--- a/seminar/Ankrit_Jarngal_2023BSE028_Seminar_PPT.pptx
+++ b/seminar/Ankrit_Jarngal_2023BSE028_Seminar_PPT.pptx
@@ -14,11 +14,6 @@
     <p:sldId id="262" r:id="rId13"/>
     <p:sldId id="263" r:id="rId14"/>
     <p:sldId id="264" r:id="rId15"/>
-    <p:sldId id="265" r:id="rId16"/>
-    <p:sldId id="266" r:id="rId17"/>
-    <p:sldId id="267" r:id="rId18"/>
-    <p:sldId id="268" r:id="rId19"/>
-    <p:sldId id="269" r:id="rId20"/>
   </p:sldIdLst>
   <p:sldSz cx="12191695" cy="6858000" type="screen4x3"/>
   <p:notesSz cx="6858000" cy="9144000"/>
@@ -515,357 +510,7 @@
           <a:lstStyle/>
           <a:p>
             <a:r>
-              <a:t>Introduce yourself and the topic: AI making reverse engineering efficient, games as the proof case.</a:t>
-            </a:r>
-          </a:p>
-        </p:txBody>
-      </p:sp>
-      <p:sp>
-        <p:nvSpPr>
-          <p:cNvPr id="4" name="Slide Number Placeholder 3"/>
-          <p:cNvSpPr>
-            <a:spLocks noGrp="1"/>
-          </p:cNvSpPr>
-          <p:nvPr>
-            <p:ph type="sldNum" idx="5" sz="quarter"/>
-          </p:nvPr>
-        </p:nvSpPr>
-        <p:spPr/>
-      </p:sp>
-    </p:spTree>
-  </p:cSld>
-  <p:clrMapOvr>
-    <a:masterClrMapping/>
-  </p:clrMapOvr>
-</p:notes>
-</file>
-
-<file path=ppt/notesSlides/notesSlide10.xml><?xml version="1.0" encoding="utf-8"?>
-<p:notes xmlns:a="http://schemas.openxmlformats.org/drawingml/2006/main" xmlns:p="http://schemas.openxmlformats.org/presentationml/2006/main" xmlns:r="http://schemas.openxmlformats.org/officeDocument/2006/relationships">
-  <p:cSld>
-    <p:spTree>
-      <p:nvGrpSpPr>
-        <p:cNvPr id="1" name=""/>
-        <p:cNvGrpSpPr/>
-        <p:nvPr/>
-      </p:nvGrpSpPr>
-      <p:grpSpPr>
-        <a:xfrm>
-          <a:off x="0" y="0"/>
-          <a:ext cx="0" cy="0"/>
-          <a:chOff x="0" y="0"/>
-          <a:chExt cx="0" cy="0"/>
-        </a:xfrm>
-      </p:grpSpPr>
-      <p:sp>
-        <p:nvSpPr>
-          <p:cNvPr id="2" name="Slide Image Placeholder 1"/>
-          <p:cNvSpPr>
-            <a:spLocks noGrp="1"/>
-          </p:cNvSpPr>
-          <p:nvPr>
-            <p:ph type="sldImg" idx="2"/>
-          </p:nvPr>
-        </p:nvSpPr>
-        <p:spPr/>
-      </p:sp>
-      <p:sp>
-        <p:nvSpPr>
-          <p:cNvPr id="3" name="Notes Placeholder 2"/>
-          <p:cNvSpPr>
-            <a:spLocks noGrp="1"/>
-          </p:cNvSpPr>
-          <p:nvPr>
-            <p:ph type="body" idx="3" sz="quarter"/>
-          </p:nvPr>
-        </p:nvSpPr>
-        <p:spPr/>
-        <p:txBody>
-          <a:bodyPr/>
-          <a:lstStyle/>
-          <a:p>
-            <a:r>
-              <a:t>Four routes taxonomy.</a:t>
-            </a:r>
-          </a:p>
-        </p:txBody>
-      </p:sp>
-      <p:sp>
-        <p:nvSpPr>
-          <p:cNvPr id="4" name="Slide Number Placeholder 3"/>
-          <p:cNvSpPr>
-            <a:spLocks noGrp="1"/>
-          </p:cNvSpPr>
-          <p:nvPr>
-            <p:ph type="sldNum" idx="5" sz="quarter"/>
-          </p:nvPr>
-        </p:nvSpPr>
-        <p:spPr/>
-      </p:sp>
-    </p:spTree>
-  </p:cSld>
-  <p:clrMapOvr>
-    <a:masterClrMapping/>
-  </p:clrMapOvr>
-</p:notes>
-</file>
-
-<file path=ppt/notesSlides/notesSlide11.xml><?xml version="1.0" encoding="utf-8"?>
-<p:notes xmlns:a="http://schemas.openxmlformats.org/drawingml/2006/main" xmlns:p="http://schemas.openxmlformats.org/presentationml/2006/main" xmlns:r="http://schemas.openxmlformats.org/officeDocument/2006/relationships">
-  <p:cSld>
-    <p:spTree>
-      <p:nvGrpSpPr>
-        <p:cNvPr id="1" name=""/>
-        <p:cNvGrpSpPr/>
-        <p:nvPr/>
-      </p:nvGrpSpPr>
-      <p:grpSpPr>
-        <a:xfrm>
-          <a:off x="0" y="0"/>
-          <a:ext cx="0" cy="0"/>
-          <a:chOff x="0" y="0"/>
-          <a:chExt cx="0" cy="0"/>
-        </a:xfrm>
-      </p:grpSpPr>
-      <p:sp>
-        <p:nvSpPr>
-          <p:cNvPr id="2" name="Slide Image Placeholder 1"/>
-          <p:cNvSpPr>
-            <a:spLocks noGrp="1"/>
-          </p:cNvSpPr>
-          <p:nvPr>
-            <p:ph type="sldImg" idx="2"/>
-          </p:nvPr>
-        </p:nvSpPr>
-        <p:spPr/>
-      </p:sp>
-      <p:sp>
-        <p:nvSpPr>
-          <p:cNvPr id="3" name="Notes Placeholder 2"/>
-          <p:cNvSpPr>
-            <a:spLocks noGrp="1"/>
-          </p:cNvSpPr>
-          <p:nvPr>
-            <p:ph type="body" idx="3" sz="quarter"/>
-          </p:nvPr>
-        </p:nvSpPr>
-        <p:spPr/>
-        <p:txBody>
-          <a:bodyPr/>
-          <a:lstStyle/>
-          <a:p>
-            <a:r>
-              <a:t>Serious twin: matching decomps.</a:t>
-            </a:r>
-          </a:p>
-        </p:txBody>
-      </p:sp>
-      <p:sp>
-        <p:nvSpPr>
-          <p:cNvPr id="4" name="Slide Number Placeholder 3"/>
-          <p:cNvSpPr>
-            <a:spLocks noGrp="1"/>
-          </p:cNvSpPr>
-          <p:nvPr>
-            <p:ph type="sldNum" idx="5" sz="quarter"/>
-          </p:nvPr>
-        </p:nvSpPr>
-        <p:spPr/>
-      </p:sp>
-    </p:spTree>
-  </p:cSld>
-  <p:clrMapOvr>
-    <a:masterClrMapping/>
-  </p:clrMapOvr>
-</p:notes>
-</file>
-
-<file path=ppt/notesSlides/notesSlide12.xml><?xml version="1.0" encoding="utf-8"?>
-<p:notes xmlns:a="http://schemas.openxmlformats.org/drawingml/2006/main" xmlns:p="http://schemas.openxmlformats.org/presentationml/2006/main" xmlns:r="http://schemas.openxmlformats.org/officeDocument/2006/relationships">
-  <p:cSld>
-    <p:spTree>
-      <p:nvGrpSpPr>
-        <p:cNvPr id="1" name=""/>
-        <p:cNvGrpSpPr/>
-        <p:nvPr/>
-      </p:nvGrpSpPr>
-      <p:grpSpPr>
-        <a:xfrm>
-          <a:off x="0" y="0"/>
-          <a:ext cx="0" cy="0"/>
-          <a:chOff x="0" y="0"/>
-          <a:chExt cx="0" cy="0"/>
-        </a:xfrm>
-      </p:grpSpPr>
-      <p:sp>
-        <p:nvSpPr>
-          <p:cNvPr id="2" name="Slide Image Placeholder 1"/>
-          <p:cNvSpPr>
-            <a:spLocks noGrp="1"/>
-          </p:cNvSpPr>
-          <p:nvPr>
-            <p:ph type="sldImg" idx="2"/>
-          </p:nvPr>
-        </p:nvSpPr>
-        <p:spPr/>
-      </p:sp>
-      <p:sp>
-        <p:nvSpPr>
-          <p:cNvPr id="3" name="Notes Placeholder 2"/>
-          <p:cNvSpPr>
-            <a:spLocks noGrp="1"/>
-          </p:cNvSpPr>
-          <p:nvPr>
-            <p:ph type="body" idx="3" sz="quarter"/>
-          </p:nvPr>
-        </p:nvSpPr>
-        <p:spPr/>
-        <p:txBody>
-          <a:bodyPr/>
-          <a:lstStyle/>
-          <a:p>
-            <a:r>
-              <a:t>Limits and ethics — keep academic tone.</a:t>
-            </a:r>
-          </a:p>
-        </p:txBody>
-      </p:sp>
-      <p:sp>
-        <p:nvSpPr>
-          <p:cNvPr id="4" name="Slide Number Placeholder 3"/>
-          <p:cNvSpPr>
-            <a:spLocks noGrp="1"/>
-          </p:cNvSpPr>
-          <p:nvPr>
-            <p:ph type="sldNum" idx="5" sz="quarter"/>
-          </p:nvPr>
-        </p:nvSpPr>
-        <p:spPr/>
-      </p:sp>
-    </p:spTree>
-  </p:cSld>
-  <p:clrMapOvr>
-    <a:masterClrMapping/>
-  </p:clrMapOvr>
-</p:notes>
-</file>
-
-<file path=ppt/notesSlides/notesSlide13.xml><?xml version="1.0" encoding="utf-8"?>
-<p:notes xmlns:a="http://schemas.openxmlformats.org/drawingml/2006/main" xmlns:p="http://schemas.openxmlformats.org/presentationml/2006/main" xmlns:r="http://schemas.openxmlformats.org/officeDocument/2006/relationships">
-  <p:cSld>
-    <p:spTree>
-      <p:nvGrpSpPr>
-        <p:cNvPr id="1" name=""/>
-        <p:cNvGrpSpPr/>
-        <p:nvPr/>
-      </p:nvGrpSpPr>
-      <p:grpSpPr>
-        <a:xfrm>
-          <a:off x="0" y="0"/>
-          <a:ext cx="0" cy="0"/>
-          <a:chOff x="0" y="0"/>
-          <a:chExt cx="0" cy="0"/>
-        </a:xfrm>
-      </p:grpSpPr>
-      <p:sp>
-        <p:nvSpPr>
-          <p:cNvPr id="2" name="Slide Image Placeholder 1"/>
-          <p:cNvSpPr>
-            <a:spLocks noGrp="1"/>
-          </p:cNvSpPr>
-          <p:nvPr>
-            <p:ph type="sldImg" idx="2"/>
-          </p:nvPr>
-        </p:nvSpPr>
-        <p:spPr/>
-      </p:sp>
-      <p:sp>
-        <p:nvSpPr>
-          <p:cNvPr id="3" name="Notes Placeholder 2"/>
-          <p:cNvSpPr>
-            <a:spLocks noGrp="1"/>
-          </p:cNvSpPr>
-          <p:nvPr>
-            <p:ph type="body" idx="3" sz="quarter"/>
-          </p:nvPr>
-        </p:nvSpPr>
-        <p:spPr/>
-        <p:txBody>
-          <a:bodyPr/>
-          <a:lstStyle/>
-          <a:p>
-            <a:r>
-              <a:t>Closing thesis.</a:t>
-            </a:r>
-          </a:p>
-        </p:txBody>
-      </p:sp>
-      <p:sp>
-        <p:nvSpPr>
-          <p:cNvPr id="4" name="Slide Number Placeholder 3"/>
-          <p:cNvSpPr>
-            <a:spLocks noGrp="1"/>
-          </p:cNvSpPr>
-          <p:nvPr>
-            <p:ph type="sldNum" idx="5" sz="quarter"/>
-          </p:nvPr>
-        </p:nvSpPr>
-        <p:spPr/>
-      </p:sp>
-    </p:spTree>
-  </p:cSld>
-  <p:clrMapOvr>
-    <a:masterClrMapping/>
-  </p:clrMapOvr>
-</p:notes>
-</file>
-
-<file path=ppt/notesSlides/notesSlide14.xml><?xml version="1.0" encoding="utf-8"?>
-<p:notes xmlns:a="http://schemas.openxmlformats.org/drawingml/2006/main" xmlns:p="http://schemas.openxmlformats.org/presentationml/2006/main" xmlns:r="http://schemas.openxmlformats.org/officeDocument/2006/relationships">
-  <p:cSld>
-    <p:spTree>
-      <p:nvGrpSpPr>
-        <p:cNvPr id="1" name=""/>
-        <p:cNvGrpSpPr/>
-        <p:nvPr/>
-      </p:nvGrpSpPr>
-      <p:grpSpPr>
-        <a:xfrm>
-          <a:off x="0" y="0"/>
-          <a:ext cx="0" cy="0"/>
-          <a:chOff x="0" y="0"/>
-          <a:chExt cx="0" cy="0"/>
-        </a:xfrm>
-      </p:grpSpPr>
-      <p:sp>
-        <p:nvSpPr>
-          <p:cNvPr id="2" name="Slide Image Placeholder 1"/>
-          <p:cNvSpPr>
-            <a:spLocks noGrp="1"/>
-          </p:cNvSpPr>
-          <p:nvPr>
-            <p:ph type="sldImg" idx="2"/>
-          </p:nvPr>
-        </p:nvSpPr>
-        <p:spPr/>
-      </p:sp>
-      <p:sp>
-        <p:nvSpPr>
-          <p:cNvPr id="3" name="Notes Placeholder 2"/>
-          <p:cNvSpPr>
-            <a:spLocks noGrp="1"/>
-          </p:cNvSpPr>
-          <p:nvPr>
-            <p:ph type="body" idx="3" sz="quarter"/>
-          </p:nvPr>
-        </p:nvSpPr>
-        <p:spPr/>
-        <p:txBody>
-          <a:bodyPr/>
-          <a:lstStyle/>
-          <a:p>
-            <a:r>
-              <a:t>Open floor.</a:t>
+              <a:t>Introduce topic and yourself.</a:t>
             </a:r>
           </a:p>
         </p:txBody>
@@ -935,7 +580,7 @@
           <a:lstStyle/>
           <a:p>
             <a:r>
-              <a:t>Hook: Minecraft-style systems appearing inside Elden Ring — ask how without source.</a:t>
+              <a:t>Define reverse engineering clearly for the audience.</a:t>
             </a:r>
           </a:p>
         </p:txBody>
@@ -1005,7 +650,7 @@
           <a:lstStyle/>
           <a:p>
             <a:r>
-              <a:t>Roadmap for the talk.</a:t>
+              <a:t>Walk the traditional pipeline; stress the manual bottleneck.</a:t>
             </a:r>
           </a:p>
         </p:txBody>
@@ -1075,7 +720,7 @@
           <a:lstStyle/>
           <a:p>
             <a:r>
-              <a:t>Define RE clearly.</a:t>
+              <a:t>Define AI-assisted RE as a layer on classical tools.</a:t>
             </a:r>
           </a:p>
         </p:txBody>
@@ -1145,7 +790,7 @@
           <a:lstStyle/>
           <a:p>
             <a:r>
-              <a:t>Pain of stripped symbols.</a:t>
+              <a:t>Explain speed gains with the pipeline diagram.</a:t>
             </a:r>
           </a:p>
         </p:txBody>
@@ -1215,7 +860,7 @@
           <a:lstStyle/>
           <a:p>
             <a:r>
-              <a:t>Cite LLM4Decompile numbers briefly; emphasize Ghidra+LLM refine path.</a:t>
+              <a:t>Introduce games as the case study without dumping brand names.</a:t>
             </a:r>
           </a:p>
         </p:txBody>
@@ -1285,7 +930,7 @@
           <a:lstStyle/>
           <a:p>
             <a:r>
-              <a:t>Stress tools remain foundation.</a:t>
+              <a:t>Explain the bridge architecture simply.</a:t>
             </a:r>
           </a:p>
         </p:txBody>
@@ -1355,7 +1000,7 @@
           <a:lstStyle/>
           <a:p>
             <a:r>
-              <a:t>Why games: closed binaries.</a:t>
+              <a:t>Cover correctness, legal, and ethical limits.</a:t>
             </a:r>
           </a:p>
         </p:txBody>
@@ -1425,7 +1070,7 @@
           <a:lstStyle/>
           <a:p>
             <a:r>
-              <a:t>Explain passthrough without drowning in jargon.</a:t>
+              <a:t>Close with the thesis and take questions.</a:t>
             </a:r>
           </a:p>
         </p:txBody>
@@ -4447,8 +4092,8 @@
         </p:nvSpPr>
         <p:spPr>
           <a:xfrm>
-            <a:off x="731520" y="1828800"/>
-            <a:ext cx="10515600" cy="1097280"/>
+            <a:off x="731520" y="1920240"/>
+            <a:ext cx="10515600" cy="914400"/>
           </a:xfrm>
           <a:prstGeom prst="rect">
             <a:avLst/>
@@ -4461,9 +4106,13 @@
           </a:bodyPr>
           <a:lstStyle/>
           <a:p>
-            <a:pPr algn="l"/>
-            <a:r>
-              <a:rPr sz="4000" b="1">
+            <a:pPr algn="l">
+              <a:spcAft>
+                <a:spcPts val="400"/>
+              </a:spcAft>
+            </a:pPr>
+            <a:r>
+              <a:rPr sz="3600" b="1">
                 <a:solidFill>
                   <a:srgbClr val="FFFFFF"/>
                 </a:solidFill>
@@ -4482,8 +4131,8 @@
         </p:nvSpPr>
         <p:spPr>
           <a:xfrm>
-            <a:off x="731520" y="3017520"/>
-            <a:ext cx="10515600" cy="457200"/>
+            <a:off x="731520" y="2926080"/>
+            <a:ext cx="10515600" cy="548640"/>
           </a:xfrm>
           <a:prstGeom prst="rect">
             <a:avLst/>
@@ -4496,15 +4145,19 @@
           </a:bodyPr>
           <a:lstStyle/>
           <a:p>
-            <a:pPr algn="l"/>
-            <a:r>
-              <a:rPr sz="2000" b="0">
-                <a:solidFill>
-                  <a:srgbClr val="D7E2EA"/>
+            <a:pPr algn="l">
+              <a:spcAft>
+                <a:spcPts val="400"/>
+              </a:spcAft>
+            </a:pPr>
+            <a:r>
+              <a:rPr sz="1800" b="0">
+                <a:solidFill>
+                  <a:srgbClr val="CBD5E1"/>
                 </a:solidFill>
                 <a:latin typeface="Calibri"/>
               </a:rPr>
-              <a:t>Video games as a case study in compiled-code modification</a:t>
+              <a:t>How AI is transforming binary analysis — with video games as a case study</a:t>
             </a:r>
           </a:p>
         </p:txBody>
@@ -4518,7 +4171,7 @@
         <p:spPr>
           <a:xfrm>
             <a:off x="731520" y="3657600"/>
-            <a:ext cx="2011680" cy="54864"/>
+            <a:ext cx="1828800" cy="45720"/>
           </a:xfrm>
           <a:prstGeom prst="rect">
             <a:avLst/>
@@ -4560,7 +4213,7 @@
         </p:nvSpPr>
         <p:spPr>
           <a:xfrm>
-            <a:off x="731520" y="4023360"/>
+            <a:off x="731520" y="3931920"/>
             <a:ext cx="10058400" cy="1097280"/>
           </a:xfrm>
           <a:prstGeom prst="rect">
@@ -4574,2045 +4227,51 @@
           </a:bodyPr>
           <a:lstStyle/>
           <a:p>
-            <a:pPr algn="l"/>
-            <a:r>
-              <a:rPr sz="1600" b="0">
-                <a:solidFill>
-                  <a:srgbClr val="D7E2EA"/>
+            <a:pPr algn="l">
+              <a:spcAft>
+                <a:spcPts val="400"/>
+              </a:spcAft>
+            </a:pPr>
+            <a:r>
+              <a:rPr sz="1500" b="0">
+                <a:solidFill>
+                  <a:srgbClr val="94A3B8"/>
                 </a:solidFill>
                 <a:latin typeface="Calibri"/>
               </a:rPr>
-              <a:t>Ankrit Jarngal  ·  Enroll. No. 2023BSE028
-B.Tech CSE  ·  NIT Srinagar  ·  2025–2026</a:t>
-            </a:r>
-          </a:p>
-        </p:txBody>
-      </p:sp>
-    </p:spTree>
-  </p:cSld>
-  <p:clrMapOvr>
-    <a:masterClrMapping/>
-  </p:clrMapOvr>
-</p:sld>
-</file>
-
-<file path=ppt/slides/slide10.xml><?xml version="1.0" encoding="utf-8"?>
-<p:sld xmlns:a="http://schemas.openxmlformats.org/drawingml/2006/main" xmlns:p="http://schemas.openxmlformats.org/presentationml/2006/main" xmlns:r="http://schemas.openxmlformats.org/officeDocument/2006/relationships">
-  <p:cSld>
-    <p:bg>
-      <p:bgPr>
-        <a:solidFill>
-          <a:srgbClr val="F4F6F8"/>
-        </a:solidFill>
-        <a:effectLst/>
-      </p:bgPr>
-    </p:bg>
-    <p:spTree>
-      <p:nvGrpSpPr>
-        <p:cNvPr id="1" name=""/>
-        <p:cNvGrpSpPr/>
-        <p:nvPr/>
-      </p:nvGrpSpPr>
-      <p:grpSpPr/>
-      <p:sp>
-        <p:nvSpPr>
-          <p:cNvPr id="2" name="Rectangle 1"/>
-          <p:cNvSpPr/>
-          <p:nvPr/>
-        </p:nvSpPr>
-        <p:spPr>
-          <a:xfrm>
-            <a:off x="0" y="0"/>
-            <a:ext cx="109728" cy="6858000"/>
-          </a:xfrm>
-          <a:prstGeom prst="rect">
-            <a:avLst/>
-          </a:prstGeom>
-          <a:solidFill>
-            <a:srgbClr val="1F7A8C"/>
-          </a:solidFill>
-          <a:ln>
-            <a:noFill/>
-          </a:ln>
-        </p:spPr>
-        <p:style>
-          <a:lnRef idx="1">
-            <a:schemeClr val="accent1"/>
-          </a:lnRef>
-          <a:fillRef idx="3">
-            <a:schemeClr val="accent1"/>
-          </a:fillRef>
-          <a:effectRef idx="2">
-            <a:schemeClr val="accent1"/>
-          </a:effectRef>
-          <a:fontRef idx="minor">
-            <a:schemeClr val="lt1"/>
-          </a:fontRef>
-        </p:style>
-        <p:txBody>
-          <a:bodyPr rtlCol="0" anchor="ctr"/>
-          <a:lstStyle/>
-          <a:p>
-            <a:pPr algn="ctr"/>
-          </a:p>
-        </p:txBody>
-      </p:sp>
-      <p:sp>
-        <p:nvSpPr>
-          <p:cNvPr id="3" name="TextBox 2"/>
-          <p:cNvSpPr txBox="1"/>
-          <p:nvPr/>
-        </p:nvSpPr>
-        <p:spPr>
-          <a:xfrm>
-            <a:off x="411480" y="256032"/>
-            <a:ext cx="8321040" cy="1005840"/>
-          </a:xfrm>
-          <a:prstGeom prst="rect">
-            <a:avLst/>
-          </a:prstGeom>
-          <a:noFill/>
-        </p:spPr>
-        <p:txBody>
-          <a:bodyPr wrap="square">
-            <a:spAutoFit/>
-          </a:bodyPr>
-          <a:lstStyle/>
-          <a:p>
-            <a:pPr algn="l"/>
-            <a:r>
-              <a:rPr sz="2600" b="1">
-                <a:solidFill>
-                  <a:srgbClr val="0B1F3A"/>
+              <a:t>Ankrit Jarngal  |  Enroll. No. 2023BSE028</a:t>
+            </a:r>
+          </a:p>
+          <a:p>
+            <a:pPr algn="l">
+              <a:spcAft>
+                <a:spcPts val="400"/>
+              </a:spcAft>
+            </a:pPr>
+            <a:r>
+              <a:rPr sz="1500" b="0">
+                <a:solidFill>
+                  <a:srgbClr val="94A3B8"/>
                 </a:solidFill>
                 <a:latin typeface="Calibri"/>
               </a:rPr>
-              <a:t>Four routes put one game inside another.</a:t>
-            </a:r>
-          </a:p>
-        </p:txBody>
-      </p:sp>
-      <p:sp>
-        <p:nvSpPr>
-          <p:cNvPr id="4" name="Rounded Rectangle 3"/>
-          <p:cNvSpPr/>
-          <p:nvPr/>
-        </p:nvSpPr>
-        <p:spPr>
-          <a:xfrm>
-            <a:off x="640080" y="2103120"/>
-            <a:ext cx="2651760" cy="3291840"/>
-          </a:xfrm>
-          <a:prstGeom prst="roundRect">
-            <a:avLst>
-              <a:gd name="adj" fmla="val 10000"/>
-            </a:avLst>
-          </a:prstGeom>
-          <a:solidFill>
-            <a:srgbClr val="0B1F3A"/>
-          </a:solidFill>
-          <a:ln>
-            <a:noFill/>
-          </a:ln>
-        </p:spPr>
-        <p:style>
-          <a:lnRef idx="1">
-            <a:schemeClr val="accent1"/>
-          </a:lnRef>
-          <a:fillRef idx="3">
-            <a:schemeClr val="accent1"/>
-          </a:fillRef>
-          <a:effectRef idx="2">
-            <a:schemeClr val="accent1"/>
-          </a:effectRef>
-          <a:fontRef idx="minor">
-            <a:schemeClr val="lt1"/>
-          </a:fontRef>
-        </p:style>
-        <p:txBody>
-          <a:bodyPr rtlCol="0" anchor="ctr"/>
-          <a:lstStyle/>
-          <a:p>
-            <a:pPr algn="ctr"/>
-          </a:p>
-        </p:txBody>
-      </p:sp>
-      <p:sp>
-        <p:nvSpPr>
-          <p:cNvPr id="5" name="TextBox 4"/>
-          <p:cNvSpPr txBox="1"/>
-          <p:nvPr/>
-        </p:nvSpPr>
-        <p:spPr>
-          <a:xfrm>
-            <a:off x="777240" y="2468880"/>
-            <a:ext cx="2377440" cy="1463040"/>
-          </a:xfrm>
-          <a:prstGeom prst="rect">
-            <a:avLst/>
-          </a:prstGeom>
-          <a:noFill/>
-        </p:spPr>
-        <p:txBody>
-          <a:bodyPr wrap="square">
-            <a:spAutoFit/>
-          </a:bodyPr>
-          <a:lstStyle/>
-          <a:p>
-            <a:pPr algn="ctr"/>
-            <a:r>
-              <a:rPr sz="2000" b="1">
-                <a:solidFill>
-                  <a:srgbClr val="FFFFFF"/>
+              <a:t>B.Tech — Computer Science and Engineering</a:t>
+            </a:r>
+          </a:p>
+          <a:p>
+            <a:pPr algn="l">
+              <a:spcAft>
+                <a:spcPts val="400"/>
+              </a:spcAft>
+            </a:pPr>
+            <a:r>
+              <a:rPr sz="1500" b="0">
+                <a:solidFill>
+                  <a:srgbClr val="94A3B8"/>
                 </a:solidFill>
                 <a:latin typeface="Calibri"/>
               </a:rPr>
-              <a:t>Content
-port</a:t>
-            </a:r>
-          </a:p>
-        </p:txBody>
-      </p:sp>
-      <p:sp>
-        <p:nvSpPr>
-          <p:cNvPr id="6" name="TextBox 5"/>
-          <p:cNvSpPr txBox="1"/>
-          <p:nvPr/>
-        </p:nvSpPr>
-        <p:spPr>
-          <a:xfrm>
-            <a:off x="777240" y="4206240"/>
-            <a:ext cx="2377440" cy="822960"/>
-          </a:xfrm>
-          <a:prstGeom prst="rect">
-            <a:avLst/>
-          </a:prstGeom>
-          <a:noFill/>
-        </p:spPr>
-        <p:txBody>
-          <a:bodyPr wrap="square">
-            <a:spAutoFit/>
-          </a:bodyPr>
-          <a:lstStyle/>
-          <a:p>
-            <a:pPr algn="ctr"/>
-            <a:r>
-              <a:rPr sz="1400" b="0">
-                <a:solidFill>
-                  <a:srgbClr val="D7E2EA"/>
-                </a:solidFill>
-                <a:latin typeface="Calibri"/>
-              </a:rPr>
-              <a:t>Assets → host formats</a:t>
-            </a:r>
-          </a:p>
-        </p:txBody>
-      </p:sp>
-      <p:sp>
-        <p:nvSpPr>
-          <p:cNvPr id="7" name="Rounded Rectangle 6"/>
-          <p:cNvSpPr/>
-          <p:nvPr/>
-        </p:nvSpPr>
-        <p:spPr>
-          <a:xfrm>
-            <a:off x="3520439" y="2103120"/>
-            <a:ext cx="2651760" cy="3291840"/>
-          </a:xfrm>
-          <a:prstGeom prst="roundRect">
-            <a:avLst>
-              <a:gd name="adj" fmla="val 10000"/>
-            </a:avLst>
-          </a:prstGeom>
-          <a:solidFill>
-            <a:srgbClr val="1F7A8C"/>
-          </a:solidFill>
-          <a:ln>
-            <a:noFill/>
-          </a:ln>
-        </p:spPr>
-        <p:style>
-          <a:lnRef idx="1">
-            <a:schemeClr val="accent1"/>
-          </a:lnRef>
-          <a:fillRef idx="3">
-            <a:schemeClr val="accent1"/>
-          </a:fillRef>
-          <a:effectRef idx="2">
-            <a:schemeClr val="accent1"/>
-          </a:effectRef>
-          <a:fontRef idx="minor">
-            <a:schemeClr val="lt1"/>
-          </a:fontRef>
-        </p:style>
-        <p:txBody>
-          <a:bodyPr rtlCol="0" anchor="ctr"/>
-          <a:lstStyle/>
-          <a:p>
-            <a:pPr algn="ctr"/>
-          </a:p>
-        </p:txBody>
-      </p:sp>
-      <p:sp>
-        <p:nvSpPr>
-          <p:cNvPr id="8" name="TextBox 7"/>
-          <p:cNvSpPr txBox="1"/>
-          <p:nvPr/>
-        </p:nvSpPr>
-        <p:spPr>
-          <a:xfrm>
-            <a:off x="3657599" y="2468880"/>
-            <a:ext cx="2377440" cy="1463040"/>
-          </a:xfrm>
-          <a:prstGeom prst="rect">
-            <a:avLst/>
-          </a:prstGeom>
-          <a:noFill/>
-        </p:spPr>
-        <p:txBody>
-          <a:bodyPr wrap="square">
-            <a:spAutoFit/>
-          </a:bodyPr>
-          <a:lstStyle/>
-          <a:p>
-            <a:pPr algn="ctr"/>
-            <a:r>
-              <a:rPr sz="2000" b="1">
-                <a:solidFill>
-                  <a:srgbClr val="FFFFFF"/>
-                </a:solidFill>
-                <a:latin typeface="Calibri"/>
-              </a:rPr>
-              <a:t>Pass-
-through</a:t>
-            </a:r>
-          </a:p>
-        </p:txBody>
-      </p:sp>
-      <p:sp>
-        <p:nvSpPr>
-          <p:cNvPr id="9" name="TextBox 8"/>
-          <p:cNvSpPr txBox="1"/>
-          <p:nvPr/>
-        </p:nvSpPr>
-        <p:spPr>
-          <a:xfrm>
-            <a:off x="3657599" y="4206240"/>
-            <a:ext cx="2377440" cy="822960"/>
-          </a:xfrm>
-          <a:prstGeom prst="rect">
-            <a:avLst/>
-          </a:prstGeom>
-          <a:noFill/>
-        </p:spPr>
-        <p:txBody>
-          <a:bodyPr wrap="square">
-            <a:spAutoFit/>
-          </a:bodyPr>
-          <a:lstStyle/>
-          <a:p>
-            <a:pPr algn="ctr"/>
-            <a:r>
-              <a:rPr sz="1400" b="0">
-                <a:solidFill>
-                  <a:srgbClr val="D7E2EA"/>
-                </a:solidFill>
-                <a:latin typeface="Calibri"/>
-              </a:rPr>
-              <a:t>Two processes + sync</a:t>
-            </a:r>
-          </a:p>
-        </p:txBody>
-      </p:sp>
-      <p:sp>
-        <p:nvSpPr>
-          <p:cNvPr id="10" name="Rounded Rectangle 9"/>
-          <p:cNvSpPr/>
-          <p:nvPr/>
-        </p:nvSpPr>
-        <p:spPr>
-          <a:xfrm>
-            <a:off x="6400800" y="2103120"/>
-            <a:ext cx="2651760" cy="3291840"/>
-          </a:xfrm>
-          <a:prstGeom prst="roundRect">
-            <a:avLst>
-              <a:gd name="adj" fmla="val 10000"/>
-            </a:avLst>
-          </a:prstGeom>
-          <a:solidFill>
-            <a:srgbClr val="0B1F3A"/>
-          </a:solidFill>
-          <a:ln>
-            <a:noFill/>
-          </a:ln>
-        </p:spPr>
-        <p:style>
-          <a:lnRef idx="1">
-            <a:schemeClr val="accent1"/>
-          </a:lnRef>
-          <a:fillRef idx="3">
-            <a:schemeClr val="accent1"/>
-          </a:fillRef>
-          <a:effectRef idx="2">
-            <a:schemeClr val="accent1"/>
-          </a:effectRef>
-          <a:fontRef idx="minor">
-            <a:schemeClr val="lt1"/>
-          </a:fontRef>
-        </p:style>
-        <p:txBody>
-          <a:bodyPr rtlCol="0" anchor="ctr"/>
-          <a:lstStyle/>
-          <a:p>
-            <a:pPr algn="ctr"/>
-          </a:p>
-        </p:txBody>
-      </p:sp>
-      <p:sp>
-        <p:nvSpPr>
-          <p:cNvPr id="11" name="TextBox 10"/>
-          <p:cNvSpPr txBox="1"/>
-          <p:nvPr/>
-        </p:nvSpPr>
-        <p:spPr>
-          <a:xfrm>
-            <a:off x="6537960" y="2468880"/>
-            <a:ext cx="2377440" cy="1463040"/>
-          </a:xfrm>
-          <a:prstGeom prst="rect">
-            <a:avLst/>
-          </a:prstGeom>
-          <a:noFill/>
-        </p:spPr>
-        <p:txBody>
-          <a:bodyPr wrap="square">
-            <a:spAutoFit/>
-          </a:bodyPr>
-          <a:lstStyle/>
-          <a:p>
-            <a:pPr algn="ctr"/>
-            <a:r>
-              <a:rPr sz="2000" b="1">
-                <a:solidFill>
-                  <a:srgbClr val="FFFFFF"/>
-                </a:solidFill>
-                <a:latin typeface="Calibri"/>
-              </a:rPr>
-              <a:t>Headless
-rules</a:t>
-            </a:r>
-          </a:p>
-        </p:txBody>
-      </p:sp>
-      <p:sp>
-        <p:nvSpPr>
-          <p:cNvPr id="12" name="TextBox 11"/>
-          <p:cNvSpPr txBox="1"/>
-          <p:nvPr/>
-        </p:nvSpPr>
-        <p:spPr>
-          <a:xfrm>
-            <a:off x="6537960" y="4206240"/>
-            <a:ext cx="2377440" cy="822960"/>
-          </a:xfrm>
-          <a:prstGeom prst="rect">
-            <a:avLst/>
-          </a:prstGeom>
-          <a:noFill/>
-        </p:spPr>
-        <p:txBody>
-          <a:bodyPr wrap="square">
-            <a:spAutoFit/>
-          </a:bodyPr>
-          <a:lstStyle/>
-          <a:p>
-            <a:pPr algn="ctr"/>
-            <a:r>
-              <a:rPr sz="1400" b="0">
-                <a:solidFill>
-                  <a:srgbClr val="D7E2EA"/>
-                </a:solidFill>
-                <a:latin typeface="Calibri"/>
-              </a:rPr>
-              <a:t>Reimplement logic</a:t>
-            </a:r>
-          </a:p>
-        </p:txBody>
-      </p:sp>
-      <p:sp>
-        <p:nvSpPr>
-          <p:cNvPr id="13" name="Rounded Rectangle 12"/>
-          <p:cNvSpPr/>
-          <p:nvPr/>
-        </p:nvSpPr>
-        <p:spPr>
-          <a:xfrm>
-            <a:off x="9281159" y="2103120"/>
-            <a:ext cx="2651760" cy="3291840"/>
-          </a:xfrm>
-          <a:prstGeom prst="roundRect">
-            <a:avLst>
-              <a:gd name="adj" fmla="val 10000"/>
-            </a:avLst>
-          </a:prstGeom>
-          <a:solidFill>
-            <a:srgbClr val="1F7A8C"/>
-          </a:solidFill>
-          <a:ln>
-            <a:noFill/>
-          </a:ln>
-        </p:spPr>
-        <p:style>
-          <a:lnRef idx="1">
-            <a:schemeClr val="accent1"/>
-          </a:lnRef>
-          <a:fillRef idx="3">
-            <a:schemeClr val="accent1"/>
-          </a:fillRef>
-          <a:effectRef idx="2">
-            <a:schemeClr val="accent1"/>
-          </a:effectRef>
-          <a:fontRef idx="minor">
-            <a:schemeClr val="lt1"/>
-          </a:fontRef>
-        </p:style>
-        <p:txBody>
-          <a:bodyPr rtlCol="0" anchor="ctr"/>
-          <a:lstStyle/>
-          <a:p>
-            <a:pPr algn="ctr"/>
-          </a:p>
-        </p:txBody>
-      </p:sp>
-      <p:sp>
-        <p:nvSpPr>
-          <p:cNvPr id="14" name="TextBox 13"/>
-          <p:cNvSpPr txBox="1"/>
-          <p:nvPr/>
-        </p:nvSpPr>
-        <p:spPr>
-          <a:xfrm>
-            <a:off x="9418319" y="2468880"/>
-            <a:ext cx="2377440" cy="1463040"/>
-          </a:xfrm>
-          <a:prstGeom prst="rect">
-            <a:avLst/>
-          </a:prstGeom>
-          <a:noFill/>
-        </p:spPr>
-        <p:txBody>
-          <a:bodyPr wrap="square">
-            <a:spAutoFit/>
-          </a:bodyPr>
-          <a:lstStyle/>
-          <a:p>
-            <a:pPr algn="ctr"/>
-            <a:r>
-              <a:rPr sz="2000" b="1">
-                <a:solidFill>
-                  <a:srgbClr val="FFFFFF"/>
-                </a:solidFill>
-                <a:latin typeface="Calibri"/>
-              </a:rPr>
-              <a:t>Decomp as
-library</a:t>
-            </a:r>
-          </a:p>
-        </p:txBody>
-      </p:sp>
-      <p:sp>
-        <p:nvSpPr>
-          <p:cNvPr id="15" name="TextBox 14"/>
-          <p:cNvSpPr txBox="1"/>
-          <p:nvPr/>
-        </p:nvSpPr>
-        <p:spPr>
-          <a:xfrm>
-            <a:off x="9418319" y="4206240"/>
-            <a:ext cx="2377440" cy="822960"/>
-          </a:xfrm>
-          <a:prstGeom prst="rect">
-            <a:avLst/>
-          </a:prstGeom>
-          <a:noFill/>
-        </p:spPr>
-        <p:txBody>
-          <a:bodyPr wrap="square">
-            <a:spAutoFit/>
-          </a:bodyPr>
-          <a:lstStyle/>
-          <a:p>
-            <a:pPr algn="ctr"/>
-            <a:r>
-              <a:rPr sz="1400" b="0">
-                <a:solidFill>
-                  <a:srgbClr val="D7E2EA"/>
-                </a:solidFill>
-                <a:latin typeface="Calibri"/>
-              </a:rPr>
-              <a:t>Call matched code</a:t>
-            </a:r>
-          </a:p>
-        </p:txBody>
-      </p:sp>
-    </p:spTree>
-  </p:cSld>
-  <p:clrMapOvr>
-    <a:masterClrMapping/>
-  </p:clrMapOvr>
-</p:sld>
-</file>
-
-<file path=ppt/slides/slide11.xml><?xml version="1.0" encoding="utf-8"?>
-<p:sld xmlns:a="http://schemas.openxmlformats.org/drawingml/2006/main" xmlns:p="http://schemas.openxmlformats.org/presentationml/2006/main" xmlns:r="http://schemas.openxmlformats.org/officeDocument/2006/relationships">
-  <p:cSld>
-    <p:bg>
-      <p:bgPr>
-        <a:solidFill>
-          <a:srgbClr val="F4F6F8"/>
-        </a:solidFill>
-        <a:effectLst/>
-      </p:bgPr>
-    </p:bg>
-    <p:spTree>
-      <p:nvGrpSpPr>
-        <p:cNvPr id="1" name=""/>
-        <p:cNvGrpSpPr/>
-        <p:nvPr/>
-      </p:nvGrpSpPr>
-      <p:grpSpPr/>
-      <p:sp>
-        <p:nvSpPr>
-          <p:cNvPr id="2" name="Rectangle 1"/>
-          <p:cNvSpPr/>
-          <p:nvPr/>
-        </p:nvSpPr>
-        <p:spPr>
-          <a:xfrm>
-            <a:off x="0" y="0"/>
-            <a:ext cx="109728" cy="6858000"/>
-          </a:xfrm>
-          <a:prstGeom prst="rect">
-            <a:avLst/>
-          </a:prstGeom>
-          <a:solidFill>
-            <a:srgbClr val="1F7A8C"/>
-          </a:solidFill>
-          <a:ln>
-            <a:noFill/>
-          </a:ln>
-        </p:spPr>
-        <p:style>
-          <a:lnRef idx="1">
-            <a:schemeClr val="accent1"/>
-          </a:lnRef>
-          <a:fillRef idx="3">
-            <a:schemeClr val="accent1"/>
-          </a:fillRef>
-          <a:effectRef idx="2">
-            <a:schemeClr val="accent1"/>
-          </a:effectRef>
-          <a:fontRef idx="minor">
-            <a:schemeClr val="lt1"/>
-          </a:fontRef>
-        </p:style>
-        <p:txBody>
-          <a:bodyPr rtlCol="0" anchor="ctr"/>
-          <a:lstStyle/>
-          <a:p>
-            <a:pPr algn="ctr"/>
-          </a:p>
-        </p:txBody>
-      </p:sp>
-      <p:sp>
-        <p:nvSpPr>
-          <p:cNvPr id="3" name="TextBox 2"/>
-          <p:cNvSpPr txBox="1"/>
-          <p:nvPr/>
-        </p:nvSpPr>
-        <p:spPr>
-          <a:xfrm>
-            <a:off x="411480" y="256032"/>
-            <a:ext cx="8321040" cy="1005840"/>
-          </a:xfrm>
-          <a:prstGeom prst="rect">
-            <a:avLst/>
-          </a:prstGeom>
-          <a:noFill/>
-        </p:spPr>
-        <p:txBody>
-          <a:bodyPr wrap="square">
-            <a:spAutoFit/>
-          </a:bodyPr>
-          <a:lstStyle/>
-          <a:p>
-            <a:pPr algn="l"/>
-            <a:r>
-              <a:rPr sz="2600" b="1">
-                <a:solidFill>
-                  <a:srgbClr val="0B1F3A"/>
-                </a:solidFill>
-                <a:latin typeface="Calibri"/>
-              </a:rPr>
-              <a:t>Matching decompilation is the serious twin of mashup demos.</a:t>
-            </a:r>
-          </a:p>
-        </p:txBody>
-      </p:sp>
-      <p:sp>
-        <p:nvSpPr>
-          <p:cNvPr id="4" name="Rounded Rectangle 3"/>
-          <p:cNvSpPr/>
-          <p:nvPr/>
-        </p:nvSpPr>
-        <p:spPr>
-          <a:xfrm>
-            <a:off x="548640" y="2743200"/>
-            <a:ext cx="2011680" cy="1371600"/>
-          </a:xfrm>
-          <a:prstGeom prst="roundRect">
-            <a:avLst>
-              <a:gd name="adj" fmla="val 10000"/>
-            </a:avLst>
-          </a:prstGeom>
-          <a:solidFill>
-            <a:srgbClr val="0B1F3A"/>
-          </a:solidFill>
-          <a:ln>
-            <a:noFill/>
-          </a:ln>
-        </p:spPr>
-        <p:style>
-          <a:lnRef idx="1">
-            <a:schemeClr val="accent1"/>
-          </a:lnRef>
-          <a:fillRef idx="3">
-            <a:schemeClr val="accent1"/>
-          </a:fillRef>
-          <a:effectRef idx="2">
-            <a:schemeClr val="accent1"/>
-          </a:effectRef>
-          <a:fontRef idx="minor">
-            <a:schemeClr val="lt1"/>
-          </a:fontRef>
-        </p:style>
-        <p:txBody>
-          <a:bodyPr rtlCol="0" anchor="ctr" wrap="square"/>
-          <a:lstStyle/>
-          <a:p>
-            <a:pPr algn="ctr">
-              <a:spcBef>
-                <a:spcPts val="0"/>
-              </a:spcBef>
-            </a:pPr>
-            <a:r>
-              <a:rPr sz="1400" b="1">
-                <a:solidFill>
-                  <a:srgbClr val="FFFFFF"/>
-                </a:solidFill>
-                <a:latin typeface="Calibri"/>
-              </a:rPr>
-              <a:t>Pick function</a:t>
-            </a:r>
-          </a:p>
-        </p:txBody>
-      </p:sp>
-      <p:sp>
-        <p:nvSpPr>
-          <p:cNvPr id="5" name="TextBox 4"/>
-          <p:cNvSpPr txBox="1"/>
-          <p:nvPr/>
-        </p:nvSpPr>
-        <p:spPr>
-          <a:xfrm>
-            <a:off x="2423159" y="3108960"/>
-            <a:ext cx="457200" cy="457200"/>
-          </a:xfrm>
-          <a:prstGeom prst="rect">
-            <a:avLst/>
-          </a:prstGeom>
-          <a:noFill/>
-        </p:spPr>
-        <p:txBody>
-          <a:bodyPr wrap="square">
-            <a:spAutoFit/>
-          </a:bodyPr>
-          <a:lstStyle/>
-          <a:p>
-            <a:pPr algn="l"/>
-            <a:r>
-              <a:rPr sz="2400" b="0">
-                <a:solidFill>
-                  <a:srgbClr val="1F7A8C"/>
-                </a:solidFill>
-                <a:latin typeface="Calibri"/>
-              </a:rPr>
-              <a:t>→</a:t>
-            </a:r>
-          </a:p>
-        </p:txBody>
-      </p:sp>
-      <p:sp>
-        <p:nvSpPr>
-          <p:cNvPr id="6" name="Rounded Rectangle 5"/>
-          <p:cNvSpPr/>
-          <p:nvPr/>
-        </p:nvSpPr>
-        <p:spPr>
-          <a:xfrm>
-            <a:off x="2834640" y="2743200"/>
-            <a:ext cx="2011680" cy="1371600"/>
-          </a:xfrm>
-          <a:prstGeom prst="roundRect">
-            <a:avLst>
-              <a:gd name="adj" fmla="val 10000"/>
-            </a:avLst>
-          </a:prstGeom>
-          <a:solidFill>
-            <a:srgbClr val="0B1F3A"/>
-          </a:solidFill>
-          <a:ln>
-            <a:noFill/>
-          </a:ln>
-        </p:spPr>
-        <p:style>
-          <a:lnRef idx="1">
-            <a:schemeClr val="accent1"/>
-          </a:lnRef>
-          <a:fillRef idx="3">
-            <a:schemeClr val="accent1"/>
-          </a:fillRef>
-          <a:effectRef idx="2">
-            <a:schemeClr val="accent1"/>
-          </a:effectRef>
-          <a:fontRef idx="minor">
-            <a:schemeClr val="lt1"/>
-          </a:fontRef>
-        </p:style>
-        <p:txBody>
-          <a:bodyPr rtlCol="0" anchor="ctr" wrap="square"/>
-          <a:lstStyle/>
-          <a:p>
-            <a:pPr algn="ctr">
-              <a:spcBef>
-                <a:spcPts val="0"/>
-              </a:spcBef>
-            </a:pPr>
-            <a:r>
-              <a:rPr sz="1400" b="1">
-                <a:solidFill>
-                  <a:srgbClr val="FFFFFF"/>
-                </a:solidFill>
-                <a:latin typeface="Calibri"/>
-              </a:rPr>
-              <a:t>Write C</a:t>
-            </a:r>
-          </a:p>
-        </p:txBody>
-      </p:sp>
-      <p:sp>
-        <p:nvSpPr>
-          <p:cNvPr id="7" name="TextBox 6"/>
-          <p:cNvSpPr txBox="1"/>
-          <p:nvPr/>
-        </p:nvSpPr>
-        <p:spPr>
-          <a:xfrm>
-            <a:off x="4709159" y="3108960"/>
-            <a:ext cx="457200" cy="457200"/>
-          </a:xfrm>
-          <a:prstGeom prst="rect">
-            <a:avLst/>
-          </a:prstGeom>
-          <a:noFill/>
-        </p:spPr>
-        <p:txBody>
-          <a:bodyPr wrap="square">
-            <a:spAutoFit/>
-          </a:bodyPr>
-          <a:lstStyle/>
-          <a:p>
-            <a:pPr algn="l"/>
-            <a:r>
-              <a:rPr sz="2400" b="0">
-                <a:solidFill>
-                  <a:srgbClr val="1F7A8C"/>
-                </a:solidFill>
-                <a:latin typeface="Calibri"/>
-              </a:rPr>
-              <a:t>→</a:t>
-            </a:r>
-          </a:p>
-        </p:txBody>
-      </p:sp>
-      <p:sp>
-        <p:nvSpPr>
-          <p:cNvPr id="8" name="Rounded Rectangle 7"/>
-          <p:cNvSpPr/>
-          <p:nvPr/>
-        </p:nvSpPr>
-        <p:spPr>
-          <a:xfrm>
-            <a:off x="5120640" y="2743200"/>
-            <a:ext cx="2011680" cy="1371600"/>
-          </a:xfrm>
-          <a:prstGeom prst="roundRect">
-            <a:avLst>
-              <a:gd name="adj" fmla="val 10000"/>
-            </a:avLst>
-          </a:prstGeom>
-          <a:solidFill>
-            <a:srgbClr val="0B1F3A"/>
-          </a:solidFill>
-          <a:ln>
-            <a:noFill/>
-          </a:ln>
-        </p:spPr>
-        <p:style>
-          <a:lnRef idx="1">
-            <a:schemeClr val="accent1"/>
-          </a:lnRef>
-          <a:fillRef idx="3">
-            <a:schemeClr val="accent1"/>
-          </a:fillRef>
-          <a:effectRef idx="2">
-            <a:schemeClr val="accent1"/>
-          </a:effectRef>
-          <a:fontRef idx="minor">
-            <a:schemeClr val="lt1"/>
-          </a:fontRef>
-        </p:style>
-        <p:txBody>
-          <a:bodyPr rtlCol="0" anchor="ctr" wrap="square"/>
-          <a:lstStyle/>
-          <a:p>
-            <a:pPr algn="ctr">
-              <a:spcBef>
-                <a:spcPts val="0"/>
-              </a:spcBef>
-            </a:pPr>
-            <a:r>
-              <a:rPr sz="1400" b="1">
-                <a:solidFill>
-                  <a:srgbClr val="FFFFFF"/>
-                </a:solidFill>
-                <a:latin typeface="Calibri"/>
-              </a:rPr>
-              <a:t>Compile</a:t>
-            </a:r>
-          </a:p>
-        </p:txBody>
-      </p:sp>
-      <p:sp>
-        <p:nvSpPr>
-          <p:cNvPr id="9" name="TextBox 8"/>
-          <p:cNvSpPr txBox="1"/>
-          <p:nvPr/>
-        </p:nvSpPr>
-        <p:spPr>
-          <a:xfrm>
-            <a:off x="6995159" y="3108960"/>
-            <a:ext cx="457200" cy="457200"/>
-          </a:xfrm>
-          <a:prstGeom prst="rect">
-            <a:avLst/>
-          </a:prstGeom>
-          <a:noFill/>
-        </p:spPr>
-        <p:txBody>
-          <a:bodyPr wrap="square">
-            <a:spAutoFit/>
-          </a:bodyPr>
-          <a:lstStyle/>
-          <a:p>
-            <a:pPr algn="l"/>
-            <a:r>
-              <a:rPr sz="2400" b="0">
-                <a:solidFill>
-                  <a:srgbClr val="1F7A8C"/>
-                </a:solidFill>
-                <a:latin typeface="Calibri"/>
-              </a:rPr>
-              <a:t>→</a:t>
-            </a:r>
-          </a:p>
-        </p:txBody>
-      </p:sp>
-      <p:sp>
-        <p:nvSpPr>
-          <p:cNvPr id="10" name="Rounded Rectangle 9"/>
-          <p:cNvSpPr/>
-          <p:nvPr/>
-        </p:nvSpPr>
-        <p:spPr>
-          <a:xfrm>
-            <a:off x="7406640" y="2743200"/>
-            <a:ext cx="2011680" cy="1371600"/>
-          </a:xfrm>
-          <a:prstGeom prst="roundRect">
-            <a:avLst>
-              <a:gd name="adj" fmla="val 10000"/>
-            </a:avLst>
-          </a:prstGeom>
-          <a:solidFill>
-            <a:srgbClr val="0B1F3A"/>
-          </a:solidFill>
-          <a:ln>
-            <a:noFill/>
-          </a:ln>
-        </p:spPr>
-        <p:style>
-          <a:lnRef idx="1">
-            <a:schemeClr val="accent1"/>
-          </a:lnRef>
-          <a:fillRef idx="3">
-            <a:schemeClr val="accent1"/>
-          </a:fillRef>
-          <a:effectRef idx="2">
-            <a:schemeClr val="accent1"/>
-          </a:effectRef>
-          <a:fontRef idx="minor">
-            <a:schemeClr val="lt1"/>
-          </a:fontRef>
-        </p:style>
-        <p:txBody>
-          <a:bodyPr rtlCol="0" anchor="ctr" wrap="square"/>
-          <a:lstStyle/>
-          <a:p>
-            <a:pPr algn="ctr">
-              <a:spcBef>
-                <a:spcPts val="0"/>
-              </a:spcBef>
-            </a:pPr>
-            <a:r>
-              <a:rPr sz="1400" b="1">
-                <a:solidFill>
-                  <a:srgbClr val="FFFFFF"/>
-                </a:solidFill>
-                <a:latin typeface="Calibri"/>
-              </a:rPr>
-              <a:t>objdiff</a:t>
-            </a:r>
-          </a:p>
-        </p:txBody>
-      </p:sp>
-      <p:sp>
-        <p:nvSpPr>
-          <p:cNvPr id="11" name="TextBox 10"/>
-          <p:cNvSpPr txBox="1"/>
-          <p:nvPr/>
-        </p:nvSpPr>
-        <p:spPr>
-          <a:xfrm>
-            <a:off x="9281159" y="3108960"/>
-            <a:ext cx="457200" cy="457200"/>
-          </a:xfrm>
-          <a:prstGeom prst="rect">
-            <a:avLst/>
-          </a:prstGeom>
-          <a:noFill/>
-        </p:spPr>
-        <p:txBody>
-          <a:bodyPr wrap="square">
-            <a:spAutoFit/>
-          </a:bodyPr>
-          <a:lstStyle/>
-          <a:p>
-            <a:pPr algn="l"/>
-            <a:r>
-              <a:rPr sz="2400" b="0">
-                <a:solidFill>
-                  <a:srgbClr val="1F7A8C"/>
-                </a:solidFill>
-                <a:latin typeface="Calibri"/>
-              </a:rPr>
-              <a:t>→</a:t>
-            </a:r>
-          </a:p>
-        </p:txBody>
-      </p:sp>
-      <p:sp>
-        <p:nvSpPr>
-          <p:cNvPr id="12" name="Rounded Rectangle 11"/>
-          <p:cNvSpPr/>
-          <p:nvPr/>
-        </p:nvSpPr>
-        <p:spPr>
-          <a:xfrm>
-            <a:off x="9692640" y="2743200"/>
-            <a:ext cx="2011680" cy="1371600"/>
-          </a:xfrm>
-          <a:prstGeom prst="roundRect">
-            <a:avLst>
-              <a:gd name="adj" fmla="val 10000"/>
-            </a:avLst>
-          </a:prstGeom>
-          <a:solidFill>
-            <a:srgbClr val="1F7A8C"/>
-          </a:solidFill>
-          <a:ln>
-            <a:noFill/>
-          </a:ln>
-        </p:spPr>
-        <p:style>
-          <a:lnRef idx="1">
-            <a:schemeClr val="accent1"/>
-          </a:lnRef>
-          <a:fillRef idx="3">
-            <a:schemeClr val="accent1"/>
-          </a:fillRef>
-          <a:effectRef idx="2">
-            <a:schemeClr val="accent1"/>
-          </a:effectRef>
-          <a:fontRef idx="minor">
-            <a:schemeClr val="lt1"/>
-          </a:fontRef>
-        </p:style>
-        <p:txBody>
-          <a:bodyPr rtlCol="0" anchor="ctr" wrap="square"/>
-          <a:lstStyle/>
-          <a:p>
-            <a:pPr algn="ctr">
-              <a:spcBef>
-                <a:spcPts val="0"/>
-              </a:spcBef>
-            </a:pPr>
-            <a:r>
-              <a:rPr sz="1400" b="1">
-                <a:solidFill>
-                  <a:srgbClr val="FFFFFF"/>
-                </a:solidFill>
-                <a:latin typeface="Calibri"/>
-              </a:rPr>
-              <a:t>Match?</a:t>
-            </a:r>
-          </a:p>
-        </p:txBody>
-      </p:sp>
-      <p:sp>
-        <p:nvSpPr>
-          <p:cNvPr id="13" name="TextBox 12"/>
-          <p:cNvSpPr txBox="1"/>
-          <p:nvPr/>
-        </p:nvSpPr>
-        <p:spPr>
-          <a:xfrm>
-            <a:off x="548640" y="4754880"/>
-            <a:ext cx="10972800" cy="914400"/>
-          </a:xfrm>
-          <a:prstGeom prst="rect">
-            <a:avLst/>
-          </a:prstGeom>
-          <a:noFill/>
-        </p:spPr>
-        <p:txBody>
-          <a:bodyPr wrap="square">
-            <a:spAutoFit/>
-          </a:bodyPr>
-          <a:lstStyle/>
-          <a:p>
-            <a:pPr algn="ctr"/>
-            <a:r>
-              <a:rPr sz="1600" b="0">
-                <a:solidFill>
-                  <a:srgbClr val="2F3E4E"/>
-                </a:solidFill>
-                <a:latin typeface="Calibri"/>
-              </a:rPr>
-              <a:t>Agent speed + fixed compiler oracle → trustworthy preservation.
-Example: Snowboard Kids 2 matching loops (Lewis, 2026).</a:t>
-            </a:r>
-          </a:p>
-        </p:txBody>
-      </p:sp>
-    </p:spTree>
-  </p:cSld>
-  <p:clrMapOvr>
-    <a:masterClrMapping/>
-  </p:clrMapOvr>
-</p:sld>
-</file>
-
-<file path=ppt/slides/slide12.xml><?xml version="1.0" encoding="utf-8"?>
-<p:sld xmlns:a="http://schemas.openxmlformats.org/drawingml/2006/main" xmlns:p="http://schemas.openxmlformats.org/presentationml/2006/main" xmlns:r="http://schemas.openxmlformats.org/officeDocument/2006/relationships">
-  <p:cSld>
-    <p:bg>
-      <p:bgPr>
-        <a:solidFill>
-          <a:srgbClr val="F4F6F8"/>
-        </a:solidFill>
-        <a:effectLst/>
-      </p:bgPr>
-    </p:bg>
-    <p:spTree>
-      <p:nvGrpSpPr>
-        <p:cNvPr id="1" name=""/>
-        <p:cNvGrpSpPr/>
-        <p:nvPr/>
-      </p:nvGrpSpPr>
-      <p:grpSpPr/>
-      <p:sp>
-        <p:nvSpPr>
-          <p:cNvPr id="2" name="Rectangle 1"/>
-          <p:cNvSpPr/>
-          <p:nvPr/>
-        </p:nvSpPr>
-        <p:spPr>
-          <a:xfrm>
-            <a:off x="0" y="0"/>
-            <a:ext cx="109728" cy="6858000"/>
-          </a:xfrm>
-          <a:prstGeom prst="rect">
-            <a:avLst/>
-          </a:prstGeom>
-          <a:solidFill>
-            <a:srgbClr val="1F7A8C"/>
-          </a:solidFill>
-          <a:ln>
-            <a:noFill/>
-          </a:ln>
-        </p:spPr>
-        <p:style>
-          <a:lnRef idx="1">
-            <a:schemeClr val="accent1"/>
-          </a:lnRef>
-          <a:fillRef idx="3">
-            <a:schemeClr val="accent1"/>
-          </a:fillRef>
-          <a:effectRef idx="2">
-            <a:schemeClr val="accent1"/>
-          </a:effectRef>
-          <a:fontRef idx="minor">
-            <a:schemeClr val="lt1"/>
-          </a:fontRef>
-        </p:style>
-        <p:txBody>
-          <a:bodyPr rtlCol="0" anchor="ctr"/>
-          <a:lstStyle/>
-          <a:p>
-            <a:pPr algn="ctr"/>
-          </a:p>
-        </p:txBody>
-      </p:sp>
-      <p:sp>
-        <p:nvSpPr>
-          <p:cNvPr id="3" name="TextBox 2"/>
-          <p:cNvSpPr txBox="1"/>
-          <p:nvPr/>
-        </p:nvSpPr>
-        <p:spPr>
-          <a:xfrm>
-            <a:off x="411480" y="256032"/>
-            <a:ext cx="8321040" cy="1005840"/>
-          </a:xfrm>
-          <a:prstGeom prst="rect">
-            <a:avLst/>
-          </a:prstGeom>
-          <a:noFill/>
-        </p:spPr>
-        <p:txBody>
-          <a:bodyPr wrap="square">
-            <a:spAutoFit/>
-          </a:bodyPr>
-          <a:lstStyle/>
-          <a:p>
-            <a:pPr algn="l"/>
-            <a:r>
-              <a:rPr sz="2600" b="1">
-                <a:solidFill>
-                  <a:srgbClr val="0B1F3A"/>
-                </a:solidFill>
-                <a:latin typeface="Calibri"/>
-              </a:rPr>
-              <a:t>Capability rose; correctness, legality, and verification still bind us.</a:t>
-            </a:r>
-          </a:p>
-        </p:txBody>
-      </p:sp>
-      <p:sp>
-        <p:nvSpPr>
-          <p:cNvPr id="4" name="Rounded Rectangle 3"/>
-          <p:cNvSpPr/>
-          <p:nvPr/>
-        </p:nvSpPr>
-        <p:spPr>
-          <a:xfrm>
-            <a:off x="914400" y="2011680"/>
-            <a:ext cx="4754880" cy="1645920"/>
-          </a:xfrm>
-          <a:prstGeom prst="roundRect">
-            <a:avLst>
-              <a:gd name="adj" fmla="val 10000"/>
-            </a:avLst>
-          </a:prstGeom>
-          <a:solidFill>
-            <a:srgbClr val="FFFFFF"/>
-          </a:solidFill>
-          <a:ln>
-            <a:noFill/>
-          </a:ln>
-        </p:spPr>
-        <p:style>
-          <a:lnRef idx="1">
-            <a:schemeClr val="accent1"/>
-          </a:lnRef>
-          <a:fillRef idx="3">
-            <a:schemeClr val="accent1"/>
-          </a:fillRef>
-          <a:effectRef idx="2">
-            <a:schemeClr val="accent1"/>
-          </a:effectRef>
-          <a:fontRef idx="minor">
-            <a:schemeClr val="lt1"/>
-          </a:fontRef>
-        </p:style>
-        <p:txBody>
-          <a:bodyPr rtlCol="0" anchor="ctr"/>
-          <a:lstStyle/>
-          <a:p>
-            <a:pPr algn="ctr"/>
-          </a:p>
-        </p:txBody>
-      </p:sp>
-      <p:sp>
-        <p:nvSpPr>
-          <p:cNvPr id="5" name="TextBox 4"/>
-          <p:cNvSpPr txBox="1"/>
-          <p:nvPr/>
-        </p:nvSpPr>
-        <p:spPr>
-          <a:xfrm>
-            <a:off x="1234440" y="2331720"/>
-            <a:ext cx="4114800" cy="548640"/>
-          </a:xfrm>
-          <a:prstGeom prst="rect">
-            <a:avLst/>
-          </a:prstGeom>
-          <a:noFill/>
-        </p:spPr>
-        <p:txBody>
-          <a:bodyPr wrap="square">
-            <a:spAutoFit/>
-          </a:bodyPr>
-          <a:lstStyle/>
-          <a:p>
-            <a:pPr algn="l"/>
-            <a:r>
-              <a:rPr sz="2200" b="1">
-                <a:solidFill>
-                  <a:srgbClr val="0B1F3A"/>
-                </a:solidFill>
-                <a:latin typeface="Calibri"/>
-              </a:rPr>
-              <a:t>Hallucinations</a:t>
-            </a:r>
-          </a:p>
-        </p:txBody>
-      </p:sp>
-      <p:sp>
-        <p:nvSpPr>
-          <p:cNvPr id="6" name="TextBox 5"/>
-          <p:cNvSpPr txBox="1"/>
-          <p:nvPr/>
-        </p:nvSpPr>
-        <p:spPr>
-          <a:xfrm>
-            <a:off x="1234440" y="2926080"/>
-            <a:ext cx="4114800" cy="457200"/>
-          </a:xfrm>
-          <a:prstGeom prst="rect">
-            <a:avLst/>
-          </a:prstGeom>
-          <a:noFill/>
-        </p:spPr>
-        <p:txBody>
-          <a:bodyPr wrap="square">
-            <a:spAutoFit/>
-          </a:bodyPr>
-          <a:lstStyle/>
-          <a:p>
-            <a:pPr algn="l"/>
-            <a:r>
-              <a:rPr sz="1600" b="0">
-                <a:solidFill>
-                  <a:srgbClr val="2F3E4E"/>
-                </a:solidFill>
-                <a:latin typeface="Calibri"/>
-              </a:rPr>
-              <a:t>Plausible ≠ correct</a:t>
-            </a:r>
-          </a:p>
-        </p:txBody>
-      </p:sp>
-      <p:sp>
-        <p:nvSpPr>
-          <p:cNvPr id="7" name="Rounded Rectangle 6"/>
-          <p:cNvSpPr/>
-          <p:nvPr/>
-        </p:nvSpPr>
-        <p:spPr>
-          <a:xfrm>
-            <a:off x="6217920" y="2011680"/>
-            <a:ext cx="4754880" cy="1645920"/>
-          </a:xfrm>
-          <a:prstGeom prst="roundRect">
-            <a:avLst>
-              <a:gd name="adj" fmla="val 10000"/>
-            </a:avLst>
-          </a:prstGeom>
-          <a:solidFill>
-            <a:srgbClr val="FFFFFF"/>
-          </a:solidFill>
-          <a:ln>
-            <a:noFill/>
-          </a:ln>
-        </p:spPr>
-        <p:style>
-          <a:lnRef idx="1">
-            <a:schemeClr val="accent1"/>
-          </a:lnRef>
-          <a:fillRef idx="3">
-            <a:schemeClr val="accent1"/>
-          </a:fillRef>
-          <a:effectRef idx="2">
-            <a:schemeClr val="accent1"/>
-          </a:effectRef>
-          <a:fontRef idx="minor">
-            <a:schemeClr val="lt1"/>
-          </a:fontRef>
-        </p:style>
-        <p:txBody>
-          <a:bodyPr rtlCol="0" anchor="ctr"/>
-          <a:lstStyle/>
-          <a:p>
-            <a:pPr algn="ctr"/>
-          </a:p>
-        </p:txBody>
-      </p:sp>
-      <p:sp>
-        <p:nvSpPr>
-          <p:cNvPr id="8" name="TextBox 7"/>
-          <p:cNvSpPr txBox="1"/>
-          <p:nvPr/>
-        </p:nvSpPr>
-        <p:spPr>
-          <a:xfrm>
-            <a:off x="6537960" y="2331720"/>
-            <a:ext cx="4114800" cy="548640"/>
-          </a:xfrm>
-          <a:prstGeom prst="rect">
-            <a:avLst/>
-          </a:prstGeom>
-          <a:noFill/>
-        </p:spPr>
-        <p:txBody>
-          <a:bodyPr wrap="square">
-            <a:spAutoFit/>
-          </a:bodyPr>
-          <a:lstStyle/>
-          <a:p>
-            <a:pPr algn="l"/>
-            <a:r>
-              <a:rPr sz="2200" b="1">
-                <a:solidFill>
-                  <a:srgbClr val="0B1F3A"/>
-                </a:solidFill>
-                <a:latin typeface="Calibri"/>
-              </a:rPr>
-              <a:t>Obfuscation</a:t>
-            </a:r>
-          </a:p>
-        </p:txBody>
-      </p:sp>
-      <p:sp>
-        <p:nvSpPr>
-          <p:cNvPr id="9" name="TextBox 8"/>
-          <p:cNvSpPr txBox="1"/>
-          <p:nvPr/>
-        </p:nvSpPr>
-        <p:spPr>
-          <a:xfrm>
-            <a:off x="6537960" y="2926080"/>
-            <a:ext cx="4114800" cy="457200"/>
-          </a:xfrm>
-          <a:prstGeom prst="rect">
-            <a:avLst/>
-          </a:prstGeom>
-          <a:noFill/>
-        </p:spPr>
-        <p:txBody>
-          <a:bodyPr wrap="square">
-            <a:spAutoFit/>
-          </a:bodyPr>
-          <a:lstStyle/>
-          <a:p>
-            <a:pPr algn="l"/>
-            <a:r>
-              <a:rPr sz="1600" b="0">
-                <a:solidFill>
-                  <a:srgbClr val="2F3E4E"/>
-                </a:solidFill>
-                <a:latin typeface="Calibri"/>
-              </a:rPr>
-              <a:t>Still breaks models</a:t>
-            </a:r>
-          </a:p>
-        </p:txBody>
-      </p:sp>
-      <p:sp>
-        <p:nvSpPr>
-          <p:cNvPr id="10" name="Rounded Rectangle 9"/>
-          <p:cNvSpPr/>
-          <p:nvPr/>
-        </p:nvSpPr>
-        <p:spPr>
-          <a:xfrm>
-            <a:off x="914400" y="4023360"/>
-            <a:ext cx="4754880" cy="1645920"/>
-          </a:xfrm>
-          <a:prstGeom prst="roundRect">
-            <a:avLst>
-              <a:gd name="adj" fmla="val 10000"/>
-            </a:avLst>
-          </a:prstGeom>
-          <a:solidFill>
-            <a:srgbClr val="FFFFFF"/>
-          </a:solidFill>
-          <a:ln>
-            <a:noFill/>
-          </a:ln>
-        </p:spPr>
-        <p:style>
-          <a:lnRef idx="1">
-            <a:schemeClr val="accent1"/>
-          </a:lnRef>
-          <a:fillRef idx="3">
-            <a:schemeClr val="accent1"/>
-          </a:fillRef>
-          <a:effectRef idx="2">
-            <a:schemeClr val="accent1"/>
-          </a:effectRef>
-          <a:fontRef idx="minor">
-            <a:schemeClr val="lt1"/>
-          </a:fontRef>
-        </p:style>
-        <p:txBody>
-          <a:bodyPr rtlCol="0" anchor="ctr"/>
-          <a:lstStyle/>
-          <a:p>
-            <a:pPr algn="ctr"/>
-          </a:p>
-        </p:txBody>
-      </p:sp>
-      <p:sp>
-        <p:nvSpPr>
-          <p:cNvPr id="11" name="TextBox 10"/>
-          <p:cNvSpPr txBox="1"/>
-          <p:nvPr/>
-        </p:nvSpPr>
-        <p:spPr>
-          <a:xfrm>
-            <a:off x="1234440" y="4343400"/>
-            <a:ext cx="4114800" cy="548640"/>
-          </a:xfrm>
-          <a:prstGeom prst="rect">
-            <a:avLst/>
-          </a:prstGeom>
-          <a:noFill/>
-        </p:spPr>
-        <p:txBody>
-          <a:bodyPr wrap="square">
-            <a:spAutoFit/>
-          </a:bodyPr>
-          <a:lstStyle/>
-          <a:p>
-            <a:pPr algn="l"/>
-            <a:r>
-              <a:rPr sz="2200" b="1">
-                <a:solidFill>
-                  <a:srgbClr val="0B1F3A"/>
-                </a:solidFill>
-                <a:latin typeface="Calibri"/>
-              </a:rPr>
-              <a:t>Rights / EULA</a:t>
-            </a:r>
-          </a:p>
-        </p:txBody>
-      </p:sp>
-      <p:sp>
-        <p:nvSpPr>
-          <p:cNvPr id="12" name="TextBox 11"/>
-          <p:cNvSpPr txBox="1"/>
-          <p:nvPr/>
-        </p:nvSpPr>
-        <p:spPr>
-          <a:xfrm>
-            <a:off x="1234440" y="4937760"/>
-            <a:ext cx="4114800" cy="457200"/>
-          </a:xfrm>
-          <a:prstGeom prst="rect">
-            <a:avLst/>
-          </a:prstGeom>
-          <a:noFill/>
-        </p:spPr>
-        <p:txBody>
-          <a:bodyPr wrap="square">
-            <a:spAutoFit/>
-          </a:bodyPr>
-          <a:lstStyle/>
-          <a:p>
-            <a:pPr algn="l"/>
-            <a:r>
-              <a:rPr sz="1600" b="0">
-                <a:solidFill>
-                  <a:srgbClr val="2F3E4E"/>
-                </a:solidFill>
-                <a:latin typeface="Calibri"/>
-              </a:rPr>
-              <a:t>Assets aren’t free</a:t>
-            </a:r>
-          </a:p>
-        </p:txBody>
-      </p:sp>
-      <p:sp>
-        <p:nvSpPr>
-          <p:cNvPr id="13" name="Rounded Rectangle 12"/>
-          <p:cNvSpPr/>
-          <p:nvPr/>
-        </p:nvSpPr>
-        <p:spPr>
-          <a:xfrm>
-            <a:off x="6217920" y="4023360"/>
-            <a:ext cx="4754880" cy="1645920"/>
-          </a:xfrm>
-          <a:prstGeom prst="roundRect">
-            <a:avLst>
-              <a:gd name="adj" fmla="val 10000"/>
-            </a:avLst>
-          </a:prstGeom>
-          <a:solidFill>
-            <a:srgbClr val="FFFFFF"/>
-          </a:solidFill>
-          <a:ln>
-            <a:noFill/>
-          </a:ln>
-        </p:spPr>
-        <p:style>
-          <a:lnRef idx="1">
-            <a:schemeClr val="accent1"/>
-          </a:lnRef>
-          <a:fillRef idx="3">
-            <a:schemeClr val="accent1"/>
-          </a:fillRef>
-          <a:effectRef idx="2">
-            <a:schemeClr val="accent1"/>
-          </a:effectRef>
-          <a:fontRef idx="minor">
-            <a:schemeClr val="lt1"/>
-          </a:fontRef>
-        </p:style>
-        <p:txBody>
-          <a:bodyPr rtlCol="0" anchor="ctr"/>
-          <a:lstStyle/>
-          <a:p>
-            <a:pPr algn="ctr"/>
-          </a:p>
-        </p:txBody>
-      </p:sp>
-      <p:sp>
-        <p:nvSpPr>
-          <p:cNvPr id="14" name="TextBox 13"/>
-          <p:cNvSpPr txBox="1"/>
-          <p:nvPr/>
-        </p:nvSpPr>
-        <p:spPr>
-          <a:xfrm>
-            <a:off x="6537960" y="4343400"/>
-            <a:ext cx="4114800" cy="548640"/>
-          </a:xfrm>
-          <a:prstGeom prst="rect">
-            <a:avLst/>
-          </a:prstGeom>
-          <a:noFill/>
-        </p:spPr>
-        <p:txBody>
-          <a:bodyPr wrap="square">
-            <a:spAutoFit/>
-          </a:bodyPr>
-          <a:lstStyle/>
-          <a:p>
-            <a:pPr algn="l"/>
-            <a:r>
-              <a:rPr sz="2200" b="1">
-                <a:solidFill>
-                  <a:srgbClr val="0B1F3A"/>
-                </a:solidFill>
-                <a:latin typeface="Calibri"/>
-              </a:rPr>
-              <a:t>Anti-cheat</a:t>
-            </a:r>
-          </a:p>
-        </p:txBody>
-      </p:sp>
-      <p:sp>
-        <p:nvSpPr>
-          <p:cNvPr id="15" name="TextBox 14"/>
-          <p:cNvSpPr txBox="1"/>
-          <p:nvPr/>
-        </p:nvSpPr>
-        <p:spPr>
-          <a:xfrm>
-            <a:off x="6537960" y="4937760"/>
-            <a:ext cx="4114800" cy="457200"/>
-          </a:xfrm>
-          <a:prstGeom prst="rect">
-            <a:avLst/>
-          </a:prstGeom>
-          <a:noFill/>
-        </p:spPr>
-        <p:txBody>
-          <a:bodyPr wrap="square">
-            <a:spAutoFit/>
-          </a:bodyPr>
-          <a:lstStyle/>
-          <a:p>
-            <a:pPr algn="l"/>
-            <a:r>
-              <a:rPr sz="1600" b="0">
-                <a:solidFill>
-                  <a:srgbClr val="2F3E4E"/>
-                </a:solidFill>
-                <a:latin typeface="Calibri"/>
-              </a:rPr>
-              <a:t>Offline-only for serious work</a:t>
-            </a:r>
-          </a:p>
-        </p:txBody>
-      </p:sp>
-    </p:spTree>
-  </p:cSld>
-  <p:clrMapOvr>
-    <a:masterClrMapping/>
-  </p:clrMapOvr>
-</p:sld>
-</file>
-
-<file path=ppt/slides/slide13.xml><?xml version="1.0" encoding="utf-8"?>
-<p:sld xmlns:a="http://schemas.openxmlformats.org/drawingml/2006/main" xmlns:p="http://schemas.openxmlformats.org/presentationml/2006/main" xmlns:r="http://schemas.openxmlformats.org/officeDocument/2006/relationships">
-  <p:cSld>
-    <p:bg>
-      <p:bgPr>
-        <a:solidFill>
-          <a:srgbClr val="F4F6F8"/>
-        </a:solidFill>
-        <a:effectLst/>
-      </p:bgPr>
-    </p:bg>
-    <p:spTree>
-      <p:nvGrpSpPr>
-        <p:cNvPr id="1" name=""/>
-        <p:cNvGrpSpPr/>
-        <p:nvPr/>
-      </p:nvGrpSpPr>
-      <p:grpSpPr/>
-      <p:sp>
-        <p:nvSpPr>
-          <p:cNvPr id="2" name="Rectangle 1"/>
-          <p:cNvSpPr/>
-          <p:nvPr/>
-        </p:nvSpPr>
-        <p:spPr>
-          <a:xfrm>
-            <a:off x="0" y="0"/>
-            <a:ext cx="109728" cy="6858000"/>
-          </a:xfrm>
-          <a:prstGeom prst="rect">
-            <a:avLst/>
-          </a:prstGeom>
-          <a:solidFill>
-            <a:srgbClr val="1F7A8C"/>
-          </a:solidFill>
-          <a:ln>
-            <a:noFill/>
-          </a:ln>
-        </p:spPr>
-        <p:style>
-          <a:lnRef idx="1">
-            <a:schemeClr val="accent1"/>
-          </a:lnRef>
-          <a:fillRef idx="3">
-            <a:schemeClr val="accent1"/>
-          </a:fillRef>
-          <a:effectRef idx="2">
-            <a:schemeClr val="accent1"/>
-          </a:effectRef>
-          <a:fontRef idx="minor">
-            <a:schemeClr val="lt1"/>
-          </a:fontRef>
-        </p:style>
-        <p:txBody>
-          <a:bodyPr rtlCol="0" anchor="ctr"/>
-          <a:lstStyle/>
-          <a:p>
-            <a:pPr algn="ctr"/>
-          </a:p>
-        </p:txBody>
-      </p:sp>
-      <p:sp>
-        <p:nvSpPr>
-          <p:cNvPr id="3" name="TextBox 2"/>
-          <p:cNvSpPr txBox="1"/>
-          <p:nvPr/>
-        </p:nvSpPr>
-        <p:spPr>
-          <a:xfrm>
-            <a:off x="411480" y="256032"/>
-            <a:ext cx="8321040" cy="1005840"/>
-          </a:xfrm>
-          <a:prstGeom prst="rect">
-            <a:avLst/>
-          </a:prstGeom>
-          <a:noFill/>
-        </p:spPr>
-        <p:txBody>
-          <a:bodyPr wrap="square">
-            <a:spAutoFit/>
-          </a:bodyPr>
-          <a:lstStyle/>
-          <a:p>
-            <a:pPr algn="l"/>
-            <a:r>
-              <a:rPr sz="2600" b="1">
-                <a:solidFill>
-                  <a:srgbClr val="0B1F3A"/>
-                </a:solidFill>
-                <a:latin typeface="Calibri"/>
-              </a:rPr>
-              <a:t>AI compresses the reverse-engineering bottleneck — it does not erase it.</a:t>
-            </a:r>
-          </a:p>
-        </p:txBody>
-      </p:sp>
-      <p:sp>
-        <p:nvSpPr>
-          <p:cNvPr id="4" name="Rounded Rectangle 3"/>
-          <p:cNvSpPr/>
-          <p:nvPr/>
-        </p:nvSpPr>
-        <p:spPr>
-          <a:xfrm>
-            <a:off x="1371600" y="2286000"/>
-            <a:ext cx="9326880" cy="3200400"/>
-          </a:xfrm>
-          <a:prstGeom prst="roundRect">
-            <a:avLst>
-              <a:gd name="adj" fmla="val 10000"/>
-            </a:avLst>
-          </a:prstGeom>
-          <a:solidFill>
-            <a:srgbClr val="0B1F3A"/>
-          </a:solidFill>
-          <a:ln>
-            <a:noFill/>
-          </a:ln>
-        </p:spPr>
-        <p:style>
-          <a:lnRef idx="1">
-            <a:schemeClr val="accent1"/>
-          </a:lnRef>
-          <a:fillRef idx="3">
-            <a:schemeClr val="accent1"/>
-          </a:fillRef>
-          <a:effectRef idx="2">
-            <a:schemeClr val="accent1"/>
-          </a:effectRef>
-          <a:fontRef idx="minor">
-            <a:schemeClr val="lt1"/>
-          </a:fontRef>
-        </p:style>
-        <p:txBody>
-          <a:bodyPr rtlCol="0" anchor="ctr"/>
-          <a:lstStyle/>
-          <a:p>
-            <a:pPr algn="ctr"/>
-          </a:p>
-        </p:txBody>
-      </p:sp>
-      <p:sp>
-        <p:nvSpPr>
-          <p:cNvPr id="5" name="TextBox 4"/>
-          <p:cNvSpPr txBox="1"/>
-          <p:nvPr/>
-        </p:nvSpPr>
-        <p:spPr>
-          <a:xfrm>
-            <a:off x="1828800" y="2926080"/>
-            <a:ext cx="8412480" cy="1828800"/>
-          </a:xfrm>
-          <a:prstGeom prst="rect">
-            <a:avLst/>
-          </a:prstGeom>
-          <a:noFill/>
-        </p:spPr>
-        <p:txBody>
-          <a:bodyPr wrap="square">
-            <a:spAutoFit/>
-          </a:bodyPr>
-          <a:lstStyle/>
-          <a:p>
-            <a:pPr algn="ctr"/>
-            <a:r>
-              <a:rPr sz="2400" b="0">
-                <a:solidFill>
-                  <a:srgbClr val="FFFFFF"/>
-                </a:solidFill>
-                <a:latin typeface="Calibri"/>
-              </a:rPr>
-              <a:t>Classical tools measure the bytes.
-LLMs draft the meaning.
-Humans — and oracles — decide what ships.</a:t>
-            </a:r>
-          </a:p>
-        </p:txBody>
-      </p:sp>
-    </p:spTree>
-  </p:cSld>
-  <p:clrMapOvr>
-    <a:masterClrMapping/>
-  </p:clrMapOvr>
-</p:sld>
-</file>
-
-<file path=ppt/slides/slide14.xml><?xml version="1.0" encoding="utf-8"?>
-<p:sld xmlns:a="http://schemas.openxmlformats.org/drawingml/2006/main" xmlns:p="http://schemas.openxmlformats.org/presentationml/2006/main" xmlns:r="http://schemas.openxmlformats.org/officeDocument/2006/relationships">
-  <p:cSld>
-    <p:bg>
-      <p:bgPr>
-        <a:solidFill>
-          <a:srgbClr val="0B1F3A"/>
-        </a:solidFill>
-        <a:effectLst/>
-      </p:bgPr>
-    </p:bg>
-    <p:spTree>
-      <p:nvGrpSpPr>
-        <p:cNvPr id="1" name=""/>
-        <p:cNvGrpSpPr/>
-        <p:nvPr/>
-      </p:nvGrpSpPr>
-      <p:grpSpPr/>
-      <p:sp>
-        <p:nvSpPr>
-          <p:cNvPr id="2" name="TextBox 1"/>
-          <p:cNvSpPr txBox="1"/>
-          <p:nvPr/>
-        </p:nvSpPr>
-        <p:spPr>
-          <a:xfrm>
-            <a:off x="731520" y="2194560"/>
-            <a:ext cx="10515600" cy="914400"/>
-          </a:xfrm>
-          <a:prstGeom prst="rect">
-            <a:avLst/>
-          </a:prstGeom>
-          <a:noFill/>
-        </p:spPr>
-        <p:txBody>
-          <a:bodyPr wrap="square">
-            <a:spAutoFit/>
-          </a:bodyPr>
-          <a:lstStyle/>
-          <a:p>
-            <a:pPr algn="ctr"/>
-            <a:r>
-              <a:rPr sz="4400" b="1">
-                <a:solidFill>
-                  <a:srgbClr val="FFFFFF"/>
-                </a:solidFill>
-                <a:latin typeface="Calibri"/>
-              </a:rPr>
-              <a:t>Thank you</a:t>
-            </a:r>
-          </a:p>
-        </p:txBody>
-      </p:sp>
-      <p:sp>
-        <p:nvSpPr>
-          <p:cNvPr id="3" name="Rectangle 2"/>
-          <p:cNvSpPr/>
-          <p:nvPr/>
-        </p:nvSpPr>
-        <p:spPr>
-          <a:xfrm>
-            <a:off x="5029200" y="3291840"/>
-            <a:ext cx="2011680" cy="54864"/>
-          </a:xfrm>
-          <a:prstGeom prst="rect">
-            <a:avLst/>
-          </a:prstGeom>
-          <a:solidFill>
-            <a:srgbClr val="1F7A8C"/>
-          </a:solidFill>
-          <a:ln>
-            <a:noFill/>
-          </a:ln>
-        </p:spPr>
-        <p:style>
-          <a:lnRef idx="1">
-            <a:schemeClr val="accent1"/>
-          </a:lnRef>
-          <a:fillRef idx="3">
-            <a:schemeClr val="accent1"/>
-          </a:fillRef>
-          <a:effectRef idx="2">
-            <a:schemeClr val="accent1"/>
-          </a:effectRef>
-          <a:fontRef idx="minor">
-            <a:schemeClr val="lt1"/>
-          </a:fontRef>
-        </p:style>
-        <p:txBody>
-          <a:bodyPr rtlCol="0" anchor="ctr"/>
-          <a:lstStyle/>
-          <a:p>
-            <a:pPr algn="ctr"/>
-          </a:p>
-        </p:txBody>
-      </p:sp>
-      <p:sp>
-        <p:nvSpPr>
-          <p:cNvPr id="4" name="TextBox 3"/>
-          <p:cNvSpPr txBox="1"/>
-          <p:nvPr/>
-        </p:nvSpPr>
-        <p:spPr>
-          <a:xfrm>
-            <a:off x="731520" y="3657600"/>
-            <a:ext cx="10515600" cy="1371600"/>
-          </a:xfrm>
-          <a:prstGeom prst="rect">
-            <a:avLst/>
-          </a:prstGeom>
-          <a:noFill/>
-        </p:spPr>
-        <p:txBody>
-          <a:bodyPr wrap="square">
-            <a:spAutoFit/>
-          </a:bodyPr>
-          <a:lstStyle/>
-          <a:p>
-            <a:pPr algn="ctr"/>
-            <a:r>
-              <a:rPr sz="1800" b="0">
-                <a:solidFill>
-                  <a:srgbClr val="D7E2EA"/>
-                </a:solidFill>
-                <a:latin typeface="Calibri"/>
-              </a:rPr>
-              <a:t>Ankrit Jarngal  ·  2023BSE028
-Computer Science and Engineering  ·  NIT Srinagar
-Questions?</a:t>
+              <a:t>National Institute of Technology Srinagar  |  2025–2026</a:t>
             </a:r>
           </a:p>
         </p:txBody>
@@ -6631,7 +4290,7 @@
     <p:bg>
       <p:bgPr>
         <a:solidFill>
-          <a:srgbClr val="F4F6F8"/>
+          <a:srgbClr val="F8FAFC"/>
         </a:solidFill>
         <a:effectLst/>
       </p:bgPr>
@@ -6652,7 +4311,7 @@
         <p:spPr>
           <a:xfrm>
             <a:off x="0" y="0"/>
-            <a:ext cx="109728" cy="6858000"/>
+            <a:ext cx="91440" cy="6858000"/>
           </a:xfrm>
           <a:prstGeom prst="rect">
             <a:avLst/>
@@ -6694,8 +4353,8 @@
         </p:nvSpPr>
         <p:spPr>
           <a:xfrm>
-            <a:off x="411480" y="256032"/>
-            <a:ext cx="8321040" cy="1005840"/>
+            <a:off x="457200" y="256032"/>
+            <a:ext cx="11155680" cy="640080"/>
           </a:xfrm>
           <a:prstGeom prst="rect">
             <a:avLst/>
@@ -6708,37 +4367,78 @@
           </a:bodyPr>
           <a:lstStyle/>
           <a:p>
-            <a:pPr algn="l"/>
-            <a:r>
-              <a:rPr sz="2600" b="1">
+            <a:pPr algn="l">
+              <a:spcAft>
+                <a:spcPts val="400"/>
+              </a:spcAft>
+            </a:pPr>
+            <a:r>
+              <a:rPr sz="2800" b="1">
                 <a:solidFill>
                   <a:srgbClr val="0B1F3A"/>
                 </a:solidFill>
                 <a:latin typeface="Calibri"/>
               </a:rPr>
-              <a:t>One game can run inside another — without the studio’s source.</a:t>
-            </a:r>
-          </a:p>
-        </p:txBody>
-      </p:sp>
-      <p:sp>
-        <p:nvSpPr>
-          <p:cNvPr id="4" name="Rounded Rectangle 3"/>
+              <a:t>What is Reverse Engineering?</a:t>
+            </a:r>
+          </a:p>
+        </p:txBody>
+      </p:sp>
+      <p:sp>
+        <p:nvSpPr>
+          <p:cNvPr id="4" name="TextBox 3"/>
+          <p:cNvSpPr txBox="1"/>
+          <p:nvPr/>
+        </p:nvSpPr>
+        <p:spPr>
+          <a:xfrm>
+            <a:off x="457200" y="868680"/>
+            <a:ext cx="11155680" cy="411480"/>
+          </a:xfrm>
+          <a:prstGeom prst="rect">
+            <a:avLst/>
+          </a:prstGeom>
+          <a:noFill/>
+        </p:spPr>
+        <p:txBody>
+          <a:bodyPr wrap="square">
+            <a:spAutoFit/>
+          </a:bodyPr>
+          <a:lstStyle/>
+          <a:p>
+            <a:pPr algn="l">
+              <a:spcAft>
+                <a:spcPts val="400"/>
+              </a:spcAft>
+            </a:pPr>
+            <a:r>
+              <a:rPr sz="1500" b="0">
+                <a:solidFill>
+                  <a:srgbClr val="64748B"/>
+                </a:solidFill>
+                <a:latin typeface="Calibri"/>
+              </a:rPr>
+              <a:t>Setting the background before we talk about AI</a:t>
+            </a:r>
+          </a:p>
+        </p:txBody>
+      </p:sp>
+      <p:sp>
+        <p:nvSpPr>
+          <p:cNvPr id="5" name="Rectangle 4"/>
           <p:cNvSpPr/>
           <p:nvPr/>
         </p:nvSpPr>
         <p:spPr>
           <a:xfrm>
-            <a:off x="1097280" y="1828800"/>
-            <a:ext cx="4114800" cy="3474720"/>
-          </a:xfrm>
-          <a:prstGeom prst="roundRect">
-            <a:avLst>
-              <a:gd name="adj" fmla="val 10000"/>
-            </a:avLst>
+            <a:off x="457200" y="1280160"/>
+            <a:ext cx="11155680" cy="18288"/>
+          </a:xfrm>
+          <a:prstGeom prst="rect">
+            <a:avLst/>
           </a:prstGeom>
           <a:solidFill>
-            <a:srgbClr val="0B1F3A"/>
+            <a:srgbClr val="CBD5E1"/>
           </a:solidFill>
           <a:ln>
             <a:noFill/>
@@ -6759,85 +4459,10 @@
           </a:fontRef>
         </p:style>
         <p:txBody>
-          <a:bodyPr rtlCol="0" anchor="ctr" wrap="square"/>
-          <a:lstStyle/>
-          <a:p>
-            <a:pPr algn="ctr">
-              <a:spcBef>
-                <a:spcPts val="0"/>
-              </a:spcBef>
-            </a:pPr>
-            <a:r>
-              <a:rPr sz="2200" b="1">
-                <a:solidFill>
-                  <a:srgbClr val="FFFFFF"/>
-                </a:solidFill>
-                <a:latin typeface="Calibri"/>
-              </a:rPr>
-              <a:t>HOST
-Elden Ring
-(compiled world)</a:t>
-            </a:r>
-          </a:p>
-        </p:txBody>
-      </p:sp>
-      <p:sp>
-        <p:nvSpPr>
-          <p:cNvPr id="5" name="Rounded Rectangle 4"/>
-          <p:cNvSpPr/>
-          <p:nvPr/>
-        </p:nvSpPr>
-        <p:spPr>
-          <a:xfrm>
-            <a:off x="6858000" y="1828800"/>
-            <a:ext cx="4114800" cy="3474720"/>
-          </a:xfrm>
-          <a:prstGeom prst="roundRect">
-            <a:avLst>
-              <a:gd name="adj" fmla="val 10000"/>
-            </a:avLst>
-          </a:prstGeom>
-          <a:solidFill>
-            <a:srgbClr val="1F7A8C"/>
-          </a:solidFill>
-          <a:ln>
-            <a:noFill/>
-          </a:ln>
-        </p:spPr>
-        <p:style>
-          <a:lnRef idx="1">
-            <a:schemeClr val="accent1"/>
-          </a:lnRef>
-          <a:fillRef idx="3">
-            <a:schemeClr val="accent1"/>
-          </a:fillRef>
-          <a:effectRef idx="2">
-            <a:schemeClr val="accent1"/>
-          </a:effectRef>
-          <a:fontRef idx="minor">
-            <a:schemeClr val="lt1"/>
-          </a:fontRef>
-        </p:style>
-        <p:txBody>
-          <a:bodyPr rtlCol="0" anchor="ctr" wrap="square"/>
-          <a:lstStyle/>
-          <a:p>
-            <a:pPr algn="ctr">
-              <a:spcBef>
-                <a:spcPts val="0"/>
-              </a:spcBef>
-            </a:pPr>
-            <a:r>
-              <a:rPr sz="2200" b="1">
-                <a:solidFill>
-                  <a:srgbClr val="FFFFFF"/>
-                </a:solidFill>
-                <a:latin typeface="Calibri"/>
-              </a:rPr>
-              <a:t>GUEST
-Minecraft
-(live process)</a:t>
-            </a:r>
+          <a:bodyPr rtlCol="0" anchor="ctr"/>
+          <a:lstStyle/>
+          <a:p>
+            <a:pPr algn="ctr"/>
           </a:p>
         </p:txBody>
       </p:sp>
@@ -6849,8 +4474,8 @@
         </p:nvSpPr>
         <p:spPr>
           <a:xfrm>
-            <a:off x="5120640" y="3200400"/>
-            <a:ext cx="1828800" cy="548640"/>
+            <a:off x="548640" y="1554480"/>
+            <a:ext cx="10972800" cy="4114800"/>
           </a:xfrm>
           <a:prstGeom prst="rect">
             <a:avLst/>
@@ -6863,15 +4488,67 @@
           </a:bodyPr>
           <a:lstStyle/>
           <a:p>
-            <a:pPr algn="ctr"/>
-            <a:r>
-              <a:rPr sz="3600" b="1">
-                <a:solidFill>
-                  <a:srgbClr val="E86A33"/>
+            <a:pPr algn="l">
+              <a:spcAft>
+                <a:spcPts val="800"/>
+              </a:spcAft>
+            </a:pPr>
+            <a:r>
+              <a:rPr sz="1800">
+                <a:solidFill>
+                  <a:srgbClr val="334155"/>
                 </a:solidFill>
                 <a:latin typeface="Calibri"/>
               </a:rPr>
-              <a:t>⟷</a:t>
+              <a:t>•  Reverse engineering means analyzing a finished software binary to understand how it works — without having the original source code.</a:t>
+            </a:r>
+          </a:p>
+          <a:p>
+            <a:pPr algn="l">
+              <a:spcAft>
+                <a:spcPts val="800"/>
+              </a:spcAft>
+            </a:pPr>
+            <a:r>
+              <a:rPr sz="1800">
+                <a:solidFill>
+                  <a:srgbClr val="334155"/>
+                </a:solidFill>
+                <a:latin typeface="Calibri"/>
+              </a:rPr>
+              <a:t>•  The program is already compiled into machine code. The goal is to recover structure, behavior, and intent from that binary.</a:t>
+            </a:r>
+          </a:p>
+          <a:p>
+            <a:pPr algn="l">
+              <a:spcAft>
+                <a:spcPts val="800"/>
+              </a:spcAft>
+            </a:pPr>
+            <a:r>
+              <a:rPr sz="1800">
+                <a:solidFill>
+                  <a:srgbClr val="334155"/>
+                </a:solidFill>
+                <a:latin typeface="Calibri"/>
+              </a:rPr>
+              <a:t>•  It is used in security research, interoperability, digital preservation, and software modification.</a:t>
+            </a:r>
+          </a:p>
+          <a:p>
+            <a:pPr algn="l">
+              <a:spcAft>
+                <a:spcPts val="800"/>
+              </a:spcAft>
+            </a:pPr>
+            <a:r>
+              <a:rPr sz="1800">
+                <a:solidFill>
+                  <a:srgbClr val="334155"/>
+                </a:solidFill>
+                <a:latin typeface="Calibri"/>
+              </a:rPr>
+              <a:t>•  Important: it is not rewriting software from scratch. It is interpreting and, when needed, carefully modifying what already exists.</a:t>
             </a:r>
           </a:p>
         </p:txBody>
@@ -6884,8 +4561,8 @@
         </p:nvSpPr>
         <p:spPr>
           <a:xfrm>
-            <a:off x="1097280" y="5669280"/>
-            <a:ext cx="9601200" cy="548640"/>
+            <a:off x="548640" y="5760720"/>
+            <a:ext cx="10972800" cy="457200"/>
           </a:xfrm>
           <a:prstGeom prst="rect">
             <a:avLst/>
@@ -6898,15 +4575,19 @@
           </a:bodyPr>
           <a:lstStyle/>
           <a:p>
-            <a:pPr algn="ctr"/>
-            <a:r>
-              <a:rPr sz="1600" b="0">
-                <a:solidFill>
-                  <a:srgbClr val="2F3E4E"/>
+            <a:pPr algn="l">
+              <a:spcAft>
+                <a:spcPts val="400"/>
+              </a:spcAft>
+            </a:pPr>
+            <a:r>
+              <a:rPr sz="1600" b="1">
+                <a:solidFill>
+                  <a:srgbClr val="1F7A8C"/>
                 </a:solidFill>
                 <a:latin typeface="Calibri"/>
               </a:rPr>
-              <a:t>Bridge: camera · collision · damage · depth composite</a:t>
+              <a:t>Key idea: compiled code → human understanding → safe modification</a:t>
             </a:r>
           </a:p>
         </p:txBody>
@@ -6925,7 +4606,7 @@
     <p:bg>
       <p:bgPr>
         <a:solidFill>
-          <a:srgbClr val="F4F6F8"/>
+          <a:srgbClr val="F8FAFC"/>
         </a:solidFill>
         <a:effectLst/>
       </p:bgPr>
@@ -6946,7 +4627,7 @@
         <p:spPr>
           <a:xfrm>
             <a:off x="0" y="0"/>
-            <a:ext cx="109728" cy="6858000"/>
+            <a:ext cx="91440" cy="6858000"/>
           </a:xfrm>
           <a:prstGeom prst="rect">
             <a:avLst/>
@@ -6988,8 +4669,8 @@
         </p:nvSpPr>
         <p:spPr>
           <a:xfrm>
-            <a:off x="411480" y="256032"/>
-            <a:ext cx="8321040" cy="1005840"/>
+            <a:off x="457200" y="256032"/>
+            <a:ext cx="11155680" cy="640080"/>
           </a:xfrm>
           <a:prstGeom prst="rect">
             <a:avLst/>
@@ -7002,37 +4683,78 @@
           </a:bodyPr>
           <a:lstStyle/>
           <a:p>
-            <a:pPr algn="l"/>
-            <a:r>
-              <a:rPr sz="2600" b="1">
+            <a:pPr algn="l">
+              <a:spcAft>
+                <a:spcPts val="400"/>
+              </a:spcAft>
+            </a:pPr>
+            <a:r>
+              <a:rPr sz="2800" b="1">
                 <a:solidFill>
                   <a:srgbClr val="0B1F3A"/>
                 </a:solidFill>
                 <a:latin typeface="Calibri"/>
               </a:rPr>
-              <a:t>Three stops: how RE works, how AI helps, what games reveal.</a:t>
-            </a:r>
-          </a:p>
-        </p:txBody>
-      </p:sp>
-      <p:sp>
-        <p:nvSpPr>
-          <p:cNvPr id="4" name="Rounded Rectangle 3"/>
+              <a:t>The Traditional Reverse Engineering Process</a:t>
+            </a:r>
+          </a:p>
+        </p:txBody>
+      </p:sp>
+      <p:sp>
+        <p:nvSpPr>
+          <p:cNvPr id="4" name="TextBox 3"/>
+          <p:cNvSpPr txBox="1"/>
+          <p:nvPr/>
+        </p:nvSpPr>
+        <p:spPr>
+          <a:xfrm>
+            <a:off x="457200" y="868680"/>
+            <a:ext cx="11155680" cy="411480"/>
+          </a:xfrm>
+          <a:prstGeom prst="rect">
+            <a:avLst/>
+          </a:prstGeom>
+          <a:noFill/>
+        </p:spPr>
+        <p:txBody>
+          <a:bodyPr wrap="square">
+            <a:spAutoFit/>
+          </a:bodyPr>
+          <a:lstStyle/>
+          <a:p>
+            <a:pPr algn="l">
+              <a:spcAft>
+                <a:spcPts val="400"/>
+              </a:spcAft>
+            </a:pPr>
+            <a:r>
+              <a:rPr sz="1500" b="0">
+                <a:solidFill>
+                  <a:srgbClr val="64748B"/>
+                </a:solidFill>
+                <a:latin typeface="Calibri"/>
+              </a:rPr>
+              <a:t>Powerful tools — but a slow human bottleneck</a:t>
+            </a:r>
+          </a:p>
+        </p:txBody>
+      </p:sp>
+      <p:sp>
+        <p:nvSpPr>
+          <p:cNvPr id="5" name="Rectangle 4"/>
           <p:cNvSpPr/>
           <p:nvPr/>
         </p:nvSpPr>
         <p:spPr>
           <a:xfrm>
-            <a:off x="731520" y="2011680"/>
-            <a:ext cx="3200400" cy="3291840"/>
-          </a:xfrm>
-          <a:prstGeom prst="roundRect">
-            <a:avLst>
-              <a:gd name="adj" fmla="val 10000"/>
-            </a:avLst>
+            <a:off x="457200" y="1280160"/>
+            <a:ext cx="11155680" cy="18288"/>
+          </a:xfrm>
+          <a:prstGeom prst="rect">
+            <a:avLst/>
           </a:prstGeom>
           <a:solidFill>
-            <a:srgbClr val="FFFFFF"/>
+            <a:srgbClr val="CBD5E1"/>
           </a:solidFill>
           <a:ln>
             <a:noFill/>
@@ -7060,59 +4782,40 @@
           </a:p>
         </p:txBody>
       </p:sp>
-      <p:sp>
-        <p:nvSpPr>
-          <p:cNvPr id="5" name="Rectangle 4"/>
-          <p:cNvSpPr/>
+      <p:pic>
+        <p:nvPicPr>
+          <p:cNvPr id="6" name="Picture 5" descr="diagram_traditional_re.png"/>
+          <p:cNvPicPr>
+            <a:picLocks noChangeAspect="1"/>
+          </p:cNvPicPr>
           <p:nvPr/>
-        </p:nvSpPr>
-        <p:spPr>
-          <a:xfrm>
-            <a:off x="731520" y="2011680"/>
-            <a:ext cx="3200400" cy="137160"/>
+        </p:nvPicPr>
+        <p:blipFill>
+          <a:blip r:embed="rId2"/>
+          <a:stretch>
+            <a:fillRect/>
+          </a:stretch>
+        </p:blipFill>
+        <p:spPr>
+          <a:xfrm>
+            <a:off x="640080" y="1554480"/>
+            <a:ext cx="10972800" cy="966978"/>
           </a:xfrm>
           <a:prstGeom prst="rect">
             <a:avLst/>
           </a:prstGeom>
-          <a:solidFill>
-            <a:srgbClr val="1F7A8C"/>
-          </a:solidFill>
-          <a:ln>
-            <a:noFill/>
-          </a:ln>
-        </p:spPr>
-        <p:style>
-          <a:lnRef idx="1">
-            <a:schemeClr val="accent1"/>
-          </a:lnRef>
-          <a:fillRef idx="3">
-            <a:schemeClr val="accent1"/>
-          </a:fillRef>
-          <a:effectRef idx="2">
-            <a:schemeClr val="accent1"/>
-          </a:effectRef>
-          <a:fontRef idx="minor">
-            <a:schemeClr val="lt1"/>
-          </a:fontRef>
-        </p:style>
-        <p:txBody>
-          <a:bodyPr rtlCol="0" anchor="ctr"/>
-          <a:lstStyle/>
-          <a:p>
-            <a:pPr algn="ctr"/>
-          </a:p>
-        </p:txBody>
-      </p:sp>
-      <p:sp>
-        <p:nvSpPr>
-          <p:cNvPr id="6" name="TextBox 5"/>
+        </p:spPr>
+      </p:pic>
+      <p:sp>
+        <p:nvSpPr>
+          <p:cNvPr id="7" name="TextBox 6"/>
           <p:cNvSpPr txBox="1"/>
           <p:nvPr/>
         </p:nvSpPr>
         <p:spPr>
           <a:xfrm>
-            <a:off x="1005840" y="2377440"/>
-            <a:ext cx="2560320" cy="548640"/>
+            <a:off x="548640" y="4206240"/>
+            <a:ext cx="10972800" cy="2011680"/>
           </a:xfrm>
           <a:prstGeom prst="rect">
             <a:avLst/>
@@ -7125,471 +4828,51 @@
           </a:bodyPr>
           <a:lstStyle/>
           <a:p>
-            <a:pPr algn="l"/>
-            <a:r>
-              <a:rPr sz="2800" b="1">
-                <a:solidFill>
-                  <a:srgbClr val="1F7A8C"/>
+            <a:pPr algn="l">
+              <a:spcAft>
+                <a:spcPts val="800"/>
+              </a:spcAft>
+            </a:pPr>
+            <a:r>
+              <a:rPr sz="1600">
+                <a:solidFill>
+                  <a:srgbClr val="334155"/>
                 </a:solidFill>
                 <a:latin typeface="Calibri"/>
               </a:rPr>
-              <a:t>01</a:t>
-            </a:r>
-          </a:p>
-        </p:txBody>
-      </p:sp>
-      <p:sp>
-        <p:nvSpPr>
-          <p:cNvPr id="7" name="TextBox 6"/>
-          <p:cNvSpPr txBox="1"/>
-          <p:nvPr/>
-        </p:nvSpPr>
-        <p:spPr>
-          <a:xfrm>
-            <a:off x="1005840" y="3108960"/>
-            <a:ext cx="2651760" cy="548640"/>
-          </a:xfrm>
-          <a:prstGeom prst="rect">
-            <a:avLst/>
-          </a:prstGeom>
-          <a:noFill/>
-        </p:spPr>
-        <p:txBody>
-          <a:bodyPr wrap="square">
-            <a:spAutoFit/>
-          </a:bodyPr>
-          <a:lstStyle/>
-          <a:p>
-            <a:pPr algn="l"/>
-            <a:r>
-              <a:rPr sz="2200" b="1">
-                <a:solidFill>
-                  <a:srgbClr val="0B1F3A"/>
+              <a:t>•  Tools like Ghidra, IDA Pro, and Binary Ninja already disassemble and decompile well.</a:t>
+            </a:r>
+          </a:p>
+          <a:p>
+            <a:pPr algn="l">
+              <a:spcAft>
+                <a:spcPts val="800"/>
+              </a:spcAft>
+            </a:pPr>
+            <a:r>
+              <a:rPr sz="1600">
+                <a:solidFill>
+                  <a:srgbClr val="334155"/>
                 </a:solidFill>
                 <a:latin typeface="Calibri"/>
               </a:rPr>
-              <a:t>Classical RE</a:t>
-            </a:r>
-          </a:p>
-        </p:txBody>
-      </p:sp>
-      <p:sp>
-        <p:nvSpPr>
-          <p:cNvPr id="8" name="TextBox 7"/>
-          <p:cNvSpPr txBox="1"/>
-          <p:nvPr/>
-        </p:nvSpPr>
-        <p:spPr>
-          <a:xfrm>
-            <a:off x="1005840" y="3840480"/>
-            <a:ext cx="2651760" cy="731520"/>
-          </a:xfrm>
-          <a:prstGeom prst="rect">
-            <a:avLst/>
-          </a:prstGeom>
-          <a:noFill/>
-        </p:spPr>
-        <p:txBody>
-          <a:bodyPr wrap="square">
-            <a:spAutoFit/>
-          </a:bodyPr>
-          <a:lstStyle/>
-          <a:p>
-            <a:pPr algn="l"/>
-            <a:r>
-              <a:rPr sz="1600" b="0">
-                <a:solidFill>
-                  <a:srgbClr val="2F3E4E"/>
+              <a:t>•  The slow part is manual: naming functions, recovering data structures, and understanding intent.</a:t>
+            </a:r>
+          </a:p>
+          <a:p>
+            <a:pPr algn="l">
+              <a:spcAft>
+                <a:spcPts val="800"/>
+              </a:spcAft>
+            </a:pPr>
+            <a:r>
+              <a:rPr sz="1600">
+                <a:solidFill>
+                  <a:srgbClr val="334155"/>
                 </a:solidFill>
                 <a:latin typeface="Calibri"/>
               </a:rPr>
-              <a:t>Binary → insight</a:t>
-            </a:r>
-          </a:p>
-        </p:txBody>
-      </p:sp>
-      <p:sp>
-        <p:nvSpPr>
-          <p:cNvPr id="9" name="Rounded Rectangle 8"/>
-          <p:cNvSpPr/>
-          <p:nvPr/>
-        </p:nvSpPr>
-        <p:spPr>
-          <a:xfrm>
-            <a:off x="4297680" y="2011680"/>
-            <a:ext cx="3200400" cy="3291840"/>
-          </a:xfrm>
-          <a:prstGeom prst="roundRect">
-            <a:avLst>
-              <a:gd name="adj" fmla="val 10000"/>
-            </a:avLst>
-          </a:prstGeom>
-          <a:solidFill>
-            <a:srgbClr val="FFFFFF"/>
-          </a:solidFill>
-          <a:ln>
-            <a:noFill/>
-          </a:ln>
-        </p:spPr>
-        <p:style>
-          <a:lnRef idx="1">
-            <a:schemeClr val="accent1"/>
-          </a:lnRef>
-          <a:fillRef idx="3">
-            <a:schemeClr val="accent1"/>
-          </a:fillRef>
-          <a:effectRef idx="2">
-            <a:schemeClr val="accent1"/>
-          </a:effectRef>
-          <a:fontRef idx="minor">
-            <a:schemeClr val="lt1"/>
-          </a:fontRef>
-        </p:style>
-        <p:txBody>
-          <a:bodyPr rtlCol="0" anchor="ctr"/>
-          <a:lstStyle/>
-          <a:p>
-            <a:pPr algn="ctr"/>
-          </a:p>
-        </p:txBody>
-      </p:sp>
-      <p:sp>
-        <p:nvSpPr>
-          <p:cNvPr id="10" name="Rectangle 9"/>
-          <p:cNvSpPr/>
-          <p:nvPr/>
-        </p:nvSpPr>
-        <p:spPr>
-          <a:xfrm>
-            <a:off x="4297680" y="2011680"/>
-            <a:ext cx="3200400" cy="137160"/>
-          </a:xfrm>
-          <a:prstGeom prst="rect">
-            <a:avLst/>
-          </a:prstGeom>
-          <a:solidFill>
-            <a:srgbClr val="1F7A8C"/>
-          </a:solidFill>
-          <a:ln>
-            <a:noFill/>
-          </a:ln>
-        </p:spPr>
-        <p:style>
-          <a:lnRef idx="1">
-            <a:schemeClr val="accent1"/>
-          </a:lnRef>
-          <a:fillRef idx="3">
-            <a:schemeClr val="accent1"/>
-          </a:fillRef>
-          <a:effectRef idx="2">
-            <a:schemeClr val="accent1"/>
-          </a:effectRef>
-          <a:fontRef idx="minor">
-            <a:schemeClr val="lt1"/>
-          </a:fontRef>
-        </p:style>
-        <p:txBody>
-          <a:bodyPr rtlCol="0" anchor="ctr"/>
-          <a:lstStyle/>
-          <a:p>
-            <a:pPr algn="ctr"/>
-          </a:p>
-        </p:txBody>
-      </p:sp>
-      <p:sp>
-        <p:nvSpPr>
-          <p:cNvPr id="11" name="TextBox 10"/>
-          <p:cNvSpPr txBox="1"/>
-          <p:nvPr/>
-        </p:nvSpPr>
-        <p:spPr>
-          <a:xfrm>
-            <a:off x="4572000" y="2377440"/>
-            <a:ext cx="2560320" cy="548640"/>
-          </a:xfrm>
-          <a:prstGeom prst="rect">
-            <a:avLst/>
-          </a:prstGeom>
-          <a:noFill/>
-        </p:spPr>
-        <p:txBody>
-          <a:bodyPr wrap="square">
-            <a:spAutoFit/>
-          </a:bodyPr>
-          <a:lstStyle/>
-          <a:p>
-            <a:pPr algn="l"/>
-            <a:r>
-              <a:rPr sz="2800" b="1">
-                <a:solidFill>
-                  <a:srgbClr val="1F7A8C"/>
-                </a:solidFill>
-                <a:latin typeface="Calibri"/>
-              </a:rPr>
-              <a:t>02</a:t>
-            </a:r>
-          </a:p>
-        </p:txBody>
-      </p:sp>
-      <p:sp>
-        <p:nvSpPr>
-          <p:cNvPr id="12" name="TextBox 11"/>
-          <p:cNvSpPr txBox="1"/>
-          <p:nvPr/>
-        </p:nvSpPr>
-        <p:spPr>
-          <a:xfrm>
-            <a:off x="4572000" y="3108960"/>
-            <a:ext cx="2651760" cy="548640"/>
-          </a:xfrm>
-          <a:prstGeom prst="rect">
-            <a:avLst/>
-          </a:prstGeom>
-          <a:noFill/>
-        </p:spPr>
-        <p:txBody>
-          <a:bodyPr wrap="square">
-            <a:spAutoFit/>
-          </a:bodyPr>
-          <a:lstStyle/>
-          <a:p>
-            <a:pPr algn="l"/>
-            <a:r>
-              <a:rPr sz="2200" b="1">
-                <a:solidFill>
-                  <a:srgbClr val="0B1F3A"/>
-                </a:solidFill>
-                <a:latin typeface="Calibri"/>
-              </a:rPr>
-              <a:t>AI layer</a:t>
-            </a:r>
-          </a:p>
-        </p:txBody>
-      </p:sp>
-      <p:sp>
-        <p:nvSpPr>
-          <p:cNvPr id="13" name="TextBox 12"/>
-          <p:cNvSpPr txBox="1"/>
-          <p:nvPr/>
-        </p:nvSpPr>
-        <p:spPr>
-          <a:xfrm>
-            <a:off x="4572000" y="3840480"/>
-            <a:ext cx="2651760" cy="731520"/>
-          </a:xfrm>
-          <a:prstGeom prst="rect">
-            <a:avLst/>
-          </a:prstGeom>
-          <a:noFill/>
-        </p:spPr>
-        <p:txBody>
-          <a:bodyPr wrap="square">
-            <a:spAutoFit/>
-          </a:bodyPr>
-          <a:lstStyle/>
-          <a:p>
-            <a:pPr algn="l"/>
-            <a:r>
-              <a:rPr sz="1600" b="0">
-                <a:solidFill>
-                  <a:srgbClr val="2F3E4E"/>
-                </a:solidFill>
-                <a:latin typeface="Calibri"/>
-              </a:rPr>
-              <a:t>Names, types, loops</a:t>
-            </a:r>
-          </a:p>
-        </p:txBody>
-      </p:sp>
-      <p:sp>
-        <p:nvSpPr>
-          <p:cNvPr id="14" name="Rounded Rectangle 13"/>
-          <p:cNvSpPr/>
-          <p:nvPr/>
-        </p:nvSpPr>
-        <p:spPr>
-          <a:xfrm>
-            <a:off x="7863840" y="2011680"/>
-            <a:ext cx="3200400" cy="3291840"/>
-          </a:xfrm>
-          <a:prstGeom prst="roundRect">
-            <a:avLst>
-              <a:gd name="adj" fmla="val 10000"/>
-            </a:avLst>
-          </a:prstGeom>
-          <a:solidFill>
-            <a:srgbClr val="FFFFFF"/>
-          </a:solidFill>
-          <a:ln>
-            <a:noFill/>
-          </a:ln>
-        </p:spPr>
-        <p:style>
-          <a:lnRef idx="1">
-            <a:schemeClr val="accent1"/>
-          </a:lnRef>
-          <a:fillRef idx="3">
-            <a:schemeClr val="accent1"/>
-          </a:fillRef>
-          <a:effectRef idx="2">
-            <a:schemeClr val="accent1"/>
-          </a:effectRef>
-          <a:fontRef idx="minor">
-            <a:schemeClr val="lt1"/>
-          </a:fontRef>
-        </p:style>
-        <p:txBody>
-          <a:bodyPr rtlCol="0" anchor="ctr"/>
-          <a:lstStyle/>
-          <a:p>
-            <a:pPr algn="ctr"/>
-          </a:p>
-        </p:txBody>
-      </p:sp>
-      <p:sp>
-        <p:nvSpPr>
-          <p:cNvPr id="15" name="Rectangle 14"/>
-          <p:cNvSpPr/>
-          <p:nvPr/>
-        </p:nvSpPr>
-        <p:spPr>
-          <a:xfrm>
-            <a:off x="7863840" y="2011680"/>
-            <a:ext cx="3200400" cy="137160"/>
-          </a:xfrm>
-          <a:prstGeom prst="rect">
-            <a:avLst/>
-          </a:prstGeom>
-          <a:solidFill>
-            <a:srgbClr val="1F7A8C"/>
-          </a:solidFill>
-          <a:ln>
-            <a:noFill/>
-          </a:ln>
-        </p:spPr>
-        <p:style>
-          <a:lnRef idx="1">
-            <a:schemeClr val="accent1"/>
-          </a:lnRef>
-          <a:fillRef idx="3">
-            <a:schemeClr val="accent1"/>
-          </a:fillRef>
-          <a:effectRef idx="2">
-            <a:schemeClr val="accent1"/>
-          </a:effectRef>
-          <a:fontRef idx="minor">
-            <a:schemeClr val="lt1"/>
-          </a:fontRef>
-        </p:style>
-        <p:txBody>
-          <a:bodyPr rtlCol="0" anchor="ctr"/>
-          <a:lstStyle/>
-          <a:p>
-            <a:pPr algn="ctr"/>
-          </a:p>
-        </p:txBody>
-      </p:sp>
-      <p:sp>
-        <p:nvSpPr>
-          <p:cNvPr id="16" name="TextBox 15"/>
-          <p:cNvSpPr txBox="1"/>
-          <p:nvPr/>
-        </p:nvSpPr>
-        <p:spPr>
-          <a:xfrm>
-            <a:off x="8138160" y="2377440"/>
-            <a:ext cx="2560320" cy="548640"/>
-          </a:xfrm>
-          <a:prstGeom prst="rect">
-            <a:avLst/>
-          </a:prstGeom>
-          <a:noFill/>
-        </p:spPr>
-        <p:txBody>
-          <a:bodyPr wrap="square">
-            <a:spAutoFit/>
-          </a:bodyPr>
-          <a:lstStyle/>
-          <a:p>
-            <a:pPr algn="l"/>
-            <a:r>
-              <a:rPr sz="2800" b="1">
-                <a:solidFill>
-                  <a:srgbClr val="1F7A8C"/>
-                </a:solidFill>
-                <a:latin typeface="Calibri"/>
-              </a:rPr>
-              <a:t>03</a:t>
-            </a:r>
-          </a:p>
-        </p:txBody>
-      </p:sp>
-      <p:sp>
-        <p:nvSpPr>
-          <p:cNvPr id="17" name="TextBox 16"/>
-          <p:cNvSpPr txBox="1"/>
-          <p:nvPr/>
-        </p:nvSpPr>
-        <p:spPr>
-          <a:xfrm>
-            <a:off x="8138160" y="3108960"/>
-            <a:ext cx="2651760" cy="548640"/>
-          </a:xfrm>
-          <a:prstGeom prst="rect">
-            <a:avLst/>
-          </a:prstGeom>
-          <a:noFill/>
-        </p:spPr>
-        <p:txBody>
-          <a:bodyPr wrap="square">
-            <a:spAutoFit/>
-          </a:bodyPr>
-          <a:lstStyle/>
-          <a:p>
-            <a:pPr algn="l"/>
-            <a:r>
-              <a:rPr sz="2200" b="1">
-                <a:solidFill>
-                  <a:srgbClr val="0B1F3A"/>
-                </a:solidFill>
-                <a:latin typeface="Calibri"/>
-              </a:rPr>
-              <a:t>Game bridges</a:t>
-            </a:r>
-          </a:p>
-        </p:txBody>
-      </p:sp>
-      <p:sp>
-        <p:nvSpPr>
-          <p:cNvPr id="18" name="TextBox 17"/>
-          <p:cNvSpPr txBox="1"/>
-          <p:nvPr/>
-        </p:nvSpPr>
-        <p:spPr>
-          <a:xfrm>
-            <a:off x="8138160" y="3840480"/>
-            <a:ext cx="2651760" cy="731520"/>
-          </a:xfrm>
-          <a:prstGeom prst="rect">
-            <a:avLst/>
-          </a:prstGeom>
-          <a:noFill/>
-        </p:spPr>
-        <p:txBody>
-          <a:bodyPr wrap="square">
-            <a:spAutoFit/>
-          </a:bodyPr>
-          <a:lstStyle/>
-          <a:p>
-            <a:pPr algn="l"/>
-            <a:r>
-              <a:rPr sz="1600" b="0">
-                <a:solidFill>
-                  <a:srgbClr val="2F3E4E"/>
-                </a:solidFill>
-                <a:latin typeface="Calibri"/>
-              </a:rPr>
-              <a:t>Compiled mashups</a:t>
+              <a:t>•  Stripped binaries show meaningless labels (e.g. sub_401000) — experts can spend weeks here.</a:t>
             </a:r>
           </a:p>
         </p:txBody>
@@ -7608,7 +4891,7 @@
     <p:bg>
       <p:bgPr>
         <a:solidFill>
-          <a:srgbClr val="F4F6F8"/>
+          <a:srgbClr val="F8FAFC"/>
         </a:solidFill>
         <a:effectLst/>
       </p:bgPr>
@@ -7629,7 +4912,7 @@
         <p:spPr>
           <a:xfrm>
             <a:off x="0" y="0"/>
-            <a:ext cx="109728" cy="6858000"/>
+            <a:ext cx="91440" cy="6858000"/>
           </a:xfrm>
           <a:prstGeom prst="rect">
             <a:avLst/>
@@ -7671,8 +4954,8 @@
         </p:nvSpPr>
         <p:spPr>
           <a:xfrm>
-            <a:off x="411480" y="256032"/>
-            <a:ext cx="8321040" cy="1005840"/>
+            <a:off x="457200" y="256032"/>
+            <a:ext cx="11155680" cy="640080"/>
           </a:xfrm>
           <a:prstGeom prst="rect">
             <a:avLst/>
@@ -7685,37 +4968,78 @@
           </a:bodyPr>
           <a:lstStyle/>
           <a:p>
-            <a:pPr algn="l"/>
-            <a:r>
-              <a:rPr sz="2600" b="1">
+            <a:pPr algn="l">
+              <a:spcAft>
+                <a:spcPts val="400"/>
+              </a:spcAft>
+            </a:pPr>
+            <a:r>
+              <a:rPr sz="2800" b="1">
                 <a:solidFill>
                   <a:srgbClr val="0B1F3A"/>
                 </a:solidFill>
                 <a:latin typeface="Calibri"/>
               </a:rPr>
-              <a:t>Reverse engineering recovers meaning from compiled binaries.</a:t>
-            </a:r>
-          </a:p>
-        </p:txBody>
-      </p:sp>
-      <p:sp>
-        <p:nvSpPr>
-          <p:cNvPr id="4" name="Rounded Rectangle 3"/>
+              <a:t>What is AI-Assisted Reverse Engineering?</a:t>
+            </a:r>
+          </a:p>
+        </p:txBody>
+      </p:sp>
+      <p:sp>
+        <p:nvSpPr>
+          <p:cNvPr id="4" name="TextBox 3"/>
+          <p:cNvSpPr txBox="1"/>
+          <p:nvPr/>
+        </p:nvSpPr>
+        <p:spPr>
+          <a:xfrm>
+            <a:off x="457200" y="868680"/>
+            <a:ext cx="11155680" cy="411480"/>
+          </a:xfrm>
+          <a:prstGeom prst="rect">
+            <a:avLst/>
+          </a:prstGeom>
+          <a:noFill/>
+        </p:spPr>
+        <p:txBody>
+          <a:bodyPr wrap="square">
+            <a:spAutoFit/>
+          </a:bodyPr>
+          <a:lstStyle/>
+          <a:p>
+            <a:pPr algn="l">
+              <a:spcAft>
+                <a:spcPts val="400"/>
+              </a:spcAft>
+            </a:pPr>
+            <a:r>
+              <a:rPr sz="1500" b="0">
+                <a:solidFill>
+                  <a:srgbClr val="64748B"/>
+                </a:solidFill>
+                <a:latin typeface="Calibri"/>
+              </a:rPr>
+              <a:t>LLMs and agents on top of classical tools — not a replacement</a:t>
+            </a:r>
+          </a:p>
+        </p:txBody>
+      </p:sp>
+      <p:sp>
+        <p:nvSpPr>
+          <p:cNvPr id="5" name="Rectangle 4"/>
           <p:cNvSpPr/>
           <p:nvPr/>
         </p:nvSpPr>
         <p:spPr>
           <a:xfrm>
-            <a:off x="640080" y="2743200"/>
-            <a:ext cx="1828800" cy="1280160"/>
-          </a:xfrm>
-          <a:prstGeom prst="roundRect">
-            <a:avLst>
-              <a:gd name="adj" fmla="val 10000"/>
-            </a:avLst>
+            <a:off x="457200" y="1280160"/>
+            <a:ext cx="11155680" cy="18288"/>
+          </a:xfrm>
+          <a:prstGeom prst="rect">
+            <a:avLst/>
           </a:prstGeom>
           <a:solidFill>
-            <a:srgbClr val="0B1F3A"/>
+            <a:srgbClr val="CBD5E1"/>
           </a:solidFill>
           <a:ln>
             <a:noFill/>
@@ -7736,36 +5060,23 @@
           </a:fontRef>
         </p:style>
         <p:txBody>
-          <a:bodyPr rtlCol="0" anchor="ctr" wrap="square"/>
-          <a:lstStyle/>
-          <a:p>
-            <a:pPr algn="ctr">
-              <a:spcBef>
-                <a:spcPts val="0"/>
-              </a:spcBef>
-            </a:pPr>
-            <a:r>
-              <a:rPr sz="1600" b="1">
-                <a:solidFill>
-                  <a:srgbClr val="FFFFFF"/>
-                </a:solidFill>
-                <a:latin typeface="Calibri"/>
-              </a:rPr>
-              <a:t>Binary</a:t>
-            </a:r>
-          </a:p>
-        </p:txBody>
-      </p:sp>
-      <p:sp>
-        <p:nvSpPr>
-          <p:cNvPr id="5" name="TextBox 4"/>
+          <a:bodyPr rtlCol="0" anchor="ctr"/>
+          <a:lstStyle/>
+          <a:p>
+            <a:pPr algn="ctr"/>
+          </a:p>
+        </p:txBody>
+      </p:sp>
+      <p:sp>
+        <p:nvSpPr>
+          <p:cNvPr id="6" name="TextBox 5"/>
           <p:cNvSpPr txBox="1"/>
           <p:nvPr/>
         </p:nvSpPr>
         <p:spPr>
           <a:xfrm>
-            <a:off x="2331720" y="3063240"/>
-            <a:ext cx="548640" cy="548640"/>
+            <a:off x="548640" y="1554480"/>
+            <a:ext cx="5486400" cy="4389120"/>
           </a:xfrm>
           <a:prstGeom prst="rect">
             <a:avLst/>
@@ -7778,40 +5089,94 @@
           </a:bodyPr>
           <a:lstStyle/>
           <a:p>
-            <a:pPr algn="ctr"/>
-            <a:r>
-              <a:rPr sz="2800" b="0">
-                <a:solidFill>
-                  <a:srgbClr val="1F7A8C"/>
+            <a:pPr algn="l">
+              <a:spcAft>
+                <a:spcPts val="800"/>
+              </a:spcAft>
+            </a:pPr>
+            <a:r>
+              <a:rPr sz="1700">
+                <a:solidFill>
+                  <a:srgbClr val="334155"/>
                 </a:solidFill>
                 <a:latin typeface="Calibri"/>
               </a:rPr>
-              <a:t>→</a:t>
-            </a:r>
-          </a:p>
-        </p:txBody>
-      </p:sp>
-      <p:sp>
-        <p:nvSpPr>
-          <p:cNvPr id="6" name="Rounded Rectangle 5"/>
+              <a:t>•  AI assistants read decompiler output and suggest meaningful names, types, and explanations.</a:t>
+            </a:r>
+          </a:p>
+          <a:p>
+            <a:pPr algn="l">
+              <a:spcAft>
+                <a:spcPts val="800"/>
+              </a:spcAft>
+            </a:pPr>
+            <a:r>
+              <a:rPr sz="1700">
+                <a:solidFill>
+                  <a:srgbClr val="334155"/>
+                </a:solidFill>
+                <a:latin typeface="Calibri"/>
+              </a:rPr>
+              <a:t>•  Specialized models can refine pseudo-code so it becomes closer to readable source.</a:t>
+            </a:r>
+          </a:p>
+          <a:p>
+            <a:pPr algn="l">
+              <a:spcAft>
+                <a:spcPts val="800"/>
+              </a:spcAft>
+            </a:pPr>
+            <a:r>
+              <a:rPr sz="1700">
+                <a:solidFill>
+                  <a:srgbClr val="334155"/>
+                </a:solidFill>
+                <a:latin typeface="Calibri"/>
+              </a:rPr>
+              <a:t>•  Coding agents can iterate: propose a change, test against the binary, and retry.</a:t>
+            </a:r>
+          </a:p>
+          <a:p>
+            <a:pPr algn="l">
+              <a:spcAft>
+                <a:spcPts val="800"/>
+              </a:spcAft>
+            </a:pPr>
+            <a:r>
+              <a:rPr sz="1700">
+                <a:solidFill>
+                  <a:srgbClr val="334155"/>
+                </a:solidFill>
+                <a:latin typeface="Calibri"/>
+              </a:rPr>
+              <a:t>•  The analyst still decides what is correct — AI drafts, humans approve.</a:t>
+            </a:r>
+          </a:p>
+        </p:txBody>
+      </p:sp>
+      <p:sp>
+        <p:nvSpPr>
+          <p:cNvPr id="7" name="Rounded Rectangle 6"/>
           <p:cNvSpPr/>
           <p:nvPr/>
         </p:nvSpPr>
         <p:spPr>
           <a:xfrm>
-            <a:off x="2834639" y="2743200"/>
-            <a:ext cx="1828800" cy="1280160"/>
+            <a:off x="6583680" y="1645920"/>
+            <a:ext cx="4846320" cy="1234440"/>
           </a:xfrm>
           <a:prstGeom prst="roundRect">
             <a:avLst>
-              <a:gd name="adj" fmla="val 10000"/>
+              <a:gd name="adj" fmla="val 8000"/>
             </a:avLst>
           </a:prstGeom>
           <a:solidFill>
-            <a:srgbClr val="0B1F3A"/>
+            <a:srgbClr val="FFFFFF"/>
           </a:solidFill>
           <a:ln>
-            <a:noFill/>
+            <a:solidFill>
+              <a:srgbClr val="CBD5E1"/>
+            </a:solidFill>
           </a:ln>
         </p:spPr>
         <p:style>
@@ -7829,36 +5194,23 @@
           </a:fontRef>
         </p:style>
         <p:txBody>
-          <a:bodyPr rtlCol="0" anchor="ctr" wrap="square"/>
-          <a:lstStyle/>
-          <a:p>
-            <a:pPr algn="ctr">
-              <a:spcBef>
-                <a:spcPts val="0"/>
-              </a:spcBef>
-            </a:pPr>
-            <a:r>
-              <a:rPr sz="1600" b="1">
-                <a:solidFill>
-                  <a:srgbClr val="FFFFFF"/>
-                </a:solidFill>
-                <a:latin typeface="Calibri"/>
-              </a:rPr>
-              <a:t>Disasm</a:t>
-            </a:r>
-          </a:p>
-        </p:txBody>
-      </p:sp>
-      <p:sp>
-        <p:nvSpPr>
-          <p:cNvPr id="7" name="TextBox 6"/>
+          <a:bodyPr rtlCol="0" anchor="ctr"/>
+          <a:lstStyle/>
+          <a:p>
+            <a:pPr algn="ctr"/>
+          </a:p>
+        </p:txBody>
+      </p:sp>
+      <p:sp>
+        <p:nvSpPr>
+          <p:cNvPr id="8" name="TextBox 7"/>
           <p:cNvSpPr txBox="1"/>
           <p:nvPr/>
         </p:nvSpPr>
         <p:spPr>
           <a:xfrm>
-            <a:off x="4526279" y="3063240"/>
-            <a:ext cx="548640" cy="548640"/>
+            <a:off x="6858000" y="1874520"/>
+            <a:ext cx="4389120" cy="411480"/>
           </a:xfrm>
           <a:prstGeom prst="rect">
             <a:avLst/>
@@ -7871,40 +5223,85 @@
           </a:bodyPr>
           <a:lstStyle/>
           <a:p>
-            <a:pPr algn="ctr"/>
-            <a:r>
-              <a:rPr sz="2800" b="0">
-                <a:solidFill>
-                  <a:srgbClr val="1F7A8C"/>
+            <a:pPr algn="l">
+              <a:spcAft>
+                <a:spcPts val="400"/>
+              </a:spcAft>
+            </a:pPr>
+            <a:r>
+              <a:rPr sz="1800" b="1">
+                <a:solidFill>
+                  <a:srgbClr val="0B1F3A"/>
                 </a:solidFill>
                 <a:latin typeface="Calibri"/>
               </a:rPr>
-              <a:t>→</a:t>
-            </a:r>
-          </a:p>
-        </p:txBody>
-      </p:sp>
-      <p:sp>
-        <p:nvSpPr>
-          <p:cNvPr id="8" name="Rounded Rectangle 7"/>
+              <a:t>LLM layer</a:t>
+            </a:r>
+          </a:p>
+        </p:txBody>
+      </p:sp>
+      <p:sp>
+        <p:nvSpPr>
+          <p:cNvPr id="9" name="TextBox 8"/>
+          <p:cNvSpPr txBox="1"/>
+          <p:nvPr/>
+        </p:nvSpPr>
+        <p:spPr>
+          <a:xfrm>
+            <a:off x="6858000" y="2286000"/>
+            <a:ext cx="4389120" cy="411480"/>
+          </a:xfrm>
+          <a:prstGeom prst="rect">
+            <a:avLst/>
+          </a:prstGeom>
+          <a:noFill/>
+        </p:spPr>
+        <p:txBody>
+          <a:bodyPr wrap="square">
+            <a:spAutoFit/>
+          </a:bodyPr>
+          <a:lstStyle/>
+          <a:p>
+            <a:pPr algn="l">
+              <a:spcAft>
+                <a:spcPts val="400"/>
+              </a:spcAft>
+            </a:pPr>
+            <a:r>
+              <a:rPr sz="1500" b="0">
+                <a:solidFill>
+                  <a:srgbClr val="64748B"/>
+                </a:solidFill>
+                <a:latin typeface="Calibri"/>
+              </a:rPr>
+              <a:t>Rename · explain · refine</a:t>
+            </a:r>
+          </a:p>
+        </p:txBody>
+      </p:sp>
+      <p:sp>
+        <p:nvSpPr>
+          <p:cNvPr id="10" name="Rounded Rectangle 9"/>
           <p:cNvSpPr/>
           <p:nvPr/>
         </p:nvSpPr>
         <p:spPr>
           <a:xfrm>
-            <a:off x="5029200" y="2743200"/>
-            <a:ext cx="1828800" cy="1280160"/>
+            <a:off x="6583680" y="3063240"/>
+            <a:ext cx="4846320" cy="1234440"/>
           </a:xfrm>
           <a:prstGeom prst="roundRect">
             <a:avLst>
-              <a:gd name="adj" fmla="val 10000"/>
+              <a:gd name="adj" fmla="val 8000"/>
             </a:avLst>
           </a:prstGeom>
           <a:solidFill>
-            <a:srgbClr val="0B1F3A"/>
+            <a:srgbClr val="FFFFFF"/>
           </a:solidFill>
           <a:ln>
-            <a:noFill/>
+            <a:solidFill>
+              <a:srgbClr val="CBD5E1"/>
+            </a:solidFill>
           </a:ln>
         </p:spPr>
         <p:style>
@@ -7922,36 +5319,23 @@
           </a:fontRef>
         </p:style>
         <p:txBody>
-          <a:bodyPr rtlCol="0" anchor="ctr" wrap="square"/>
-          <a:lstStyle/>
-          <a:p>
-            <a:pPr algn="ctr">
-              <a:spcBef>
-                <a:spcPts val="0"/>
-              </a:spcBef>
-            </a:pPr>
-            <a:r>
-              <a:rPr sz="1600" b="1">
-                <a:solidFill>
-                  <a:srgbClr val="FFFFFF"/>
-                </a:solidFill>
-                <a:latin typeface="Calibri"/>
-              </a:rPr>
-              <a:t>Decompile</a:t>
-            </a:r>
-          </a:p>
-        </p:txBody>
-      </p:sp>
-      <p:sp>
-        <p:nvSpPr>
-          <p:cNvPr id="9" name="TextBox 8"/>
+          <a:bodyPr rtlCol="0" anchor="ctr"/>
+          <a:lstStyle/>
+          <a:p>
+            <a:pPr algn="ctr"/>
+          </a:p>
+        </p:txBody>
+      </p:sp>
+      <p:sp>
+        <p:nvSpPr>
+          <p:cNvPr id="11" name="TextBox 10"/>
           <p:cNvSpPr txBox="1"/>
           <p:nvPr/>
         </p:nvSpPr>
         <p:spPr>
           <a:xfrm>
-            <a:off x="6720840" y="3063240"/>
-            <a:ext cx="548640" cy="548640"/>
+            <a:off x="6858000" y="3291840"/>
+            <a:ext cx="4389120" cy="411480"/>
           </a:xfrm>
           <a:prstGeom prst="rect">
             <a:avLst/>
@@ -7964,40 +5348,85 @@
           </a:bodyPr>
           <a:lstStyle/>
           <a:p>
-            <a:pPr algn="ctr"/>
-            <a:r>
-              <a:rPr sz="2800" b="0">
-                <a:solidFill>
-                  <a:srgbClr val="1F7A8C"/>
+            <a:pPr algn="l">
+              <a:spcAft>
+                <a:spcPts val="400"/>
+              </a:spcAft>
+            </a:pPr>
+            <a:r>
+              <a:rPr sz="1800" b="1">
+                <a:solidFill>
+                  <a:srgbClr val="0B1F3A"/>
                 </a:solidFill>
                 <a:latin typeface="Calibri"/>
               </a:rPr>
-              <a:t>→</a:t>
-            </a:r>
-          </a:p>
-        </p:txBody>
-      </p:sp>
-      <p:sp>
-        <p:nvSpPr>
-          <p:cNvPr id="10" name="Rounded Rectangle 9"/>
+              <a:t>Tool bridges</a:t>
+            </a:r>
+          </a:p>
+        </p:txBody>
+      </p:sp>
+      <p:sp>
+        <p:nvSpPr>
+          <p:cNvPr id="12" name="TextBox 11"/>
+          <p:cNvSpPr txBox="1"/>
+          <p:nvPr/>
+        </p:nvSpPr>
+        <p:spPr>
+          <a:xfrm>
+            <a:off x="6858000" y="3703320"/>
+            <a:ext cx="4389120" cy="411480"/>
+          </a:xfrm>
+          <a:prstGeom prst="rect">
+            <a:avLst/>
+          </a:prstGeom>
+          <a:noFill/>
+        </p:spPr>
+        <p:txBody>
+          <a:bodyPr wrap="square">
+            <a:spAutoFit/>
+          </a:bodyPr>
+          <a:lstStyle/>
+          <a:p>
+            <a:pPr algn="l">
+              <a:spcAft>
+                <a:spcPts val="400"/>
+              </a:spcAft>
+            </a:pPr>
+            <a:r>
+              <a:rPr sz="1500" b="0">
+                <a:solidFill>
+                  <a:srgbClr val="64748B"/>
+                </a:solidFill>
+                <a:latin typeface="Calibri"/>
+              </a:rPr>
+              <a:t>Connect AI to Ghidra / IDA</a:t>
+            </a:r>
+          </a:p>
+        </p:txBody>
+      </p:sp>
+      <p:sp>
+        <p:nvSpPr>
+          <p:cNvPr id="13" name="Rounded Rectangle 12"/>
           <p:cNvSpPr/>
           <p:nvPr/>
         </p:nvSpPr>
         <p:spPr>
           <a:xfrm>
-            <a:off x="7223759" y="2743200"/>
-            <a:ext cx="1828800" cy="1280160"/>
+            <a:off x="6583680" y="4480560"/>
+            <a:ext cx="4846320" cy="1234440"/>
           </a:xfrm>
           <a:prstGeom prst="roundRect">
             <a:avLst>
-              <a:gd name="adj" fmla="val 10000"/>
+              <a:gd name="adj" fmla="val 8000"/>
             </a:avLst>
           </a:prstGeom>
           <a:solidFill>
-            <a:srgbClr val="0B1F3A"/>
+            <a:srgbClr val="FFFFFF"/>
           </a:solidFill>
           <a:ln>
-            <a:noFill/>
+            <a:solidFill>
+              <a:srgbClr val="CBD5E1"/>
+            </a:solidFill>
           </a:ln>
         </p:spPr>
         <p:style>
@@ -8015,36 +5444,23 @@
           </a:fontRef>
         </p:style>
         <p:txBody>
-          <a:bodyPr rtlCol="0" anchor="ctr" wrap="square"/>
-          <a:lstStyle/>
-          <a:p>
-            <a:pPr algn="ctr">
-              <a:spcBef>
-                <a:spcPts val="0"/>
-              </a:spcBef>
-            </a:pPr>
-            <a:r>
-              <a:rPr sz="1600" b="1">
-                <a:solidFill>
-                  <a:srgbClr val="FFFFFF"/>
-                </a:solidFill>
-                <a:latin typeface="Calibri"/>
-              </a:rPr>
-              <a:t>Types</a:t>
-            </a:r>
-          </a:p>
-        </p:txBody>
-      </p:sp>
-      <p:sp>
-        <p:nvSpPr>
-          <p:cNvPr id="11" name="TextBox 10"/>
+          <a:bodyPr rtlCol="0" anchor="ctr"/>
+          <a:lstStyle/>
+          <a:p>
+            <a:pPr algn="ctr"/>
+          </a:p>
+        </p:txBody>
+      </p:sp>
+      <p:sp>
+        <p:nvSpPr>
+          <p:cNvPr id="14" name="TextBox 13"/>
           <p:cNvSpPr txBox="1"/>
           <p:nvPr/>
         </p:nvSpPr>
         <p:spPr>
           <a:xfrm>
-            <a:off x="8915399" y="3063240"/>
-            <a:ext cx="548640" cy="548640"/>
+            <a:off x="6858000" y="4709160"/>
+            <a:ext cx="4389120" cy="411480"/>
           </a:xfrm>
           <a:prstGeom prst="rect">
             <a:avLst/>
@@ -8057,87 +5473,33 @@
           </a:bodyPr>
           <a:lstStyle/>
           <a:p>
-            <a:pPr algn="ctr"/>
-            <a:r>
-              <a:rPr sz="2800" b="0">
-                <a:solidFill>
-                  <a:srgbClr val="1F7A8C"/>
+            <a:pPr algn="l">
+              <a:spcAft>
+                <a:spcPts val="400"/>
+              </a:spcAft>
+            </a:pPr>
+            <a:r>
+              <a:rPr sz="1800" b="1">
+                <a:solidFill>
+                  <a:srgbClr val="0B1F3A"/>
                 </a:solidFill>
                 <a:latin typeface="Calibri"/>
               </a:rPr>
-              <a:t>→</a:t>
-            </a:r>
-          </a:p>
-        </p:txBody>
-      </p:sp>
-      <p:sp>
-        <p:nvSpPr>
-          <p:cNvPr id="12" name="Rounded Rectangle 11"/>
-          <p:cNvSpPr/>
-          <p:nvPr/>
-        </p:nvSpPr>
-        <p:spPr>
-          <a:xfrm>
-            <a:off x="9418319" y="2743200"/>
-            <a:ext cx="1828800" cy="1280160"/>
-          </a:xfrm>
-          <a:prstGeom prst="roundRect">
-            <a:avLst>
-              <a:gd name="adj" fmla="val 10000"/>
-            </a:avLst>
-          </a:prstGeom>
-          <a:solidFill>
-            <a:srgbClr val="1F7A8C"/>
-          </a:solidFill>
-          <a:ln>
-            <a:noFill/>
-          </a:ln>
-        </p:spPr>
-        <p:style>
-          <a:lnRef idx="1">
-            <a:schemeClr val="accent1"/>
-          </a:lnRef>
-          <a:fillRef idx="3">
-            <a:schemeClr val="accent1"/>
-          </a:fillRef>
-          <a:effectRef idx="2">
-            <a:schemeClr val="accent1"/>
-          </a:effectRef>
-          <a:fontRef idx="minor">
-            <a:schemeClr val="lt1"/>
-          </a:fontRef>
-        </p:style>
-        <p:txBody>
-          <a:bodyPr rtlCol="0" anchor="ctr" wrap="square"/>
-          <a:lstStyle/>
-          <a:p>
-            <a:pPr algn="ctr">
-              <a:spcBef>
-                <a:spcPts val="0"/>
-              </a:spcBef>
-            </a:pPr>
-            <a:r>
-              <a:rPr sz="1600" b="1">
-                <a:solidFill>
-                  <a:srgbClr val="FFFFFF"/>
-                </a:solidFill>
-                <a:latin typeface="Calibri"/>
-              </a:rPr>
-              <a:t>Insight</a:t>
-            </a:r>
-          </a:p>
-        </p:txBody>
-      </p:sp>
-      <p:sp>
-        <p:nvSpPr>
-          <p:cNvPr id="13" name="TextBox 12"/>
+              <a:t>Agent loops</a:t>
+            </a:r>
+          </a:p>
+        </p:txBody>
+      </p:sp>
+      <p:sp>
+        <p:nvSpPr>
+          <p:cNvPr id="15" name="TextBox 14"/>
           <p:cNvSpPr txBox="1"/>
           <p:nvPr/>
         </p:nvSpPr>
         <p:spPr>
           <a:xfrm>
-            <a:off x="640080" y="4754880"/>
-            <a:ext cx="10515600" cy="731520"/>
+            <a:off x="6858000" y="5120640"/>
+            <a:ext cx="4389120" cy="411480"/>
           </a:xfrm>
           <a:prstGeom prst="rect">
             <a:avLst/>
@@ -8150,15 +5512,19 @@
           </a:bodyPr>
           <a:lstStyle/>
           <a:p>
-            <a:pPr algn="ctr"/>
-            <a:r>
-              <a:rPr sz="1800" b="0">
-                <a:solidFill>
-                  <a:srgbClr val="2F3E4E"/>
+            <a:pPr algn="l">
+              <a:spcAft>
+                <a:spcPts val="400"/>
+              </a:spcAft>
+            </a:pPr>
+            <a:r>
+              <a:rPr sz="1500" b="0">
+                <a:solidFill>
+                  <a:srgbClr val="64748B"/>
                 </a:solidFill>
                 <a:latin typeface="Calibri"/>
               </a:rPr>
-              <a:t>Not rewriting from scratch — interpreting what the compiler already emitted.</a:t>
+              <a:t>Iterate until checks pass</a:t>
             </a:r>
           </a:p>
         </p:txBody>
@@ -8177,7 +5543,7 @@
     <p:bg>
       <p:bgPr>
         <a:solidFill>
-          <a:srgbClr val="F4F6F8"/>
+          <a:srgbClr val="F8FAFC"/>
         </a:solidFill>
         <a:effectLst/>
       </p:bgPr>
@@ -8198,7 +5564,7 @@
         <p:spPr>
           <a:xfrm>
             <a:off x="0" y="0"/>
-            <a:ext cx="109728" cy="6858000"/>
+            <a:ext cx="91440" cy="6858000"/>
           </a:xfrm>
           <a:prstGeom prst="rect">
             <a:avLst/>
@@ -8240,8 +5606,8 @@
         </p:nvSpPr>
         <p:spPr>
           <a:xfrm>
-            <a:off x="411480" y="256032"/>
-            <a:ext cx="8321040" cy="1005840"/>
+            <a:off x="457200" y="256032"/>
+            <a:ext cx="11155680" cy="640080"/>
           </a:xfrm>
           <a:prstGeom prst="rect">
             <a:avLst/>
@@ -8254,37 +5620,78 @@
           </a:bodyPr>
           <a:lstStyle/>
           <a:p>
-            <a:pPr algn="l"/>
-            <a:r>
-              <a:rPr sz="2600" b="1">
+            <a:pPr algn="l">
+              <a:spcAft>
+                <a:spcPts val="400"/>
+              </a:spcAft>
+            </a:pPr>
+            <a:r>
+              <a:rPr sz="2800" b="1">
                 <a:solidFill>
                   <a:srgbClr val="0B1F3A"/>
                 </a:solidFill>
                 <a:latin typeface="Calibri"/>
               </a:rPr>
-              <a:t>Classical tools are strong; naming and structure still burn hours.</a:t>
-            </a:r>
-          </a:p>
-        </p:txBody>
-      </p:sp>
-      <p:sp>
-        <p:nvSpPr>
-          <p:cNvPr id="4" name="Rounded Rectangle 3"/>
+              <a:t>How AI Made Reverse Engineering Much Faster</a:t>
+            </a:r>
+          </a:p>
+        </p:txBody>
+      </p:sp>
+      <p:sp>
+        <p:nvSpPr>
+          <p:cNvPr id="4" name="TextBox 3"/>
+          <p:cNvSpPr txBox="1"/>
+          <p:nvPr/>
+        </p:nvSpPr>
+        <p:spPr>
+          <a:xfrm>
+            <a:off x="457200" y="868680"/>
+            <a:ext cx="11155680" cy="411480"/>
+          </a:xfrm>
+          <a:prstGeom prst="rect">
+            <a:avLst/>
+          </a:prstGeom>
+          <a:noFill/>
+        </p:spPr>
+        <p:txBody>
+          <a:bodyPr wrap="square">
+            <a:spAutoFit/>
+          </a:bodyPr>
+          <a:lstStyle/>
+          <a:p>
+            <a:pPr algn="l">
+              <a:spcAft>
+                <a:spcPts val="400"/>
+              </a:spcAft>
+            </a:pPr>
+            <a:r>
+              <a:rPr sz="1500" b="0">
+                <a:solidFill>
+                  <a:srgbClr val="64748B"/>
+                </a:solidFill>
+                <a:latin typeface="Calibri"/>
+              </a:rPr>
+              <a:t>Same foundation — compressed analysis time</a:t>
+            </a:r>
+          </a:p>
+        </p:txBody>
+      </p:sp>
+      <p:sp>
+        <p:nvSpPr>
+          <p:cNvPr id="5" name="Rectangle 4"/>
           <p:cNvSpPr/>
           <p:nvPr/>
         </p:nvSpPr>
         <p:spPr>
           <a:xfrm>
-            <a:off x="914400" y="2011680"/>
-            <a:ext cx="4754880" cy="3657600"/>
-          </a:xfrm>
-          <a:prstGeom prst="roundRect">
-            <a:avLst>
-              <a:gd name="adj" fmla="val 10000"/>
-            </a:avLst>
+            <a:off x="457200" y="1280160"/>
+            <a:ext cx="11155680" cy="18288"/>
+          </a:xfrm>
+          <a:prstGeom prst="rect">
+            <a:avLst/>
           </a:prstGeom>
           <a:solidFill>
-            <a:srgbClr val="0B1F3A"/>
+            <a:srgbClr val="CBD5E1"/>
           </a:solidFill>
           <a:ln>
             <a:noFill/>
@@ -8305,38 +5712,47 @@
           </a:fontRef>
         </p:style>
         <p:txBody>
-          <a:bodyPr rtlCol="0" anchor="ctr" wrap="square"/>
-          <a:lstStyle/>
-          <a:p>
-            <a:pPr algn="ctr">
-              <a:spcBef>
-                <a:spcPts val="0"/>
-              </a:spcBef>
-            </a:pPr>
-            <a:r>
-              <a:rPr sz="2600" b="1">
-                <a:solidFill>
-                  <a:srgbClr val="FFFFFF"/>
-                </a:solidFill>
-                <a:latin typeface="Calibri"/>
-              </a:rPr>
-              <a:t>sub_401000
-local_28
-offset +0x2C</a:t>
-            </a:r>
-          </a:p>
-        </p:txBody>
-      </p:sp>
-      <p:sp>
-        <p:nvSpPr>
-          <p:cNvPr id="5" name="TextBox 4"/>
+          <a:bodyPr rtlCol="0" anchor="ctr"/>
+          <a:lstStyle/>
+          <a:p>
+            <a:pPr algn="ctr"/>
+          </a:p>
+        </p:txBody>
+      </p:sp>
+      <p:pic>
+        <p:nvPicPr>
+          <p:cNvPr id="6" name="Picture 5" descr="diagram_ai_assisted.png"/>
+          <p:cNvPicPr>
+            <a:picLocks noChangeAspect="1"/>
+          </p:cNvPicPr>
+          <p:nvPr/>
+        </p:nvPicPr>
+        <p:blipFill>
+          <a:blip r:embed="rId2"/>
+          <a:stretch>
+            <a:fillRect/>
+          </a:stretch>
+        </p:blipFill>
+        <p:spPr>
+          <a:xfrm>
+            <a:off x="365760" y="1417320"/>
+            <a:ext cx="6583680" cy="23317894"/>
+          </a:xfrm>
+          <a:prstGeom prst="rect">
+            <a:avLst/>
+          </a:prstGeom>
+        </p:spPr>
+      </p:pic>
+      <p:sp>
+        <p:nvSpPr>
+          <p:cNvPr id="7" name="TextBox 6"/>
           <p:cNvSpPr txBox="1"/>
           <p:nvPr/>
         </p:nvSpPr>
         <p:spPr>
           <a:xfrm>
-            <a:off x="6035040" y="2194560"/>
-            <a:ext cx="731520" cy="548640"/>
+            <a:off x="6949440" y="1645920"/>
+            <a:ext cx="4754880" cy="4572000"/>
           </a:xfrm>
           <a:prstGeom prst="rect">
             <a:avLst/>
@@ -8349,75 +5765,67 @@
           </a:bodyPr>
           <a:lstStyle/>
           <a:p>
-            <a:pPr algn="l"/>
-            <a:r>
-              <a:rPr sz="3600" b="0">
-                <a:solidFill>
-                  <a:srgbClr val="1F7A8C"/>
+            <a:pPr algn="l">
+              <a:spcAft>
+                <a:spcPts val="800"/>
+              </a:spcAft>
+            </a:pPr>
+            <a:r>
+              <a:rPr sz="1600">
+                <a:solidFill>
+                  <a:srgbClr val="334155"/>
                 </a:solidFill>
                 <a:latin typeface="Calibri"/>
               </a:rPr>
-              <a:t>→</a:t>
-            </a:r>
-          </a:p>
-        </p:txBody>
-      </p:sp>
-      <p:sp>
-        <p:nvSpPr>
-          <p:cNvPr id="6" name="Rounded Rectangle 5"/>
-          <p:cNvSpPr/>
-          <p:nvPr/>
-        </p:nvSpPr>
-        <p:spPr>
-          <a:xfrm>
-            <a:off x="6766560" y="2011680"/>
-            <a:ext cx="4572000" cy="3657600"/>
-          </a:xfrm>
-          <a:prstGeom prst="roundRect">
-            <a:avLst>
-              <a:gd name="adj" fmla="val 10000"/>
-            </a:avLst>
-          </a:prstGeom>
-          <a:solidFill>
-            <a:srgbClr val="1F7A8C"/>
-          </a:solidFill>
-          <a:ln>
-            <a:noFill/>
-          </a:ln>
-        </p:spPr>
-        <p:style>
-          <a:lnRef idx="1">
-            <a:schemeClr val="accent1"/>
-          </a:lnRef>
-          <a:fillRef idx="3">
-            <a:schemeClr val="accent1"/>
-          </a:fillRef>
-          <a:effectRef idx="2">
-            <a:schemeClr val="accent1"/>
-          </a:effectRef>
-          <a:fontRef idx="minor">
-            <a:schemeClr val="lt1"/>
-          </a:fontRef>
-        </p:style>
-        <p:txBody>
-          <a:bodyPr rtlCol="0" anchor="ctr" wrap="square"/>
-          <a:lstStyle/>
-          <a:p>
-            <a:pPr algn="ctr">
-              <a:spcBef>
-                <a:spcPts val="0"/>
-              </a:spcBef>
+              <a:t>•  Readable drafts in minutes instead of long manual renaming sessions.</a:t>
+            </a:r>
+          </a:p>
+          <a:p>
+            <a:pPr algn="l">
+              <a:spcAft>
+                <a:spcPts val="800"/>
+              </a:spcAft>
             </a:pPr>
             <a:r>
-              <a:rPr sz="2600" b="1">
-                <a:solidFill>
-                  <a:srgbClr val="FFFFFF"/>
+              <a:rPr sz="1600">
+                <a:solidFill>
+                  <a:srgbClr val="334155"/>
                 </a:solidFill>
                 <a:latin typeface="Calibri"/>
               </a:rPr>
-              <a:t>load_player()
-health
-Hitbox.radius</a:t>
+              <a:t>•  Research models show large gains when LLMs refine classical decompiler output.</a:t>
+            </a:r>
+          </a:p>
+          <a:p>
+            <a:pPr algn="l">
+              <a:spcAft>
+                <a:spcPts val="800"/>
+              </a:spcAft>
+            </a:pPr>
+            <a:r>
+              <a:rPr sz="1600">
+                <a:solidFill>
+                  <a:srgbClr val="334155"/>
+                </a:solidFill>
+                <a:latin typeface="Calibri"/>
+              </a:rPr>
+              <a:t>•  Agents automate the try → check → fix loop for many functions.</a:t>
+            </a:r>
+          </a:p>
+          <a:p>
+            <a:pPr algn="l">
+              <a:spcAft>
+                <a:spcPts val="800"/>
+              </a:spcAft>
+            </a:pPr>
+            <a:r>
+              <a:rPr sz="1600">
+                <a:solidFill>
+                  <a:srgbClr val="334155"/>
+                </a:solidFill>
+                <a:latin typeface="Calibri"/>
+              </a:rPr>
+              <a:t>•  Result: work that took specialists months can often move in days or weeks — with verification still required.</a:t>
             </a:r>
           </a:p>
         </p:txBody>
@@ -8436,7 +5844,7 @@
     <p:bg>
       <p:bgPr>
         <a:solidFill>
-          <a:srgbClr val="F4F6F8"/>
+          <a:srgbClr val="F8FAFC"/>
         </a:solidFill>
         <a:effectLst/>
       </p:bgPr>
@@ -8457,7 +5865,7 @@
         <p:spPr>
           <a:xfrm>
             <a:off x="0" y="0"/>
-            <a:ext cx="109728" cy="6858000"/>
+            <a:ext cx="91440" cy="6858000"/>
           </a:xfrm>
           <a:prstGeom prst="rect">
             <a:avLst/>
@@ -8499,8 +5907,8 @@
         </p:nvSpPr>
         <p:spPr>
           <a:xfrm>
-            <a:off x="411480" y="256032"/>
-            <a:ext cx="8321040" cy="1005840"/>
+            <a:off x="457200" y="256032"/>
+            <a:ext cx="11155680" cy="640080"/>
           </a:xfrm>
           <a:prstGeom prst="rect">
             <a:avLst/>
@@ -8513,37 +5921,78 @@
           </a:bodyPr>
           <a:lstStyle/>
           <a:p>
-            <a:pPr algn="l"/>
-            <a:r>
-              <a:rPr sz="2600" b="1">
+            <a:pPr algn="l">
+              <a:spcAft>
+                <a:spcPts val="400"/>
+              </a:spcAft>
+            </a:pPr>
+            <a:r>
+              <a:rPr sz="2800" b="1">
                 <a:solidFill>
                   <a:srgbClr val="0B1F3A"/>
                 </a:solidFill>
                 <a:latin typeface="Calibri"/>
               </a:rPr>
-              <a:t>Specialized LLMs raise decompilation re-executability.</a:t>
-            </a:r>
-          </a:p>
-        </p:txBody>
-      </p:sp>
-      <p:sp>
-        <p:nvSpPr>
-          <p:cNvPr id="4" name="Rounded Rectangle 3"/>
+              <a:t>Case Study: Modifying Compiled Video Games</a:t>
+            </a:r>
+          </a:p>
+        </p:txBody>
+      </p:sp>
+      <p:sp>
+        <p:nvSpPr>
+          <p:cNvPr id="4" name="TextBox 3"/>
+          <p:cNvSpPr txBox="1"/>
+          <p:nvPr/>
+        </p:nvSpPr>
+        <p:spPr>
+          <a:xfrm>
+            <a:off x="457200" y="868680"/>
+            <a:ext cx="11155680" cy="411480"/>
+          </a:xfrm>
+          <a:prstGeom prst="rect">
+            <a:avLst/>
+          </a:prstGeom>
+          <a:noFill/>
+        </p:spPr>
+        <p:txBody>
+          <a:bodyPr wrap="square">
+            <a:spAutoFit/>
+          </a:bodyPr>
+          <a:lstStyle/>
+          <a:p>
+            <a:pPr algn="l">
+              <a:spcAft>
+                <a:spcPts val="400"/>
+              </a:spcAft>
+            </a:pPr>
+            <a:r>
+              <a:rPr sz="1500" b="0">
+                <a:solidFill>
+                  <a:srgbClr val="64748B"/>
+                </a:solidFill>
+                <a:latin typeface="Calibri"/>
+              </a:rPr>
+              <a:t>Why games show the power of AI-assisted reverse engineering</a:t>
+            </a:r>
+          </a:p>
+        </p:txBody>
+      </p:sp>
+      <p:sp>
+        <p:nvSpPr>
+          <p:cNvPr id="5" name="Rectangle 4"/>
           <p:cNvSpPr/>
           <p:nvPr/>
         </p:nvSpPr>
         <p:spPr>
           <a:xfrm>
-            <a:off x="914400" y="2103120"/>
-            <a:ext cx="3108960" cy="3200400"/>
-          </a:xfrm>
-          <a:prstGeom prst="roundRect">
-            <a:avLst>
-              <a:gd name="adj" fmla="val 10000"/>
-            </a:avLst>
+            <a:off x="457200" y="1280160"/>
+            <a:ext cx="11155680" cy="18288"/>
+          </a:xfrm>
+          <a:prstGeom prst="rect">
+            <a:avLst/>
           </a:prstGeom>
           <a:solidFill>
-            <a:srgbClr val="FFFFFF"/>
+            <a:srgbClr val="CBD5E1"/>
           </a:solidFill>
           <a:ln>
             <a:noFill/>
@@ -8573,57 +6022,14 @@
       </p:sp>
       <p:sp>
         <p:nvSpPr>
-          <p:cNvPr id="5" name="Rectangle 4"/>
-          <p:cNvSpPr/>
-          <p:nvPr/>
-        </p:nvSpPr>
-        <p:spPr>
-          <a:xfrm>
-            <a:off x="914400" y="2103120"/>
-            <a:ext cx="3108960" cy="109728"/>
-          </a:xfrm>
-          <a:prstGeom prst="rect">
-            <a:avLst/>
-          </a:prstGeom>
-          <a:solidFill>
-            <a:srgbClr val="2F3E4E"/>
-          </a:solidFill>
-          <a:ln>
-            <a:noFill/>
-          </a:ln>
-        </p:spPr>
-        <p:style>
-          <a:lnRef idx="1">
-            <a:schemeClr val="accent1"/>
-          </a:lnRef>
-          <a:fillRef idx="3">
-            <a:schemeClr val="accent1"/>
-          </a:fillRef>
-          <a:effectRef idx="2">
-            <a:schemeClr val="accent1"/>
-          </a:effectRef>
-          <a:fontRef idx="minor">
-            <a:schemeClr val="lt1"/>
-          </a:fontRef>
-        </p:style>
-        <p:txBody>
-          <a:bodyPr rtlCol="0" anchor="ctr"/>
-          <a:lstStyle/>
-          <a:p>
-            <a:pPr algn="ctr"/>
-          </a:p>
-        </p:txBody>
-      </p:sp>
-      <p:sp>
-        <p:nvSpPr>
           <p:cNvPr id="6" name="TextBox 5"/>
           <p:cNvSpPr txBox="1"/>
           <p:nvPr/>
         </p:nvSpPr>
         <p:spPr>
           <a:xfrm>
-            <a:off x="914400" y="2743200"/>
-            <a:ext cx="3108960" cy="1097280"/>
+            <a:off x="548640" y="1554480"/>
+            <a:ext cx="10972800" cy="4572000"/>
           </a:xfrm>
           <a:prstGeom prst="rect">
             <a:avLst/>
@@ -8636,401 +6042,83 @@
           </a:bodyPr>
           <a:lstStyle/>
           <a:p>
-            <a:pPr algn="ctr"/>
-            <a:r>
-              <a:rPr sz="4800" b="1">
-                <a:solidFill>
-                  <a:srgbClr val="0B1F3A"/>
+            <a:pPr algn="l">
+              <a:spcAft>
+                <a:spcPts val="800"/>
+              </a:spcAft>
+            </a:pPr>
+            <a:r>
+              <a:rPr sz="1700">
+                <a:solidFill>
+                  <a:srgbClr val="334155"/>
                 </a:solidFill>
                 <a:latin typeface="Calibri"/>
               </a:rPr>
-              <a:t>~20%</a:t>
-            </a:r>
-          </a:p>
-        </p:txBody>
-      </p:sp>
-      <p:sp>
-        <p:nvSpPr>
-          <p:cNvPr id="7" name="TextBox 6"/>
-          <p:cNvSpPr txBox="1"/>
-          <p:nvPr/>
-        </p:nvSpPr>
-        <p:spPr>
-          <a:xfrm>
-            <a:off x="1097280" y="4023360"/>
-            <a:ext cx="2743200" cy="822960"/>
-          </a:xfrm>
-          <a:prstGeom prst="rect">
-            <a:avLst/>
-          </a:prstGeom>
-          <a:noFill/>
-        </p:spPr>
-        <p:txBody>
-          <a:bodyPr wrap="square">
-            <a:spAutoFit/>
-          </a:bodyPr>
-          <a:lstStyle/>
-          <a:p>
-            <a:pPr algn="ctr"/>
-            <a:r>
-              <a:rPr sz="1600" b="0">
-                <a:solidFill>
-                  <a:srgbClr val="2F3E4E"/>
+              <a:t>•  Modern games ship as closed, optimized binaries — usually with no source code and limited official APIs.</a:t>
+            </a:r>
+          </a:p>
+          <a:p>
+            <a:pPr algn="l">
+              <a:spcAft>
+                <a:spcPts val="800"/>
+              </a:spcAft>
+            </a:pPr>
+            <a:r>
+              <a:rPr sz="1700">
+                <a:solidFill>
+                  <a:srgbClr val="334155"/>
                 </a:solidFill>
                 <a:latin typeface="Calibri"/>
               </a:rPr>
-              <a:t>Ghidra alone</a:t>
-            </a:r>
-          </a:p>
-        </p:txBody>
-      </p:sp>
-      <p:sp>
-        <p:nvSpPr>
-          <p:cNvPr id="8" name="Rounded Rectangle 7"/>
-          <p:cNvSpPr/>
-          <p:nvPr/>
-        </p:nvSpPr>
-        <p:spPr>
-          <a:xfrm>
-            <a:off x="4572000" y="2103120"/>
-            <a:ext cx="3108960" cy="3200400"/>
-          </a:xfrm>
-          <a:prstGeom prst="roundRect">
-            <a:avLst>
-              <a:gd name="adj" fmla="val 10000"/>
-            </a:avLst>
-          </a:prstGeom>
-          <a:solidFill>
-            <a:srgbClr val="FFFFFF"/>
-          </a:solidFill>
-          <a:ln>
-            <a:noFill/>
-          </a:ln>
-        </p:spPr>
-        <p:style>
-          <a:lnRef idx="1">
-            <a:schemeClr val="accent1"/>
-          </a:lnRef>
-          <a:fillRef idx="3">
-            <a:schemeClr val="accent1"/>
-          </a:fillRef>
-          <a:effectRef idx="2">
-            <a:schemeClr val="accent1"/>
-          </a:effectRef>
-          <a:fontRef idx="minor">
-            <a:schemeClr val="lt1"/>
-          </a:fontRef>
-        </p:style>
-        <p:txBody>
-          <a:bodyPr rtlCol="0" anchor="ctr"/>
-          <a:lstStyle/>
-          <a:p>
-            <a:pPr algn="ctr"/>
-          </a:p>
-        </p:txBody>
-      </p:sp>
-      <p:sp>
-        <p:nvSpPr>
-          <p:cNvPr id="9" name="Rectangle 8"/>
-          <p:cNvSpPr/>
-          <p:nvPr/>
-        </p:nvSpPr>
-        <p:spPr>
-          <a:xfrm>
-            <a:off x="4572000" y="2103120"/>
-            <a:ext cx="3108960" cy="109728"/>
-          </a:xfrm>
-          <a:prstGeom prst="rect">
-            <a:avLst/>
-          </a:prstGeom>
-          <a:solidFill>
-            <a:srgbClr val="1F7A8C"/>
-          </a:solidFill>
-          <a:ln>
-            <a:noFill/>
-          </a:ln>
-        </p:spPr>
-        <p:style>
-          <a:lnRef idx="1">
-            <a:schemeClr val="accent1"/>
-          </a:lnRef>
-          <a:fillRef idx="3">
-            <a:schemeClr val="accent1"/>
-          </a:fillRef>
-          <a:effectRef idx="2">
-            <a:schemeClr val="accent1"/>
-          </a:effectRef>
-          <a:fontRef idx="minor">
-            <a:schemeClr val="lt1"/>
-          </a:fontRef>
-        </p:style>
-        <p:txBody>
-          <a:bodyPr rtlCol="0" anchor="ctr"/>
-          <a:lstStyle/>
-          <a:p>
-            <a:pPr algn="ctr"/>
-          </a:p>
-        </p:txBody>
-      </p:sp>
-      <p:sp>
-        <p:nvSpPr>
-          <p:cNvPr id="10" name="TextBox 9"/>
-          <p:cNvSpPr txBox="1"/>
-          <p:nvPr/>
-        </p:nvSpPr>
-        <p:spPr>
-          <a:xfrm>
-            <a:off x="4572000" y="2743200"/>
-            <a:ext cx="3108960" cy="1097280"/>
-          </a:xfrm>
-          <a:prstGeom prst="rect">
-            <a:avLst/>
-          </a:prstGeom>
-          <a:noFill/>
-        </p:spPr>
-        <p:txBody>
-          <a:bodyPr wrap="square">
-            <a:spAutoFit/>
-          </a:bodyPr>
-          <a:lstStyle/>
-          <a:p>
-            <a:pPr algn="ctr"/>
-            <a:r>
-              <a:rPr sz="4800" b="1">
-                <a:solidFill>
-                  <a:srgbClr val="0B1F3A"/>
+              <a:t>•  Deep changes (camera control, collision, combat logic, rendering) require reverse engineering the compiled executable itself.</a:t>
+            </a:r>
+          </a:p>
+          <a:p>
+            <a:pPr algn="l">
+              <a:spcAft>
+                <a:spcPts val="800"/>
+              </a:spcAft>
+            </a:pPr>
+            <a:r>
+              <a:rPr sz="1700">
+                <a:solidFill>
+                  <a:srgbClr val="334155"/>
                 </a:solidFill>
                 <a:latin typeface="Calibri"/>
               </a:rPr>
-              <a:t>~45%</a:t>
-            </a:r>
-          </a:p>
-        </p:txBody>
-      </p:sp>
-      <p:sp>
-        <p:nvSpPr>
-          <p:cNvPr id="11" name="TextBox 10"/>
-          <p:cNvSpPr txBox="1"/>
-          <p:nvPr/>
-        </p:nvSpPr>
-        <p:spPr>
-          <a:xfrm>
-            <a:off x="4754880" y="4023360"/>
-            <a:ext cx="2743200" cy="822960"/>
-          </a:xfrm>
-          <a:prstGeom prst="rect">
-            <a:avLst/>
-          </a:prstGeom>
-          <a:noFill/>
-        </p:spPr>
-        <p:txBody>
-          <a:bodyPr wrap="square">
-            <a:spAutoFit/>
-          </a:bodyPr>
-          <a:lstStyle/>
-          <a:p>
-            <a:pPr algn="ctr"/>
-            <a:r>
-              <a:rPr sz="1600" b="0">
-                <a:solidFill>
-                  <a:srgbClr val="2F3E4E"/>
+              <a:t>•  Recently, creators have combined systems from different games at runtime — not by rewriting engines from scratch, but by analyzing and bridging compiled processes.</a:t>
+            </a:r>
+          </a:p>
+          <a:p>
+            <a:pPr algn="l">
+              <a:spcAft>
+                <a:spcPts val="800"/>
+              </a:spcAft>
+            </a:pPr>
+            <a:r>
+              <a:rPr sz="1700">
+                <a:solidFill>
+                  <a:srgbClr val="334155"/>
                 </a:solidFill>
                 <a:latin typeface="Calibri"/>
               </a:rPr>
-              <a:t>LLM4Decompile-End</a:t>
-            </a:r>
-          </a:p>
-        </p:txBody>
-      </p:sp>
-      <p:sp>
-        <p:nvSpPr>
-          <p:cNvPr id="12" name="Rounded Rectangle 11"/>
-          <p:cNvSpPr/>
-          <p:nvPr/>
-        </p:nvSpPr>
-        <p:spPr>
-          <a:xfrm>
-            <a:off x="8229600" y="2103120"/>
-            <a:ext cx="3108960" cy="3200400"/>
-          </a:xfrm>
-          <a:prstGeom prst="roundRect">
-            <a:avLst>
-              <a:gd name="adj" fmla="val 10000"/>
-            </a:avLst>
-          </a:prstGeom>
-          <a:solidFill>
-            <a:srgbClr val="FFFFFF"/>
-          </a:solidFill>
-          <a:ln>
-            <a:noFill/>
-          </a:ln>
-        </p:spPr>
-        <p:style>
-          <a:lnRef idx="1">
-            <a:schemeClr val="accent1"/>
-          </a:lnRef>
-          <a:fillRef idx="3">
-            <a:schemeClr val="accent1"/>
-          </a:fillRef>
-          <a:effectRef idx="2">
-            <a:schemeClr val="accent1"/>
-          </a:effectRef>
-          <a:fontRef idx="minor">
-            <a:schemeClr val="lt1"/>
-          </a:fontRef>
-        </p:style>
-        <p:txBody>
-          <a:bodyPr rtlCol="0" anchor="ctr"/>
-          <a:lstStyle/>
-          <a:p>
-            <a:pPr algn="ctr"/>
-          </a:p>
-        </p:txBody>
-      </p:sp>
-      <p:sp>
-        <p:nvSpPr>
-          <p:cNvPr id="13" name="Rectangle 12"/>
-          <p:cNvSpPr/>
-          <p:nvPr/>
-        </p:nvSpPr>
-        <p:spPr>
-          <a:xfrm>
-            <a:off x="8229600" y="2103120"/>
-            <a:ext cx="3108960" cy="109728"/>
-          </a:xfrm>
-          <a:prstGeom prst="rect">
-            <a:avLst/>
-          </a:prstGeom>
-          <a:solidFill>
-            <a:srgbClr val="1F7A8C"/>
-          </a:solidFill>
-          <a:ln>
-            <a:noFill/>
-          </a:ln>
-        </p:spPr>
-        <p:style>
-          <a:lnRef idx="1">
-            <a:schemeClr val="accent1"/>
-          </a:lnRef>
-          <a:fillRef idx="3">
-            <a:schemeClr val="accent1"/>
-          </a:fillRef>
-          <a:effectRef idx="2">
-            <a:schemeClr val="accent1"/>
-          </a:effectRef>
-          <a:fontRef idx="minor">
-            <a:schemeClr val="lt1"/>
-          </a:fontRef>
-        </p:style>
-        <p:txBody>
-          <a:bodyPr rtlCol="0" anchor="ctr"/>
-          <a:lstStyle/>
-          <a:p>
-            <a:pPr algn="ctr"/>
-          </a:p>
-        </p:txBody>
-      </p:sp>
-      <p:sp>
-        <p:nvSpPr>
-          <p:cNvPr id="14" name="TextBox 13"/>
-          <p:cNvSpPr txBox="1"/>
-          <p:nvPr/>
-        </p:nvSpPr>
-        <p:spPr>
-          <a:xfrm>
-            <a:off x="8229600" y="2743200"/>
-            <a:ext cx="3108960" cy="1097280"/>
-          </a:xfrm>
-          <a:prstGeom prst="rect">
-            <a:avLst/>
-          </a:prstGeom>
-          <a:noFill/>
-        </p:spPr>
-        <p:txBody>
-          <a:bodyPr wrap="square">
-            <a:spAutoFit/>
-          </a:bodyPr>
-          <a:lstStyle/>
-          <a:p>
-            <a:pPr algn="ctr"/>
-            <a:r>
-              <a:rPr sz="4800" b="1">
-                <a:solidFill>
-                  <a:srgbClr val="0B1F3A"/>
+              <a:t>•  AI coding agents made the glue work (hooks, protocols, iteration) far more accessible than before.</a:t>
+            </a:r>
+          </a:p>
+          <a:p>
+            <a:pPr algn="l">
+              <a:spcAft>
+                <a:spcPts val="800"/>
+              </a:spcAft>
+            </a:pPr>
+            <a:r>
+              <a:rPr sz="1700">
+                <a:solidFill>
+                  <a:srgbClr val="334155"/>
                 </a:solidFill>
                 <a:latin typeface="Calibri"/>
               </a:rPr>
-              <a:t>~53%</a:t>
-            </a:r>
-          </a:p>
-        </p:txBody>
-      </p:sp>
-      <p:sp>
-        <p:nvSpPr>
-          <p:cNvPr id="15" name="TextBox 14"/>
-          <p:cNvSpPr txBox="1"/>
-          <p:nvPr/>
-        </p:nvSpPr>
-        <p:spPr>
-          <a:xfrm>
-            <a:off x="8412480" y="4023360"/>
-            <a:ext cx="2743200" cy="822960"/>
-          </a:xfrm>
-          <a:prstGeom prst="rect">
-            <a:avLst/>
-          </a:prstGeom>
-          <a:noFill/>
-        </p:spPr>
-        <p:txBody>
-          <a:bodyPr wrap="square">
-            <a:spAutoFit/>
-          </a:bodyPr>
-          <a:lstStyle/>
-          <a:p>
-            <a:pPr algn="ctr"/>
-            <a:r>
-              <a:rPr sz="1600" b="0">
-                <a:solidFill>
-                  <a:srgbClr val="2F3E4E"/>
-                </a:solidFill>
-                <a:latin typeface="Calibri"/>
-              </a:rPr>
-              <a:t>Ghidra + LLM Ref</a:t>
-            </a:r>
-          </a:p>
-        </p:txBody>
-      </p:sp>
-      <p:sp>
-        <p:nvSpPr>
-          <p:cNvPr id="16" name="TextBox 15"/>
-          <p:cNvSpPr txBox="1"/>
-          <p:nvPr/>
-        </p:nvSpPr>
-        <p:spPr>
-          <a:xfrm>
-            <a:off x="914400" y="5760720"/>
-            <a:ext cx="10058400" cy="457200"/>
-          </a:xfrm>
-          <a:prstGeom prst="rect">
-            <a:avLst/>
-          </a:prstGeom>
-          <a:noFill/>
-        </p:spPr>
-        <p:txBody>
-          <a:bodyPr wrap="square">
-            <a:spAutoFit/>
-          </a:bodyPr>
-          <a:lstStyle/>
-          <a:p>
-            <a:pPr algn="l"/>
-            <a:r>
-              <a:rPr sz="1200" b="0">
-                <a:solidFill>
-                  <a:srgbClr val="2F3E4E"/>
-                </a:solidFill>
-                <a:latin typeface="Calibri"/>
-              </a:rPr>
-              <a:t>Source: Tan et al., LLM4Decompile (EMNLP 2024), HumanEval-Decompile</a:t>
+              <a:t>•  This is the seminar’s main focus: previously near-impossible binary-level game modification becoming comparatively practical.</a:t>
             </a:r>
           </a:p>
         </p:txBody>
@@ -9049,7 +6137,7 @@
     <p:bg>
       <p:bgPr>
         <a:solidFill>
-          <a:srgbClr val="F4F6F8"/>
+          <a:srgbClr val="F8FAFC"/>
         </a:solidFill>
         <a:effectLst/>
       </p:bgPr>
@@ -9070,7 +6158,7 @@
         <p:spPr>
           <a:xfrm>
             <a:off x="0" y="0"/>
-            <a:ext cx="109728" cy="6858000"/>
+            <a:ext cx="91440" cy="6858000"/>
           </a:xfrm>
           <a:prstGeom prst="rect">
             <a:avLst/>
@@ -9112,8 +6200,8 @@
         </p:nvSpPr>
         <p:spPr>
           <a:xfrm>
-            <a:off x="411480" y="256032"/>
-            <a:ext cx="8321040" cy="1005840"/>
+            <a:off x="457200" y="256032"/>
+            <a:ext cx="11155680" cy="640080"/>
           </a:xfrm>
           <a:prstGeom prst="rect">
             <a:avLst/>
@@ -9126,37 +6214,78 @@
           </a:bodyPr>
           <a:lstStyle/>
           <a:p>
-            <a:pPr algn="l"/>
-            <a:r>
-              <a:rPr sz="2600" b="1">
+            <a:pPr algn="l">
+              <a:spcAft>
+                <a:spcPts val="400"/>
+              </a:spcAft>
+            </a:pPr>
+            <a:r>
+              <a:rPr sz="2800" b="1">
                 <a:solidFill>
                   <a:srgbClr val="0B1F3A"/>
                 </a:solidFill>
                 <a:latin typeface="Calibri"/>
               </a:rPr>
-              <a:t>AI sits on classical RE tools — it does not replace them.</a:t>
-            </a:r>
-          </a:p>
-        </p:txBody>
-      </p:sp>
-      <p:sp>
-        <p:nvSpPr>
-          <p:cNvPr id="4" name="Rounded Rectangle 3"/>
+              <a:t>How These Game Modifications Actually Work</a:t>
+            </a:r>
+          </a:p>
+        </p:txBody>
+      </p:sp>
+      <p:sp>
+        <p:nvSpPr>
+          <p:cNvPr id="4" name="TextBox 3"/>
+          <p:cNvSpPr txBox="1"/>
+          <p:nvPr/>
+        </p:nvSpPr>
+        <p:spPr>
+          <a:xfrm>
+            <a:off x="457200" y="868680"/>
+            <a:ext cx="11155680" cy="411480"/>
+          </a:xfrm>
+          <a:prstGeom prst="rect">
+            <a:avLst/>
+          </a:prstGeom>
+          <a:noFill/>
+        </p:spPr>
+        <p:txBody>
+          <a:bodyPr wrap="square">
+            <a:spAutoFit/>
+          </a:bodyPr>
+          <a:lstStyle/>
+          <a:p>
+            <a:pPr algn="l">
+              <a:spcAft>
+                <a:spcPts val="400"/>
+              </a:spcAft>
+            </a:pPr>
+            <a:r>
+              <a:rPr sz="1500" b="0">
+                <a:solidFill>
+                  <a:srgbClr val="64748B"/>
+                </a:solidFill>
+                <a:latin typeface="Calibri"/>
+              </a:rPr>
+              <a:t>Two compiled processes + a reverse-engineered bridge</a:t>
+            </a:r>
+          </a:p>
+        </p:txBody>
+      </p:sp>
+      <p:sp>
+        <p:nvSpPr>
+          <p:cNvPr id="5" name="Rectangle 4"/>
           <p:cNvSpPr/>
           <p:nvPr/>
         </p:nvSpPr>
         <p:spPr>
           <a:xfrm>
-            <a:off x="457200" y="2743200"/>
-            <a:ext cx="2468880" cy="1645920"/>
-          </a:xfrm>
-          <a:prstGeom prst="roundRect">
-            <a:avLst>
-              <a:gd name="adj" fmla="val 10000"/>
-            </a:avLst>
+            <a:off x="457200" y="1280160"/>
+            <a:ext cx="11155680" cy="18288"/>
+          </a:xfrm>
+          <a:prstGeom prst="rect">
+            <a:avLst/>
           </a:prstGeom>
           <a:solidFill>
-            <a:srgbClr val="0B1F3A"/>
+            <a:srgbClr val="CBD5E1"/>
           </a:solidFill>
           <a:ln>
             <a:noFill/>
@@ -9177,214 +6306,47 @@
           </a:fontRef>
         </p:style>
         <p:txBody>
-          <a:bodyPr rtlCol="0" anchor="ctr" wrap="square"/>
-          <a:lstStyle/>
-          <a:p>
-            <a:pPr algn="ctr">
-              <a:spcBef>
-                <a:spcPts val="0"/>
-              </a:spcBef>
-            </a:pPr>
-            <a:r>
-              <a:rPr sz="1500" b="1">
-                <a:solidFill>
-                  <a:srgbClr val="FFFFFF"/>
-                </a:solidFill>
-                <a:latin typeface="Calibri"/>
-              </a:rPr>
-              <a:t>Ghidra / IDA
-Binary Ninja</a:t>
-            </a:r>
-          </a:p>
-        </p:txBody>
-      </p:sp>
-      <p:sp>
-        <p:nvSpPr>
-          <p:cNvPr id="5" name="Rounded Rectangle 4"/>
-          <p:cNvSpPr/>
+          <a:bodyPr rtlCol="0" anchor="ctr"/>
+          <a:lstStyle/>
+          <a:p>
+            <a:pPr algn="ctr"/>
+          </a:p>
+        </p:txBody>
+      </p:sp>
+      <p:pic>
+        <p:nvPicPr>
+          <p:cNvPr id="6" name="Picture 5" descr="diagram_case_study.png"/>
+          <p:cNvPicPr>
+            <a:picLocks noChangeAspect="1"/>
+          </p:cNvPicPr>
           <p:nvPr/>
-        </p:nvSpPr>
-        <p:spPr>
-          <a:xfrm>
-            <a:off x="3383280" y="2743200"/>
-            <a:ext cx="2468880" cy="1645920"/>
-          </a:xfrm>
-          <a:prstGeom prst="roundRect">
-            <a:avLst>
-              <a:gd name="adj" fmla="val 10000"/>
-            </a:avLst>
-          </a:prstGeom>
-          <a:solidFill>
-            <a:srgbClr val="0B1F3A"/>
-          </a:solidFill>
-          <a:ln>
-            <a:noFill/>
-          </a:ln>
-        </p:spPr>
-        <p:style>
-          <a:lnRef idx="1">
-            <a:schemeClr val="accent1"/>
-          </a:lnRef>
-          <a:fillRef idx="3">
-            <a:schemeClr val="accent1"/>
-          </a:fillRef>
-          <a:effectRef idx="2">
-            <a:schemeClr val="accent1"/>
-          </a:effectRef>
-          <a:fontRef idx="minor">
-            <a:schemeClr val="lt1"/>
-          </a:fontRef>
-        </p:style>
-        <p:txBody>
-          <a:bodyPr rtlCol="0" anchor="ctr" wrap="square"/>
-          <a:lstStyle/>
-          <a:p>
-            <a:pPr algn="ctr">
-              <a:spcBef>
-                <a:spcPts val="0"/>
-              </a:spcBef>
-            </a:pPr>
-            <a:r>
-              <a:rPr sz="1500" b="1">
-                <a:solidFill>
-                  <a:srgbClr val="FFFFFF"/>
-                </a:solidFill>
-                <a:latin typeface="Calibri"/>
-              </a:rPr>
-              <a:t>LLM refine
-names · types</a:t>
-            </a:r>
-          </a:p>
-        </p:txBody>
-      </p:sp>
-      <p:sp>
-        <p:nvSpPr>
-          <p:cNvPr id="6" name="Rounded Rectangle 5"/>
-          <p:cNvSpPr/>
-          <p:nvPr/>
-        </p:nvSpPr>
-        <p:spPr>
-          <a:xfrm>
-            <a:off x="6309360" y="2743200"/>
-            <a:ext cx="2468880" cy="1645920"/>
-          </a:xfrm>
-          <a:prstGeom prst="roundRect">
-            <a:avLst>
-              <a:gd name="adj" fmla="val 10000"/>
-            </a:avLst>
-          </a:prstGeom>
-          <a:solidFill>
-            <a:srgbClr val="0B1F3A"/>
-          </a:solidFill>
-          <a:ln>
-            <a:noFill/>
-          </a:ln>
-        </p:spPr>
-        <p:style>
-          <a:lnRef idx="1">
-            <a:schemeClr val="accent1"/>
-          </a:lnRef>
-          <a:fillRef idx="3">
-            <a:schemeClr val="accent1"/>
-          </a:fillRef>
-          <a:effectRef idx="2">
-            <a:schemeClr val="accent1"/>
-          </a:effectRef>
-          <a:fontRef idx="minor">
-            <a:schemeClr val="lt1"/>
-          </a:fontRef>
-        </p:style>
-        <p:txBody>
-          <a:bodyPr rtlCol="0" anchor="ctr" wrap="square"/>
-          <a:lstStyle/>
-          <a:p>
-            <a:pPr algn="ctr">
-              <a:spcBef>
-                <a:spcPts val="0"/>
-              </a:spcBef>
-            </a:pPr>
-            <a:r>
-              <a:rPr sz="1500" b="1">
-                <a:solidFill>
-                  <a:srgbClr val="FFFFFF"/>
-                </a:solidFill>
-                <a:latin typeface="Calibri"/>
-              </a:rPr>
-              <a:t>Agent + MCP
-iterate hooks</a:t>
-            </a:r>
-          </a:p>
-        </p:txBody>
-      </p:sp>
-      <p:sp>
-        <p:nvSpPr>
-          <p:cNvPr id="7" name="Rounded Rectangle 6"/>
-          <p:cNvSpPr/>
-          <p:nvPr/>
-        </p:nvSpPr>
-        <p:spPr>
-          <a:xfrm>
-            <a:off x="9235440" y="2743200"/>
-            <a:ext cx="2468880" cy="1645920"/>
-          </a:xfrm>
-          <a:prstGeom prst="roundRect">
-            <a:avLst>
-              <a:gd name="adj" fmla="val 10000"/>
-            </a:avLst>
-          </a:prstGeom>
-          <a:solidFill>
-            <a:srgbClr val="0B1F3A"/>
-          </a:solidFill>
-          <a:ln>
-            <a:noFill/>
-          </a:ln>
-        </p:spPr>
-        <p:style>
-          <a:lnRef idx="1">
-            <a:schemeClr val="accent1"/>
-          </a:lnRef>
-          <a:fillRef idx="3">
-            <a:schemeClr val="accent1"/>
-          </a:fillRef>
-          <a:effectRef idx="2">
-            <a:schemeClr val="accent1"/>
-          </a:effectRef>
-          <a:fontRef idx="minor">
-            <a:schemeClr val="lt1"/>
-          </a:fontRef>
-        </p:style>
-        <p:txBody>
-          <a:bodyPr rtlCol="0" anchor="ctr" wrap="square"/>
-          <a:lstStyle/>
-          <a:p>
-            <a:pPr algn="ctr">
-              <a:spcBef>
-                <a:spcPts val="0"/>
-              </a:spcBef>
-            </a:pPr>
-            <a:r>
-              <a:rPr sz="1500" b="1">
-                <a:solidFill>
-                  <a:srgbClr val="FFFFFF"/>
-                </a:solidFill>
-                <a:latin typeface="Calibri"/>
-              </a:rPr>
-              <a:t>Verify
-build · diff</a:t>
-            </a:r>
-          </a:p>
-        </p:txBody>
-      </p:sp>
-      <p:sp>
-        <p:nvSpPr>
-          <p:cNvPr id="8" name="TextBox 7"/>
+        </p:nvPicPr>
+        <p:blipFill>
+          <a:blip r:embed="rId2"/>
+          <a:stretch>
+            <a:fillRect/>
+          </a:stretch>
+        </p:blipFill>
+        <p:spPr>
+          <a:xfrm>
+            <a:off x="320040" y="1417320"/>
+            <a:ext cx="6858000" cy="12061809"/>
+          </a:xfrm>
+          <a:prstGeom prst="rect">
+            <a:avLst/>
+          </a:prstGeom>
+        </p:spPr>
+      </p:pic>
+      <p:sp>
+        <p:nvSpPr>
+          <p:cNvPr id="7" name="TextBox 6"/>
           <p:cNvSpPr txBox="1"/>
           <p:nvPr/>
         </p:nvSpPr>
         <p:spPr>
           <a:xfrm>
-            <a:off x="2880360" y="3200400"/>
-            <a:ext cx="548640" cy="548640"/>
+            <a:off x="7223760" y="1645920"/>
+            <a:ext cx="4480560" cy="4572000"/>
           </a:xfrm>
           <a:prstGeom prst="rect">
             <a:avLst/>
@@ -9397,120 +6359,67 @@
           </a:bodyPr>
           <a:lstStyle/>
           <a:p>
-            <a:pPr algn="ctr"/>
-            <a:r>
-              <a:rPr sz="2800" b="0">
-                <a:solidFill>
-                  <a:srgbClr val="1F7A8C"/>
+            <a:pPr algn="l">
+              <a:spcAft>
+                <a:spcPts val="800"/>
+              </a:spcAft>
+            </a:pPr>
+            <a:r>
+              <a:rPr sz="1600">
+                <a:solidFill>
+                  <a:srgbClr val="334155"/>
                 </a:solidFill>
                 <a:latin typeface="Calibri"/>
               </a:rPr>
-              <a:t>→</a:t>
-            </a:r>
-          </a:p>
-        </p:txBody>
-      </p:sp>
-      <p:sp>
-        <p:nvSpPr>
-          <p:cNvPr id="9" name="TextBox 8"/>
-          <p:cNvSpPr txBox="1"/>
-          <p:nvPr/>
-        </p:nvSpPr>
-        <p:spPr>
-          <a:xfrm>
-            <a:off x="5806440" y="3200400"/>
-            <a:ext cx="548640" cy="548640"/>
-          </a:xfrm>
-          <a:prstGeom prst="rect">
-            <a:avLst/>
-          </a:prstGeom>
-          <a:noFill/>
-        </p:spPr>
-        <p:txBody>
-          <a:bodyPr wrap="square">
-            <a:spAutoFit/>
-          </a:bodyPr>
-          <a:lstStyle/>
-          <a:p>
-            <a:pPr algn="ctr"/>
-            <a:r>
-              <a:rPr sz="2800" b="0">
-                <a:solidFill>
-                  <a:srgbClr val="1F7A8C"/>
+              <a:t>•  Both games keep running as real binaries.</a:t>
+            </a:r>
+          </a:p>
+          <a:p>
+            <a:pPr algn="l">
+              <a:spcAft>
+                <a:spcPts val="800"/>
+              </a:spcAft>
+            </a:pPr>
+            <a:r>
+              <a:rPr sz="1600">
+                <a:solidFill>
+                  <a:srgbClr val="334155"/>
                 </a:solidFill>
                 <a:latin typeface="Calibri"/>
               </a:rPr>
-              <a:t>→</a:t>
-            </a:r>
-          </a:p>
-        </p:txBody>
-      </p:sp>
-      <p:sp>
-        <p:nvSpPr>
-          <p:cNvPr id="10" name="TextBox 9"/>
-          <p:cNvSpPr txBox="1"/>
-          <p:nvPr/>
-        </p:nvSpPr>
-        <p:spPr>
-          <a:xfrm>
-            <a:off x="8732520" y="3200400"/>
-            <a:ext cx="548640" cy="548640"/>
-          </a:xfrm>
-          <a:prstGeom prst="rect">
-            <a:avLst/>
-          </a:prstGeom>
-          <a:noFill/>
-        </p:spPr>
-        <p:txBody>
-          <a:bodyPr wrap="square">
-            <a:spAutoFit/>
-          </a:bodyPr>
-          <a:lstStyle/>
-          <a:p>
-            <a:pPr algn="ctr"/>
-            <a:r>
-              <a:rPr sz="2800" b="0">
-                <a:solidFill>
-                  <a:srgbClr val="1F7A8C"/>
+              <a:t>•  A thin bridge exchanges camera, collision, and events over shared memory / IPC.</a:t>
+            </a:r>
+          </a:p>
+          <a:p>
+            <a:pPr algn="l">
+              <a:spcAft>
+                <a:spcPts val="800"/>
+              </a:spcAft>
+            </a:pPr>
+            <a:r>
+              <a:rPr sz="1600">
+                <a:solidFill>
+                  <a:srgbClr val="334155"/>
                 </a:solidFill>
                 <a:latin typeface="Calibri"/>
               </a:rPr>
-              <a:t>→</a:t>
-            </a:r>
-          </a:p>
-        </p:txBody>
-      </p:sp>
-      <p:sp>
-        <p:nvSpPr>
-          <p:cNvPr id="11" name="TextBox 10"/>
-          <p:cNvSpPr txBox="1"/>
-          <p:nvPr/>
-        </p:nvSpPr>
-        <p:spPr>
-          <a:xfrm>
-            <a:off x="457200" y="5029200"/>
-            <a:ext cx="10972800" cy="640080"/>
-          </a:xfrm>
-          <a:prstGeom prst="rect">
-            <a:avLst/>
-          </a:prstGeom>
-          <a:noFill/>
-        </p:spPr>
-        <p:txBody>
-          <a:bodyPr wrap="square">
-            <a:spAutoFit/>
-          </a:bodyPr>
-          <a:lstStyle/>
-          <a:p>
-            <a:pPr algn="ctr"/>
-            <a:r>
-              <a:rPr sz="1800" b="0">
-                <a:solidFill>
-                  <a:srgbClr val="2F3E4E"/>
+              <a:t>•  Frames are composited so both worlds appear together.</a:t>
+            </a:r>
+          </a:p>
+          <a:p>
+            <a:pPr algn="l">
+              <a:spcAft>
+                <a:spcPts val="800"/>
+              </a:spcAft>
+            </a:pPr>
+            <a:r>
+              <a:rPr sz="1600">
+                <a:solidFill>
+                  <a:srgbClr val="334155"/>
                 </a:solidFill>
                 <a:latin typeface="Calibri"/>
               </a:rPr>
-              <a:t>Industry pattern: refine pseudo-C, then prove it against bytes.</a:t>
+              <a:t>•  AI helps locate addresses, draft hooks, and iterate — classical RE still validates the binary.</a:t>
             </a:r>
           </a:p>
         </p:txBody>
@@ -9529,7 +6438,7 @@
     <p:bg>
       <p:bgPr>
         <a:solidFill>
-          <a:srgbClr val="F4F6F8"/>
+          <a:srgbClr val="F8FAFC"/>
         </a:solidFill>
         <a:effectLst/>
       </p:bgPr>
@@ -9550,7 +6459,7 @@
         <p:spPr>
           <a:xfrm>
             <a:off x="0" y="0"/>
-            <a:ext cx="109728" cy="6858000"/>
+            <a:ext cx="91440" cy="6858000"/>
           </a:xfrm>
           <a:prstGeom prst="rect">
             <a:avLst/>
@@ -9592,8 +6501,8 @@
         </p:nvSpPr>
         <p:spPr>
           <a:xfrm>
-            <a:off x="411480" y="256032"/>
-            <a:ext cx="8321040" cy="1005840"/>
+            <a:off x="457200" y="256032"/>
+            <a:ext cx="11155680" cy="640080"/>
           </a:xfrm>
           <a:prstGeom prst="rect">
             <a:avLst/>
@@ -9606,37 +6515,78 @@
           </a:bodyPr>
           <a:lstStyle/>
           <a:p>
-            <a:pPr algn="l"/>
-            <a:r>
-              <a:rPr sz="2600" b="1">
+            <a:pPr algn="l">
+              <a:spcAft>
+                <a:spcPts val="400"/>
+              </a:spcAft>
+            </a:pPr>
+            <a:r>
+              <a:rPr sz="2800" b="1">
                 <a:solidFill>
                   <a:srgbClr val="0B1F3A"/>
                 </a:solidFill>
                 <a:latin typeface="Calibri"/>
               </a:rPr>
-              <a:t>Closed game engines make RE — not greenfield coding — the bottleneck.</a:t>
-            </a:r>
-          </a:p>
-        </p:txBody>
-      </p:sp>
-      <p:sp>
-        <p:nvSpPr>
-          <p:cNvPr id="4" name="Rounded Rectangle 3"/>
+              <a:t>Challenges, Limits, and Ethical Concerns</a:t>
+            </a:r>
+          </a:p>
+        </p:txBody>
+      </p:sp>
+      <p:sp>
+        <p:nvSpPr>
+          <p:cNvPr id="4" name="TextBox 3"/>
+          <p:cNvSpPr txBox="1"/>
+          <p:nvPr/>
+        </p:nvSpPr>
+        <p:spPr>
+          <a:xfrm>
+            <a:off x="457200" y="868680"/>
+            <a:ext cx="11155680" cy="411480"/>
+          </a:xfrm>
+          <a:prstGeom prst="rect">
+            <a:avLst/>
+          </a:prstGeom>
+          <a:noFill/>
+        </p:spPr>
+        <p:txBody>
+          <a:bodyPr wrap="square">
+            <a:spAutoFit/>
+          </a:bodyPr>
+          <a:lstStyle/>
+          <a:p>
+            <a:pPr algn="l">
+              <a:spcAft>
+                <a:spcPts val="400"/>
+              </a:spcAft>
+            </a:pPr>
+            <a:r>
+              <a:rPr sz="1500" b="0">
+                <a:solidFill>
+                  <a:srgbClr val="64748B"/>
+                </a:solidFill>
+                <a:latin typeface="Calibri"/>
+              </a:rPr>
+              <a:t>Faster does not mean automatic or unrestricted</a:t>
+            </a:r>
+          </a:p>
+        </p:txBody>
+      </p:sp>
+      <p:sp>
+        <p:nvSpPr>
+          <p:cNvPr id="5" name="Rectangle 4"/>
           <p:cNvSpPr/>
           <p:nvPr/>
         </p:nvSpPr>
         <p:spPr>
           <a:xfrm>
-            <a:off x="1371600" y="2011680"/>
-            <a:ext cx="9144000" cy="1143000"/>
-          </a:xfrm>
-          <a:prstGeom prst="roundRect">
-            <a:avLst>
-              <a:gd name="adj" fmla="val 10000"/>
-            </a:avLst>
+            <a:off x="457200" y="1280160"/>
+            <a:ext cx="11155680" cy="18288"/>
+          </a:xfrm>
+          <a:prstGeom prst="rect">
+            <a:avLst/>
           </a:prstGeom>
           <a:solidFill>
-            <a:srgbClr val="FFFFFF"/>
+            <a:srgbClr val="CBD5E1"/>
           </a:solidFill>
           <a:ln>
             <a:noFill/>
@@ -9666,95 +6616,27 @@
       </p:sp>
       <p:sp>
         <p:nvSpPr>
-          <p:cNvPr id="5" name="TextBox 4"/>
-          <p:cNvSpPr txBox="1"/>
-          <p:nvPr/>
-        </p:nvSpPr>
-        <p:spPr>
-          <a:xfrm>
-            <a:off x="1737360" y="2240280"/>
-            <a:ext cx="2743200" cy="640080"/>
-          </a:xfrm>
-          <a:prstGeom prst="rect">
-            <a:avLst/>
-          </a:prstGeom>
-          <a:noFill/>
-        </p:spPr>
-        <p:txBody>
-          <a:bodyPr wrap="square">
-            <a:spAutoFit/>
-          </a:bodyPr>
-          <a:lstStyle/>
-          <a:p>
-            <a:pPr algn="l"/>
-            <a:r>
-              <a:rPr sz="2200" b="1">
-                <a:solidFill>
-                  <a:srgbClr val="1F7A8C"/>
-                </a:solidFill>
-                <a:latin typeface="Calibri"/>
-              </a:rPr>
-              <a:t>No source</a:t>
-            </a:r>
-          </a:p>
-        </p:txBody>
-      </p:sp>
-      <p:sp>
-        <p:nvSpPr>
-          <p:cNvPr id="6" name="TextBox 5"/>
-          <p:cNvSpPr txBox="1"/>
-          <p:nvPr/>
-        </p:nvSpPr>
-        <p:spPr>
-          <a:xfrm>
-            <a:off x="4754880" y="2286000"/>
-            <a:ext cx="5303520" cy="640080"/>
-          </a:xfrm>
-          <a:prstGeom prst="rect">
-            <a:avLst/>
-          </a:prstGeom>
-          <a:noFill/>
-        </p:spPr>
-        <p:txBody>
-          <a:bodyPr wrap="square">
-            <a:spAutoFit/>
-          </a:bodyPr>
-          <a:lstStyle/>
-          <a:p>
-            <a:pPr algn="l"/>
-            <a:r>
-              <a:rPr sz="2000" b="0">
-                <a:solidFill>
-                  <a:srgbClr val="0B1F3A"/>
-                </a:solidFill>
-                <a:latin typeface="Calibri"/>
-              </a:rPr>
-              <a:t>Optimized native binaries</a:t>
-            </a:r>
-          </a:p>
-        </p:txBody>
-      </p:sp>
-      <p:sp>
-        <p:nvSpPr>
-          <p:cNvPr id="7" name="Rounded Rectangle 6"/>
+          <p:cNvPr id="6" name="Rounded Rectangle 5"/>
           <p:cNvSpPr/>
           <p:nvPr/>
         </p:nvSpPr>
         <p:spPr>
           <a:xfrm>
-            <a:off x="1371600" y="3383280"/>
-            <a:ext cx="9144000" cy="1143000"/>
+            <a:off x="457200" y="1554480"/>
+            <a:ext cx="5486400" cy="1920240"/>
           </a:xfrm>
           <a:prstGeom prst="roundRect">
             <a:avLst>
-              <a:gd name="adj" fmla="val 10000"/>
+              <a:gd name="adj" fmla="val 6000"/>
             </a:avLst>
           </a:prstGeom>
           <a:solidFill>
             <a:srgbClr val="FFFFFF"/>
           </a:solidFill>
           <a:ln>
-            <a:noFill/>
+            <a:solidFill>
+              <a:srgbClr val="CBD5E1"/>
+            </a:solidFill>
           </a:ln>
         </p:spPr>
         <p:style>
@@ -9781,92 +6663,20 @@
       </p:sp>
       <p:sp>
         <p:nvSpPr>
-          <p:cNvPr id="8" name="TextBox 7"/>
-          <p:cNvSpPr txBox="1"/>
+          <p:cNvPr id="7" name="Rectangle 6"/>
+          <p:cNvSpPr/>
           <p:nvPr/>
         </p:nvSpPr>
         <p:spPr>
           <a:xfrm>
-            <a:off x="1737360" y="3611880"/>
-            <a:ext cx="2743200" cy="640080"/>
+            <a:off x="457200" y="1554480"/>
+            <a:ext cx="109728" cy="1920240"/>
           </a:xfrm>
           <a:prstGeom prst="rect">
             <a:avLst/>
           </a:prstGeom>
-          <a:noFill/>
-        </p:spPr>
-        <p:txBody>
-          <a:bodyPr wrap="square">
-            <a:spAutoFit/>
-          </a:bodyPr>
-          <a:lstStyle/>
-          <a:p>
-            <a:pPr algn="l"/>
-            <a:r>
-              <a:rPr sz="2200" b="1">
-                <a:solidFill>
-                  <a:srgbClr val="1F7A8C"/>
-                </a:solidFill>
-                <a:latin typeface="Calibri"/>
-              </a:rPr>
-              <a:t>Deep systems</a:t>
-            </a:r>
-          </a:p>
-        </p:txBody>
-      </p:sp>
-      <p:sp>
-        <p:nvSpPr>
-          <p:cNvPr id="9" name="TextBox 8"/>
-          <p:cNvSpPr txBox="1"/>
-          <p:nvPr/>
-        </p:nvSpPr>
-        <p:spPr>
-          <a:xfrm>
-            <a:off x="4754880" y="3657600"/>
-            <a:ext cx="5303520" cy="640080"/>
-          </a:xfrm>
-          <a:prstGeom prst="rect">
-            <a:avLst/>
-          </a:prstGeom>
-          <a:noFill/>
-        </p:spPr>
-        <p:txBody>
-          <a:bodyPr wrap="square">
-            <a:spAutoFit/>
-          </a:bodyPr>
-          <a:lstStyle/>
-          <a:p>
-            <a:pPr algn="l"/>
-            <a:r>
-              <a:rPr sz="2000" b="0">
-                <a:solidFill>
-                  <a:srgbClr val="0B1F3A"/>
-                </a:solidFill>
-                <a:latin typeface="Calibri"/>
-              </a:rPr>
-              <a:t>Camera, collision, damage</a:t>
-            </a:r>
-          </a:p>
-        </p:txBody>
-      </p:sp>
-      <p:sp>
-        <p:nvSpPr>
-          <p:cNvPr id="10" name="Rounded Rectangle 9"/>
-          <p:cNvSpPr/>
-          <p:nvPr/>
-        </p:nvSpPr>
-        <p:spPr>
-          <a:xfrm>
-            <a:off x="1371600" y="4754880"/>
-            <a:ext cx="9144000" cy="1143000"/>
-          </a:xfrm>
-          <a:prstGeom prst="roundRect">
-            <a:avLst>
-              <a:gd name="adj" fmla="val 10000"/>
-            </a:avLst>
-          </a:prstGeom>
           <a:solidFill>
-            <a:srgbClr val="FFFFFF"/>
+            <a:srgbClr val="1F7A8C"/>
           </a:solidFill>
           <a:ln>
             <a:noFill/>
@@ -9896,14 +6706,14 @@
       </p:sp>
       <p:sp>
         <p:nvSpPr>
-          <p:cNvPr id="11" name="TextBox 10"/>
+          <p:cNvPr id="8" name="TextBox 7"/>
           <p:cNvSpPr txBox="1"/>
           <p:nvPr/>
         </p:nvSpPr>
         <p:spPr>
           <a:xfrm>
-            <a:off x="1737360" y="4983480"/>
-            <a:ext cx="2743200" cy="640080"/>
+            <a:off x="822960" y="1874520"/>
+            <a:ext cx="4846320" cy="411480"/>
           </a:xfrm>
           <a:prstGeom prst="rect">
             <a:avLst/>
@@ -9916,16 +6726,149 @@
           </a:bodyPr>
           <a:lstStyle/>
           <a:p>
-            <a:pPr algn="l"/>
-            <a:r>
-              <a:rPr sz="2200" b="1">
-                <a:solidFill>
-                  <a:srgbClr val="1F7A8C"/>
+            <a:pPr algn="l">
+              <a:spcAft>
+                <a:spcPts val="400"/>
+              </a:spcAft>
+            </a:pPr>
+            <a:r>
+              <a:rPr sz="1800" b="1">
+                <a:solidFill>
+                  <a:srgbClr val="0B1F3A"/>
                 </a:solidFill>
                 <a:latin typeface="Calibri"/>
               </a:rPr>
-              <a:t>Few APIs</a:t>
-            </a:r>
+              <a:t>Correctness</a:t>
+            </a:r>
+          </a:p>
+        </p:txBody>
+      </p:sp>
+      <p:sp>
+        <p:nvSpPr>
+          <p:cNvPr id="9" name="TextBox 8"/>
+          <p:cNvSpPr txBox="1"/>
+          <p:nvPr/>
+        </p:nvSpPr>
+        <p:spPr>
+          <a:xfrm>
+            <a:off x="822960" y="2377440"/>
+            <a:ext cx="4846320" cy="868680"/>
+          </a:xfrm>
+          <a:prstGeom prst="rect">
+            <a:avLst/>
+          </a:prstGeom>
+          <a:noFill/>
+        </p:spPr>
+        <p:txBody>
+          <a:bodyPr wrap="square">
+            <a:spAutoFit/>
+          </a:bodyPr>
+          <a:lstStyle/>
+          <a:p>
+            <a:pPr algn="l">
+              <a:spcAft>
+                <a:spcPts val="400"/>
+              </a:spcAft>
+            </a:pPr>
+            <a:r>
+              <a:rPr sz="1400" b="0">
+                <a:solidFill>
+                  <a:srgbClr val="334155"/>
+                </a:solidFill>
+                <a:latin typeface="Calibri"/>
+              </a:rPr>
+              <a:t>AI can invent plausible but wrong types and logic. Results must be verified against the binary.</a:t>
+            </a:r>
+          </a:p>
+        </p:txBody>
+      </p:sp>
+      <p:sp>
+        <p:nvSpPr>
+          <p:cNvPr id="10" name="Rounded Rectangle 9"/>
+          <p:cNvSpPr/>
+          <p:nvPr/>
+        </p:nvSpPr>
+        <p:spPr>
+          <a:xfrm>
+            <a:off x="6217920" y="1554480"/>
+            <a:ext cx="5486400" cy="1920240"/>
+          </a:xfrm>
+          <a:prstGeom prst="roundRect">
+            <a:avLst>
+              <a:gd name="adj" fmla="val 6000"/>
+            </a:avLst>
+          </a:prstGeom>
+          <a:solidFill>
+            <a:srgbClr val="FFFFFF"/>
+          </a:solidFill>
+          <a:ln>
+            <a:solidFill>
+              <a:srgbClr val="CBD5E1"/>
+            </a:solidFill>
+          </a:ln>
+        </p:spPr>
+        <p:style>
+          <a:lnRef idx="1">
+            <a:schemeClr val="accent1"/>
+          </a:lnRef>
+          <a:fillRef idx="3">
+            <a:schemeClr val="accent1"/>
+          </a:fillRef>
+          <a:effectRef idx="2">
+            <a:schemeClr val="accent1"/>
+          </a:effectRef>
+          <a:fontRef idx="minor">
+            <a:schemeClr val="lt1"/>
+          </a:fontRef>
+        </p:style>
+        <p:txBody>
+          <a:bodyPr rtlCol="0" anchor="ctr"/>
+          <a:lstStyle/>
+          <a:p>
+            <a:pPr algn="ctr"/>
+          </a:p>
+        </p:txBody>
+      </p:sp>
+      <p:sp>
+        <p:nvSpPr>
+          <p:cNvPr id="11" name="Rectangle 10"/>
+          <p:cNvSpPr/>
+          <p:nvPr/>
+        </p:nvSpPr>
+        <p:spPr>
+          <a:xfrm>
+            <a:off x="6217920" y="1554480"/>
+            <a:ext cx="109728" cy="1920240"/>
+          </a:xfrm>
+          <a:prstGeom prst="rect">
+            <a:avLst/>
+          </a:prstGeom>
+          <a:solidFill>
+            <a:srgbClr val="1F7A8C"/>
+          </a:solidFill>
+          <a:ln>
+            <a:noFill/>
+          </a:ln>
+        </p:spPr>
+        <p:style>
+          <a:lnRef idx="1">
+            <a:schemeClr val="accent1"/>
+          </a:lnRef>
+          <a:fillRef idx="3">
+            <a:schemeClr val="accent1"/>
+          </a:fillRef>
+          <a:effectRef idx="2">
+            <a:schemeClr val="accent1"/>
+          </a:effectRef>
+          <a:fontRef idx="minor">
+            <a:schemeClr val="lt1"/>
+          </a:fontRef>
+        </p:style>
+        <p:txBody>
+          <a:bodyPr rtlCol="0" anchor="ctr"/>
+          <a:lstStyle/>
+          <a:p>
+            <a:pPr algn="ctr"/>
           </a:p>
         </p:txBody>
       </p:sp>
@@ -9937,8 +6880,8 @@
         </p:nvSpPr>
         <p:spPr>
           <a:xfrm>
-            <a:off x="4754880" y="5029200"/>
-            <a:ext cx="5303520" cy="640080"/>
+            <a:off x="6583680" y="1874520"/>
+            <a:ext cx="4846320" cy="411480"/>
           </a:xfrm>
           <a:prstGeom prst="rect">
             <a:avLst/>
@@ -9951,15 +6894,394 @@
           </a:bodyPr>
           <a:lstStyle/>
           <a:p>
-            <a:pPr algn="l"/>
-            <a:r>
-              <a:rPr sz="2000" b="0">
+            <a:pPr algn="l">
+              <a:spcAft>
+                <a:spcPts val="400"/>
+              </a:spcAft>
+            </a:pPr>
+            <a:r>
+              <a:rPr sz="1800" b="1">
                 <a:solidFill>
                   <a:srgbClr val="0B1F3A"/>
                 </a:solidFill>
                 <a:latin typeface="Calibri"/>
               </a:rPr>
-              <a:t>Official mod surfaces are thin</a:t>
+              <a:t>Hard defenses</a:t>
+            </a:r>
+          </a:p>
+        </p:txBody>
+      </p:sp>
+      <p:sp>
+        <p:nvSpPr>
+          <p:cNvPr id="13" name="TextBox 12"/>
+          <p:cNvSpPr txBox="1"/>
+          <p:nvPr/>
+        </p:nvSpPr>
+        <p:spPr>
+          <a:xfrm>
+            <a:off x="6583680" y="2377440"/>
+            <a:ext cx="4846320" cy="868680"/>
+          </a:xfrm>
+          <a:prstGeom prst="rect">
+            <a:avLst/>
+          </a:prstGeom>
+          <a:noFill/>
+        </p:spPr>
+        <p:txBody>
+          <a:bodyPr wrap="square">
+            <a:spAutoFit/>
+          </a:bodyPr>
+          <a:lstStyle/>
+          <a:p>
+            <a:pPr algn="l">
+              <a:spcAft>
+                <a:spcPts val="400"/>
+              </a:spcAft>
+            </a:pPr>
+            <a:r>
+              <a:rPr sz="1400" b="0">
+                <a:solidFill>
+                  <a:srgbClr val="334155"/>
+                </a:solidFill>
+                <a:latin typeface="Calibri"/>
+              </a:rPr>
+              <a:t>Obfuscation, packing, and anti-tamper still defeat many automated approaches.</a:t>
+            </a:r>
+          </a:p>
+        </p:txBody>
+      </p:sp>
+      <p:sp>
+        <p:nvSpPr>
+          <p:cNvPr id="14" name="Rounded Rectangle 13"/>
+          <p:cNvSpPr/>
+          <p:nvPr/>
+        </p:nvSpPr>
+        <p:spPr>
+          <a:xfrm>
+            <a:off x="457200" y="3749039"/>
+            <a:ext cx="5486400" cy="1920240"/>
+          </a:xfrm>
+          <a:prstGeom prst="roundRect">
+            <a:avLst>
+              <a:gd name="adj" fmla="val 6000"/>
+            </a:avLst>
+          </a:prstGeom>
+          <a:solidFill>
+            <a:srgbClr val="FFFFFF"/>
+          </a:solidFill>
+          <a:ln>
+            <a:solidFill>
+              <a:srgbClr val="CBD5E1"/>
+            </a:solidFill>
+          </a:ln>
+        </p:spPr>
+        <p:style>
+          <a:lnRef idx="1">
+            <a:schemeClr val="accent1"/>
+          </a:lnRef>
+          <a:fillRef idx="3">
+            <a:schemeClr val="accent1"/>
+          </a:fillRef>
+          <a:effectRef idx="2">
+            <a:schemeClr val="accent1"/>
+          </a:effectRef>
+          <a:fontRef idx="minor">
+            <a:schemeClr val="lt1"/>
+          </a:fontRef>
+        </p:style>
+        <p:txBody>
+          <a:bodyPr rtlCol="0" anchor="ctr"/>
+          <a:lstStyle/>
+          <a:p>
+            <a:pPr algn="ctr"/>
+          </a:p>
+        </p:txBody>
+      </p:sp>
+      <p:sp>
+        <p:nvSpPr>
+          <p:cNvPr id="15" name="Rectangle 14"/>
+          <p:cNvSpPr/>
+          <p:nvPr/>
+        </p:nvSpPr>
+        <p:spPr>
+          <a:xfrm>
+            <a:off x="457200" y="3749039"/>
+            <a:ext cx="109728" cy="1920240"/>
+          </a:xfrm>
+          <a:prstGeom prst="rect">
+            <a:avLst/>
+          </a:prstGeom>
+          <a:solidFill>
+            <a:srgbClr val="1F7A8C"/>
+          </a:solidFill>
+          <a:ln>
+            <a:noFill/>
+          </a:ln>
+        </p:spPr>
+        <p:style>
+          <a:lnRef idx="1">
+            <a:schemeClr val="accent1"/>
+          </a:lnRef>
+          <a:fillRef idx="3">
+            <a:schemeClr val="accent1"/>
+          </a:fillRef>
+          <a:effectRef idx="2">
+            <a:schemeClr val="accent1"/>
+          </a:effectRef>
+          <a:fontRef idx="minor">
+            <a:schemeClr val="lt1"/>
+          </a:fontRef>
+        </p:style>
+        <p:txBody>
+          <a:bodyPr rtlCol="0" anchor="ctr"/>
+          <a:lstStyle/>
+          <a:p>
+            <a:pPr algn="ctr"/>
+          </a:p>
+        </p:txBody>
+      </p:sp>
+      <p:sp>
+        <p:nvSpPr>
+          <p:cNvPr id="16" name="TextBox 15"/>
+          <p:cNvSpPr txBox="1"/>
+          <p:nvPr/>
+        </p:nvSpPr>
+        <p:spPr>
+          <a:xfrm>
+            <a:off x="822960" y="4069079"/>
+            <a:ext cx="4846320" cy="411480"/>
+          </a:xfrm>
+          <a:prstGeom prst="rect">
+            <a:avLst/>
+          </a:prstGeom>
+          <a:noFill/>
+        </p:spPr>
+        <p:txBody>
+          <a:bodyPr wrap="square">
+            <a:spAutoFit/>
+          </a:bodyPr>
+          <a:lstStyle/>
+          <a:p>
+            <a:pPr algn="l">
+              <a:spcAft>
+                <a:spcPts val="400"/>
+              </a:spcAft>
+            </a:pPr>
+            <a:r>
+              <a:rPr sz="1800" b="1">
+                <a:solidFill>
+                  <a:srgbClr val="0B1F3A"/>
+                </a:solidFill>
+                <a:latin typeface="Calibri"/>
+              </a:rPr>
+              <a:t>Legal / policy</a:t>
+            </a:r>
+          </a:p>
+        </p:txBody>
+      </p:sp>
+      <p:sp>
+        <p:nvSpPr>
+          <p:cNvPr id="17" name="TextBox 16"/>
+          <p:cNvSpPr txBox="1"/>
+          <p:nvPr/>
+        </p:nvSpPr>
+        <p:spPr>
+          <a:xfrm>
+            <a:off x="822960" y="4571999"/>
+            <a:ext cx="4846320" cy="868680"/>
+          </a:xfrm>
+          <a:prstGeom prst="rect">
+            <a:avLst/>
+          </a:prstGeom>
+          <a:noFill/>
+        </p:spPr>
+        <p:txBody>
+          <a:bodyPr wrap="square">
+            <a:spAutoFit/>
+          </a:bodyPr>
+          <a:lstStyle/>
+          <a:p>
+            <a:pPr algn="l">
+              <a:spcAft>
+                <a:spcPts val="400"/>
+              </a:spcAft>
+            </a:pPr>
+            <a:r>
+              <a:rPr sz="1400" b="0">
+                <a:solidFill>
+                  <a:srgbClr val="334155"/>
+                </a:solidFill>
+                <a:latin typeface="Calibri"/>
+              </a:rPr>
+              <a:t>Copyright, license terms, and redistribution rules still apply — especially for commercial game assets.</a:t>
+            </a:r>
+          </a:p>
+        </p:txBody>
+      </p:sp>
+      <p:sp>
+        <p:nvSpPr>
+          <p:cNvPr id="18" name="Rounded Rectangle 17"/>
+          <p:cNvSpPr/>
+          <p:nvPr/>
+        </p:nvSpPr>
+        <p:spPr>
+          <a:xfrm>
+            <a:off x="6217920" y="3749039"/>
+            <a:ext cx="5486400" cy="1920240"/>
+          </a:xfrm>
+          <a:prstGeom prst="roundRect">
+            <a:avLst>
+              <a:gd name="adj" fmla="val 6000"/>
+            </a:avLst>
+          </a:prstGeom>
+          <a:solidFill>
+            <a:srgbClr val="FFFFFF"/>
+          </a:solidFill>
+          <a:ln>
+            <a:solidFill>
+              <a:srgbClr val="CBD5E1"/>
+            </a:solidFill>
+          </a:ln>
+        </p:spPr>
+        <p:style>
+          <a:lnRef idx="1">
+            <a:schemeClr val="accent1"/>
+          </a:lnRef>
+          <a:fillRef idx="3">
+            <a:schemeClr val="accent1"/>
+          </a:fillRef>
+          <a:effectRef idx="2">
+            <a:schemeClr val="accent1"/>
+          </a:effectRef>
+          <a:fontRef idx="minor">
+            <a:schemeClr val="lt1"/>
+          </a:fontRef>
+        </p:style>
+        <p:txBody>
+          <a:bodyPr rtlCol="0" anchor="ctr"/>
+          <a:lstStyle/>
+          <a:p>
+            <a:pPr algn="ctr"/>
+          </a:p>
+        </p:txBody>
+      </p:sp>
+      <p:sp>
+        <p:nvSpPr>
+          <p:cNvPr id="19" name="Rectangle 18"/>
+          <p:cNvSpPr/>
+          <p:nvPr/>
+        </p:nvSpPr>
+        <p:spPr>
+          <a:xfrm>
+            <a:off x="6217920" y="3749039"/>
+            <a:ext cx="109728" cy="1920240"/>
+          </a:xfrm>
+          <a:prstGeom prst="rect">
+            <a:avLst/>
+          </a:prstGeom>
+          <a:solidFill>
+            <a:srgbClr val="1F7A8C"/>
+          </a:solidFill>
+          <a:ln>
+            <a:noFill/>
+          </a:ln>
+        </p:spPr>
+        <p:style>
+          <a:lnRef idx="1">
+            <a:schemeClr val="accent1"/>
+          </a:lnRef>
+          <a:fillRef idx="3">
+            <a:schemeClr val="accent1"/>
+          </a:fillRef>
+          <a:effectRef idx="2">
+            <a:schemeClr val="accent1"/>
+          </a:effectRef>
+          <a:fontRef idx="minor">
+            <a:schemeClr val="lt1"/>
+          </a:fontRef>
+        </p:style>
+        <p:txBody>
+          <a:bodyPr rtlCol="0" anchor="ctr"/>
+          <a:lstStyle/>
+          <a:p>
+            <a:pPr algn="ctr"/>
+          </a:p>
+        </p:txBody>
+      </p:sp>
+      <p:sp>
+        <p:nvSpPr>
+          <p:cNvPr id="20" name="TextBox 19"/>
+          <p:cNvSpPr txBox="1"/>
+          <p:nvPr/>
+        </p:nvSpPr>
+        <p:spPr>
+          <a:xfrm>
+            <a:off x="6583680" y="4069079"/>
+            <a:ext cx="4846320" cy="411480"/>
+          </a:xfrm>
+          <a:prstGeom prst="rect">
+            <a:avLst/>
+          </a:prstGeom>
+          <a:noFill/>
+        </p:spPr>
+        <p:txBody>
+          <a:bodyPr wrap="square">
+            <a:spAutoFit/>
+          </a:bodyPr>
+          <a:lstStyle/>
+          <a:p>
+            <a:pPr algn="l">
+              <a:spcAft>
+                <a:spcPts val="400"/>
+              </a:spcAft>
+            </a:pPr>
+            <a:r>
+              <a:rPr sz="1800" b="1">
+                <a:solidFill>
+                  <a:srgbClr val="0B1F3A"/>
+                </a:solidFill>
+                <a:latin typeface="Calibri"/>
+              </a:rPr>
+              <a:t>Responsibility</a:t>
+            </a:r>
+          </a:p>
+        </p:txBody>
+      </p:sp>
+      <p:sp>
+        <p:nvSpPr>
+          <p:cNvPr id="21" name="TextBox 20"/>
+          <p:cNvSpPr txBox="1"/>
+          <p:nvPr/>
+        </p:nvSpPr>
+        <p:spPr>
+          <a:xfrm>
+            <a:off x="6583680" y="4571999"/>
+            <a:ext cx="4846320" cy="868680"/>
+          </a:xfrm>
+          <a:prstGeom prst="rect">
+            <a:avLst/>
+          </a:prstGeom>
+          <a:noFill/>
+        </p:spPr>
+        <p:txBody>
+          <a:bodyPr wrap="square">
+            <a:spAutoFit/>
+          </a:bodyPr>
+          <a:lstStyle/>
+          <a:p>
+            <a:pPr algn="l">
+              <a:spcAft>
+                <a:spcPts val="400"/>
+              </a:spcAft>
+            </a:pPr>
+            <a:r>
+              <a:rPr sz="1400" b="0">
+                <a:solidFill>
+                  <a:srgbClr val="334155"/>
+                </a:solidFill>
+                <a:latin typeface="Calibri"/>
+              </a:rPr>
+              <a:t>Online anti-cheat bypass is out of scope; serious work stays offline and does not ship proprietary files.</a:t>
             </a:r>
           </a:p>
         </p:txBody>
@@ -9978,7 +7300,7 @@
     <p:bg>
       <p:bgPr>
         <a:solidFill>
-          <a:srgbClr val="F4F6F8"/>
+          <a:srgbClr val="F8FAFC"/>
         </a:solidFill>
         <a:effectLst/>
       </p:bgPr>
@@ -9999,7 +7321,7 @@
         <p:spPr>
           <a:xfrm>
             <a:off x="0" y="0"/>
-            <a:ext cx="109728" cy="6858000"/>
+            <a:ext cx="91440" cy="6858000"/>
           </a:xfrm>
           <a:prstGeom prst="rect">
             <a:avLst/>
@@ -10041,8 +7363,8 @@
         </p:nvSpPr>
         <p:spPr>
           <a:xfrm>
-            <a:off x="411480" y="256032"/>
-            <a:ext cx="8321040" cy="1005840"/>
+            <a:off x="457200" y="256032"/>
+            <a:ext cx="11155680" cy="640080"/>
           </a:xfrm>
           <a:prstGeom prst="rect">
             <a:avLst/>
@@ -10055,37 +7377,78 @@
           </a:bodyPr>
           <a:lstStyle/>
           <a:p>
-            <a:pPr algn="l"/>
-            <a:r>
-              <a:rPr sz="2600" b="1">
+            <a:pPr algn="l">
+              <a:spcAft>
+                <a:spcPts val="400"/>
+              </a:spcAft>
+            </a:pPr>
+            <a:r>
+              <a:rPr sz="2800" b="1">
                 <a:solidFill>
                   <a:srgbClr val="0B1F3A"/>
                 </a:solidFill>
                 <a:latin typeface="Calibri"/>
               </a:rPr>
-              <a:t>Passthrough bridges keep both binaries alive and share one frame.</a:t>
-            </a:r>
-          </a:p>
-        </p:txBody>
-      </p:sp>
-      <p:sp>
-        <p:nvSpPr>
-          <p:cNvPr id="4" name="Rounded Rectangle 3"/>
+              <a:t>Conclusion</a:t>
+            </a:r>
+          </a:p>
+        </p:txBody>
+      </p:sp>
+      <p:sp>
+        <p:nvSpPr>
+          <p:cNvPr id="4" name="TextBox 3"/>
+          <p:cNvSpPr txBox="1"/>
+          <p:nvPr/>
+        </p:nvSpPr>
+        <p:spPr>
+          <a:xfrm>
+            <a:off x="457200" y="868680"/>
+            <a:ext cx="11155680" cy="411480"/>
+          </a:xfrm>
+          <a:prstGeom prst="rect">
+            <a:avLst/>
+          </a:prstGeom>
+          <a:noFill/>
+        </p:spPr>
+        <p:txBody>
+          <a:bodyPr wrap="square">
+            <a:spAutoFit/>
+          </a:bodyPr>
+          <a:lstStyle/>
+          <a:p>
+            <a:pPr algn="l">
+              <a:spcAft>
+                <a:spcPts val="400"/>
+              </a:spcAft>
+            </a:pPr>
+            <a:r>
+              <a:rPr sz="1500" b="0">
+                <a:solidFill>
+                  <a:srgbClr val="64748B"/>
+                </a:solidFill>
+                <a:latin typeface="Calibri"/>
+              </a:rPr>
+              <a:t>AI amplifies reverse engineering — it does not replace it</a:t>
+            </a:r>
+          </a:p>
+        </p:txBody>
+      </p:sp>
+      <p:sp>
+        <p:nvSpPr>
+          <p:cNvPr id="5" name="Rectangle 4"/>
           <p:cNvSpPr/>
           <p:nvPr/>
         </p:nvSpPr>
         <p:spPr>
           <a:xfrm>
-            <a:off x="548640" y="1828800"/>
-            <a:ext cx="3291840" cy="3840480"/>
-          </a:xfrm>
-          <a:prstGeom prst="roundRect">
-            <a:avLst>
-              <a:gd name="adj" fmla="val 10000"/>
-            </a:avLst>
+            <a:off x="457200" y="1280160"/>
+            <a:ext cx="11155680" cy="18288"/>
+          </a:xfrm>
+          <a:prstGeom prst="rect">
+            <a:avLst/>
           </a:prstGeom>
           <a:solidFill>
-            <a:srgbClr val="0B1F3A"/>
+            <a:srgbClr val="CBD5E1"/>
           </a:solidFill>
           <a:ln>
             <a:noFill/>
@@ -10106,146 +7469,96 @@
           </a:fontRef>
         </p:style>
         <p:txBody>
-          <a:bodyPr rtlCol="0" anchor="ctr" wrap="square"/>
-          <a:lstStyle/>
-          <a:p>
-            <a:pPr algn="ctr">
-              <a:spcBef>
-                <a:spcPts val="0"/>
-              </a:spcBef>
+          <a:bodyPr rtlCol="0" anchor="ctr"/>
+          <a:lstStyle/>
+          <a:p>
+            <a:pPr algn="ctr"/>
+          </a:p>
+        </p:txBody>
+      </p:sp>
+      <p:sp>
+        <p:nvSpPr>
+          <p:cNvPr id="6" name="TextBox 5"/>
+          <p:cNvSpPr txBox="1"/>
+          <p:nvPr/>
+        </p:nvSpPr>
+        <p:spPr>
+          <a:xfrm>
+            <a:off x="548640" y="1554480"/>
+            <a:ext cx="10972800" cy="3200400"/>
+          </a:xfrm>
+          <a:prstGeom prst="rect">
+            <a:avLst/>
+          </a:prstGeom>
+          <a:noFill/>
+        </p:spPr>
+        <p:txBody>
+          <a:bodyPr wrap="square">
+            <a:spAutoFit/>
+          </a:bodyPr>
+          <a:lstStyle/>
+          <a:p>
+            <a:pPr algn="l">
+              <a:spcAft>
+                <a:spcPts val="800"/>
+              </a:spcAft>
             </a:pPr>
             <a:r>
-              <a:rPr sz="1800" b="1">
-                <a:solidFill>
-                  <a:srgbClr val="FFFFFF"/>
+              <a:rPr sz="1700">
+                <a:solidFill>
+                  <a:srgbClr val="334155"/>
                 </a:solidFill>
                 <a:latin typeface="Calibri"/>
               </a:rPr>
-              <a:t>GUEST
-pose
-frames
-hits</a:t>
-            </a:r>
-          </a:p>
-        </p:txBody>
-      </p:sp>
-      <p:sp>
-        <p:nvSpPr>
-          <p:cNvPr id="5" name="Rounded Rectangle 4"/>
-          <p:cNvSpPr/>
-          <p:nvPr/>
-        </p:nvSpPr>
-        <p:spPr>
-          <a:xfrm>
-            <a:off x="4434840" y="2560320"/>
-            <a:ext cx="3200400" cy="2377440"/>
-          </a:xfrm>
-          <a:prstGeom prst="roundRect">
-            <a:avLst>
-              <a:gd name="adj" fmla="val 10000"/>
-            </a:avLst>
-          </a:prstGeom>
-          <a:solidFill>
-            <a:srgbClr val="E86A33"/>
-          </a:solidFill>
-          <a:ln>
-            <a:noFill/>
-          </a:ln>
-        </p:spPr>
-        <p:style>
-          <a:lnRef idx="1">
-            <a:schemeClr val="accent1"/>
-          </a:lnRef>
-          <a:fillRef idx="3">
-            <a:schemeClr val="accent1"/>
-          </a:fillRef>
-          <a:effectRef idx="2">
-            <a:schemeClr val="accent1"/>
-          </a:effectRef>
-          <a:fontRef idx="minor">
-            <a:schemeClr val="lt1"/>
-          </a:fontRef>
-        </p:style>
-        <p:txBody>
-          <a:bodyPr rtlCol="0" anchor="ctr" wrap="square"/>
-          <a:lstStyle/>
-          <a:p>
-            <a:pPr algn="ctr">
-              <a:spcBef>
-                <a:spcPts val="0"/>
-              </a:spcBef>
+              <a:t>•  Classical reverse engineering recovers meaning from compiled binaries; the bottleneck was always human analysis time.</a:t>
+            </a:r>
+          </a:p>
+          <a:p>
+            <a:pPr algn="l">
+              <a:spcAft>
+                <a:spcPts val="800"/>
+              </a:spcAft>
             </a:pPr>
             <a:r>
-              <a:rPr sz="1800" b="1">
-                <a:solidFill>
-                  <a:srgbClr val="FFFFFF"/>
+              <a:rPr sz="1700">
+                <a:solidFill>
+                  <a:srgbClr val="334155"/>
                 </a:solidFill>
                 <a:latin typeface="Calibri"/>
               </a:rPr>
-              <a:t>SHARED
-MEMORY
-/ IPC</a:t>
-            </a:r>
-          </a:p>
-        </p:txBody>
-      </p:sp>
-      <p:sp>
-        <p:nvSpPr>
-          <p:cNvPr id="6" name="Rounded Rectangle 5"/>
-          <p:cNvSpPr/>
-          <p:nvPr/>
-        </p:nvSpPr>
-        <p:spPr>
-          <a:xfrm>
-            <a:off x="8229600" y="1828800"/>
-            <a:ext cx="3291840" cy="3840480"/>
-          </a:xfrm>
-          <a:prstGeom prst="roundRect">
-            <a:avLst>
-              <a:gd name="adj" fmla="val 10000"/>
-            </a:avLst>
-          </a:prstGeom>
-          <a:solidFill>
-            <a:srgbClr val="1F7A8C"/>
-          </a:solidFill>
-          <a:ln>
-            <a:noFill/>
-          </a:ln>
-        </p:spPr>
-        <p:style>
-          <a:lnRef idx="1">
-            <a:schemeClr val="accent1"/>
-          </a:lnRef>
-          <a:fillRef idx="3">
-            <a:schemeClr val="accent1"/>
-          </a:fillRef>
-          <a:effectRef idx="2">
-            <a:schemeClr val="accent1"/>
-          </a:effectRef>
-          <a:fontRef idx="minor">
-            <a:schemeClr val="lt1"/>
-          </a:fontRef>
-        </p:style>
-        <p:txBody>
-          <a:bodyPr rtlCol="0" anchor="ctr" wrap="square"/>
-          <a:lstStyle/>
-          <a:p>
-            <a:pPr algn="ctr">
-              <a:spcBef>
-                <a:spcPts val="0"/>
-              </a:spcBef>
+              <a:t>•  AI assists by renaming, explaining, refining, and iterating — making the pipeline dramatically faster.</a:t>
+            </a:r>
+          </a:p>
+          <a:p>
+            <a:pPr algn="l">
+              <a:spcAft>
+                <a:spcPts val="800"/>
+              </a:spcAft>
             </a:pPr>
             <a:r>
-              <a:rPr sz="1800" b="1">
-                <a:solidFill>
-                  <a:srgbClr val="FFFFFF"/>
+              <a:rPr sz="1700">
+                <a:solidFill>
+                  <a:srgbClr val="334155"/>
                 </a:solidFill>
                 <a:latin typeface="Calibri"/>
               </a:rPr>
-              <a:t>HOST
-camera
-rays
-Present()</a:t>
+              <a:t>•  Video-game binary bridges show how formerly expert-only modifications become comparatively practical.</a:t>
+            </a:r>
+          </a:p>
+          <a:p>
+            <a:pPr algn="l">
+              <a:spcAft>
+                <a:spcPts val="800"/>
+              </a:spcAft>
+            </a:pPr>
+            <a:r>
+              <a:rPr sz="1700">
+                <a:solidFill>
+                  <a:srgbClr val="334155"/>
+                </a:solidFill>
+                <a:latin typeface="Calibri"/>
+              </a:rPr>
+              <a:t>•  Verification, legality, and ethics remain essential. AI drafts; engineers decide.</a:t>
             </a:r>
           </a:p>
         </p:txBody>
@@ -10258,8 +7571,8 @@
         </p:nvSpPr>
         <p:spPr>
           <a:xfrm>
-            <a:off x="548640" y="5852160"/>
-            <a:ext cx="10972800" cy="457200"/>
+            <a:off x="548640" y="5029200"/>
+            <a:ext cx="10972800" cy="1097280"/>
           </a:xfrm>
           <a:prstGeom prst="rect">
             <a:avLst/>
@@ -10272,15 +7585,35 @@
           </a:bodyPr>
           <a:lstStyle/>
           <a:p>
-            <a:pPr algn="ctr"/>
-            <a:r>
-              <a:rPr sz="1400" b="0">
-                <a:solidFill>
-                  <a:srgbClr val="2F3E4E"/>
+            <a:pPr algn="ctr">
+              <a:spcAft>
+                <a:spcPts val="400"/>
+              </a:spcAft>
+            </a:pPr>
+            <a:r>
+              <a:rPr sz="1600" b="1">
+                <a:solidFill>
+                  <a:srgbClr val="0B1F3A"/>
                 </a:solidFill>
                 <a:latin typeface="Calibri"/>
               </a:rPr>
-              <a:t>Example path: Fabric mod ↔ DLL in Elden Ring (offline)</a:t>
+              <a:t>Thank you  |  Ankrit Jarngal · 2023BSE028 · CSE · NIT Srinagar</a:t>
+            </a:r>
+          </a:p>
+          <a:p>
+            <a:pPr algn="ctr">
+              <a:spcAft>
+                <a:spcPts val="400"/>
+              </a:spcAft>
+            </a:pPr>
+            <a:r>
+              <a:rPr sz="1600" b="1">
+                <a:solidFill>
+                  <a:srgbClr val="0B1F3A"/>
+                </a:solidFill>
+                <a:latin typeface="Calibri"/>
+              </a:rPr>
+              <a:t>Questions?</a:t>
             </a:r>
           </a:p>
         </p:txBody>

--- a/seminar/Ankrit_Jarngal_2023BSE028_Seminar_PPT.pptx
+++ b/seminar/Ankrit_Jarngal_2023BSE028_Seminar_PPT.pptx
@@ -510,7 +510,7 @@
           <a:lstStyle/>
           <a:p>
             <a:r>
-              <a:t>Introduce topic and yourself.</a:t>
+              <a:t>Open with topic and identity. Keep it calm.</a:t>
             </a:r>
           </a:p>
         </p:txBody>
@@ -580,7 +580,7 @@
           <a:lstStyle/>
           <a:p>
             <a:r>
-              <a:t>Define reverse engineering clearly for the audience.</a:t>
+              <a:t>Define RE for a CSE audience. Stress: not rewriting from scratch.</a:t>
             </a:r>
           </a:p>
         </p:txBody>
@@ -650,7 +650,7 @@
           <a:lstStyle/>
           <a:p>
             <a:r>
-              <a:t>Walk the traditional pipeline; stress the manual bottleneck.</a:t>
+              <a:t>Walk the classical pipeline. Point at Manual Analysis as the costly step.</a:t>
             </a:r>
           </a:p>
         </p:txBody>
@@ -720,7 +720,7 @@
           <a:lstStyle/>
           <a:p>
             <a:r>
-              <a:t>Define AI-assisted RE as a layer on classical tools.</a:t>
+              <a:t>Define AI-assisted RE as a layer, not a replacement.</a:t>
             </a:r>
           </a:p>
         </p:txBody>
@@ -790,7 +790,7 @@
           <a:lstStyle/>
           <a:p>
             <a:r>
-              <a:t>Explain speed gains with the pipeline diagram.</a:t>
+              <a:t>Explain speed: renaming, agent loops, verification still required.</a:t>
             </a:r>
           </a:p>
         </p:txBody>
@@ -860,7 +860,7 @@
           <a:lstStyle/>
           <a:p>
             <a:r>
-              <a:t>Introduce games as the case study without dumping brand names.</a:t>
+              <a:t>Introduce games as closed binaries — avoid brand-name dumping.</a:t>
             </a:r>
           </a:p>
         </p:txBody>
@@ -930,7 +930,7 @@
           <a:lstStyle/>
           <a:p>
             <a:r>
-              <a:t>Explain the bridge architecture simply.</a:t>
+              <a:t>Explain host/guest/bridge simply using the diagram.</a:t>
             </a:r>
           </a:p>
         </p:txBody>
@@ -1000,7 +1000,7 @@
           <a:lstStyle/>
           <a:p>
             <a:r>
-              <a:t>Cover correctness, legal, and ethical limits.</a:t>
+              <a:t>Cover correctness, defenses, legal, responsibility.</a:t>
             </a:r>
           </a:p>
         </p:txBody>
@@ -1070,7 +1070,7 @@
           <a:lstStyle/>
           <a:p>
             <a:r>
-              <a:t>Close with the thesis and take questions.</a:t>
+              <a:t>Close on the thesis. Invite questions.</a:t>
             </a:r>
           </a:p>
         </p:txBody>
@@ -4072,7 +4072,7 @@
     <p:bg>
       <p:bgPr>
         <a:solidFill>
-          <a:srgbClr val="0B1F3A"/>
+          <a:srgbClr val="0E1116"/>
         </a:solidFill>
         <a:effectLst/>
       </p:bgPr>
@@ -4092,8 +4092,8 @@
         </p:nvSpPr>
         <p:spPr>
           <a:xfrm>
-            <a:off x="731520" y="1920240"/>
-            <a:ext cx="10515600" cy="914400"/>
+            <a:off x="640080" y="1463040"/>
+            <a:ext cx="10972800" cy="320040"/>
           </a:xfrm>
           <a:prstGeom prst="rect">
             <a:avLst/>
@@ -4108,17 +4108,17 @@
           <a:p>
             <a:pPr algn="l">
               <a:spcAft>
-                <a:spcPts val="400"/>
+                <a:spcPts val="200"/>
               </a:spcAft>
             </a:pPr>
             <a:r>
-              <a:rPr sz="3600" b="1">
-                <a:solidFill>
-                  <a:srgbClr val="FFFFFF"/>
-                </a:solidFill>
-                <a:latin typeface="Calibri"/>
+              <a:rPr sz="1100" b="1">
+                <a:solidFill>
+                  <a:srgbClr val="4DA3FF"/>
+                </a:solidFill>
+                <a:latin typeface="Consolas"/>
               </a:rPr>
-              <a:t>AI-Powered Reverse Engineering</a:t>
+              <a:t>SEMINAR  ·  NIT SRINAGAR  ·  2025–26</a:t>
             </a:r>
           </a:p>
         </p:txBody>
@@ -4131,8 +4131,8 @@
         </p:nvSpPr>
         <p:spPr>
           <a:xfrm>
-            <a:off x="731520" y="2926080"/>
-            <a:ext cx="10515600" cy="548640"/>
+            <a:off x="640080" y="2011680"/>
+            <a:ext cx="10972800" cy="1463040"/>
           </a:xfrm>
           <a:prstGeom prst="rect">
             <a:avLst/>
@@ -4147,17 +4147,33 @@
           <a:p>
             <a:pPr algn="l">
               <a:spcAft>
-                <a:spcPts val="400"/>
+                <a:spcPts val="200"/>
               </a:spcAft>
             </a:pPr>
             <a:r>
-              <a:rPr sz="1800" b="0">
-                <a:solidFill>
-                  <a:srgbClr val="CBD5E1"/>
-                </a:solidFill>
-                <a:latin typeface="Calibri"/>
+              <a:rPr sz="5400" b="1">
+                <a:solidFill>
+                  <a:srgbClr val="E8EAED"/>
+                </a:solidFill>
+                <a:latin typeface="Arial"/>
               </a:rPr>
-              <a:t>How AI is transforming binary analysis — with video games as a case study</a:t>
+              <a:t>AI-Powered</a:t>
+            </a:r>
+          </a:p>
+          <a:p>
+            <a:pPr algn="l">
+              <a:spcAft>
+                <a:spcPts val="200"/>
+              </a:spcAft>
+            </a:pPr>
+            <a:r>
+              <a:rPr sz="5400" b="1">
+                <a:solidFill>
+                  <a:srgbClr val="E8EAED"/>
+                </a:solidFill>
+                <a:latin typeface="Arial"/>
+              </a:rPr>
+              <a:t>Reverse Engineering</a:t>
             </a:r>
           </a:p>
         </p:txBody>
@@ -4170,14 +4186,14 @@
         </p:nvSpPr>
         <p:spPr>
           <a:xfrm>
-            <a:off x="731520" y="3657600"/>
-            <a:ext cx="1828800" cy="45720"/>
+            <a:off x="640080" y="3794760"/>
+            <a:ext cx="1463040" cy="31750"/>
           </a:xfrm>
           <a:prstGeom prst="rect">
             <a:avLst/>
           </a:prstGeom>
           <a:solidFill>
-            <a:srgbClr val="1F7A8C"/>
+            <a:srgbClr val="4DA3FF"/>
           </a:solidFill>
           <a:ln>
             <a:noFill/>
@@ -4213,8 +4229,8 @@
         </p:nvSpPr>
         <p:spPr>
           <a:xfrm>
-            <a:off x="731520" y="3931920"/>
-            <a:ext cx="10058400" cy="1097280"/>
+            <a:off x="640080" y="4114800"/>
+            <a:ext cx="10058400" cy="457200"/>
           </a:xfrm>
           <a:prstGeom prst="rect">
             <a:avLst/>
@@ -4229,49 +4245,56 @@
           <a:p>
             <a:pPr algn="l">
               <a:spcAft>
-                <a:spcPts val="400"/>
+                <a:spcPts val="200"/>
               </a:spcAft>
             </a:pPr>
             <a:r>
-              <a:rPr sz="1500" b="0">
-                <a:solidFill>
-                  <a:srgbClr val="94A3B8"/>
-                </a:solidFill>
-                <a:latin typeface="Calibri"/>
+              <a:rPr sz="1800" b="0">
+                <a:solidFill>
+                  <a:srgbClr val="9AA4B2"/>
+                </a:solidFill>
+                <a:latin typeface="Arial"/>
               </a:rPr>
-              <a:t>Ankrit Jarngal  |  Enroll. No. 2023BSE028</a:t>
-            </a:r>
-          </a:p>
+              <a:t>How AI accelerates binary analysis — with video games as the case study</a:t>
+            </a:r>
+          </a:p>
+        </p:txBody>
+      </p:sp>
+      <p:sp>
+        <p:nvSpPr>
+          <p:cNvPr id="6" name="TextBox 5"/>
+          <p:cNvSpPr txBox="1"/>
+          <p:nvPr/>
+        </p:nvSpPr>
+        <p:spPr>
+          <a:xfrm>
+            <a:off x="640080" y="5852160"/>
+            <a:ext cx="10058400" cy="457200"/>
+          </a:xfrm>
+          <a:prstGeom prst="rect">
+            <a:avLst/>
+          </a:prstGeom>
+          <a:noFill/>
+        </p:spPr>
+        <p:txBody>
+          <a:bodyPr wrap="square">
+            <a:spAutoFit/>
+          </a:bodyPr>
+          <a:lstStyle/>
           <a:p>
             <a:pPr algn="l">
               <a:spcAft>
-                <a:spcPts val="400"/>
+                <a:spcPts val="200"/>
               </a:spcAft>
             </a:pPr>
             <a:r>
-              <a:rPr sz="1500" b="0">
-                <a:solidFill>
-                  <a:srgbClr val="94A3B8"/>
-                </a:solidFill>
-                <a:latin typeface="Calibri"/>
+              <a:rPr sz="1400" b="0">
+                <a:solidFill>
+                  <a:srgbClr val="5B6572"/>
+                </a:solidFill>
+                <a:latin typeface="Consolas"/>
               </a:rPr>
-              <a:t>B.Tech — Computer Science and Engineering</a:t>
-            </a:r>
-          </a:p>
-          <a:p>
-            <a:pPr algn="l">
-              <a:spcAft>
-                <a:spcPts val="400"/>
-              </a:spcAft>
-            </a:pPr>
-            <a:r>
-              <a:rPr sz="1500" b="0">
-                <a:solidFill>
-                  <a:srgbClr val="94A3B8"/>
-                </a:solidFill>
-                <a:latin typeface="Calibri"/>
-              </a:rPr>
-              <a:t>National Institute of Technology Srinagar  |  2025–2026</a:t>
+              <a:t>Ankrit Jarngal   ·   2023BSE028   ·   CSE</a:t>
             </a:r>
           </a:p>
         </p:txBody>
@@ -4290,7 +4313,7 @@
     <p:bg>
       <p:bgPr>
         <a:solidFill>
-          <a:srgbClr val="F8FAFC"/>
+          <a:srgbClr val="0E1116"/>
         </a:solidFill>
         <a:effectLst/>
       </p:bgPr>
@@ -4304,20 +4327,98 @@
       <p:grpSpPr/>
       <p:sp>
         <p:nvSpPr>
-          <p:cNvPr id="2" name="Rectangle 1"/>
+          <p:cNvPr id="2" name="TextBox 1"/>
+          <p:cNvSpPr txBox="1"/>
+          <p:nvPr/>
+        </p:nvSpPr>
+        <p:spPr>
+          <a:xfrm>
+            <a:off x="640080" y="201168"/>
+            <a:ext cx="5486400" cy="274320"/>
+          </a:xfrm>
+          <a:prstGeom prst="rect">
+            <a:avLst/>
+          </a:prstGeom>
+          <a:noFill/>
+        </p:spPr>
+        <p:txBody>
+          <a:bodyPr wrap="square">
+            <a:spAutoFit/>
+          </a:bodyPr>
+          <a:lstStyle/>
+          <a:p>
+            <a:pPr algn="l">
+              <a:spcAft>
+                <a:spcPts val="200"/>
+              </a:spcAft>
+            </a:pPr>
+            <a:r>
+              <a:rPr sz="1000" b="0">
+                <a:solidFill>
+                  <a:srgbClr val="5B6572"/>
+                </a:solidFill>
+                <a:latin typeface="Consolas"/>
+              </a:rPr>
+              <a:t>AI-POWERED REVERSE ENGINEERING</a:t>
+            </a:r>
+          </a:p>
+        </p:txBody>
+      </p:sp>
+      <p:sp>
+        <p:nvSpPr>
+          <p:cNvPr id="3" name="TextBox 2"/>
+          <p:cNvSpPr txBox="1"/>
+          <p:nvPr/>
+        </p:nvSpPr>
+        <p:spPr>
+          <a:xfrm>
+            <a:off x="10241280" y="201168"/>
+            <a:ext cx="1280160" cy="274320"/>
+          </a:xfrm>
+          <a:prstGeom prst="rect">
+            <a:avLst/>
+          </a:prstGeom>
+          <a:noFill/>
+        </p:spPr>
+        <p:txBody>
+          <a:bodyPr wrap="square">
+            <a:spAutoFit/>
+          </a:bodyPr>
+          <a:lstStyle/>
+          <a:p>
+            <a:pPr algn="r">
+              <a:spcAft>
+                <a:spcPts val="200"/>
+              </a:spcAft>
+            </a:pPr>
+            <a:r>
+              <a:rPr sz="1000" b="0">
+                <a:solidFill>
+                  <a:srgbClr val="5B6572"/>
+                </a:solidFill>
+                <a:latin typeface="Consolas"/>
+              </a:rPr>
+              <a:t>02 / 09</a:t>
+            </a:r>
+          </a:p>
+        </p:txBody>
+      </p:sp>
+      <p:sp>
+        <p:nvSpPr>
+          <p:cNvPr id="4" name="Rectangle 3"/>
           <p:cNvSpPr/>
           <p:nvPr/>
         </p:nvSpPr>
         <p:spPr>
           <a:xfrm>
-            <a:off x="0" y="0"/>
-            <a:ext cx="91440" cy="6858000"/>
+            <a:off x="640080" y="502920"/>
+            <a:ext cx="10881360" cy="15240"/>
           </a:xfrm>
           <a:prstGeom prst="rect">
             <a:avLst/>
           </a:prstGeom>
           <a:solidFill>
-            <a:srgbClr val="1F7A8C"/>
+            <a:srgbClr val="2A313B"/>
           </a:solidFill>
           <a:ln>
             <a:noFill/>
@@ -4347,14 +4448,283 @@
       </p:sp>
       <p:sp>
         <p:nvSpPr>
+          <p:cNvPr id="5" name="TextBox 4"/>
+          <p:cNvSpPr txBox="1"/>
+          <p:nvPr/>
+        </p:nvSpPr>
+        <p:spPr>
+          <a:xfrm>
+            <a:off x="640080" y="777240"/>
+            <a:ext cx="10972800" cy="320040"/>
+          </a:xfrm>
+          <a:prstGeom prst="rect">
+            <a:avLst/>
+          </a:prstGeom>
+          <a:noFill/>
+        </p:spPr>
+        <p:txBody>
+          <a:bodyPr wrap="square">
+            <a:spAutoFit/>
+          </a:bodyPr>
+          <a:lstStyle/>
+          <a:p>
+            <a:pPr algn="l">
+              <a:spcAft>
+                <a:spcPts val="200"/>
+              </a:spcAft>
+            </a:pPr>
+            <a:r>
+              <a:rPr sz="1100" b="1">
+                <a:solidFill>
+                  <a:srgbClr val="4DA3FF"/>
+                </a:solidFill>
+                <a:latin typeface="Consolas"/>
+              </a:rPr>
+              <a:t>01  BACKGROUND</a:t>
+            </a:r>
+          </a:p>
+        </p:txBody>
+      </p:sp>
+      <p:sp>
+        <p:nvSpPr>
+          <p:cNvPr id="6" name="TextBox 5"/>
+          <p:cNvSpPr txBox="1"/>
+          <p:nvPr/>
+        </p:nvSpPr>
+        <p:spPr>
+          <a:xfrm>
+            <a:off x="640080" y="1280160"/>
+            <a:ext cx="10789920" cy="1280160"/>
+          </a:xfrm>
+          <a:prstGeom prst="rect">
+            <a:avLst/>
+          </a:prstGeom>
+          <a:noFill/>
+        </p:spPr>
+        <p:txBody>
+          <a:bodyPr wrap="square">
+            <a:spAutoFit/>
+          </a:bodyPr>
+          <a:lstStyle/>
+          <a:p>
+            <a:pPr algn="l">
+              <a:spcAft>
+                <a:spcPts val="200"/>
+              </a:spcAft>
+            </a:pPr>
+            <a:r>
+              <a:rPr sz="3600" b="1">
+                <a:solidFill>
+                  <a:srgbClr val="E8EAED"/>
+                </a:solidFill>
+                <a:latin typeface="Arial"/>
+              </a:rPr>
+              <a:t>Reverse engineering recovers meaning</a:t>
+            </a:r>
+          </a:p>
+          <a:p>
+            <a:pPr algn="l">
+              <a:spcAft>
+                <a:spcPts val="200"/>
+              </a:spcAft>
+            </a:pPr>
+            <a:r>
+              <a:rPr sz="3600" b="1">
+                <a:solidFill>
+                  <a:srgbClr val="E8EAED"/>
+                </a:solidFill>
+                <a:latin typeface="Arial"/>
+              </a:rPr>
+              <a:t>from compiled software.</a:t>
+            </a:r>
+          </a:p>
+        </p:txBody>
+      </p:sp>
+      <p:sp>
+        <p:nvSpPr>
+          <p:cNvPr id="7" name="TextBox 6"/>
+          <p:cNvSpPr txBox="1"/>
+          <p:nvPr/>
+        </p:nvSpPr>
+        <p:spPr>
+          <a:xfrm>
+            <a:off x="640080" y="3108960"/>
+            <a:ext cx="10515600" cy="2011680"/>
+          </a:xfrm>
+          <a:prstGeom prst="rect">
+            <a:avLst/>
+          </a:prstGeom>
+          <a:noFill/>
+        </p:spPr>
+        <p:txBody>
+          <a:bodyPr wrap="square">
+            <a:spAutoFit/>
+          </a:bodyPr>
+          <a:lstStyle/>
+          <a:p>
+            <a:pPr algn="l">
+              <a:spcAft>
+                <a:spcPts val="200"/>
+              </a:spcAft>
+            </a:pPr>
+            <a:r>
+              <a:rPr sz="2000" b="0">
+                <a:solidFill>
+                  <a:srgbClr val="9AA4B2"/>
+                </a:solidFill>
+                <a:latin typeface="Arial"/>
+              </a:rPr>
+              <a:t>You start with a finished binary — not source code.</a:t>
+            </a:r>
+          </a:p>
+          <a:p>
+            <a:pPr algn="l">
+              <a:spcAft>
+                <a:spcPts val="200"/>
+              </a:spcAft>
+            </a:pPr>
+            <a:r>
+              <a:rPr sz="2000" b="0">
+                <a:solidFill>
+                  <a:srgbClr val="9AA4B2"/>
+                </a:solidFill>
+                <a:latin typeface="Arial"/>
+              </a:rPr>
+              <a:t>The goal is to understand structure and behavior,</a:t>
+            </a:r>
+          </a:p>
+          <a:p>
+            <a:pPr algn="l">
+              <a:spcAft>
+                <a:spcPts val="200"/>
+              </a:spcAft>
+            </a:pPr>
+            <a:r>
+              <a:rPr sz="2000" b="0">
+                <a:solidFill>
+                  <a:srgbClr val="9AA4B2"/>
+                </a:solidFill>
+                <a:latin typeface="Arial"/>
+              </a:rPr>
+              <a:t>then modify it carefully when needed.</a:t>
+            </a:r>
+          </a:p>
+        </p:txBody>
+      </p:sp>
+      <p:sp>
+        <p:nvSpPr>
+          <p:cNvPr id="8" name="TextBox 7"/>
+          <p:cNvSpPr txBox="1"/>
+          <p:nvPr/>
+        </p:nvSpPr>
+        <p:spPr>
+          <a:xfrm>
+            <a:off x="640080" y="5669280"/>
+            <a:ext cx="10515600" cy="457200"/>
+          </a:xfrm>
+          <a:prstGeom prst="rect">
+            <a:avLst/>
+          </a:prstGeom>
+          <a:noFill/>
+        </p:spPr>
+        <p:txBody>
+          <a:bodyPr wrap="square">
+            <a:spAutoFit/>
+          </a:bodyPr>
+          <a:lstStyle/>
+          <a:p>
+            <a:pPr algn="l">
+              <a:spcAft>
+                <a:spcPts val="200"/>
+              </a:spcAft>
+            </a:pPr>
+            <a:r>
+              <a:rPr sz="1600" b="1">
+                <a:solidFill>
+                  <a:srgbClr val="4DA3FF"/>
+                </a:solidFill>
+                <a:latin typeface="Arial"/>
+              </a:rPr>
+              <a:t>Not rewriting from scratch. Interpreting what already exists.</a:t>
+            </a:r>
+          </a:p>
+        </p:txBody>
+      </p:sp>
+    </p:spTree>
+  </p:cSld>
+  <p:clrMapOvr>
+    <a:masterClrMapping/>
+  </p:clrMapOvr>
+</p:sld>
+</file>
+
+<file path=ppt/slides/slide3.xml><?xml version="1.0" encoding="utf-8"?>
+<p:sld xmlns:a="http://schemas.openxmlformats.org/drawingml/2006/main" xmlns:p="http://schemas.openxmlformats.org/presentationml/2006/main" xmlns:r="http://schemas.openxmlformats.org/officeDocument/2006/relationships">
+  <p:cSld>
+    <p:bg>
+      <p:bgPr>
+        <a:solidFill>
+          <a:srgbClr val="0E1116"/>
+        </a:solidFill>
+        <a:effectLst/>
+      </p:bgPr>
+    </p:bg>
+    <p:spTree>
+      <p:nvGrpSpPr>
+        <p:cNvPr id="1" name=""/>
+        <p:cNvGrpSpPr/>
+        <p:nvPr/>
+      </p:nvGrpSpPr>
+      <p:grpSpPr/>
+      <p:sp>
+        <p:nvSpPr>
+          <p:cNvPr id="2" name="TextBox 1"/>
+          <p:cNvSpPr txBox="1"/>
+          <p:nvPr/>
+        </p:nvSpPr>
+        <p:spPr>
+          <a:xfrm>
+            <a:off x="640080" y="201168"/>
+            <a:ext cx="5486400" cy="274320"/>
+          </a:xfrm>
+          <a:prstGeom prst="rect">
+            <a:avLst/>
+          </a:prstGeom>
+          <a:noFill/>
+        </p:spPr>
+        <p:txBody>
+          <a:bodyPr wrap="square">
+            <a:spAutoFit/>
+          </a:bodyPr>
+          <a:lstStyle/>
+          <a:p>
+            <a:pPr algn="l">
+              <a:spcAft>
+                <a:spcPts val="200"/>
+              </a:spcAft>
+            </a:pPr>
+            <a:r>
+              <a:rPr sz="1000" b="0">
+                <a:solidFill>
+                  <a:srgbClr val="5B6572"/>
+                </a:solidFill>
+                <a:latin typeface="Consolas"/>
+              </a:rPr>
+              <a:t>AI-POWERED REVERSE ENGINEERING</a:t>
+            </a:r>
+          </a:p>
+        </p:txBody>
+      </p:sp>
+      <p:sp>
+        <p:nvSpPr>
           <p:cNvPr id="3" name="TextBox 2"/>
           <p:cNvSpPr txBox="1"/>
           <p:nvPr/>
         </p:nvSpPr>
         <p:spPr>
           <a:xfrm>
-            <a:off x="457200" y="256032"/>
-            <a:ext cx="11155680" cy="640080"/>
+            <a:off x="10241280" y="201168"/>
+            <a:ext cx="1280160" cy="274320"/>
           </a:xfrm>
           <a:prstGeom prst="rect">
             <a:avLst/>
@@ -4367,78 +4737,39 @@
           </a:bodyPr>
           <a:lstStyle/>
           <a:p>
-            <a:pPr algn="l">
+            <a:pPr algn="r">
               <a:spcAft>
-                <a:spcPts val="400"/>
+                <a:spcPts val="200"/>
               </a:spcAft>
             </a:pPr>
             <a:r>
-              <a:rPr sz="2800" b="1">
-                <a:solidFill>
-                  <a:srgbClr val="0B1F3A"/>
-                </a:solidFill>
-                <a:latin typeface="Calibri"/>
+              <a:rPr sz="1000" b="0">
+                <a:solidFill>
+                  <a:srgbClr val="5B6572"/>
+                </a:solidFill>
+                <a:latin typeface="Consolas"/>
               </a:rPr>
-              <a:t>What is Reverse Engineering?</a:t>
-            </a:r>
-          </a:p>
-        </p:txBody>
-      </p:sp>
-      <p:sp>
-        <p:nvSpPr>
-          <p:cNvPr id="4" name="TextBox 3"/>
-          <p:cNvSpPr txBox="1"/>
+              <a:t>03 / 09</a:t>
+            </a:r>
+          </a:p>
+        </p:txBody>
+      </p:sp>
+      <p:sp>
+        <p:nvSpPr>
+          <p:cNvPr id="4" name="Rectangle 3"/>
+          <p:cNvSpPr/>
           <p:nvPr/>
         </p:nvSpPr>
         <p:spPr>
           <a:xfrm>
-            <a:off x="457200" y="868680"/>
-            <a:ext cx="11155680" cy="411480"/>
+            <a:off x="640080" y="502920"/>
+            <a:ext cx="10881360" cy="15240"/>
           </a:xfrm>
           <a:prstGeom prst="rect">
             <a:avLst/>
           </a:prstGeom>
-          <a:noFill/>
-        </p:spPr>
-        <p:txBody>
-          <a:bodyPr wrap="square">
-            <a:spAutoFit/>
-          </a:bodyPr>
-          <a:lstStyle/>
-          <a:p>
-            <a:pPr algn="l">
-              <a:spcAft>
-                <a:spcPts val="400"/>
-              </a:spcAft>
-            </a:pPr>
-            <a:r>
-              <a:rPr sz="1500" b="0">
-                <a:solidFill>
-                  <a:srgbClr val="64748B"/>
-                </a:solidFill>
-                <a:latin typeface="Calibri"/>
-              </a:rPr>
-              <a:t>Setting the background before we talk about AI</a:t>
-            </a:r>
-          </a:p>
-        </p:txBody>
-      </p:sp>
-      <p:sp>
-        <p:nvSpPr>
-          <p:cNvPr id="5" name="Rectangle 4"/>
-          <p:cNvSpPr/>
-          <p:nvPr/>
-        </p:nvSpPr>
-        <p:spPr>
-          <a:xfrm>
-            <a:off x="457200" y="1280160"/>
-            <a:ext cx="11155680" cy="18288"/>
-          </a:xfrm>
-          <a:prstGeom prst="rect">
-            <a:avLst/>
-          </a:prstGeom>
           <a:solidFill>
-            <a:srgbClr val="CBD5E1"/>
+            <a:srgbClr val="2A313B"/>
           </a:solidFill>
           <a:ln>
             <a:noFill/>
@@ -4468,14 +4799,53 @@
       </p:sp>
       <p:sp>
         <p:nvSpPr>
+          <p:cNvPr id="5" name="TextBox 4"/>
+          <p:cNvSpPr txBox="1"/>
+          <p:nvPr/>
+        </p:nvSpPr>
+        <p:spPr>
+          <a:xfrm>
+            <a:off x="640080" y="777240"/>
+            <a:ext cx="10972800" cy="320040"/>
+          </a:xfrm>
+          <a:prstGeom prst="rect">
+            <a:avLst/>
+          </a:prstGeom>
+          <a:noFill/>
+        </p:spPr>
+        <p:txBody>
+          <a:bodyPr wrap="square">
+            <a:spAutoFit/>
+          </a:bodyPr>
+          <a:lstStyle/>
+          <a:p>
+            <a:pPr algn="l">
+              <a:spcAft>
+                <a:spcPts val="200"/>
+              </a:spcAft>
+            </a:pPr>
+            <a:r>
+              <a:rPr sz="1100" b="1">
+                <a:solidFill>
+                  <a:srgbClr val="4DA3FF"/>
+                </a:solidFill>
+                <a:latin typeface="Consolas"/>
+              </a:rPr>
+              <a:t>01  BACKGROUND</a:t>
+            </a:r>
+          </a:p>
+        </p:txBody>
+      </p:sp>
+      <p:sp>
+        <p:nvSpPr>
           <p:cNvPr id="6" name="TextBox 5"/>
           <p:cNvSpPr txBox="1"/>
           <p:nvPr/>
         </p:nvSpPr>
         <p:spPr>
           <a:xfrm>
-            <a:off x="548640" y="1554480"/>
-            <a:ext cx="10972800" cy="4114800"/>
+            <a:off x="640080" y="1143000"/>
+            <a:ext cx="10972800" cy="640080"/>
           </a:xfrm>
           <a:prstGeom prst="rect">
             <a:avLst/>
@@ -4490,65 +4860,17 @@
           <a:p>
             <a:pPr algn="l">
               <a:spcAft>
-                <a:spcPts val="800"/>
+                <a:spcPts val="200"/>
               </a:spcAft>
             </a:pPr>
             <a:r>
-              <a:rPr sz="1800">
-                <a:solidFill>
-                  <a:srgbClr val="334155"/>
-                </a:solidFill>
-                <a:latin typeface="Calibri"/>
+              <a:rPr sz="3200" b="1">
+                <a:solidFill>
+                  <a:srgbClr val="E8EAED"/>
+                </a:solidFill>
+                <a:latin typeface="Arial"/>
               </a:rPr>
-              <a:t>•  Reverse engineering means analyzing a finished software binary to understand how it works — without having the original source code.</a:t>
-            </a:r>
-          </a:p>
-          <a:p>
-            <a:pPr algn="l">
-              <a:spcAft>
-                <a:spcPts val="800"/>
-              </a:spcAft>
-            </a:pPr>
-            <a:r>
-              <a:rPr sz="1800">
-                <a:solidFill>
-                  <a:srgbClr val="334155"/>
-                </a:solidFill>
-                <a:latin typeface="Calibri"/>
-              </a:rPr>
-              <a:t>•  The program is already compiled into machine code. The goal is to recover structure, behavior, and intent from that binary.</a:t>
-            </a:r>
-          </a:p>
-          <a:p>
-            <a:pPr algn="l">
-              <a:spcAft>
-                <a:spcPts val="800"/>
-              </a:spcAft>
-            </a:pPr>
-            <a:r>
-              <a:rPr sz="1800">
-                <a:solidFill>
-                  <a:srgbClr val="334155"/>
-                </a:solidFill>
-                <a:latin typeface="Calibri"/>
-              </a:rPr>
-              <a:t>•  It is used in security research, interoperability, digital preservation, and software modification.</a:t>
-            </a:r>
-          </a:p>
-          <a:p>
-            <a:pPr algn="l">
-              <a:spcAft>
-                <a:spcPts val="800"/>
-              </a:spcAft>
-            </a:pPr>
-            <a:r>
-              <a:rPr sz="1800">
-                <a:solidFill>
-                  <a:srgbClr val="334155"/>
-                </a:solidFill>
-                <a:latin typeface="Calibri"/>
-              </a:rPr>
-              <a:t>•  Important: it is not rewriting software from scratch. It is interpreting and, when needed, carefully modifying what already exists.</a:t>
+              <a:t>The classical pipeline</a:t>
             </a:r>
           </a:p>
         </p:txBody>
@@ -4561,8 +4883,8 @@
         </p:nvSpPr>
         <p:spPr>
           <a:xfrm>
-            <a:off x="548640" y="5760720"/>
-            <a:ext cx="10972800" cy="457200"/>
+            <a:off x="640080" y="1783080"/>
+            <a:ext cx="10972800" cy="365760"/>
           </a:xfrm>
           <a:prstGeom prst="rect">
             <a:avLst/>
@@ -4577,17 +4899,80 @@
           <a:p>
             <a:pPr algn="l">
               <a:spcAft>
-                <a:spcPts val="400"/>
+                <a:spcPts val="200"/>
               </a:spcAft>
             </a:pPr>
             <a:r>
-              <a:rPr sz="1600" b="1">
-                <a:solidFill>
-                  <a:srgbClr val="1F7A8C"/>
-                </a:solidFill>
-                <a:latin typeface="Calibri"/>
+              <a:rPr sz="1600" b="0">
+                <a:solidFill>
+                  <a:srgbClr val="9AA4B2"/>
+                </a:solidFill>
+                <a:latin typeface="Arial"/>
               </a:rPr>
-              <a:t>Key idea: compiled code → human understanding → safe modification</a:t>
+              <a:t>Disassemble → decompile → understand. Tools are strong. Humans are the bottleneck.</a:t>
+            </a:r>
+          </a:p>
+        </p:txBody>
+      </p:sp>
+      <p:pic>
+        <p:nvPicPr>
+          <p:cNvPr id="8" name="Picture 7" descr="diagram_traditional_re.png"/>
+          <p:cNvPicPr>
+            <a:picLocks noChangeAspect="1"/>
+          </p:cNvPicPr>
+          <p:nvPr/>
+        </p:nvPicPr>
+        <p:blipFill>
+          <a:blip r:embed="rId2"/>
+          <a:stretch>
+            <a:fillRect/>
+          </a:stretch>
+        </p:blipFill>
+        <p:spPr>
+          <a:xfrm>
+            <a:off x="457200" y="2377440"/>
+            <a:ext cx="11247120" cy="774802"/>
+          </a:xfrm>
+          <a:prstGeom prst="rect">
+            <a:avLst/>
+          </a:prstGeom>
+        </p:spPr>
+      </p:pic>
+      <p:sp>
+        <p:nvSpPr>
+          <p:cNvPr id="9" name="TextBox 8"/>
+          <p:cNvSpPr txBox="1"/>
+          <p:nvPr/>
+        </p:nvSpPr>
+        <p:spPr>
+          <a:xfrm>
+            <a:off x="640080" y="5806440"/>
+            <a:ext cx="10972800" cy="457200"/>
+          </a:xfrm>
+          <a:prstGeom prst="rect">
+            <a:avLst/>
+          </a:prstGeom>
+          <a:noFill/>
+        </p:spPr>
+        <p:txBody>
+          <a:bodyPr wrap="square">
+            <a:spAutoFit/>
+          </a:bodyPr>
+          <a:lstStyle/>
+          <a:p>
+            <a:pPr algn="l">
+              <a:spcAft>
+                <a:spcPts val="200"/>
+              </a:spcAft>
+            </a:pPr>
+            <a:r>
+              <a:rPr sz="1500" b="0">
+                <a:solidFill>
+                  <a:srgbClr val="9AA4B2"/>
+                </a:solidFill>
+                <a:latin typeface="Arial"/>
+              </a:rPr>
+              <a:t>Manual naming and structure recovery is where most time is lost.</a:t>
             </a:r>
           </a:p>
         </p:txBody>
@@ -4600,13 +4985,13 @@
 </p:sld>
 </file>
 
-<file path=ppt/slides/slide3.xml><?xml version="1.0" encoding="utf-8"?>
+<file path=ppt/slides/slide4.xml><?xml version="1.0" encoding="utf-8"?>
 <p:sld xmlns:a="http://schemas.openxmlformats.org/drawingml/2006/main" xmlns:p="http://schemas.openxmlformats.org/presentationml/2006/main" xmlns:r="http://schemas.openxmlformats.org/officeDocument/2006/relationships">
   <p:cSld>
     <p:bg>
       <p:bgPr>
         <a:solidFill>
-          <a:srgbClr val="F8FAFC"/>
+          <a:srgbClr val="0E1116"/>
         </a:solidFill>
         <a:effectLst/>
       </p:bgPr>
@@ -4620,20 +5005,98 @@
       <p:grpSpPr/>
       <p:sp>
         <p:nvSpPr>
-          <p:cNvPr id="2" name="Rectangle 1"/>
+          <p:cNvPr id="2" name="TextBox 1"/>
+          <p:cNvSpPr txBox="1"/>
+          <p:nvPr/>
+        </p:nvSpPr>
+        <p:spPr>
+          <a:xfrm>
+            <a:off x="640080" y="201168"/>
+            <a:ext cx="5486400" cy="274320"/>
+          </a:xfrm>
+          <a:prstGeom prst="rect">
+            <a:avLst/>
+          </a:prstGeom>
+          <a:noFill/>
+        </p:spPr>
+        <p:txBody>
+          <a:bodyPr wrap="square">
+            <a:spAutoFit/>
+          </a:bodyPr>
+          <a:lstStyle/>
+          <a:p>
+            <a:pPr algn="l">
+              <a:spcAft>
+                <a:spcPts val="200"/>
+              </a:spcAft>
+            </a:pPr>
+            <a:r>
+              <a:rPr sz="1000" b="0">
+                <a:solidFill>
+                  <a:srgbClr val="5B6572"/>
+                </a:solidFill>
+                <a:latin typeface="Consolas"/>
+              </a:rPr>
+              <a:t>AI-POWERED REVERSE ENGINEERING</a:t>
+            </a:r>
+          </a:p>
+        </p:txBody>
+      </p:sp>
+      <p:sp>
+        <p:nvSpPr>
+          <p:cNvPr id="3" name="TextBox 2"/>
+          <p:cNvSpPr txBox="1"/>
+          <p:nvPr/>
+        </p:nvSpPr>
+        <p:spPr>
+          <a:xfrm>
+            <a:off x="10241280" y="201168"/>
+            <a:ext cx="1280160" cy="274320"/>
+          </a:xfrm>
+          <a:prstGeom prst="rect">
+            <a:avLst/>
+          </a:prstGeom>
+          <a:noFill/>
+        </p:spPr>
+        <p:txBody>
+          <a:bodyPr wrap="square">
+            <a:spAutoFit/>
+          </a:bodyPr>
+          <a:lstStyle/>
+          <a:p>
+            <a:pPr algn="r">
+              <a:spcAft>
+                <a:spcPts val="200"/>
+              </a:spcAft>
+            </a:pPr>
+            <a:r>
+              <a:rPr sz="1000" b="0">
+                <a:solidFill>
+                  <a:srgbClr val="5B6572"/>
+                </a:solidFill>
+                <a:latin typeface="Consolas"/>
+              </a:rPr>
+              <a:t>04 / 09</a:t>
+            </a:r>
+          </a:p>
+        </p:txBody>
+      </p:sp>
+      <p:sp>
+        <p:nvSpPr>
+          <p:cNvPr id="4" name="Rectangle 3"/>
           <p:cNvSpPr/>
           <p:nvPr/>
         </p:nvSpPr>
         <p:spPr>
           <a:xfrm>
-            <a:off x="0" y="0"/>
-            <a:ext cx="91440" cy="6858000"/>
+            <a:off x="640080" y="502920"/>
+            <a:ext cx="10881360" cy="15240"/>
           </a:xfrm>
           <a:prstGeom prst="rect">
             <a:avLst/>
           </a:prstGeom>
           <a:solidFill>
-            <a:srgbClr val="1F7A8C"/>
+            <a:srgbClr val="2A313B"/>
           </a:solidFill>
           <a:ln>
             <a:noFill/>
@@ -4663,14 +5126,14 @@
       </p:sp>
       <p:sp>
         <p:nvSpPr>
-          <p:cNvPr id="3" name="TextBox 2"/>
+          <p:cNvPr id="5" name="TextBox 4"/>
           <p:cNvSpPr txBox="1"/>
           <p:nvPr/>
         </p:nvSpPr>
         <p:spPr>
           <a:xfrm>
-            <a:off x="457200" y="256032"/>
-            <a:ext cx="11155680" cy="640080"/>
+            <a:off x="640080" y="777240"/>
+            <a:ext cx="10972800" cy="320040"/>
           </a:xfrm>
           <a:prstGeom prst="rect">
             <a:avLst/>
@@ -4685,31 +5148,31 @@
           <a:p>
             <a:pPr algn="l">
               <a:spcAft>
-                <a:spcPts val="400"/>
+                <a:spcPts val="200"/>
               </a:spcAft>
             </a:pPr>
             <a:r>
-              <a:rPr sz="2800" b="1">
-                <a:solidFill>
-                  <a:srgbClr val="0B1F3A"/>
-                </a:solidFill>
-                <a:latin typeface="Calibri"/>
+              <a:rPr sz="1100" b="1">
+                <a:solidFill>
+                  <a:srgbClr val="4DA3FF"/>
+                </a:solidFill>
+                <a:latin typeface="Consolas"/>
               </a:rPr>
-              <a:t>The Traditional Reverse Engineering Process</a:t>
-            </a:r>
-          </a:p>
-        </p:txBody>
-      </p:sp>
-      <p:sp>
-        <p:nvSpPr>
-          <p:cNvPr id="4" name="TextBox 3"/>
+              <a:t>02  AI-ASSISTED RE</a:t>
+            </a:r>
+          </a:p>
+        </p:txBody>
+      </p:sp>
+      <p:sp>
+        <p:nvSpPr>
+          <p:cNvPr id="6" name="TextBox 5"/>
           <p:cNvSpPr txBox="1"/>
           <p:nvPr/>
         </p:nvSpPr>
         <p:spPr>
           <a:xfrm>
-            <a:off x="457200" y="868680"/>
-            <a:ext cx="11155680" cy="411480"/>
+            <a:off x="640080" y="1234440"/>
+            <a:ext cx="10972800" cy="1097280"/>
           </a:xfrm>
           <a:prstGeom prst="rect">
             <a:avLst/>
@@ -4724,40 +5187,60 @@
           <a:p>
             <a:pPr algn="l">
               <a:spcAft>
-                <a:spcPts val="400"/>
+                <a:spcPts val="200"/>
               </a:spcAft>
             </a:pPr>
             <a:r>
-              <a:rPr sz="1500" b="0">
-                <a:solidFill>
-                  <a:srgbClr val="64748B"/>
-                </a:solidFill>
-                <a:latin typeface="Calibri"/>
+              <a:rPr sz="3400" b="1">
+                <a:solidFill>
+                  <a:srgbClr val="E8EAED"/>
+                </a:solidFill>
+                <a:latin typeface="Arial"/>
               </a:rPr>
-              <a:t>Powerful tools — but a slow human bottleneck</a:t>
-            </a:r>
-          </a:p>
-        </p:txBody>
-      </p:sp>
-      <p:sp>
-        <p:nvSpPr>
-          <p:cNvPr id="5" name="Rectangle 4"/>
+              <a:t>AI sits on top of classical tools.</a:t>
+            </a:r>
+          </a:p>
+          <a:p>
+            <a:pPr algn="l">
+              <a:spcAft>
+                <a:spcPts val="200"/>
+              </a:spcAft>
+            </a:pPr>
+            <a:r>
+              <a:rPr sz="3400" b="1">
+                <a:solidFill>
+                  <a:srgbClr val="E8EAED"/>
+                </a:solidFill>
+                <a:latin typeface="Arial"/>
+              </a:rPr>
+              <a:t>It does not replace them.</a:t>
+            </a:r>
+          </a:p>
+        </p:txBody>
+      </p:sp>
+      <p:sp>
+        <p:nvSpPr>
+          <p:cNvPr id="7" name="Rounded Rectangle 6"/>
           <p:cNvSpPr/>
           <p:nvPr/>
         </p:nvSpPr>
         <p:spPr>
           <a:xfrm>
-            <a:off x="457200" y="1280160"/>
-            <a:ext cx="11155680" cy="18288"/>
-          </a:xfrm>
-          <a:prstGeom prst="rect">
-            <a:avLst/>
+            <a:off x="640080" y="3200400"/>
+            <a:ext cx="3474720" cy="2377440"/>
+          </a:xfrm>
+          <a:prstGeom prst="roundRect">
+            <a:avLst>
+              <a:gd name="adj" fmla="val 6000"/>
+            </a:avLst>
           </a:prstGeom>
           <a:solidFill>
-            <a:srgbClr val="CBD5E1"/>
+            <a:srgbClr val="171B22"/>
           </a:solidFill>
-          <a:ln>
-            <a:noFill/>
+          <a:ln w="12700">
+            <a:solidFill>
+              <a:srgbClr val="2A313B"/>
+            </a:solidFill>
           </a:ln>
         </p:spPr>
         <p:style>
@@ -4782,40 +5265,16 @@
           </a:p>
         </p:txBody>
       </p:sp>
-      <p:pic>
-        <p:nvPicPr>
-          <p:cNvPr id="6" name="Picture 5" descr="diagram_traditional_re.png"/>
-          <p:cNvPicPr>
-            <a:picLocks noChangeAspect="1"/>
-          </p:cNvPicPr>
-          <p:nvPr/>
-        </p:nvPicPr>
-        <p:blipFill>
-          <a:blip r:embed="rId2"/>
-          <a:stretch>
-            <a:fillRect/>
-          </a:stretch>
-        </p:blipFill>
-        <p:spPr>
-          <a:xfrm>
-            <a:off x="640080" y="1554480"/>
-            <a:ext cx="10972800" cy="966978"/>
-          </a:xfrm>
-          <a:prstGeom prst="rect">
-            <a:avLst/>
-          </a:prstGeom>
-        </p:spPr>
-      </p:pic>
-      <p:sp>
-        <p:nvSpPr>
-          <p:cNvPr id="7" name="TextBox 6"/>
+      <p:sp>
+        <p:nvSpPr>
+          <p:cNvPr id="8" name="TextBox 7"/>
           <p:cNvSpPr txBox="1"/>
           <p:nvPr/>
         </p:nvSpPr>
         <p:spPr>
           <a:xfrm>
-            <a:off x="548640" y="4206240"/>
-            <a:ext cx="10972800" cy="2011680"/>
+            <a:off x="914400" y="3429000"/>
+            <a:ext cx="2926080" cy="411480"/>
           </a:xfrm>
           <a:prstGeom prst="rect">
             <a:avLst/>
@@ -4830,98 +5289,99 @@
           <a:p>
             <a:pPr algn="l">
               <a:spcAft>
-                <a:spcPts val="800"/>
+                <a:spcPts val="200"/>
               </a:spcAft>
             </a:pPr>
             <a:r>
-              <a:rPr sz="1600">
-                <a:solidFill>
-                  <a:srgbClr val="334155"/>
-                </a:solidFill>
-                <a:latin typeface="Calibri"/>
+              <a:rPr sz="1800" b="1">
+                <a:solidFill>
+                  <a:srgbClr val="4DA3FF"/>
+                </a:solidFill>
+                <a:latin typeface="Consolas"/>
               </a:rPr>
-              <a:t>•  Tools like Ghidra, IDA Pro, and Binary Ninja already disassemble and decompile well.</a:t>
-            </a:r>
-          </a:p>
+              <a:t>LLM layer</a:t>
+            </a:r>
+          </a:p>
+        </p:txBody>
+      </p:sp>
+      <p:sp>
+        <p:nvSpPr>
+          <p:cNvPr id="9" name="TextBox 8"/>
+          <p:cNvSpPr txBox="1"/>
+          <p:nvPr/>
+        </p:nvSpPr>
+        <p:spPr>
+          <a:xfrm>
+            <a:off x="914400" y="4023360"/>
+            <a:ext cx="2926080" cy="1280160"/>
+          </a:xfrm>
+          <a:prstGeom prst="rect">
+            <a:avLst/>
+          </a:prstGeom>
+          <a:noFill/>
+        </p:spPr>
+        <p:txBody>
+          <a:bodyPr wrap="square">
+            <a:spAutoFit/>
+          </a:bodyPr>
+          <a:lstStyle/>
           <a:p>
             <a:pPr algn="l">
               <a:spcAft>
-                <a:spcPts val="800"/>
+                <a:spcPts val="200"/>
               </a:spcAft>
             </a:pPr>
             <a:r>
-              <a:rPr sz="1600">
-                <a:solidFill>
-                  <a:srgbClr val="334155"/>
-                </a:solidFill>
-                <a:latin typeface="Calibri"/>
+              <a:rPr sz="1500" b="0">
+                <a:solidFill>
+                  <a:srgbClr val="9AA4B2"/>
+                </a:solidFill>
+                <a:latin typeface="Arial"/>
               </a:rPr>
-              <a:t>•  The slow part is manual: naming functions, recovering data structures, and understanding intent.</a:t>
+              <a:t>Rename, explain, and refine</a:t>
             </a:r>
           </a:p>
           <a:p>
             <a:pPr algn="l">
               <a:spcAft>
-                <a:spcPts val="800"/>
+                <a:spcPts val="200"/>
               </a:spcAft>
             </a:pPr>
             <a:r>
-              <a:rPr sz="1600">
-                <a:solidFill>
-                  <a:srgbClr val="334155"/>
-                </a:solidFill>
-                <a:latin typeface="Calibri"/>
+              <a:rPr sz="1500" b="0">
+                <a:solidFill>
+                  <a:srgbClr val="9AA4B2"/>
+                </a:solidFill>
+                <a:latin typeface="Arial"/>
               </a:rPr>
-              <a:t>•  Stripped binaries show meaningless labels (e.g. sub_401000) — experts can spend weeks here.</a:t>
-            </a:r>
-          </a:p>
-        </p:txBody>
-      </p:sp>
-    </p:spTree>
-  </p:cSld>
-  <p:clrMapOvr>
-    <a:masterClrMapping/>
-  </p:clrMapOvr>
-</p:sld>
-</file>
-
-<file path=ppt/slides/slide4.xml><?xml version="1.0" encoding="utf-8"?>
-<p:sld xmlns:a="http://schemas.openxmlformats.org/drawingml/2006/main" xmlns:p="http://schemas.openxmlformats.org/presentationml/2006/main" xmlns:r="http://schemas.openxmlformats.org/officeDocument/2006/relationships">
-  <p:cSld>
-    <p:bg>
-      <p:bgPr>
-        <a:solidFill>
-          <a:srgbClr val="F8FAFC"/>
-        </a:solidFill>
-        <a:effectLst/>
-      </p:bgPr>
-    </p:bg>
-    <p:spTree>
-      <p:nvGrpSpPr>
-        <p:cNvPr id="1" name=""/>
-        <p:cNvGrpSpPr/>
-        <p:nvPr/>
-      </p:nvGrpSpPr>
-      <p:grpSpPr/>
-      <p:sp>
-        <p:nvSpPr>
-          <p:cNvPr id="2" name="Rectangle 1"/>
+              <a:t>pseudo-code into readable form.</a:t>
+            </a:r>
+          </a:p>
+        </p:txBody>
+      </p:sp>
+      <p:sp>
+        <p:nvSpPr>
+          <p:cNvPr id="10" name="Rounded Rectangle 9"/>
           <p:cNvSpPr/>
           <p:nvPr/>
         </p:nvSpPr>
         <p:spPr>
           <a:xfrm>
-            <a:off x="0" y="0"/>
-            <a:ext cx="91440" cy="6858000"/>
-          </a:xfrm>
-          <a:prstGeom prst="rect">
-            <a:avLst/>
+            <a:off x="4389120" y="3200400"/>
+            <a:ext cx="3474720" cy="2377440"/>
+          </a:xfrm>
+          <a:prstGeom prst="roundRect">
+            <a:avLst>
+              <a:gd name="adj" fmla="val 6000"/>
+            </a:avLst>
           </a:prstGeom>
           <a:solidFill>
-            <a:srgbClr val="1F7A8C"/>
+            <a:srgbClr val="171B22"/>
           </a:solidFill>
-          <a:ln>
-            <a:noFill/>
+          <a:ln w="12700">
+            <a:solidFill>
+              <a:srgbClr val="2A313B"/>
+            </a:solidFill>
           </a:ln>
         </p:spPr>
         <p:style>
@@ -4948,14 +5408,14 @@
       </p:sp>
       <p:sp>
         <p:nvSpPr>
-          <p:cNvPr id="3" name="TextBox 2"/>
+          <p:cNvPr id="11" name="TextBox 10"/>
           <p:cNvSpPr txBox="1"/>
           <p:nvPr/>
         </p:nvSpPr>
         <p:spPr>
           <a:xfrm>
-            <a:off x="457200" y="256032"/>
-            <a:ext cx="11155680" cy="640080"/>
+            <a:off x="4663440" y="3429000"/>
+            <a:ext cx="2926080" cy="411480"/>
           </a:xfrm>
           <a:prstGeom prst="rect">
             <a:avLst/>
@@ -4970,31 +5430,31 @@
           <a:p>
             <a:pPr algn="l">
               <a:spcAft>
-                <a:spcPts val="400"/>
+                <a:spcPts val="200"/>
               </a:spcAft>
             </a:pPr>
             <a:r>
-              <a:rPr sz="2800" b="1">
-                <a:solidFill>
-                  <a:srgbClr val="0B1F3A"/>
-                </a:solidFill>
-                <a:latin typeface="Calibri"/>
+              <a:rPr sz="1800" b="1">
+                <a:solidFill>
+                  <a:srgbClr val="4DA3FF"/>
+                </a:solidFill>
+                <a:latin typeface="Consolas"/>
               </a:rPr>
-              <a:t>What is AI-Assisted Reverse Engineering?</a:t>
-            </a:r>
-          </a:p>
-        </p:txBody>
-      </p:sp>
-      <p:sp>
-        <p:nvSpPr>
-          <p:cNvPr id="4" name="TextBox 3"/>
+              <a:t>Tool bridges</a:t>
+            </a:r>
+          </a:p>
+        </p:txBody>
+      </p:sp>
+      <p:sp>
+        <p:nvSpPr>
+          <p:cNvPr id="12" name="TextBox 11"/>
           <p:cNvSpPr txBox="1"/>
           <p:nvPr/>
         </p:nvSpPr>
         <p:spPr>
           <a:xfrm>
-            <a:off x="457200" y="868680"/>
-            <a:ext cx="11155680" cy="411480"/>
+            <a:off x="4663440" y="4023360"/>
+            <a:ext cx="2926080" cy="1280160"/>
           </a:xfrm>
           <a:prstGeom prst="rect">
             <a:avLst/>
@@ -5009,40 +5469,60 @@
           <a:p>
             <a:pPr algn="l">
               <a:spcAft>
-                <a:spcPts val="400"/>
+                <a:spcPts val="200"/>
               </a:spcAft>
             </a:pPr>
             <a:r>
               <a:rPr sz="1500" b="0">
                 <a:solidFill>
-                  <a:srgbClr val="64748B"/>
-                </a:solidFill>
-                <a:latin typeface="Calibri"/>
+                  <a:srgbClr val="9AA4B2"/>
+                </a:solidFill>
+                <a:latin typeface="Arial"/>
               </a:rPr>
-              <a:t>LLMs and agents on top of classical tools — not a replacement</a:t>
-            </a:r>
-          </a:p>
-        </p:txBody>
-      </p:sp>
-      <p:sp>
-        <p:nvSpPr>
-          <p:cNvPr id="5" name="Rectangle 4"/>
+              <a:t>Connect models to Ghidra / IDA</a:t>
+            </a:r>
+          </a:p>
+          <a:p>
+            <a:pPr algn="l">
+              <a:spcAft>
+                <a:spcPts val="200"/>
+              </a:spcAft>
+            </a:pPr>
+            <a:r>
+              <a:rPr sz="1500" b="0">
+                <a:solidFill>
+                  <a:srgbClr val="9AA4B2"/>
+                </a:solidFill>
+                <a:latin typeface="Arial"/>
+              </a:rPr>
+              <a:t>so agents can query the binary.</a:t>
+            </a:r>
+          </a:p>
+        </p:txBody>
+      </p:sp>
+      <p:sp>
+        <p:nvSpPr>
+          <p:cNvPr id="13" name="Rounded Rectangle 12"/>
           <p:cNvSpPr/>
           <p:nvPr/>
         </p:nvSpPr>
         <p:spPr>
           <a:xfrm>
-            <a:off x="457200" y="1280160"/>
-            <a:ext cx="11155680" cy="18288"/>
-          </a:xfrm>
-          <a:prstGeom prst="rect">
-            <a:avLst/>
+            <a:off x="8138159" y="3200400"/>
+            <a:ext cx="3474720" cy="2377440"/>
+          </a:xfrm>
+          <a:prstGeom prst="roundRect">
+            <a:avLst>
+              <a:gd name="adj" fmla="val 6000"/>
+            </a:avLst>
           </a:prstGeom>
           <a:solidFill>
-            <a:srgbClr val="CBD5E1"/>
+            <a:srgbClr val="171B22"/>
           </a:solidFill>
-          <a:ln>
-            <a:noFill/>
+          <a:ln w="12700">
+            <a:solidFill>
+              <a:srgbClr val="2A313B"/>
+            </a:solidFill>
           </a:ln>
         </p:spPr>
         <p:style>
@@ -5069,14 +5549,14 @@
       </p:sp>
       <p:sp>
         <p:nvSpPr>
-          <p:cNvPr id="6" name="TextBox 5"/>
+          <p:cNvPr id="14" name="TextBox 13"/>
           <p:cNvSpPr txBox="1"/>
           <p:nvPr/>
         </p:nvSpPr>
         <p:spPr>
           <a:xfrm>
-            <a:off x="548640" y="1554480"/>
-            <a:ext cx="5486400" cy="4389120"/>
+            <a:off x="8412479" y="3429000"/>
+            <a:ext cx="2926080" cy="411480"/>
           </a:xfrm>
           <a:prstGeom prst="rect">
             <a:avLst/>
@@ -5091,92 +5571,199 @@
           <a:p>
             <a:pPr algn="l">
               <a:spcAft>
-                <a:spcPts val="800"/>
+                <a:spcPts val="200"/>
               </a:spcAft>
             </a:pPr>
             <a:r>
-              <a:rPr sz="1700">
-                <a:solidFill>
-                  <a:srgbClr val="334155"/>
-                </a:solidFill>
-                <a:latin typeface="Calibri"/>
+              <a:rPr sz="1800" b="1">
+                <a:solidFill>
+                  <a:srgbClr val="4DA3FF"/>
+                </a:solidFill>
+                <a:latin typeface="Consolas"/>
               </a:rPr>
-              <a:t>•  AI assistants read decompiler output and suggest meaningful names, types, and explanations.</a:t>
-            </a:r>
-          </a:p>
+              <a:t>Verify loop</a:t>
+            </a:r>
+          </a:p>
+        </p:txBody>
+      </p:sp>
+      <p:sp>
+        <p:nvSpPr>
+          <p:cNvPr id="15" name="TextBox 14"/>
+          <p:cNvSpPr txBox="1"/>
+          <p:nvPr/>
+        </p:nvSpPr>
+        <p:spPr>
+          <a:xfrm>
+            <a:off x="8412479" y="4023360"/>
+            <a:ext cx="2926080" cy="1280160"/>
+          </a:xfrm>
+          <a:prstGeom prst="rect">
+            <a:avLst/>
+          </a:prstGeom>
+          <a:noFill/>
+        </p:spPr>
+        <p:txBody>
+          <a:bodyPr wrap="square">
+            <a:spAutoFit/>
+          </a:bodyPr>
+          <a:lstStyle/>
           <a:p>
             <a:pPr algn="l">
               <a:spcAft>
-                <a:spcPts val="800"/>
+                <a:spcPts val="200"/>
               </a:spcAft>
             </a:pPr>
             <a:r>
-              <a:rPr sz="1700">
-                <a:solidFill>
-                  <a:srgbClr val="334155"/>
-                </a:solidFill>
-                <a:latin typeface="Calibri"/>
+              <a:rPr sz="1500" b="0">
+                <a:solidFill>
+                  <a:srgbClr val="9AA4B2"/>
+                </a:solidFill>
+                <a:latin typeface="Arial"/>
               </a:rPr>
-              <a:t>•  Specialized models can refine pseudo-code so it becomes closer to readable source.</a:t>
+              <a:t>Propose → check against bytes</a:t>
             </a:r>
           </a:p>
           <a:p>
             <a:pPr algn="l">
               <a:spcAft>
-                <a:spcPts val="800"/>
+                <a:spcPts val="200"/>
               </a:spcAft>
             </a:pPr>
             <a:r>
-              <a:rPr sz="1700">
-                <a:solidFill>
-                  <a:srgbClr val="334155"/>
-                </a:solidFill>
-                <a:latin typeface="Calibri"/>
+              <a:rPr sz="1500" b="0">
+                <a:solidFill>
+                  <a:srgbClr val="9AA4B2"/>
+                </a:solidFill>
+                <a:latin typeface="Arial"/>
               </a:rPr>
-              <a:t>•  Coding agents can iterate: propose a change, test against the binary, and retry.</a:t>
-            </a:r>
-          </a:p>
+              <a:t>→ retry until evidence holds.</a:t>
+            </a:r>
+          </a:p>
+        </p:txBody>
+      </p:sp>
+    </p:spTree>
+  </p:cSld>
+  <p:clrMapOvr>
+    <a:masterClrMapping/>
+  </p:clrMapOvr>
+</p:sld>
+</file>
+
+<file path=ppt/slides/slide5.xml><?xml version="1.0" encoding="utf-8"?>
+<p:sld xmlns:a="http://schemas.openxmlformats.org/drawingml/2006/main" xmlns:p="http://schemas.openxmlformats.org/presentationml/2006/main" xmlns:r="http://schemas.openxmlformats.org/officeDocument/2006/relationships">
+  <p:cSld>
+    <p:bg>
+      <p:bgPr>
+        <a:solidFill>
+          <a:srgbClr val="0E1116"/>
+        </a:solidFill>
+        <a:effectLst/>
+      </p:bgPr>
+    </p:bg>
+    <p:spTree>
+      <p:nvGrpSpPr>
+        <p:cNvPr id="1" name=""/>
+        <p:cNvGrpSpPr/>
+        <p:nvPr/>
+      </p:nvGrpSpPr>
+      <p:grpSpPr/>
+      <p:sp>
+        <p:nvSpPr>
+          <p:cNvPr id="2" name="TextBox 1"/>
+          <p:cNvSpPr txBox="1"/>
+          <p:nvPr/>
+        </p:nvSpPr>
+        <p:spPr>
+          <a:xfrm>
+            <a:off x="640080" y="201168"/>
+            <a:ext cx="5486400" cy="274320"/>
+          </a:xfrm>
+          <a:prstGeom prst="rect">
+            <a:avLst/>
+          </a:prstGeom>
+          <a:noFill/>
+        </p:spPr>
+        <p:txBody>
+          <a:bodyPr wrap="square">
+            <a:spAutoFit/>
+          </a:bodyPr>
+          <a:lstStyle/>
           <a:p>
             <a:pPr algn="l">
               <a:spcAft>
-                <a:spcPts val="800"/>
+                <a:spcPts val="200"/>
               </a:spcAft>
             </a:pPr>
             <a:r>
-              <a:rPr sz="1700">
-                <a:solidFill>
-                  <a:srgbClr val="334155"/>
-                </a:solidFill>
-                <a:latin typeface="Calibri"/>
+              <a:rPr sz="1000" b="0">
+                <a:solidFill>
+                  <a:srgbClr val="5B6572"/>
+                </a:solidFill>
+                <a:latin typeface="Consolas"/>
               </a:rPr>
-              <a:t>•  The analyst still decides what is correct — AI drafts, humans approve.</a:t>
-            </a:r>
-          </a:p>
-        </p:txBody>
-      </p:sp>
-      <p:sp>
-        <p:nvSpPr>
-          <p:cNvPr id="7" name="Rounded Rectangle 6"/>
+              <a:t>AI-POWERED REVERSE ENGINEERING</a:t>
+            </a:r>
+          </a:p>
+        </p:txBody>
+      </p:sp>
+      <p:sp>
+        <p:nvSpPr>
+          <p:cNvPr id="3" name="TextBox 2"/>
+          <p:cNvSpPr txBox="1"/>
+          <p:nvPr/>
+        </p:nvSpPr>
+        <p:spPr>
+          <a:xfrm>
+            <a:off x="10241280" y="201168"/>
+            <a:ext cx="1280160" cy="274320"/>
+          </a:xfrm>
+          <a:prstGeom prst="rect">
+            <a:avLst/>
+          </a:prstGeom>
+          <a:noFill/>
+        </p:spPr>
+        <p:txBody>
+          <a:bodyPr wrap="square">
+            <a:spAutoFit/>
+          </a:bodyPr>
+          <a:lstStyle/>
+          <a:p>
+            <a:pPr algn="r">
+              <a:spcAft>
+                <a:spcPts val="200"/>
+              </a:spcAft>
+            </a:pPr>
+            <a:r>
+              <a:rPr sz="1000" b="0">
+                <a:solidFill>
+                  <a:srgbClr val="5B6572"/>
+                </a:solidFill>
+                <a:latin typeface="Consolas"/>
+              </a:rPr>
+              <a:t>05 / 09</a:t>
+            </a:r>
+          </a:p>
+        </p:txBody>
+      </p:sp>
+      <p:sp>
+        <p:nvSpPr>
+          <p:cNvPr id="4" name="Rectangle 3"/>
           <p:cNvSpPr/>
           <p:nvPr/>
         </p:nvSpPr>
         <p:spPr>
           <a:xfrm>
-            <a:off x="6583680" y="1645920"/>
-            <a:ext cx="4846320" cy="1234440"/>
-          </a:xfrm>
-          <a:prstGeom prst="roundRect">
-            <a:avLst>
-              <a:gd name="adj" fmla="val 8000"/>
-            </a:avLst>
+            <a:off x="640080" y="502920"/>
+            <a:ext cx="10881360" cy="15240"/>
+          </a:xfrm>
+          <a:prstGeom prst="rect">
+            <a:avLst/>
           </a:prstGeom>
           <a:solidFill>
-            <a:srgbClr val="FFFFFF"/>
+            <a:srgbClr val="2A313B"/>
           </a:solidFill>
           <a:ln>
-            <a:solidFill>
-              <a:srgbClr val="CBD5E1"/>
-            </a:solidFill>
+            <a:noFill/>
           </a:ln>
         </p:spPr>
         <p:style>
@@ -5203,14 +5790,14 @@
       </p:sp>
       <p:sp>
         <p:nvSpPr>
-          <p:cNvPr id="8" name="TextBox 7"/>
+          <p:cNvPr id="5" name="TextBox 4"/>
           <p:cNvSpPr txBox="1"/>
           <p:nvPr/>
         </p:nvSpPr>
         <p:spPr>
           <a:xfrm>
-            <a:off x="6858000" y="1874520"/>
-            <a:ext cx="4389120" cy="411480"/>
+            <a:off x="640080" y="777240"/>
+            <a:ext cx="10972800" cy="320040"/>
           </a:xfrm>
           <a:prstGeom prst="rect">
             <a:avLst/>
@@ -5225,31 +5812,31 @@
           <a:p>
             <a:pPr algn="l">
               <a:spcAft>
-                <a:spcPts val="400"/>
+                <a:spcPts val="200"/>
               </a:spcAft>
             </a:pPr>
             <a:r>
-              <a:rPr sz="1800" b="1">
-                <a:solidFill>
-                  <a:srgbClr val="0B1F3A"/>
-                </a:solidFill>
-                <a:latin typeface="Calibri"/>
+              <a:rPr sz="1100" b="1">
+                <a:solidFill>
+                  <a:srgbClr val="4DA3FF"/>
+                </a:solidFill>
+                <a:latin typeface="Consolas"/>
               </a:rPr>
-              <a:t>LLM layer</a:t>
-            </a:r>
-          </a:p>
-        </p:txBody>
-      </p:sp>
-      <p:sp>
-        <p:nvSpPr>
-          <p:cNvPr id="9" name="TextBox 8"/>
+              <a:t>02  AI-ASSISTED RE</a:t>
+            </a:r>
+          </a:p>
+        </p:txBody>
+      </p:sp>
+      <p:sp>
+        <p:nvSpPr>
+          <p:cNvPr id="6" name="TextBox 5"/>
           <p:cNvSpPr txBox="1"/>
           <p:nvPr/>
         </p:nvSpPr>
         <p:spPr>
           <a:xfrm>
-            <a:off x="6858000" y="2286000"/>
-            <a:ext cx="4389120" cy="411480"/>
+            <a:off x="640080" y="1097280"/>
+            <a:ext cx="5943600" cy="914400"/>
           </a:xfrm>
           <a:prstGeom prst="rect">
             <a:avLst/>
@@ -5264,44 +5851,319 @@
           <a:p>
             <a:pPr algn="l">
               <a:spcAft>
-                <a:spcPts val="400"/>
+                <a:spcPts val="200"/>
               </a:spcAft>
             </a:pPr>
             <a:r>
-              <a:rPr sz="1500" b="0">
-                <a:solidFill>
-                  <a:srgbClr val="64748B"/>
-                </a:solidFill>
-                <a:latin typeface="Calibri"/>
+              <a:rPr sz="3400" b="1">
+                <a:solidFill>
+                  <a:srgbClr val="E8EAED"/>
+                </a:solidFill>
+                <a:latin typeface="Arial"/>
               </a:rPr>
-              <a:t>Rename · explain · refine</a:t>
-            </a:r>
-          </a:p>
-        </p:txBody>
-      </p:sp>
-      <p:sp>
-        <p:nvSpPr>
-          <p:cNvPr id="10" name="Rounded Rectangle 9"/>
+              <a:t>What got faster</a:t>
+            </a:r>
+          </a:p>
+        </p:txBody>
+      </p:sp>
+      <p:sp>
+        <p:nvSpPr>
+          <p:cNvPr id="7" name="TextBox 6"/>
+          <p:cNvSpPr txBox="1"/>
+          <p:nvPr/>
+        </p:nvSpPr>
+        <p:spPr>
+          <a:xfrm>
+            <a:off x="640080" y="2011680"/>
+            <a:ext cx="5303520" cy="3474720"/>
+          </a:xfrm>
+          <a:prstGeom prst="rect">
+            <a:avLst/>
+          </a:prstGeom>
+          <a:noFill/>
+        </p:spPr>
+        <p:txBody>
+          <a:bodyPr wrap="square">
+            <a:spAutoFit/>
+          </a:bodyPr>
+          <a:lstStyle/>
+          <a:p>
+            <a:pPr algn="l">
+              <a:spcAft>
+                <a:spcPts val="200"/>
+              </a:spcAft>
+            </a:pPr>
+            <a:r>
+              <a:rPr sz="1800" b="0">
+                <a:solidFill>
+                  <a:srgbClr val="9AA4B2"/>
+                </a:solidFill>
+                <a:latin typeface="Arial"/>
+              </a:rPr>
+              <a:t>Readable drafts in minutes,</a:t>
+            </a:r>
+          </a:p>
+          <a:p>
+            <a:pPr algn="l">
+              <a:spcAft>
+                <a:spcPts val="200"/>
+              </a:spcAft>
+            </a:pPr>
+            <a:r>
+              <a:rPr sz="1800" b="0">
+                <a:solidFill>
+                  <a:srgbClr val="9AA4B2"/>
+                </a:solidFill>
+                <a:latin typeface="Arial"/>
+              </a:rPr>
+              <a:t>not weeks of renaming.</a:t>
+            </a:r>
+          </a:p>
+          <a:p>
+            <a:pPr algn="l">
+              <a:spcAft>
+                <a:spcPts val="200"/>
+              </a:spcAft>
+            </a:pPr>
+            <a:r>
+              <a:rPr sz="1800" b="0">
+                <a:solidFill>
+                  <a:srgbClr val="9AA4B2"/>
+                </a:solidFill>
+                <a:latin typeface="Arial"/>
+              </a:rPr>
+              <a:t/>
+            </a:r>
+          </a:p>
+          <a:p>
+            <a:pPr algn="l">
+              <a:spcAft>
+                <a:spcPts val="200"/>
+              </a:spcAft>
+            </a:pPr>
+            <a:r>
+              <a:rPr sz="1800" b="0">
+                <a:solidFill>
+                  <a:srgbClr val="9AA4B2"/>
+                </a:solidFill>
+                <a:latin typeface="Arial"/>
+              </a:rPr>
+              <a:t>Agent loops automate</a:t>
+            </a:r>
+          </a:p>
+          <a:p>
+            <a:pPr algn="l">
+              <a:spcAft>
+                <a:spcPts val="200"/>
+              </a:spcAft>
+            </a:pPr>
+            <a:r>
+              <a:rPr sz="1800" b="0">
+                <a:solidFill>
+                  <a:srgbClr val="9AA4B2"/>
+                </a:solidFill>
+                <a:latin typeface="Arial"/>
+              </a:rPr>
+              <a:t>try → check → fix.</a:t>
+            </a:r>
+          </a:p>
+          <a:p>
+            <a:pPr algn="l">
+              <a:spcAft>
+                <a:spcPts val="200"/>
+              </a:spcAft>
+            </a:pPr>
+            <a:r>
+              <a:rPr sz="1800" b="0">
+                <a:solidFill>
+                  <a:srgbClr val="9AA4B2"/>
+                </a:solidFill>
+                <a:latin typeface="Arial"/>
+              </a:rPr>
+              <a:t/>
+            </a:r>
+          </a:p>
+          <a:p>
+            <a:pPr algn="l">
+              <a:spcAft>
+                <a:spcPts val="200"/>
+              </a:spcAft>
+            </a:pPr>
+            <a:r>
+              <a:rPr sz="1800" b="0">
+                <a:solidFill>
+                  <a:srgbClr val="9AA4B2"/>
+                </a:solidFill>
+                <a:latin typeface="Arial"/>
+              </a:rPr>
+              <a:t>Same tools. Compressed time.</a:t>
+            </a:r>
+          </a:p>
+          <a:p>
+            <a:pPr algn="l">
+              <a:spcAft>
+                <a:spcPts val="200"/>
+              </a:spcAft>
+            </a:pPr>
+            <a:r>
+              <a:rPr sz="1800" b="0">
+                <a:solidFill>
+                  <a:srgbClr val="9AA4B2"/>
+                </a:solidFill>
+                <a:latin typeface="Arial"/>
+              </a:rPr>
+              <a:t>Verification still required.</a:t>
+            </a:r>
+          </a:p>
+        </p:txBody>
+      </p:sp>
+      <p:pic>
+        <p:nvPicPr>
+          <p:cNvPr id="8" name="Picture 7" descr="diagram_ai_assisted.png"/>
+          <p:cNvPicPr>
+            <a:picLocks noChangeAspect="1"/>
+          </p:cNvPicPr>
+          <p:nvPr/>
+        </p:nvPicPr>
+        <p:blipFill>
+          <a:blip r:embed="rId2"/>
+          <a:stretch>
+            <a:fillRect/>
+          </a:stretch>
+        </p:blipFill>
+        <p:spPr>
+          <a:xfrm>
+            <a:off x="6400800" y="1463040"/>
+            <a:ext cx="5212080" cy="18341630"/>
+          </a:xfrm>
+          <a:prstGeom prst="rect">
+            <a:avLst/>
+          </a:prstGeom>
+        </p:spPr>
+      </p:pic>
+    </p:spTree>
+  </p:cSld>
+  <p:clrMapOvr>
+    <a:masterClrMapping/>
+  </p:clrMapOvr>
+</p:sld>
+</file>
+
+<file path=ppt/slides/slide6.xml><?xml version="1.0" encoding="utf-8"?>
+<p:sld xmlns:a="http://schemas.openxmlformats.org/drawingml/2006/main" xmlns:p="http://schemas.openxmlformats.org/presentationml/2006/main" xmlns:r="http://schemas.openxmlformats.org/officeDocument/2006/relationships">
+  <p:cSld>
+    <p:bg>
+      <p:bgPr>
+        <a:solidFill>
+          <a:srgbClr val="0E1116"/>
+        </a:solidFill>
+        <a:effectLst/>
+      </p:bgPr>
+    </p:bg>
+    <p:spTree>
+      <p:nvGrpSpPr>
+        <p:cNvPr id="1" name=""/>
+        <p:cNvGrpSpPr/>
+        <p:nvPr/>
+      </p:nvGrpSpPr>
+      <p:grpSpPr/>
+      <p:sp>
+        <p:nvSpPr>
+          <p:cNvPr id="2" name="TextBox 1"/>
+          <p:cNvSpPr txBox="1"/>
+          <p:nvPr/>
+        </p:nvSpPr>
+        <p:spPr>
+          <a:xfrm>
+            <a:off x="640080" y="201168"/>
+            <a:ext cx="5486400" cy="274320"/>
+          </a:xfrm>
+          <a:prstGeom prst="rect">
+            <a:avLst/>
+          </a:prstGeom>
+          <a:noFill/>
+        </p:spPr>
+        <p:txBody>
+          <a:bodyPr wrap="square">
+            <a:spAutoFit/>
+          </a:bodyPr>
+          <a:lstStyle/>
+          <a:p>
+            <a:pPr algn="l">
+              <a:spcAft>
+                <a:spcPts val="200"/>
+              </a:spcAft>
+            </a:pPr>
+            <a:r>
+              <a:rPr sz="1000" b="0">
+                <a:solidFill>
+                  <a:srgbClr val="5B6572"/>
+                </a:solidFill>
+                <a:latin typeface="Consolas"/>
+              </a:rPr>
+              <a:t>AI-POWERED REVERSE ENGINEERING</a:t>
+            </a:r>
+          </a:p>
+        </p:txBody>
+      </p:sp>
+      <p:sp>
+        <p:nvSpPr>
+          <p:cNvPr id="3" name="TextBox 2"/>
+          <p:cNvSpPr txBox="1"/>
+          <p:nvPr/>
+        </p:nvSpPr>
+        <p:spPr>
+          <a:xfrm>
+            <a:off x="10241280" y="201168"/>
+            <a:ext cx="1280160" cy="274320"/>
+          </a:xfrm>
+          <a:prstGeom prst="rect">
+            <a:avLst/>
+          </a:prstGeom>
+          <a:noFill/>
+        </p:spPr>
+        <p:txBody>
+          <a:bodyPr wrap="square">
+            <a:spAutoFit/>
+          </a:bodyPr>
+          <a:lstStyle/>
+          <a:p>
+            <a:pPr algn="r">
+              <a:spcAft>
+                <a:spcPts val="200"/>
+              </a:spcAft>
+            </a:pPr>
+            <a:r>
+              <a:rPr sz="1000" b="0">
+                <a:solidFill>
+                  <a:srgbClr val="5B6572"/>
+                </a:solidFill>
+                <a:latin typeface="Consolas"/>
+              </a:rPr>
+              <a:t>06 / 09</a:t>
+            </a:r>
+          </a:p>
+        </p:txBody>
+      </p:sp>
+      <p:sp>
+        <p:nvSpPr>
+          <p:cNvPr id="4" name="Rectangle 3"/>
           <p:cNvSpPr/>
           <p:nvPr/>
         </p:nvSpPr>
         <p:spPr>
           <a:xfrm>
-            <a:off x="6583680" y="3063240"/>
-            <a:ext cx="4846320" cy="1234440"/>
-          </a:xfrm>
-          <a:prstGeom prst="roundRect">
-            <a:avLst>
-              <a:gd name="adj" fmla="val 8000"/>
-            </a:avLst>
+            <a:off x="640080" y="502920"/>
+            <a:ext cx="10881360" cy="15240"/>
+          </a:xfrm>
+          <a:prstGeom prst="rect">
+            <a:avLst/>
           </a:prstGeom>
           <a:solidFill>
-            <a:srgbClr val="FFFFFF"/>
+            <a:srgbClr val="2A313B"/>
           </a:solidFill>
           <a:ln>
-            <a:solidFill>
-              <a:srgbClr val="CBD5E1"/>
-            </a:solidFill>
+            <a:noFill/>
           </a:ln>
         </p:spPr>
         <p:style>
@@ -5328,14 +6190,14 @@
       </p:sp>
       <p:sp>
         <p:nvSpPr>
-          <p:cNvPr id="11" name="TextBox 10"/>
+          <p:cNvPr id="5" name="TextBox 4"/>
           <p:cNvSpPr txBox="1"/>
           <p:nvPr/>
         </p:nvSpPr>
         <p:spPr>
           <a:xfrm>
-            <a:off x="6858000" y="3291840"/>
-            <a:ext cx="4389120" cy="411480"/>
+            <a:off x="640080" y="777240"/>
+            <a:ext cx="10972800" cy="320040"/>
           </a:xfrm>
           <a:prstGeom prst="rect">
             <a:avLst/>
@@ -5350,31 +6212,31 @@
           <a:p>
             <a:pPr algn="l">
               <a:spcAft>
-                <a:spcPts val="400"/>
+                <a:spcPts val="200"/>
               </a:spcAft>
             </a:pPr>
             <a:r>
-              <a:rPr sz="1800" b="1">
-                <a:solidFill>
-                  <a:srgbClr val="0B1F3A"/>
-                </a:solidFill>
-                <a:latin typeface="Calibri"/>
+              <a:rPr sz="1100" b="1">
+                <a:solidFill>
+                  <a:srgbClr val="4DA3FF"/>
+                </a:solidFill>
+                <a:latin typeface="Consolas"/>
               </a:rPr>
-              <a:t>Tool bridges</a:t>
-            </a:r>
-          </a:p>
-        </p:txBody>
-      </p:sp>
-      <p:sp>
-        <p:nvSpPr>
-          <p:cNvPr id="12" name="TextBox 11"/>
+              <a:t>03  CASE STUDY</a:t>
+            </a:r>
+          </a:p>
+        </p:txBody>
+      </p:sp>
+      <p:sp>
+        <p:nvSpPr>
+          <p:cNvPr id="6" name="TextBox 5"/>
           <p:cNvSpPr txBox="1"/>
           <p:nvPr/>
         </p:nvSpPr>
         <p:spPr>
           <a:xfrm>
-            <a:off x="6858000" y="3703320"/>
-            <a:ext cx="4389120" cy="411480"/>
+            <a:off x="640080" y="1234440"/>
+            <a:ext cx="10972800" cy="1188720"/>
           </a:xfrm>
           <a:prstGeom prst="rect">
             <a:avLst/>
@@ -5389,44 +6251,279 @@
           <a:p>
             <a:pPr algn="l">
               <a:spcAft>
-                <a:spcPts val="400"/>
+                <a:spcPts val="200"/>
               </a:spcAft>
             </a:pPr>
             <a:r>
-              <a:rPr sz="1500" b="0">
-                <a:solidFill>
-                  <a:srgbClr val="64748B"/>
-                </a:solidFill>
-                <a:latin typeface="Calibri"/>
+              <a:rPr sz="3400" b="1">
+                <a:solidFill>
+                  <a:srgbClr val="E8EAED"/>
+                </a:solidFill>
+                <a:latin typeface="Arial"/>
               </a:rPr>
-              <a:t>Connect AI to Ghidra / IDA</a:t>
-            </a:r>
-          </a:p>
-        </p:txBody>
-      </p:sp>
-      <p:sp>
-        <p:nvSpPr>
-          <p:cNvPr id="13" name="Rounded Rectangle 12"/>
+              <a:t>Case study: modifying compiled</a:t>
+            </a:r>
+          </a:p>
+          <a:p>
+            <a:pPr algn="l">
+              <a:spcAft>
+                <a:spcPts val="200"/>
+              </a:spcAft>
+            </a:pPr>
+            <a:r>
+              <a:rPr sz="3400" b="1">
+                <a:solidFill>
+                  <a:srgbClr val="E8EAED"/>
+                </a:solidFill>
+                <a:latin typeface="Arial"/>
+              </a:rPr>
+              <a:t>video games without source.</a:t>
+            </a:r>
+          </a:p>
+        </p:txBody>
+      </p:sp>
+      <p:sp>
+        <p:nvSpPr>
+          <p:cNvPr id="7" name="TextBox 6"/>
+          <p:cNvSpPr txBox="1"/>
+          <p:nvPr/>
+        </p:nvSpPr>
+        <p:spPr>
+          <a:xfrm>
+            <a:off x="640080" y="2926080"/>
+            <a:ext cx="10515600" cy="2560320"/>
+          </a:xfrm>
+          <a:prstGeom prst="rect">
+            <a:avLst/>
+          </a:prstGeom>
+          <a:noFill/>
+        </p:spPr>
+        <p:txBody>
+          <a:bodyPr wrap="square">
+            <a:spAutoFit/>
+          </a:bodyPr>
+          <a:lstStyle/>
+          <a:p>
+            <a:pPr algn="l">
+              <a:spcAft>
+                <a:spcPts val="200"/>
+              </a:spcAft>
+            </a:pPr>
+            <a:r>
+              <a:rPr sz="1800" b="0">
+                <a:solidFill>
+                  <a:srgbClr val="9AA4B2"/>
+                </a:solidFill>
+                <a:latin typeface="Arial"/>
+              </a:rPr>
+              <a:t>Games ship as closed, optimized binaries with thin official APIs.</a:t>
+            </a:r>
+          </a:p>
+          <a:p>
+            <a:pPr algn="l">
+              <a:spcAft>
+                <a:spcPts val="200"/>
+              </a:spcAft>
+            </a:pPr>
+            <a:r>
+              <a:rPr sz="1800" b="0">
+                <a:solidFill>
+                  <a:srgbClr val="9AA4B2"/>
+                </a:solidFill>
+                <a:latin typeface="Arial"/>
+              </a:rPr>
+              <a:t>Deep changes need reverse engineering of the executable itself.</a:t>
+            </a:r>
+          </a:p>
+          <a:p>
+            <a:pPr algn="l">
+              <a:spcAft>
+                <a:spcPts val="200"/>
+              </a:spcAft>
+            </a:pPr>
+            <a:r>
+              <a:rPr sz="1800" b="0">
+                <a:solidFill>
+                  <a:srgbClr val="9AA4B2"/>
+                </a:solidFill>
+                <a:latin typeface="Arial"/>
+              </a:rPr>
+              <a:t/>
+            </a:r>
+          </a:p>
+          <a:p>
+            <a:pPr algn="l">
+              <a:spcAft>
+                <a:spcPts val="200"/>
+              </a:spcAft>
+            </a:pPr>
+            <a:r>
+              <a:rPr sz="1800" b="0">
+                <a:solidFill>
+                  <a:srgbClr val="9AA4B2"/>
+                </a:solidFill>
+                <a:latin typeface="Arial"/>
+              </a:rPr>
+              <a:t>Recent work combines systems from different games at runtime —</a:t>
+            </a:r>
+          </a:p>
+          <a:p>
+            <a:pPr algn="l">
+              <a:spcAft>
+                <a:spcPts val="200"/>
+              </a:spcAft>
+            </a:pPr>
+            <a:r>
+              <a:rPr sz="1800" b="0">
+                <a:solidFill>
+                  <a:srgbClr val="9AA4B2"/>
+                </a:solidFill>
+                <a:latin typeface="Arial"/>
+              </a:rPr>
+              <a:t>not by rewriting engines, but by bridging two live compiled processes.</a:t>
+            </a:r>
+          </a:p>
+          <a:p>
+            <a:pPr algn="l">
+              <a:spcAft>
+                <a:spcPts val="200"/>
+              </a:spcAft>
+            </a:pPr>
+            <a:r>
+              <a:rPr sz="1800" b="0">
+                <a:solidFill>
+                  <a:srgbClr val="9AA4B2"/>
+                </a:solidFill>
+                <a:latin typeface="Arial"/>
+              </a:rPr>
+              <a:t>AI made that glue work comparatively practical.</a:t>
+            </a:r>
+          </a:p>
+        </p:txBody>
+      </p:sp>
+    </p:spTree>
+  </p:cSld>
+  <p:clrMapOvr>
+    <a:masterClrMapping/>
+  </p:clrMapOvr>
+</p:sld>
+</file>
+
+<file path=ppt/slides/slide7.xml><?xml version="1.0" encoding="utf-8"?>
+<p:sld xmlns:a="http://schemas.openxmlformats.org/drawingml/2006/main" xmlns:p="http://schemas.openxmlformats.org/presentationml/2006/main" xmlns:r="http://schemas.openxmlformats.org/officeDocument/2006/relationships">
+  <p:cSld>
+    <p:bg>
+      <p:bgPr>
+        <a:solidFill>
+          <a:srgbClr val="0E1116"/>
+        </a:solidFill>
+        <a:effectLst/>
+      </p:bgPr>
+    </p:bg>
+    <p:spTree>
+      <p:nvGrpSpPr>
+        <p:cNvPr id="1" name=""/>
+        <p:cNvGrpSpPr/>
+        <p:nvPr/>
+      </p:nvGrpSpPr>
+      <p:grpSpPr/>
+      <p:sp>
+        <p:nvSpPr>
+          <p:cNvPr id="2" name="TextBox 1"/>
+          <p:cNvSpPr txBox="1"/>
+          <p:nvPr/>
+        </p:nvSpPr>
+        <p:spPr>
+          <a:xfrm>
+            <a:off x="640080" y="201168"/>
+            <a:ext cx="5486400" cy="274320"/>
+          </a:xfrm>
+          <a:prstGeom prst="rect">
+            <a:avLst/>
+          </a:prstGeom>
+          <a:noFill/>
+        </p:spPr>
+        <p:txBody>
+          <a:bodyPr wrap="square">
+            <a:spAutoFit/>
+          </a:bodyPr>
+          <a:lstStyle/>
+          <a:p>
+            <a:pPr algn="l">
+              <a:spcAft>
+                <a:spcPts val="200"/>
+              </a:spcAft>
+            </a:pPr>
+            <a:r>
+              <a:rPr sz="1000" b="0">
+                <a:solidFill>
+                  <a:srgbClr val="5B6572"/>
+                </a:solidFill>
+                <a:latin typeface="Consolas"/>
+              </a:rPr>
+              <a:t>AI-POWERED REVERSE ENGINEERING</a:t>
+            </a:r>
+          </a:p>
+        </p:txBody>
+      </p:sp>
+      <p:sp>
+        <p:nvSpPr>
+          <p:cNvPr id="3" name="TextBox 2"/>
+          <p:cNvSpPr txBox="1"/>
+          <p:nvPr/>
+        </p:nvSpPr>
+        <p:spPr>
+          <a:xfrm>
+            <a:off x="10241280" y="201168"/>
+            <a:ext cx="1280160" cy="274320"/>
+          </a:xfrm>
+          <a:prstGeom prst="rect">
+            <a:avLst/>
+          </a:prstGeom>
+          <a:noFill/>
+        </p:spPr>
+        <p:txBody>
+          <a:bodyPr wrap="square">
+            <a:spAutoFit/>
+          </a:bodyPr>
+          <a:lstStyle/>
+          <a:p>
+            <a:pPr algn="r">
+              <a:spcAft>
+                <a:spcPts val="200"/>
+              </a:spcAft>
+            </a:pPr>
+            <a:r>
+              <a:rPr sz="1000" b="0">
+                <a:solidFill>
+                  <a:srgbClr val="5B6572"/>
+                </a:solidFill>
+                <a:latin typeface="Consolas"/>
+              </a:rPr>
+              <a:t>07 / 09</a:t>
+            </a:r>
+          </a:p>
+        </p:txBody>
+      </p:sp>
+      <p:sp>
+        <p:nvSpPr>
+          <p:cNvPr id="4" name="Rectangle 3"/>
           <p:cNvSpPr/>
           <p:nvPr/>
         </p:nvSpPr>
         <p:spPr>
           <a:xfrm>
-            <a:off x="6583680" y="4480560"/>
-            <a:ext cx="4846320" cy="1234440"/>
-          </a:xfrm>
-          <a:prstGeom prst="roundRect">
-            <a:avLst>
-              <a:gd name="adj" fmla="val 8000"/>
-            </a:avLst>
+            <a:off x="640080" y="502920"/>
+            <a:ext cx="10881360" cy="15240"/>
+          </a:xfrm>
+          <a:prstGeom prst="rect">
+            <a:avLst/>
           </a:prstGeom>
           <a:solidFill>
-            <a:srgbClr val="FFFFFF"/>
+            <a:srgbClr val="2A313B"/>
           </a:solidFill>
           <a:ln>
-            <a:solidFill>
-              <a:srgbClr val="CBD5E1"/>
-            </a:solidFill>
+            <a:noFill/>
           </a:ln>
         </p:spPr>
         <p:style>
@@ -5453,14 +6550,14 @@
       </p:sp>
       <p:sp>
         <p:nvSpPr>
-          <p:cNvPr id="14" name="TextBox 13"/>
+          <p:cNvPr id="5" name="TextBox 4"/>
           <p:cNvSpPr txBox="1"/>
           <p:nvPr/>
         </p:nvSpPr>
         <p:spPr>
           <a:xfrm>
-            <a:off x="6858000" y="4709160"/>
-            <a:ext cx="4389120" cy="411480"/>
+            <a:off x="640080" y="777240"/>
+            <a:ext cx="10972800" cy="320040"/>
           </a:xfrm>
           <a:prstGeom prst="rect">
             <a:avLst/>
@@ -5475,31 +6572,31 @@
           <a:p>
             <a:pPr algn="l">
               <a:spcAft>
-                <a:spcPts val="400"/>
+                <a:spcPts val="200"/>
               </a:spcAft>
             </a:pPr>
             <a:r>
-              <a:rPr sz="1800" b="1">
-                <a:solidFill>
-                  <a:srgbClr val="0B1F3A"/>
-                </a:solidFill>
-                <a:latin typeface="Calibri"/>
+              <a:rPr sz="1100" b="1">
+                <a:solidFill>
+                  <a:srgbClr val="4DA3FF"/>
+                </a:solidFill>
+                <a:latin typeface="Consolas"/>
               </a:rPr>
-              <a:t>Agent loops</a:t>
-            </a:r>
-          </a:p>
-        </p:txBody>
-      </p:sp>
-      <p:sp>
-        <p:nvSpPr>
-          <p:cNvPr id="15" name="TextBox 14"/>
+              <a:t>03  CASE STUDY</a:t>
+            </a:r>
+          </a:p>
+        </p:txBody>
+      </p:sp>
+      <p:sp>
+        <p:nvSpPr>
+          <p:cNvPr id="6" name="TextBox 5"/>
           <p:cNvSpPr txBox="1"/>
           <p:nvPr/>
         </p:nvSpPr>
         <p:spPr>
           <a:xfrm>
-            <a:off x="6858000" y="5120640"/>
-            <a:ext cx="4389120" cy="411480"/>
+            <a:off x="640080" y="1097280"/>
+            <a:ext cx="10972800" cy="640080"/>
           </a:xfrm>
           <a:prstGeom prst="rect">
             <a:avLst/>
@@ -5514,17 +6611,112 @@
           <a:p>
             <a:pPr algn="l">
               <a:spcAft>
-                <a:spcPts val="400"/>
+                <a:spcPts val="200"/>
               </a:spcAft>
             </a:pPr>
             <a:r>
-              <a:rPr sz="1500" b="0">
-                <a:solidFill>
-                  <a:srgbClr val="64748B"/>
-                </a:solidFill>
-                <a:latin typeface="Calibri"/>
+              <a:rPr sz="3200" b="1">
+                <a:solidFill>
+                  <a:srgbClr val="E8EAED"/>
+                </a:solidFill>
+                <a:latin typeface="Arial"/>
               </a:rPr>
-              <a:t>Iterate until checks pass</a:t>
+              <a:t>How the bridge works</a:t>
+            </a:r>
+          </a:p>
+        </p:txBody>
+      </p:sp>
+      <p:pic>
+        <p:nvPicPr>
+          <p:cNvPr id="7" name="Picture 6" descr="diagram_case_study.png"/>
+          <p:cNvPicPr>
+            <a:picLocks noChangeAspect="1"/>
+          </p:cNvPicPr>
+          <p:nvPr/>
+        </p:nvPicPr>
+        <p:blipFill>
+          <a:blip r:embed="rId2"/>
+          <a:stretch>
+            <a:fillRect/>
+          </a:stretch>
+        </p:blipFill>
+        <p:spPr>
+          <a:xfrm>
+            <a:off x="822960" y="1920240"/>
+            <a:ext cx="10424160" cy="2873159"/>
+          </a:xfrm>
+          <a:prstGeom prst="rect">
+            <a:avLst/>
+          </a:prstGeom>
+        </p:spPr>
+      </p:pic>
+      <p:sp>
+        <p:nvSpPr>
+          <p:cNvPr id="8" name="TextBox 7"/>
+          <p:cNvSpPr txBox="1"/>
+          <p:nvPr/>
+        </p:nvSpPr>
+        <p:spPr>
+          <a:xfrm>
+            <a:off x="640080" y="5212080"/>
+            <a:ext cx="10972800" cy="1097280"/>
+          </a:xfrm>
+          <a:prstGeom prst="rect">
+            <a:avLst/>
+          </a:prstGeom>
+          <a:noFill/>
+        </p:spPr>
+        <p:txBody>
+          <a:bodyPr wrap="square">
+            <a:spAutoFit/>
+          </a:bodyPr>
+          <a:lstStyle/>
+          <a:p>
+            <a:pPr algn="l">
+              <a:spcAft>
+                <a:spcPts val="200"/>
+              </a:spcAft>
+            </a:pPr>
+            <a:r>
+              <a:rPr sz="1600" b="0">
+                <a:solidFill>
+                  <a:srgbClr val="9AA4B2"/>
+                </a:solidFill>
+                <a:latin typeface="Arial"/>
+              </a:rPr>
+              <a:t>Guest and host stay as real binaries. A thin bridge exchanges camera,</a:t>
+            </a:r>
+          </a:p>
+          <a:p>
+            <a:pPr algn="l">
+              <a:spcAft>
+                <a:spcPts val="200"/>
+              </a:spcAft>
+            </a:pPr>
+            <a:r>
+              <a:rPr sz="1600" b="0">
+                <a:solidFill>
+                  <a:srgbClr val="9AA4B2"/>
+                </a:solidFill>
+                <a:latin typeface="Arial"/>
+              </a:rPr>
+              <a:t>collision, and events over shared memory — then composites one frame.</a:t>
+            </a:r>
+          </a:p>
+          <a:p>
+            <a:pPr algn="l">
+              <a:spcAft>
+                <a:spcPts val="200"/>
+              </a:spcAft>
+            </a:pPr>
+            <a:r>
+              <a:rPr sz="1600" b="0">
+                <a:solidFill>
+                  <a:srgbClr val="9AA4B2"/>
+                </a:solidFill>
+                <a:latin typeface="Arial"/>
+              </a:rPr>
+              <a:t>AI drafts hooks and protocols. Classical RE validates the bytes.</a:t>
             </a:r>
           </a:p>
         </p:txBody>
@@ -5537,13 +6729,13 @@
 </p:sld>
 </file>
 
-<file path=ppt/slides/slide5.xml><?xml version="1.0" encoding="utf-8"?>
+<file path=ppt/slides/slide8.xml><?xml version="1.0" encoding="utf-8"?>
 <p:sld xmlns:a="http://schemas.openxmlformats.org/drawingml/2006/main" xmlns:p="http://schemas.openxmlformats.org/presentationml/2006/main" xmlns:r="http://schemas.openxmlformats.org/officeDocument/2006/relationships">
   <p:cSld>
     <p:bg>
       <p:bgPr>
         <a:solidFill>
-          <a:srgbClr val="F8FAFC"/>
+          <a:srgbClr val="0E1116"/>
         </a:solidFill>
         <a:effectLst/>
       </p:bgPr>
@@ -5557,20 +6749,98 @@
       <p:grpSpPr/>
       <p:sp>
         <p:nvSpPr>
-          <p:cNvPr id="2" name="Rectangle 1"/>
+          <p:cNvPr id="2" name="TextBox 1"/>
+          <p:cNvSpPr txBox="1"/>
+          <p:nvPr/>
+        </p:nvSpPr>
+        <p:spPr>
+          <a:xfrm>
+            <a:off x="640080" y="201168"/>
+            <a:ext cx="5486400" cy="274320"/>
+          </a:xfrm>
+          <a:prstGeom prst="rect">
+            <a:avLst/>
+          </a:prstGeom>
+          <a:noFill/>
+        </p:spPr>
+        <p:txBody>
+          <a:bodyPr wrap="square">
+            <a:spAutoFit/>
+          </a:bodyPr>
+          <a:lstStyle/>
+          <a:p>
+            <a:pPr algn="l">
+              <a:spcAft>
+                <a:spcPts val="200"/>
+              </a:spcAft>
+            </a:pPr>
+            <a:r>
+              <a:rPr sz="1000" b="0">
+                <a:solidFill>
+                  <a:srgbClr val="5B6572"/>
+                </a:solidFill>
+                <a:latin typeface="Consolas"/>
+              </a:rPr>
+              <a:t>AI-POWERED REVERSE ENGINEERING</a:t>
+            </a:r>
+          </a:p>
+        </p:txBody>
+      </p:sp>
+      <p:sp>
+        <p:nvSpPr>
+          <p:cNvPr id="3" name="TextBox 2"/>
+          <p:cNvSpPr txBox="1"/>
+          <p:nvPr/>
+        </p:nvSpPr>
+        <p:spPr>
+          <a:xfrm>
+            <a:off x="10241280" y="201168"/>
+            <a:ext cx="1280160" cy="274320"/>
+          </a:xfrm>
+          <a:prstGeom prst="rect">
+            <a:avLst/>
+          </a:prstGeom>
+          <a:noFill/>
+        </p:spPr>
+        <p:txBody>
+          <a:bodyPr wrap="square">
+            <a:spAutoFit/>
+          </a:bodyPr>
+          <a:lstStyle/>
+          <a:p>
+            <a:pPr algn="r">
+              <a:spcAft>
+                <a:spcPts val="200"/>
+              </a:spcAft>
+            </a:pPr>
+            <a:r>
+              <a:rPr sz="1000" b="0">
+                <a:solidFill>
+                  <a:srgbClr val="5B6572"/>
+                </a:solidFill>
+                <a:latin typeface="Consolas"/>
+              </a:rPr>
+              <a:t>08 / 09</a:t>
+            </a:r>
+          </a:p>
+        </p:txBody>
+      </p:sp>
+      <p:sp>
+        <p:nvSpPr>
+          <p:cNvPr id="4" name="Rectangle 3"/>
           <p:cNvSpPr/>
           <p:nvPr/>
         </p:nvSpPr>
         <p:spPr>
           <a:xfrm>
-            <a:off x="0" y="0"/>
-            <a:ext cx="91440" cy="6858000"/>
+            <a:off x="640080" y="502920"/>
+            <a:ext cx="10881360" cy="15240"/>
           </a:xfrm>
           <a:prstGeom prst="rect">
             <a:avLst/>
           </a:prstGeom>
           <a:solidFill>
-            <a:srgbClr val="1F7A8C"/>
+            <a:srgbClr val="2A313B"/>
           </a:solidFill>
           <a:ln>
             <a:noFill/>
@@ -5600,14 +6870,14 @@
       </p:sp>
       <p:sp>
         <p:nvSpPr>
-          <p:cNvPr id="3" name="TextBox 2"/>
+          <p:cNvPr id="5" name="TextBox 4"/>
           <p:cNvSpPr txBox="1"/>
           <p:nvPr/>
         </p:nvSpPr>
         <p:spPr>
           <a:xfrm>
-            <a:off x="457200" y="256032"/>
-            <a:ext cx="11155680" cy="640080"/>
+            <a:off x="640080" y="777240"/>
+            <a:ext cx="10972800" cy="320040"/>
           </a:xfrm>
           <a:prstGeom prst="rect">
             <a:avLst/>
@@ -5622,31 +6892,31 @@
           <a:p>
             <a:pPr algn="l">
               <a:spcAft>
-                <a:spcPts val="400"/>
+                <a:spcPts val="200"/>
               </a:spcAft>
             </a:pPr>
             <a:r>
-              <a:rPr sz="2800" b="1">
-                <a:solidFill>
-                  <a:srgbClr val="0B1F3A"/>
-                </a:solidFill>
-                <a:latin typeface="Calibri"/>
+              <a:rPr sz="1100" b="1">
+                <a:solidFill>
+                  <a:srgbClr val="4DA3FF"/>
+                </a:solidFill>
+                <a:latin typeface="Consolas"/>
               </a:rPr>
-              <a:t>How AI Made Reverse Engineering Much Faster</a:t>
-            </a:r>
-          </a:p>
-        </p:txBody>
-      </p:sp>
-      <p:sp>
-        <p:nvSpPr>
-          <p:cNvPr id="4" name="TextBox 3"/>
+              <a:t>04  LIMITS</a:t>
+            </a:r>
+          </a:p>
+        </p:txBody>
+      </p:sp>
+      <p:sp>
+        <p:nvSpPr>
+          <p:cNvPr id="6" name="TextBox 5"/>
           <p:cNvSpPr txBox="1"/>
           <p:nvPr/>
         </p:nvSpPr>
         <p:spPr>
           <a:xfrm>
-            <a:off x="457200" y="868680"/>
-            <a:ext cx="11155680" cy="411480"/>
+            <a:off x="640080" y="1143000"/>
+            <a:ext cx="10972800" cy="640080"/>
           </a:xfrm>
           <a:prstGeom prst="rect">
             <a:avLst/>
@@ -5661,40 +6931,44 @@
           <a:p>
             <a:pPr algn="l">
               <a:spcAft>
-                <a:spcPts val="400"/>
+                <a:spcPts val="200"/>
               </a:spcAft>
             </a:pPr>
             <a:r>
-              <a:rPr sz="1500" b="0">
-                <a:solidFill>
-                  <a:srgbClr val="64748B"/>
-                </a:solidFill>
-                <a:latin typeface="Calibri"/>
+              <a:rPr sz="3400" b="1">
+                <a:solidFill>
+                  <a:srgbClr val="E8EAED"/>
+                </a:solidFill>
+                <a:latin typeface="Arial"/>
               </a:rPr>
-              <a:t>Same foundation — compressed analysis time</a:t>
-            </a:r>
-          </a:p>
-        </p:txBody>
-      </p:sp>
-      <p:sp>
-        <p:nvSpPr>
-          <p:cNvPr id="5" name="Rectangle 4"/>
+              <a:t>Faster is not unrestricted.</a:t>
+            </a:r>
+          </a:p>
+        </p:txBody>
+      </p:sp>
+      <p:sp>
+        <p:nvSpPr>
+          <p:cNvPr id="7" name="Rounded Rectangle 6"/>
           <p:cNvSpPr/>
           <p:nvPr/>
         </p:nvSpPr>
         <p:spPr>
           <a:xfrm>
-            <a:off x="457200" y="1280160"/>
-            <a:ext cx="11155680" cy="18288"/>
-          </a:xfrm>
-          <a:prstGeom prst="rect">
-            <a:avLst/>
+            <a:off x="640080" y="2103120"/>
+            <a:ext cx="5394960" cy="1691640"/>
+          </a:xfrm>
+          <a:prstGeom prst="roundRect">
+            <a:avLst>
+              <a:gd name="adj" fmla="val 6000"/>
+            </a:avLst>
           </a:prstGeom>
           <a:solidFill>
-            <a:srgbClr val="CBD5E1"/>
+            <a:srgbClr val="171B22"/>
           </a:solidFill>
-          <a:ln>
-            <a:noFill/>
+          <a:ln w="12700">
+            <a:solidFill>
+              <a:srgbClr val="2A313B"/>
+            </a:solidFill>
           </a:ln>
         </p:spPr>
         <p:style>
@@ -5719,40 +6993,16 @@
           </a:p>
         </p:txBody>
       </p:sp>
-      <p:pic>
-        <p:nvPicPr>
-          <p:cNvPr id="6" name="Picture 5" descr="diagram_ai_assisted.png"/>
-          <p:cNvPicPr>
-            <a:picLocks noChangeAspect="1"/>
-          </p:cNvPicPr>
-          <p:nvPr/>
-        </p:nvPicPr>
-        <p:blipFill>
-          <a:blip r:embed="rId2"/>
-          <a:stretch>
-            <a:fillRect/>
-          </a:stretch>
-        </p:blipFill>
-        <p:spPr>
-          <a:xfrm>
-            <a:off x="365760" y="1417320"/>
-            <a:ext cx="6583680" cy="23317894"/>
-          </a:xfrm>
-          <a:prstGeom prst="rect">
-            <a:avLst/>
-          </a:prstGeom>
-        </p:spPr>
-      </p:pic>
-      <p:sp>
-        <p:nvSpPr>
-          <p:cNvPr id="7" name="TextBox 6"/>
+      <p:sp>
+        <p:nvSpPr>
+          <p:cNvPr id="8" name="TextBox 7"/>
           <p:cNvSpPr txBox="1"/>
           <p:nvPr/>
         </p:nvSpPr>
         <p:spPr>
           <a:xfrm>
-            <a:off x="6949440" y="1645920"/>
-            <a:ext cx="4754880" cy="4572000"/>
+            <a:off x="960120" y="2423160"/>
+            <a:ext cx="4754880" cy="365760"/>
           </a:xfrm>
           <a:prstGeom prst="rect">
             <a:avLst/>
@@ -5767,114 +7017,83 @@
           <a:p>
             <a:pPr algn="l">
               <a:spcAft>
-                <a:spcPts val="800"/>
+                <a:spcPts val="200"/>
               </a:spcAft>
             </a:pPr>
             <a:r>
-              <a:rPr sz="1600">
-                <a:solidFill>
-                  <a:srgbClr val="334155"/>
-                </a:solidFill>
-                <a:latin typeface="Calibri"/>
+              <a:rPr sz="1600" b="1">
+                <a:solidFill>
+                  <a:srgbClr val="4DA3FF"/>
+                </a:solidFill>
+                <a:latin typeface="Consolas"/>
               </a:rPr>
-              <a:t>•  Readable drafts in minutes instead of long manual renaming sessions.</a:t>
-            </a:r>
-          </a:p>
+              <a:t>Correctness</a:t>
+            </a:r>
+          </a:p>
+        </p:txBody>
+      </p:sp>
+      <p:sp>
+        <p:nvSpPr>
+          <p:cNvPr id="9" name="TextBox 8"/>
+          <p:cNvSpPr txBox="1"/>
+          <p:nvPr/>
+        </p:nvSpPr>
+        <p:spPr>
+          <a:xfrm>
+            <a:off x="960120" y="2926080"/>
+            <a:ext cx="4754880" cy="640080"/>
+          </a:xfrm>
+          <a:prstGeom prst="rect">
+            <a:avLst/>
+          </a:prstGeom>
+          <a:noFill/>
+        </p:spPr>
+        <p:txBody>
+          <a:bodyPr wrap="square">
+            <a:spAutoFit/>
+          </a:bodyPr>
+          <a:lstStyle/>
           <a:p>
             <a:pPr algn="l">
               <a:spcAft>
-                <a:spcPts val="800"/>
+                <a:spcPts val="200"/>
               </a:spcAft>
             </a:pPr>
             <a:r>
-              <a:rPr sz="1600">
-                <a:solidFill>
-                  <a:srgbClr val="334155"/>
-                </a:solidFill>
-                <a:latin typeface="Calibri"/>
+              <a:rPr sz="1500" b="0">
+                <a:solidFill>
+                  <a:srgbClr val="9AA4B2"/>
+                </a:solidFill>
+                <a:latin typeface="Arial"/>
               </a:rPr>
-              <a:t>•  Research models show large gains when LLMs refine classical decompiler output.</a:t>
-            </a:r>
-          </a:p>
-          <a:p>
-            <a:pPr algn="l">
-              <a:spcAft>
-                <a:spcPts val="800"/>
-              </a:spcAft>
-            </a:pPr>
-            <a:r>
-              <a:rPr sz="1600">
-                <a:solidFill>
-                  <a:srgbClr val="334155"/>
-                </a:solidFill>
-                <a:latin typeface="Calibri"/>
-              </a:rPr>
-              <a:t>•  Agents automate the try → check → fix loop for many functions.</a:t>
-            </a:r>
-          </a:p>
-          <a:p>
-            <a:pPr algn="l">
-              <a:spcAft>
-                <a:spcPts val="800"/>
-              </a:spcAft>
-            </a:pPr>
-            <a:r>
-              <a:rPr sz="1600">
-                <a:solidFill>
-                  <a:srgbClr val="334155"/>
-                </a:solidFill>
-                <a:latin typeface="Calibri"/>
-              </a:rPr>
-              <a:t>•  Result: work that took specialists months can often move in days or weeks — with verification still required.</a:t>
-            </a:r>
-          </a:p>
-        </p:txBody>
-      </p:sp>
-    </p:spTree>
-  </p:cSld>
-  <p:clrMapOvr>
-    <a:masterClrMapping/>
-  </p:clrMapOvr>
-</p:sld>
-</file>
-
-<file path=ppt/slides/slide6.xml><?xml version="1.0" encoding="utf-8"?>
-<p:sld xmlns:a="http://schemas.openxmlformats.org/drawingml/2006/main" xmlns:p="http://schemas.openxmlformats.org/presentationml/2006/main" xmlns:r="http://schemas.openxmlformats.org/officeDocument/2006/relationships">
-  <p:cSld>
-    <p:bg>
-      <p:bgPr>
-        <a:solidFill>
-          <a:srgbClr val="F8FAFC"/>
-        </a:solidFill>
-        <a:effectLst/>
-      </p:bgPr>
-    </p:bg>
-    <p:spTree>
-      <p:nvGrpSpPr>
-        <p:cNvPr id="1" name=""/>
-        <p:cNvGrpSpPr/>
-        <p:nvPr/>
-      </p:nvGrpSpPr>
-      <p:grpSpPr/>
-      <p:sp>
-        <p:nvSpPr>
-          <p:cNvPr id="2" name="Rectangle 1"/>
+              <a:t>AI can invent plausible but wrong logic. Verify against the binary.</a:t>
+            </a:r>
+          </a:p>
+        </p:txBody>
+      </p:sp>
+      <p:sp>
+        <p:nvSpPr>
+          <p:cNvPr id="10" name="Rounded Rectangle 9"/>
           <p:cNvSpPr/>
           <p:nvPr/>
         </p:nvSpPr>
         <p:spPr>
           <a:xfrm>
-            <a:off x="0" y="0"/>
-            <a:ext cx="91440" cy="6858000"/>
-          </a:xfrm>
-          <a:prstGeom prst="rect">
-            <a:avLst/>
+            <a:off x="6309360" y="2103120"/>
+            <a:ext cx="5394960" cy="1691640"/>
+          </a:xfrm>
+          <a:prstGeom prst="roundRect">
+            <a:avLst>
+              <a:gd name="adj" fmla="val 6000"/>
+            </a:avLst>
           </a:prstGeom>
           <a:solidFill>
-            <a:srgbClr val="1F7A8C"/>
+            <a:srgbClr val="171B22"/>
           </a:solidFill>
-          <a:ln>
-            <a:noFill/>
+          <a:ln w="12700">
+            <a:solidFill>
+              <a:srgbClr val="2A313B"/>
+            </a:solidFill>
           </a:ln>
         </p:spPr>
         <p:style>
@@ -5901,14 +7120,14 @@
       </p:sp>
       <p:sp>
         <p:nvSpPr>
-          <p:cNvPr id="3" name="TextBox 2"/>
+          <p:cNvPr id="11" name="TextBox 10"/>
           <p:cNvSpPr txBox="1"/>
           <p:nvPr/>
         </p:nvSpPr>
         <p:spPr>
           <a:xfrm>
-            <a:off x="457200" y="256032"/>
-            <a:ext cx="11155680" cy="640080"/>
+            <a:off x="6629400" y="2423160"/>
+            <a:ext cx="4754880" cy="365760"/>
           </a:xfrm>
           <a:prstGeom prst="rect">
             <a:avLst/>
@@ -5923,31 +7142,31 @@
           <a:p>
             <a:pPr algn="l">
               <a:spcAft>
-                <a:spcPts val="400"/>
+                <a:spcPts val="200"/>
               </a:spcAft>
             </a:pPr>
             <a:r>
-              <a:rPr sz="2800" b="1">
-                <a:solidFill>
-                  <a:srgbClr val="0B1F3A"/>
-                </a:solidFill>
-                <a:latin typeface="Calibri"/>
+              <a:rPr sz="1600" b="1">
+                <a:solidFill>
+                  <a:srgbClr val="4DA3FF"/>
+                </a:solidFill>
+                <a:latin typeface="Consolas"/>
               </a:rPr>
-              <a:t>Case Study: Modifying Compiled Video Games</a:t>
-            </a:r>
-          </a:p>
-        </p:txBody>
-      </p:sp>
-      <p:sp>
-        <p:nvSpPr>
-          <p:cNvPr id="4" name="TextBox 3"/>
+              <a:t>Hard defenses</a:t>
+            </a:r>
+          </a:p>
+        </p:txBody>
+      </p:sp>
+      <p:sp>
+        <p:nvSpPr>
+          <p:cNvPr id="12" name="TextBox 11"/>
           <p:cNvSpPr txBox="1"/>
           <p:nvPr/>
         </p:nvSpPr>
         <p:spPr>
           <a:xfrm>
-            <a:off x="457200" y="868680"/>
-            <a:ext cx="11155680" cy="411480"/>
+            <a:off x="6629400" y="2926080"/>
+            <a:ext cx="4754880" cy="640080"/>
           </a:xfrm>
           <a:prstGeom prst="rect">
             <a:avLst/>
@@ -5962,40 +7181,44 @@
           <a:p>
             <a:pPr algn="l">
               <a:spcAft>
-                <a:spcPts val="400"/>
+                <a:spcPts val="200"/>
               </a:spcAft>
             </a:pPr>
             <a:r>
               <a:rPr sz="1500" b="0">
                 <a:solidFill>
-                  <a:srgbClr val="64748B"/>
-                </a:solidFill>
-                <a:latin typeface="Calibri"/>
+                  <a:srgbClr val="9AA4B2"/>
+                </a:solidFill>
+                <a:latin typeface="Arial"/>
               </a:rPr>
-              <a:t>Why games show the power of AI-assisted reverse engineering</a:t>
-            </a:r>
-          </a:p>
-        </p:txBody>
-      </p:sp>
-      <p:sp>
-        <p:nvSpPr>
-          <p:cNvPr id="5" name="Rectangle 4"/>
+              <a:t>Obfuscation and packing still break many automated approaches.</a:t>
+            </a:r>
+          </a:p>
+        </p:txBody>
+      </p:sp>
+      <p:sp>
+        <p:nvSpPr>
+          <p:cNvPr id="13" name="Rounded Rectangle 12"/>
           <p:cNvSpPr/>
           <p:nvPr/>
         </p:nvSpPr>
         <p:spPr>
           <a:xfrm>
-            <a:off x="457200" y="1280160"/>
-            <a:ext cx="11155680" cy="18288"/>
-          </a:xfrm>
-          <a:prstGeom prst="rect">
-            <a:avLst/>
+            <a:off x="640080" y="4023360"/>
+            <a:ext cx="5394960" cy="1691640"/>
+          </a:xfrm>
+          <a:prstGeom prst="roundRect">
+            <a:avLst>
+              <a:gd name="adj" fmla="val 6000"/>
+            </a:avLst>
           </a:prstGeom>
           <a:solidFill>
-            <a:srgbClr val="CBD5E1"/>
+            <a:srgbClr val="171B22"/>
           </a:solidFill>
-          <a:ln>
-            <a:noFill/>
+          <a:ln w="12700">
+            <a:solidFill>
+              <a:srgbClr val="2A313B"/>
+            </a:solidFill>
           </a:ln>
         </p:spPr>
         <p:style>
@@ -6022,14 +7245,14 @@
       </p:sp>
       <p:sp>
         <p:nvSpPr>
-          <p:cNvPr id="6" name="TextBox 5"/>
+          <p:cNvPr id="14" name="TextBox 13"/>
           <p:cNvSpPr txBox="1"/>
           <p:nvPr/>
         </p:nvSpPr>
         <p:spPr>
           <a:xfrm>
-            <a:off x="548640" y="1554480"/>
-            <a:ext cx="10972800" cy="4572000"/>
+            <a:off x="960120" y="4343400"/>
+            <a:ext cx="4754880" cy="365760"/>
           </a:xfrm>
           <a:prstGeom prst="rect">
             <a:avLst/>
@@ -6044,130 +7267,83 @@
           <a:p>
             <a:pPr algn="l">
               <a:spcAft>
-                <a:spcPts val="800"/>
+                <a:spcPts val="200"/>
               </a:spcAft>
             </a:pPr>
             <a:r>
-              <a:rPr sz="1700">
-                <a:solidFill>
-                  <a:srgbClr val="334155"/>
-                </a:solidFill>
-                <a:latin typeface="Calibri"/>
+              <a:rPr sz="1600" b="1">
+                <a:solidFill>
+                  <a:srgbClr val="4DA3FF"/>
+                </a:solidFill>
+                <a:latin typeface="Consolas"/>
               </a:rPr>
-              <a:t>•  Modern games ship as closed, optimized binaries — usually with no source code and limited official APIs.</a:t>
-            </a:r>
-          </a:p>
+              <a:t>Legal lines</a:t>
+            </a:r>
+          </a:p>
+        </p:txBody>
+      </p:sp>
+      <p:sp>
+        <p:nvSpPr>
+          <p:cNvPr id="15" name="TextBox 14"/>
+          <p:cNvSpPr txBox="1"/>
+          <p:nvPr/>
+        </p:nvSpPr>
+        <p:spPr>
+          <a:xfrm>
+            <a:off x="960120" y="4846320"/>
+            <a:ext cx="4754880" cy="640080"/>
+          </a:xfrm>
+          <a:prstGeom prst="rect">
+            <a:avLst/>
+          </a:prstGeom>
+          <a:noFill/>
+        </p:spPr>
+        <p:txBody>
+          <a:bodyPr wrap="square">
+            <a:spAutoFit/>
+          </a:bodyPr>
+          <a:lstStyle/>
           <a:p>
             <a:pPr algn="l">
               <a:spcAft>
-                <a:spcPts val="800"/>
+                <a:spcPts val="200"/>
               </a:spcAft>
             </a:pPr>
             <a:r>
-              <a:rPr sz="1700">
-                <a:solidFill>
-                  <a:srgbClr val="334155"/>
-                </a:solidFill>
-                <a:latin typeface="Calibri"/>
+              <a:rPr sz="1500" b="0">
+                <a:solidFill>
+                  <a:srgbClr val="9AA4B2"/>
+                </a:solidFill>
+                <a:latin typeface="Arial"/>
               </a:rPr>
-              <a:t>•  Deep changes (camera control, collision, combat logic, rendering) require reverse engineering the compiled executable itself.</a:t>
-            </a:r>
-          </a:p>
-          <a:p>
-            <a:pPr algn="l">
-              <a:spcAft>
-                <a:spcPts val="800"/>
-              </a:spcAft>
-            </a:pPr>
-            <a:r>
-              <a:rPr sz="1700">
-                <a:solidFill>
-                  <a:srgbClr val="334155"/>
-                </a:solidFill>
-                <a:latin typeface="Calibri"/>
-              </a:rPr>
-              <a:t>•  Recently, creators have combined systems from different games at runtime — not by rewriting engines from scratch, but by analyzing and bridging compiled processes.</a:t>
-            </a:r>
-          </a:p>
-          <a:p>
-            <a:pPr algn="l">
-              <a:spcAft>
-                <a:spcPts val="800"/>
-              </a:spcAft>
-            </a:pPr>
-            <a:r>
-              <a:rPr sz="1700">
-                <a:solidFill>
-                  <a:srgbClr val="334155"/>
-                </a:solidFill>
-                <a:latin typeface="Calibri"/>
-              </a:rPr>
-              <a:t>•  AI coding agents made the glue work (hooks, protocols, iteration) far more accessible than before.</a:t>
-            </a:r>
-          </a:p>
-          <a:p>
-            <a:pPr algn="l">
-              <a:spcAft>
-                <a:spcPts val="800"/>
-              </a:spcAft>
-            </a:pPr>
-            <a:r>
-              <a:rPr sz="1700">
-                <a:solidFill>
-                  <a:srgbClr val="334155"/>
-                </a:solidFill>
-                <a:latin typeface="Calibri"/>
-              </a:rPr>
-              <a:t>•  This is the seminar’s main focus: previously near-impossible binary-level game modification becoming comparatively practical.</a:t>
-            </a:r>
-          </a:p>
-        </p:txBody>
-      </p:sp>
-    </p:spTree>
-  </p:cSld>
-  <p:clrMapOvr>
-    <a:masterClrMapping/>
-  </p:clrMapOvr>
-</p:sld>
-</file>
-
-<file path=ppt/slides/slide7.xml><?xml version="1.0" encoding="utf-8"?>
-<p:sld xmlns:a="http://schemas.openxmlformats.org/drawingml/2006/main" xmlns:p="http://schemas.openxmlformats.org/presentationml/2006/main" xmlns:r="http://schemas.openxmlformats.org/officeDocument/2006/relationships">
-  <p:cSld>
-    <p:bg>
-      <p:bgPr>
-        <a:solidFill>
-          <a:srgbClr val="F8FAFC"/>
-        </a:solidFill>
-        <a:effectLst/>
-      </p:bgPr>
-    </p:bg>
-    <p:spTree>
-      <p:nvGrpSpPr>
-        <p:cNvPr id="1" name=""/>
-        <p:cNvGrpSpPr/>
-        <p:nvPr/>
-      </p:nvGrpSpPr>
-      <p:grpSpPr/>
-      <p:sp>
-        <p:nvSpPr>
-          <p:cNvPr id="2" name="Rectangle 1"/>
+              <a:t>Copyright and license terms still apply to commercial assets.</a:t>
+            </a:r>
+          </a:p>
+        </p:txBody>
+      </p:sp>
+      <p:sp>
+        <p:nvSpPr>
+          <p:cNvPr id="16" name="Rounded Rectangle 15"/>
           <p:cNvSpPr/>
           <p:nvPr/>
         </p:nvSpPr>
         <p:spPr>
           <a:xfrm>
-            <a:off x="0" y="0"/>
-            <a:ext cx="91440" cy="6858000"/>
-          </a:xfrm>
-          <a:prstGeom prst="rect">
-            <a:avLst/>
+            <a:off x="6309360" y="4023360"/>
+            <a:ext cx="5394960" cy="1691640"/>
+          </a:xfrm>
+          <a:prstGeom prst="roundRect">
+            <a:avLst>
+              <a:gd name="adj" fmla="val 6000"/>
+            </a:avLst>
           </a:prstGeom>
           <a:solidFill>
-            <a:srgbClr val="1F7A8C"/>
+            <a:srgbClr val="171B22"/>
           </a:solidFill>
-          <a:ln>
-            <a:noFill/>
+          <a:ln w="12700">
+            <a:solidFill>
+              <a:srgbClr val="2A313B"/>
+            </a:solidFill>
           </a:ln>
         </p:spPr>
         <p:style>
@@ -6194,14 +7370,157 @@
       </p:sp>
       <p:sp>
         <p:nvSpPr>
+          <p:cNvPr id="17" name="TextBox 16"/>
+          <p:cNvSpPr txBox="1"/>
+          <p:nvPr/>
+        </p:nvSpPr>
+        <p:spPr>
+          <a:xfrm>
+            <a:off x="6629400" y="4343400"/>
+            <a:ext cx="4754880" cy="365760"/>
+          </a:xfrm>
+          <a:prstGeom prst="rect">
+            <a:avLst/>
+          </a:prstGeom>
+          <a:noFill/>
+        </p:spPr>
+        <p:txBody>
+          <a:bodyPr wrap="square">
+            <a:spAutoFit/>
+          </a:bodyPr>
+          <a:lstStyle/>
+          <a:p>
+            <a:pPr algn="l">
+              <a:spcAft>
+                <a:spcPts val="200"/>
+              </a:spcAft>
+            </a:pPr>
+            <a:r>
+              <a:rPr sz="1600" b="1">
+                <a:solidFill>
+                  <a:srgbClr val="4DA3FF"/>
+                </a:solidFill>
+                <a:latin typeface="Consolas"/>
+              </a:rPr>
+              <a:t>Responsibility</a:t>
+            </a:r>
+          </a:p>
+        </p:txBody>
+      </p:sp>
+      <p:sp>
+        <p:nvSpPr>
+          <p:cNvPr id="18" name="TextBox 17"/>
+          <p:cNvSpPr txBox="1"/>
+          <p:nvPr/>
+        </p:nvSpPr>
+        <p:spPr>
+          <a:xfrm>
+            <a:off x="6629400" y="4846320"/>
+            <a:ext cx="4754880" cy="640080"/>
+          </a:xfrm>
+          <a:prstGeom prst="rect">
+            <a:avLst/>
+          </a:prstGeom>
+          <a:noFill/>
+        </p:spPr>
+        <p:txBody>
+          <a:bodyPr wrap="square">
+            <a:spAutoFit/>
+          </a:bodyPr>
+          <a:lstStyle/>
+          <a:p>
+            <a:pPr algn="l">
+              <a:spcAft>
+                <a:spcPts val="200"/>
+              </a:spcAft>
+            </a:pPr>
+            <a:r>
+              <a:rPr sz="1500" b="0">
+                <a:solidFill>
+                  <a:srgbClr val="9AA4B2"/>
+                </a:solidFill>
+                <a:latin typeface="Arial"/>
+              </a:rPr>
+              <a:t>Serious work stays offline. Do not ship proprietary files.</a:t>
+            </a:r>
+          </a:p>
+        </p:txBody>
+      </p:sp>
+    </p:spTree>
+  </p:cSld>
+  <p:clrMapOvr>
+    <a:masterClrMapping/>
+  </p:clrMapOvr>
+</p:sld>
+</file>
+
+<file path=ppt/slides/slide9.xml><?xml version="1.0" encoding="utf-8"?>
+<p:sld xmlns:a="http://schemas.openxmlformats.org/drawingml/2006/main" xmlns:p="http://schemas.openxmlformats.org/presentationml/2006/main" xmlns:r="http://schemas.openxmlformats.org/officeDocument/2006/relationships">
+  <p:cSld>
+    <p:bg>
+      <p:bgPr>
+        <a:solidFill>
+          <a:srgbClr val="0E1116"/>
+        </a:solidFill>
+        <a:effectLst/>
+      </p:bgPr>
+    </p:bg>
+    <p:spTree>
+      <p:nvGrpSpPr>
+        <p:cNvPr id="1" name=""/>
+        <p:cNvGrpSpPr/>
+        <p:nvPr/>
+      </p:nvGrpSpPr>
+      <p:grpSpPr/>
+      <p:sp>
+        <p:nvSpPr>
+          <p:cNvPr id="2" name="TextBox 1"/>
+          <p:cNvSpPr txBox="1"/>
+          <p:nvPr/>
+        </p:nvSpPr>
+        <p:spPr>
+          <a:xfrm>
+            <a:off x="640080" y="201168"/>
+            <a:ext cx="5486400" cy="274320"/>
+          </a:xfrm>
+          <a:prstGeom prst="rect">
+            <a:avLst/>
+          </a:prstGeom>
+          <a:noFill/>
+        </p:spPr>
+        <p:txBody>
+          <a:bodyPr wrap="square">
+            <a:spAutoFit/>
+          </a:bodyPr>
+          <a:lstStyle/>
+          <a:p>
+            <a:pPr algn="l">
+              <a:spcAft>
+                <a:spcPts val="200"/>
+              </a:spcAft>
+            </a:pPr>
+            <a:r>
+              <a:rPr sz="1000" b="0">
+                <a:solidFill>
+                  <a:srgbClr val="5B6572"/>
+                </a:solidFill>
+                <a:latin typeface="Consolas"/>
+              </a:rPr>
+              <a:t>AI-POWERED REVERSE ENGINEERING</a:t>
+            </a:r>
+          </a:p>
+        </p:txBody>
+      </p:sp>
+      <p:sp>
+        <p:nvSpPr>
           <p:cNvPr id="3" name="TextBox 2"/>
           <p:cNvSpPr txBox="1"/>
           <p:nvPr/>
         </p:nvSpPr>
         <p:spPr>
           <a:xfrm>
-            <a:off x="457200" y="256032"/>
-            <a:ext cx="11155680" cy="640080"/>
+            <a:off x="10241280" y="201168"/>
+            <a:ext cx="1280160" cy="274320"/>
           </a:xfrm>
           <a:prstGeom prst="rect">
             <a:avLst/>
@@ -6214,78 +7533,39 @@
           </a:bodyPr>
           <a:lstStyle/>
           <a:p>
-            <a:pPr algn="l">
+            <a:pPr algn="r">
               <a:spcAft>
-                <a:spcPts val="400"/>
+                <a:spcPts val="200"/>
               </a:spcAft>
             </a:pPr>
             <a:r>
-              <a:rPr sz="2800" b="1">
-                <a:solidFill>
-                  <a:srgbClr val="0B1F3A"/>
-                </a:solidFill>
-                <a:latin typeface="Calibri"/>
+              <a:rPr sz="1000" b="0">
+                <a:solidFill>
+                  <a:srgbClr val="5B6572"/>
+                </a:solidFill>
+                <a:latin typeface="Consolas"/>
               </a:rPr>
-              <a:t>How These Game Modifications Actually Work</a:t>
-            </a:r>
-          </a:p>
-        </p:txBody>
-      </p:sp>
-      <p:sp>
-        <p:nvSpPr>
-          <p:cNvPr id="4" name="TextBox 3"/>
-          <p:cNvSpPr txBox="1"/>
+              <a:t>09 / 09</a:t>
+            </a:r>
+          </a:p>
+        </p:txBody>
+      </p:sp>
+      <p:sp>
+        <p:nvSpPr>
+          <p:cNvPr id="4" name="Rectangle 3"/>
+          <p:cNvSpPr/>
           <p:nvPr/>
         </p:nvSpPr>
         <p:spPr>
           <a:xfrm>
-            <a:off x="457200" y="868680"/>
-            <a:ext cx="11155680" cy="411480"/>
+            <a:off x="640080" y="502920"/>
+            <a:ext cx="10881360" cy="15240"/>
           </a:xfrm>
           <a:prstGeom prst="rect">
             <a:avLst/>
           </a:prstGeom>
-          <a:noFill/>
-        </p:spPr>
-        <p:txBody>
-          <a:bodyPr wrap="square">
-            <a:spAutoFit/>
-          </a:bodyPr>
-          <a:lstStyle/>
-          <a:p>
-            <a:pPr algn="l">
-              <a:spcAft>
-                <a:spcPts val="400"/>
-              </a:spcAft>
-            </a:pPr>
-            <a:r>
-              <a:rPr sz="1500" b="0">
-                <a:solidFill>
-                  <a:srgbClr val="64748B"/>
-                </a:solidFill>
-                <a:latin typeface="Calibri"/>
-              </a:rPr>
-              <a:t>Two compiled processes + a reverse-engineered bridge</a:t>
-            </a:r>
-          </a:p>
-        </p:txBody>
-      </p:sp>
-      <p:sp>
-        <p:nvSpPr>
-          <p:cNvPr id="5" name="Rectangle 4"/>
-          <p:cNvSpPr/>
-          <p:nvPr/>
-        </p:nvSpPr>
-        <p:spPr>
-          <a:xfrm>
-            <a:off x="457200" y="1280160"/>
-            <a:ext cx="11155680" cy="18288"/>
-          </a:xfrm>
-          <a:prstGeom prst="rect">
-            <a:avLst/>
-          </a:prstGeom>
           <a:solidFill>
-            <a:srgbClr val="CBD5E1"/>
+            <a:srgbClr val="2A313B"/>
           </a:solidFill>
           <a:ln>
             <a:noFill/>
@@ -6313,40 +7593,16 @@
           </a:p>
         </p:txBody>
       </p:sp>
-      <p:pic>
-        <p:nvPicPr>
-          <p:cNvPr id="6" name="Picture 5" descr="diagram_case_study.png"/>
-          <p:cNvPicPr>
-            <a:picLocks noChangeAspect="1"/>
-          </p:cNvPicPr>
-          <p:nvPr/>
-        </p:nvPicPr>
-        <p:blipFill>
-          <a:blip r:embed="rId2"/>
-          <a:stretch>
-            <a:fillRect/>
-          </a:stretch>
-        </p:blipFill>
-        <p:spPr>
-          <a:xfrm>
-            <a:off x="320040" y="1417320"/>
-            <a:ext cx="6858000" cy="12061809"/>
-          </a:xfrm>
-          <a:prstGeom prst="rect">
-            <a:avLst/>
-          </a:prstGeom>
-        </p:spPr>
-      </p:pic>
-      <p:sp>
-        <p:nvSpPr>
-          <p:cNvPr id="7" name="TextBox 6"/>
+      <p:sp>
+        <p:nvSpPr>
+          <p:cNvPr id="5" name="TextBox 4"/>
           <p:cNvSpPr txBox="1"/>
           <p:nvPr/>
         </p:nvSpPr>
         <p:spPr>
           <a:xfrm>
-            <a:off x="7223760" y="1645920"/>
-            <a:ext cx="4480560" cy="4572000"/>
+            <a:off x="640080" y="777240"/>
+            <a:ext cx="10972800" cy="320040"/>
           </a:xfrm>
           <a:prstGeom prst="rect">
             <a:avLst/>
@@ -6361,111 +7617,92 @@
           <a:p>
             <a:pPr algn="l">
               <a:spcAft>
-                <a:spcPts val="800"/>
+                <a:spcPts val="200"/>
               </a:spcAft>
             </a:pPr>
             <a:r>
-              <a:rPr sz="1600">
-                <a:solidFill>
-                  <a:srgbClr val="334155"/>
-                </a:solidFill>
-                <a:latin typeface="Calibri"/>
+              <a:rPr sz="1100" b="1">
+                <a:solidFill>
+                  <a:srgbClr val="4DA3FF"/>
+                </a:solidFill>
+                <a:latin typeface="Consolas"/>
               </a:rPr>
-              <a:t>•  Both games keep running as real binaries.</a:t>
-            </a:r>
-          </a:p>
+              <a:t>05  TAKEAWAY</a:t>
+            </a:r>
+          </a:p>
+        </p:txBody>
+      </p:sp>
+      <p:sp>
+        <p:nvSpPr>
+          <p:cNvPr id="6" name="TextBox 5"/>
+          <p:cNvSpPr txBox="1"/>
+          <p:nvPr/>
+        </p:nvSpPr>
+        <p:spPr>
+          <a:xfrm>
+            <a:off x="640080" y="1828800"/>
+            <a:ext cx="10972800" cy="1463040"/>
+          </a:xfrm>
+          <a:prstGeom prst="rect">
+            <a:avLst/>
+          </a:prstGeom>
+          <a:noFill/>
+        </p:spPr>
+        <p:txBody>
+          <a:bodyPr wrap="square">
+            <a:spAutoFit/>
+          </a:bodyPr>
+          <a:lstStyle/>
           <a:p>
             <a:pPr algn="l">
               <a:spcAft>
-                <a:spcPts val="800"/>
+                <a:spcPts val="200"/>
               </a:spcAft>
             </a:pPr>
             <a:r>
-              <a:rPr sz="1600">
-                <a:solidFill>
-                  <a:srgbClr val="334155"/>
-                </a:solidFill>
-                <a:latin typeface="Calibri"/>
+              <a:rPr sz="3600" b="1">
+                <a:solidFill>
+                  <a:srgbClr val="E8EAED"/>
+                </a:solidFill>
+                <a:latin typeface="Arial"/>
               </a:rPr>
-              <a:t>•  A thin bridge exchanges camera, collision, and events over shared memory / IPC.</a:t>
+              <a:t>AI compresses the reverse-engineering</a:t>
             </a:r>
           </a:p>
           <a:p>
             <a:pPr algn="l">
               <a:spcAft>
-                <a:spcPts val="800"/>
+                <a:spcPts val="200"/>
               </a:spcAft>
             </a:pPr>
             <a:r>
-              <a:rPr sz="1600">
-                <a:solidFill>
-                  <a:srgbClr val="334155"/>
-                </a:solidFill>
-                <a:latin typeface="Calibri"/>
+              <a:rPr sz="3600" b="1">
+                <a:solidFill>
+                  <a:srgbClr val="E8EAED"/>
+                </a:solidFill>
+                <a:latin typeface="Arial"/>
               </a:rPr>
-              <a:t>•  Frames are composited so both worlds appear together.</a:t>
-            </a:r>
-          </a:p>
-          <a:p>
-            <a:pPr algn="l">
-              <a:spcAft>
-                <a:spcPts val="800"/>
-              </a:spcAft>
-            </a:pPr>
-            <a:r>
-              <a:rPr sz="1600">
-                <a:solidFill>
-                  <a:srgbClr val="334155"/>
-                </a:solidFill>
-                <a:latin typeface="Calibri"/>
-              </a:rPr>
-              <a:t>•  AI helps locate addresses, draft hooks, and iterate — classical RE still validates the binary.</a:t>
-            </a:r>
-          </a:p>
-        </p:txBody>
-      </p:sp>
-    </p:spTree>
-  </p:cSld>
-  <p:clrMapOvr>
-    <a:masterClrMapping/>
-  </p:clrMapOvr>
-</p:sld>
-</file>
-
-<file path=ppt/slides/slide8.xml><?xml version="1.0" encoding="utf-8"?>
-<p:sld xmlns:a="http://schemas.openxmlformats.org/drawingml/2006/main" xmlns:p="http://schemas.openxmlformats.org/presentationml/2006/main" xmlns:r="http://schemas.openxmlformats.org/officeDocument/2006/relationships">
-  <p:cSld>
-    <p:bg>
-      <p:bgPr>
-        <a:solidFill>
-          <a:srgbClr val="F8FAFC"/>
-        </a:solidFill>
-        <a:effectLst/>
-      </p:bgPr>
-    </p:bg>
-    <p:spTree>
-      <p:nvGrpSpPr>
-        <p:cNvPr id="1" name=""/>
-        <p:cNvGrpSpPr/>
-        <p:nvPr/>
-      </p:nvGrpSpPr>
-      <p:grpSpPr/>
-      <p:sp>
-        <p:nvSpPr>
-          <p:cNvPr id="2" name="Rectangle 1"/>
+              <a:t>bottleneck. It does not erase it.</a:t>
+            </a:r>
+          </a:p>
+        </p:txBody>
+      </p:sp>
+      <p:sp>
+        <p:nvSpPr>
+          <p:cNvPr id="7" name="Rectangle 6"/>
           <p:cNvSpPr/>
           <p:nvPr/>
         </p:nvSpPr>
         <p:spPr>
           <a:xfrm>
-            <a:off x="0" y="0"/>
-            <a:ext cx="91440" cy="6858000"/>
+            <a:off x="640080" y="3657600"/>
+            <a:ext cx="1463040" cy="31750"/>
           </a:xfrm>
           <a:prstGeom prst="rect">
             <a:avLst/>
           </a:prstGeom>
           <a:solidFill>
-            <a:srgbClr val="1F7A8C"/>
+            <a:srgbClr val="4DA3FF"/>
           </a:solidFill>
           <a:ln>
             <a:noFill/>
@@ -6495,14 +7732,14 @@
       </p:sp>
       <p:sp>
         <p:nvSpPr>
-          <p:cNvPr id="3" name="TextBox 2"/>
+          <p:cNvPr id="8" name="TextBox 7"/>
           <p:cNvSpPr txBox="1"/>
           <p:nvPr/>
         </p:nvSpPr>
         <p:spPr>
           <a:xfrm>
-            <a:off x="457200" y="256032"/>
-            <a:ext cx="11155680" cy="640080"/>
+            <a:off x="640080" y="4023360"/>
+            <a:ext cx="10515600" cy="914400"/>
           </a:xfrm>
           <a:prstGeom prst="rect">
             <a:avLst/>
@@ -6517,31 +7754,47 @@
           <a:p>
             <a:pPr algn="l">
               <a:spcAft>
-                <a:spcPts val="400"/>
+                <a:spcPts val="200"/>
               </a:spcAft>
             </a:pPr>
             <a:r>
-              <a:rPr sz="2800" b="1">
-                <a:solidFill>
-                  <a:srgbClr val="0B1F3A"/>
-                </a:solidFill>
-                <a:latin typeface="Calibri"/>
+              <a:rPr sz="1800" b="0">
+                <a:solidFill>
+                  <a:srgbClr val="9AA4B2"/>
+                </a:solidFill>
+                <a:latin typeface="Arial"/>
               </a:rPr>
-              <a:t>Challenges, Limits, and Ethical Concerns</a:t>
-            </a:r>
-          </a:p>
-        </p:txBody>
-      </p:sp>
-      <p:sp>
-        <p:nvSpPr>
-          <p:cNvPr id="4" name="TextBox 3"/>
+              <a:t>Classical tools measure the bytes. LLMs draft the meaning.</a:t>
+            </a:r>
+          </a:p>
+          <a:p>
+            <a:pPr algn="l">
+              <a:spcAft>
+                <a:spcPts val="200"/>
+              </a:spcAft>
+            </a:pPr>
+            <a:r>
+              <a:rPr sz="1800" b="0">
+                <a:solidFill>
+                  <a:srgbClr val="9AA4B2"/>
+                </a:solidFill>
+                <a:latin typeface="Arial"/>
+              </a:rPr>
+              <a:t>Humans — and verification oracles — decide what ships.</a:t>
+            </a:r>
+          </a:p>
+        </p:txBody>
+      </p:sp>
+      <p:sp>
+        <p:nvSpPr>
+          <p:cNvPr id="9" name="TextBox 8"/>
           <p:cNvSpPr txBox="1"/>
           <p:nvPr/>
         </p:nvSpPr>
         <p:spPr>
           <a:xfrm>
-            <a:off x="457200" y="868680"/>
-            <a:ext cx="11155680" cy="411480"/>
+            <a:off x="640080" y="5760720"/>
+            <a:ext cx="10972800" cy="457200"/>
           </a:xfrm>
           <a:prstGeom prst="rect">
             <a:avLst/>
@@ -6556,1064 +7809,17 @@
           <a:p>
             <a:pPr algn="l">
               <a:spcAft>
-                <a:spcPts val="400"/>
+                <a:spcPts val="200"/>
               </a:spcAft>
             </a:pPr>
             <a:r>
-              <a:rPr sz="1500" b="0">
-                <a:solidFill>
-                  <a:srgbClr val="64748B"/>
-                </a:solidFill>
-                <a:latin typeface="Calibri"/>
+              <a:rPr sz="1400" b="0">
+                <a:solidFill>
+                  <a:srgbClr val="5B6572"/>
+                </a:solidFill>
+                <a:latin typeface="Consolas"/>
               </a:rPr>
-              <a:t>Faster does not mean automatic or unrestricted</a:t>
-            </a:r>
-          </a:p>
-        </p:txBody>
-      </p:sp>
-      <p:sp>
-        <p:nvSpPr>
-          <p:cNvPr id="5" name="Rectangle 4"/>
-          <p:cNvSpPr/>
-          <p:nvPr/>
-        </p:nvSpPr>
-        <p:spPr>
-          <a:xfrm>
-            <a:off x="457200" y="1280160"/>
-            <a:ext cx="11155680" cy="18288"/>
-          </a:xfrm>
-          <a:prstGeom prst="rect">
-            <a:avLst/>
-          </a:prstGeom>
-          <a:solidFill>
-            <a:srgbClr val="CBD5E1"/>
-          </a:solidFill>
-          <a:ln>
-            <a:noFill/>
-          </a:ln>
-        </p:spPr>
-        <p:style>
-          <a:lnRef idx="1">
-            <a:schemeClr val="accent1"/>
-          </a:lnRef>
-          <a:fillRef idx="3">
-            <a:schemeClr val="accent1"/>
-          </a:fillRef>
-          <a:effectRef idx="2">
-            <a:schemeClr val="accent1"/>
-          </a:effectRef>
-          <a:fontRef idx="minor">
-            <a:schemeClr val="lt1"/>
-          </a:fontRef>
-        </p:style>
-        <p:txBody>
-          <a:bodyPr rtlCol="0" anchor="ctr"/>
-          <a:lstStyle/>
-          <a:p>
-            <a:pPr algn="ctr"/>
-          </a:p>
-        </p:txBody>
-      </p:sp>
-      <p:sp>
-        <p:nvSpPr>
-          <p:cNvPr id="6" name="Rounded Rectangle 5"/>
-          <p:cNvSpPr/>
-          <p:nvPr/>
-        </p:nvSpPr>
-        <p:spPr>
-          <a:xfrm>
-            <a:off x="457200" y="1554480"/>
-            <a:ext cx="5486400" cy="1920240"/>
-          </a:xfrm>
-          <a:prstGeom prst="roundRect">
-            <a:avLst>
-              <a:gd name="adj" fmla="val 6000"/>
-            </a:avLst>
-          </a:prstGeom>
-          <a:solidFill>
-            <a:srgbClr val="FFFFFF"/>
-          </a:solidFill>
-          <a:ln>
-            <a:solidFill>
-              <a:srgbClr val="CBD5E1"/>
-            </a:solidFill>
-          </a:ln>
-        </p:spPr>
-        <p:style>
-          <a:lnRef idx="1">
-            <a:schemeClr val="accent1"/>
-          </a:lnRef>
-          <a:fillRef idx="3">
-            <a:schemeClr val="accent1"/>
-          </a:fillRef>
-          <a:effectRef idx="2">
-            <a:schemeClr val="accent1"/>
-          </a:effectRef>
-          <a:fontRef idx="minor">
-            <a:schemeClr val="lt1"/>
-          </a:fontRef>
-        </p:style>
-        <p:txBody>
-          <a:bodyPr rtlCol="0" anchor="ctr"/>
-          <a:lstStyle/>
-          <a:p>
-            <a:pPr algn="ctr"/>
-          </a:p>
-        </p:txBody>
-      </p:sp>
-      <p:sp>
-        <p:nvSpPr>
-          <p:cNvPr id="7" name="Rectangle 6"/>
-          <p:cNvSpPr/>
-          <p:nvPr/>
-        </p:nvSpPr>
-        <p:spPr>
-          <a:xfrm>
-            <a:off x="457200" y="1554480"/>
-            <a:ext cx="109728" cy="1920240"/>
-          </a:xfrm>
-          <a:prstGeom prst="rect">
-            <a:avLst/>
-          </a:prstGeom>
-          <a:solidFill>
-            <a:srgbClr val="1F7A8C"/>
-          </a:solidFill>
-          <a:ln>
-            <a:noFill/>
-          </a:ln>
-        </p:spPr>
-        <p:style>
-          <a:lnRef idx="1">
-            <a:schemeClr val="accent1"/>
-          </a:lnRef>
-          <a:fillRef idx="3">
-            <a:schemeClr val="accent1"/>
-          </a:fillRef>
-          <a:effectRef idx="2">
-            <a:schemeClr val="accent1"/>
-          </a:effectRef>
-          <a:fontRef idx="minor">
-            <a:schemeClr val="lt1"/>
-          </a:fontRef>
-        </p:style>
-        <p:txBody>
-          <a:bodyPr rtlCol="0" anchor="ctr"/>
-          <a:lstStyle/>
-          <a:p>
-            <a:pPr algn="ctr"/>
-          </a:p>
-        </p:txBody>
-      </p:sp>
-      <p:sp>
-        <p:nvSpPr>
-          <p:cNvPr id="8" name="TextBox 7"/>
-          <p:cNvSpPr txBox="1"/>
-          <p:nvPr/>
-        </p:nvSpPr>
-        <p:spPr>
-          <a:xfrm>
-            <a:off x="822960" y="1874520"/>
-            <a:ext cx="4846320" cy="411480"/>
-          </a:xfrm>
-          <a:prstGeom prst="rect">
-            <a:avLst/>
-          </a:prstGeom>
-          <a:noFill/>
-        </p:spPr>
-        <p:txBody>
-          <a:bodyPr wrap="square">
-            <a:spAutoFit/>
-          </a:bodyPr>
-          <a:lstStyle/>
-          <a:p>
-            <a:pPr algn="l">
-              <a:spcAft>
-                <a:spcPts val="400"/>
-              </a:spcAft>
-            </a:pPr>
-            <a:r>
-              <a:rPr sz="1800" b="1">
-                <a:solidFill>
-                  <a:srgbClr val="0B1F3A"/>
-                </a:solidFill>
-                <a:latin typeface="Calibri"/>
-              </a:rPr>
-              <a:t>Correctness</a:t>
-            </a:r>
-          </a:p>
-        </p:txBody>
-      </p:sp>
-      <p:sp>
-        <p:nvSpPr>
-          <p:cNvPr id="9" name="TextBox 8"/>
-          <p:cNvSpPr txBox="1"/>
-          <p:nvPr/>
-        </p:nvSpPr>
-        <p:spPr>
-          <a:xfrm>
-            <a:off x="822960" y="2377440"/>
-            <a:ext cx="4846320" cy="868680"/>
-          </a:xfrm>
-          <a:prstGeom prst="rect">
-            <a:avLst/>
-          </a:prstGeom>
-          <a:noFill/>
-        </p:spPr>
-        <p:txBody>
-          <a:bodyPr wrap="square">
-            <a:spAutoFit/>
-          </a:bodyPr>
-          <a:lstStyle/>
-          <a:p>
-            <a:pPr algn="l">
-              <a:spcAft>
-                <a:spcPts val="400"/>
-              </a:spcAft>
-            </a:pPr>
-            <a:r>
-              <a:rPr sz="1400" b="0">
-                <a:solidFill>
-                  <a:srgbClr val="334155"/>
-                </a:solidFill>
-                <a:latin typeface="Calibri"/>
-              </a:rPr>
-              <a:t>AI can invent plausible but wrong types and logic. Results must be verified against the binary.</a:t>
-            </a:r>
-          </a:p>
-        </p:txBody>
-      </p:sp>
-      <p:sp>
-        <p:nvSpPr>
-          <p:cNvPr id="10" name="Rounded Rectangle 9"/>
-          <p:cNvSpPr/>
-          <p:nvPr/>
-        </p:nvSpPr>
-        <p:spPr>
-          <a:xfrm>
-            <a:off x="6217920" y="1554480"/>
-            <a:ext cx="5486400" cy="1920240"/>
-          </a:xfrm>
-          <a:prstGeom prst="roundRect">
-            <a:avLst>
-              <a:gd name="adj" fmla="val 6000"/>
-            </a:avLst>
-          </a:prstGeom>
-          <a:solidFill>
-            <a:srgbClr val="FFFFFF"/>
-          </a:solidFill>
-          <a:ln>
-            <a:solidFill>
-              <a:srgbClr val="CBD5E1"/>
-            </a:solidFill>
-          </a:ln>
-        </p:spPr>
-        <p:style>
-          <a:lnRef idx="1">
-            <a:schemeClr val="accent1"/>
-          </a:lnRef>
-          <a:fillRef idx="3">
-            <a:schemeClr val="accent1"/>
-          </a:fillRef>
-          <a:effectRef idx="2">
-            <a:schemeClr val="accent1"/>
-          </a:effectRef>
-          <a:fontRef idx="minor">
-            <a:schemeClr val="lt1"/>
-          </a:fontRef>
-        </p:style>
-        <p:txBody>
-          <a:bodyPr rtlCol="0" anchor="ctr"/>
-          <a:lstStyle/>
-          <a:p>
-            <a:pPr algn="ctr"/>
-          </a:p>
-        </p:txBody>
-      </p:sp>
-      <p:sp>
-        <p:nvSpPr>
-          <p:cNvPr id="11" name="Rectangle 10"/>
-          <p:cNvSpPr/>
-          <p:nvPr/>
-        </p:nvSpPr>
-        <p:spPr>
-          <a:xfrm>
-            <a:off x="6217920" y="1554480"/>
-            <a:ext cx="109728" cy="1920240"/>
-          </a:xfrm>
-          <a:prstGeom prst="rect">
-            <a:avLst/>
-          </a:prstGeom>
-          <a:solidFill>
-            <a:srgbClr val="1F7A8C"/>
-          </a:solidFill>
-          <a:ln>
-            <a:noFill/>
-          </a:ln>
-        </p:spPr>
-        <p:style>
-          <a:lnRef idx="1">
-            <a:schemeClr val="accent1"/>
-          </a:lnRef>
-          <a:fillRef idx="3">
-            <a:schemeClr val="accent1"/>
-          </a:fillRef>
-          <a:effectRef idx="2">
-            <a:schemeClr val="accent1"/>
-          </a:effectRef>
-          <a:fontRef idx="minor">
-            <a:schemeClr val="lt1"/>
-          </a:fontRef>
-        </p:style>
-        <p:txBody>
-          <a:bodyPr rtlCol="0" anchor="ctr"/>
-          <a:lstStyle/>
-          <a:p>
-            <a:pPr algn="ctr"/>
-          </a:p>
-        </p:txBody>
-      </p:sp>
-      <p:sp>
-        <p:nvSpPr>
-          <p:cNvPr id="12" name="TextBox 11"/>
-          <p:cNvSpPr txBox="1"/>
-          <p:nvPr/>
-        </p:nvSpPr>
-        <p:spPr>
-          <a:xfrm>
-            <a:off x="6583680" y="1874520"/>
-            <a:ext cx="4846320" cy="411480"/>
-          </a:xfrm>
-          <a:prstGeom prst="rect">
-            <a:avLst/>
-          </a:prstGeom>
-          <a:noFill/>
-        </p:spPr>
-        <p:txBody>
-          <a:bodyPr wrap="square">
-            <a:spAutoFit/>
-          </a:bodyPr>
-          <a:lstStyle/>
-          <a:p>
-            <a:pPr algn="l">
-              <a:spcAft>
-                <a:spcPts val="400"/>
-              </a:spcAft>
-            </a:pPr>
-            <a:r>
-              <a:rPr sz="1800" b="1">
-                <a:solidFill>
-                  <a:srgbClr val="0B1F3A"/>
-                </a:solidFill>
-                <a:latin typeface="Calibri"/>
-              </a:rPr>
-              <a:t>Hard defenses</a:t>
-            </a:r>
-          </a:p>
-        </p:txBody>
-      </p:sp>
-      <p:sp>
-        <p:nvSpPr>
-          <p:cNvPr id="13" name="TextBox 12"/>
-          <p:cNvSpPr txBox="1"/>
-          <p:nvPr/>
-        </p:nvSpPr>
-        <p:spPr>
-          <a:xfrm>
-            <a:off x="6583680" y="2377440"/>
-            <a:ext cx="4846320" cy="868680"/>
-          </a:xfrm>
-          <a:prstGeom prst="rect">
-            <a:avLst/>
-          </a:prstGeom>
-          <a:noFill/>
-        </p:spPr>
-        <p:txBody>
-          <a:bodyPr wrap="square">
-            <a:spAutoFit/>
-          </a:bodyPr>
-          <a:lstStyle/>
-          <a:p>
-            <a:pPr algn="l">
-              <a:spcAft>
-                <a:spcPts val="400"/>
-              </a:spcAft>
-            </a:pPr>
-            <a:r>
-              <a:rPr sz="1400" b="0">
-                <a:solidFill>
-                  <a:srgbClr val="334155"/>
-                </a:solidFill>
-                <a:latin typeface="Calibri"/>
-              </a:rPr>
-              <a:t>Obfuscation, packing, and anti-tamper still defeat many automated approaches.</a:t>
-            </a:r>
-          </a:p>
-        </p:txBody>
-      </p:sp>
-      <p:sp>
-        <p:nvSpPr>
-          <p:cNvPr id="14" name="Rounded Rectangle 13"/>
-          <p:cNvSpPr/>
-          <p:nvPr/>
-        </p:nvSpPr>
-        <p:spPr>
-          <a:xfrm>
-            <a:off x="457200" y="3749039"/>
-            <a:ext cx="5486400" cy="1920240"/>
-          </a:xfrm>
-          <a:prstGeom prst="roundRect">
-            <a:avLst>
-              <a:gd name="adj" fmla="val 6000"/>
-            </a:avLst>
-          </a:prstGeom>
-          <a:solidFill>
-            <a:srgbClr val="FFFFFF"/>
-          </a:solidFill>
-          <a:ln>
-            <a:solidFill>
-              <a:srgbClr val="CBD5E1"/>
-            </a:solidFill>
-          </a:ln>
-        </p:spPr>
-        <p:style>
-          <a:lnRef idx="1">
-            <a:schemeClr val="accent1"/>
-          </a:lnRef>
-          <a:fillRef idx="3">
-            <a:schemeClr val="accent1"/>
-          </a:fillRef>
-          <a:effectRef idx="2">
-            <a:schemeClr val="accent1"/>
-          </a:effectRef>
-          <a:fontRef idx="minor">
-            <a:schemeClr val="lt1"/>
-          </a:fontRef>
-        </p:style>
-        <p:txBody>
-          <a:bodyPr rtlCol="0" anchor="ctr"/>
-          <a:lstStyle/>
-          <a:p>
-            <a:pPr algn="ctr"/>
-          </a:p>
-        </p:txBody>
-      </p:sp>
-      <p:sp>
-        <p:nvSpPr>
-          <p:cNvPr id="15" name="Rectangle 14"/>
-          <p:cNvSpPr/>
-          <p:nvPr/>
-        </p:nvSpPr>
-        <p:spPr>
-          <a:xfrm>
-            <a:off x="457200" y="3749039"/>
-            <a:ext cx="109728" cy="1920240"/>
-          </a:xfrm>
-          <a:prstGeom prst="rect">
-            <a:avLst/>
-          </a:prstGeom>
-          <a:solidFill>
-            <a:srgbClr val="1F7A8C"/>
-          </a:solidFill>
-          <a:ln>
-            <a:noFill/>
-          </a:ln>
-        </p:spPr>
-        <p:style>
-          <a:lnRef idx="1">
-            <a:schemeClr val="accent1"/>
-          </a:lnRef>
-          <a:fillRef idx="3">
-            <a:schemeClr val="accent1"/>
-          </a:fillRef>
-          <a:effectRef idx="2">
-            <a:schemeClr val="accent1"/>
-          </a:effectRef>
-          <a:fontRef idx="minor">
-            <a:schemeClr val="lt1"/>
-          </a:fontRef>
-        </p:style>
-        <p:txBody>
-          <a:bodyPr rtlCol="0" anchor="ctr"/>
-          <a:lstStyle/>
-          <a:p>
-            <a:pPr algn="ctr"/>
-          </a:p>
-        </p:txBody>
-      </p:sp>
-      <p:sp>
-        <p:nvSpPr>
-          <p:cNvPr id="16" name="TextBox 15"/>
-          <p:cNvSpPr txBox="1"/>
-          <p:nvPr/>
-        </p:nvSpPr>
-        <p:spPr>
-          <a:xfrm>
-            <a:off x="822960" y="4069079"/>
-            <a:ext cx="4846320" cy="411480"/>
-          </a:xfrm>
-          <a:prstGeom prst="rect">
-            <a:avLst/>
-          </a:prstGeom>
-          <a:noFill/>
-        </p:spPr>
-        <p:txBody>
-          <a:bodyPr wrap="square">
-            <a:spAutoFit/>
-          </a:bodyPr>
-          <a:lstStyle/>
-          <a:p>
-            <a:pPr algn="l">
-              <a:spcAft>
-                <a:spcPts val="400"/>
-              </a:spcAft>
-            </a:pPr>
-            <a:r>
-              <a:rPr sz="1800" b="1">
-                <a:solidFill>
-                  <a:srgbClr val="0B1F3A"/>
-                </a:solidFill>
-                <a:latin typeface="Calibri"/>
-              </a:rPr>
-              <a:t>Legal / policy</a:t>
-            </a:r>
-          </a:p>
-        </p:txBody>
-      </p:sp>
-      <p:sp>
-        <p:nvSpPr>
-          <p:cNvPr id="17" name="TextBox 16"/>
-          <p:cNvSpPr txBox="1"/>
-          <p:nvPr/>
-        </p:nvSpPr>
-        <p:spPr>
-          <a:xfrm>
-            <a:off x="822960" y="4571999"/>
-            <a:ext cx="4846320" cy="868680"/>
-          </a:xfrm>
-          <a:prstGeom prst="rect">
-            <a:avLst/>
-          </a:prstGeom>
-          <a:noFill/>
-        </p:spPr>
-        <p:txBody>
-          <a:bodyPr wrap="square">
-            <a:spAutoFit/>
-          </a:bodyPr>
-          <a:lstStyle/>
-          <a:p>
-            <a:pPr algn="l">
-              <a:spcAft>
-                <a:spcPts val="400"/>
-              </a:spcAft>
-            </a:pPr>
-            <a:r>
-              <a:rPr sz="1400" b="0">
-                <a:solidFill>
-                  <a:srgbClr val="334155"/>
-                </a:solidFill>
-                <a:latin typeface="Calibri"/>
-              </a:rPr>
-              <a:t>Copyright, license terms, and redistribution rules still apply — especially for commercial game assets.</a:t>
-            </a:r>
-          </a:p>
-        </p:txBody>
-      </p:sp>
-      <p:sp>
-        <p:nvSpPr>
-          <p:cNvPr id="18" name="Rounded Rectangle 17"/>
-          <p:cNvSpPr/>
-          <p:nvPr/>
-        </p:nvSpPr>
-        <p:spPr>
-          <a:xfrm>
-            <a:off x="6217920" y="3749039"/>
-            <a:ext cx="5486400" cy="1920240"/>
-          </a:xfrm>
-          <a:prstGeom prst="roundRect">
-            <a:avLst>
-              <a:gd name="adj" fmla="val 6000"/>
-            </a:avLst>
-          </a:prstGeom>
-          <a:solidFill>
-            <a:srgbClr val="FFFFFF"/>
-          </a:solidFill>
-          <a:ln>
-            <a:solidFill>
-              <a:srgbClr val="CBD5E1"/>
-            </a:solidFill>
-          </a:ln>
-        </p:spPr>
-        <p:style>
-          <a:lnRef idx="1">
-            <a:schemeClr val="accent1"/>
-          </a:lnRef>
-          <a:fillRef idx="3">
-            <a:schemeClr val="accent1"/>
-          </a:fillRef>
-          <a:effectRef idx="2">
-            <a:schemeClr val="accent1"/>
-          </a:effectRef>
-          <a:fontRef idx="minor">
-            <a:schemeClr val="lt1"/>
-          </a:fontRef>
-        </p:style>
-        <p:txBody>
-          <a:bodyPr rtlCol="0" anchor="ctr"/>
-          <a:lstStyle/>
-          <a:p>
-            <a:pPr algn="ctr"/>
-          </a:p>
-        </p:txBody>
-      </p:sp>
-      <p:sp>
-        <p:nvSpPr>
-          <p:cNvPr id="19" name="Rectangle 18"/>
-          <p:cNvSpPr/>
-          <p:nvPr/>
-        </p:nvSpPr>
-        <p:spPr>
-          <a:xfrm>
-            <a:off x="6217920" y="3749039"/>
-            <a:ext cx="109728" cy="1920240"/>
-          </a:xfrm>
-          <a:prstGeom prst="rect">
-            <a:avLst/>
-          </a:prstGeom>
-          <a:solidFill>
-            <a:srgbClr val="1F7A8C"/>
-          </a:solidFill>
-          <a:ln>
-            <a:noFill/>
-          </a:ln>
-        </p:spPr>
-        <p:style>
-          <a:lnRef idx="1">
-            <a:schemeClr val="accent1"/>
-          </a:lnRef>
-          <a:fillRef idx="3">
-            <a:schemeClr val="accent1"/>
-          </a:fillRef>
-          <a:effectRef idx="2">
-            <a:schemeClr val="accent1"/>
-          </a:effectRef>
-          <a:fontRef idx="minor">
-            <a:schemeClr val="lt1"/>
-          </a:fontRef>
-        </p:style>
-        <p:txBody>
-          <a:bodyPr rtlCol="0" anchor="ctr"/>
-          <a:lstStyle/>
-          <a:p>
-            <a:pPr algn="ctr"/>
-          </a:p>
-        </p:txBody>
-      </p:sp>
-      <p:sp>
-        <p:nvSpPr>
-          <p:cNvPr id="20" name="TextBox 19"/>
-          <p:cNvSpPr txBox="1"/>
-          <p:nvPr/>
-        </p:nvSpPr>
-        <p:spPr>
-          <a:xfrm>
-            <a:off x="6583680" y="4069079"/>
-            <a:ext cx="4846320" cy="411480"/>
-          </a:xfrm>
-          <a:prstGeom prst="rect">
-            <a:avLst/>
-          </a:prstGeom>
-          <a:noFill/>
-        </p:spPr>
-        <p:txBody>
-          <a:bodyPr wrap="square">
-            <a:spAutoFit/>
-          </a:bodyPr>
-          <a:lstStyle/>
-          <a:p>
-            <a:pPr algn="l">
-              <a:spcAft>
-                <a:spcPts val="400"/>
-              </a:spcAft>
-            </a:pPr>
-            <a:r>
-              <a:rPr sz="1800" b="1">
-                <a:solidFill>
-                  <a:srgbClr val="0B1F3A"/>
-                </a:solidFill>
-                <a:latin typeface="Calibri"/>
-              </a:rPr>
-              <a:t>Responsibility</a:t>
-            </a:r>
-          </a:p>
-        </p:txBody>
-      </p:sp>
-      <p:sp>
-        <p:nvSpPr>
-          <p:cNvPr id="21" name="TextBox 20"/>
-          <p:cNvSpPr txBox="1"/>
-          <p:nvPr/>
-        </p:nvSpPr>
-        <p:spPr>
-          <a:xfrm>
-            <a:off x="6583680" y="4571999"/>
-            <a:ext cx="4846320" cy="868680"/>
-          </a:xfrm>
-          <a:prstGeom prst="rect">
-            <a:avLst/>
-          </a:prstGeom>
-          <a:noFill/>
-        </p:spPr>
-        <p:txBody>
-          <a:bodyPr wrap="square">
-            <a:spAutoFit/>
-          </a:bodyPr>
-          <a:lstStyle/>
-          <a:p>
-            <a:pPr algn="l">
-              <a:spcAft>
-                <a:spcPts val="400"/>
-              </a:spcAft>
-            </a:pPr>
-            <a:r>
-              <a:rPr sz="1400" b="0">
-                <a:solidFill>
-                  <a:srgbClr val="334155"/>
-                </a:solidFill>
-                <a:latin typeface="Calibri"/>
-              </a:rPr>
-              <a:t>Online anti-cheat bypass is out of scope; serious work stays offline and does not ship proprietary files.</a:t>
-            </a:r>
-          </a:p>
-        </p:txBody>
-      </p:sp>
-    </p:spTree>
-  </p:cSld>
-  <p:clrMapOvr>
-    <a:masterClrMapping/>
-  </p:clrMapOvr>
-</p:sld>
-</file>
-
-<file path=ppt/slides/slide9.xml><?xml version="1.0" encoding="utf-8"?>
-<p:sld xmlns:a="http://schemas.openxmlformats.org/drawingml/2006/main" xmlns:p="http://schemas.openxmlformats.org/presentationml/2006/main" xmlns:r="http://schemas.openxmlformats.org/officeDocument/2006/relationships">
-  <p:cSld>
-    <p:bg>
-      <p:bgPr>
-        <a:solidFill>
-          <a:srgbClr val="F8FAFC"/>
-        </a:solidFill>
-        <a:effectLst/>
-      </p:bgPr>
-    </p:bg>
-    <p:spTree>
-      <p:nvGrpSpPr>
-        <p:cNvPr id="1" name=""/>
-        <p:cNvGrpSpPr/>
-        <p:nvPr/>
-      </p:nvGrpSpPr>
-      <p:grpSpPr/>
-      <p:sp>
-        <p:nvSpPr>
-          <p:cNvPr id="2" name="Rectangle 1"/>
-          <p:cNvSpPr/>
-          <p:nvPr/>
-        </p:nvSpPr>
-        <p:spPr>
-          <a:xfrm>
-            <a:off x="0" y="0"/>
-            <a:ext cx="91440" cy="6858000"/>
-          </a:xfrm>
-          <a:prstGeom prst="rect">
-            <a:avLst/>
-          </a:prstGeom>
-          <a:solidFill>
-            <a:srgbClr val="1F7A8C"/>
-          </a:solidFill>
-          <a:ln>
-            <a:noFill/>
-          </a:ln>
-        </p:spPr>
-        <p:style>
-          <a:lnRef idx="1">
-            <a:schemeClr val="accent1"/>
-          </a:lnRef>
-          <a:fillRef idx="3">
-            <a:schemeClr val="accent1"/>
-          </a:fillRef>
-          <a:effectRef idx="2">
-            <a:schemeClr val="accent1"/>
-          </a:effectRef>
-          <a:fontRef idx="minor">
-            <a:schemeClr val="lt1"/>
-          </a:fontRef>
-        </p:style>
-        <p:txBody>
-          <a:bodyPr rtlCol="0" anchor="ctr"/>
-          <a:lstStyle/>
-          <a:p>
-            <a:pPr algn="ctr"/>
-          </a:p>
-        </p:txBody>
-      </p:sp>
-      <p:sp>
-        <p:nvSpPr>
-          <p:cNvPr id="3" name="TextBox 2"/>
-          <p:cNvSpPr txBox="1"/>
-          <p:nvPr/>
-        </p:nvSpPr>
-        <p:spPr>
-          <a:xfrm>
-            <a:off x="457200" y="256032"/>
-            <a:ext cx="11155680" cy="640080"/>
-          </a:xfrm>
-          <a:prstGeom prst="rect">
-            <a:avLst/>
-          </a:prstGeom>
-          <a:noFill/>
-        </p:spPr>
-        <p:txBody>
-          <a:bodyPr wrap="square">
-            <a:spAutoFit/>
-          </a:bodyPr>
-          <a:lstStyle/>
-          <a:p>
-            <a:pPr algn="l">
-              <a:spcAft>
-                <a:spcPts val="400"/>
-              </a:spcAft>
-            </a:pPr>
-            <a:r>
-              <a:rPr sz="2800" b="1">
-                <a:solidFill>
-                  <a:srgbClr val="0B1F3A"/>
-                </a:solidFill>
-                <a:latin typeface="Calibri"/>
-              </a:rPr>
-              <a:t>Conclusion</a:t>
-            </a:r>
-          </a:p>
-        </p:txBody>
-      </p:sp>
-      <p:sp>
-        <p:nvSpPr>
-          <p:cNvPr id="4" name="TextBox 3"/>
-          <p:cNvSpPr txBox="1"/>
-          <p:nvPr/>
-        </p:nvSpPr>
-        <p:spPr>
-          <a:xfrm>
-            <a:off x="457200" y="868680"/>
-            <a:ext cx="11155680" cy="411480"/>
-          </a:xfrm>
-          <a:prstGeom prst="rect">
-            <a:avLst/>
-          </a:prstGeom>
-          <a:noFill/>
-        </p:spPr>
-        <p:txBody>
-          <a:bodyPr wrap="square">
-            <a:spAutoFit/>
-          </a:bodyPr>
-          <a:lstStyle/>
-          <a:p>
-            <a:pPr algn="l">
-              <a:spcAft>
-                <a:spcPts val="400"/>
-              </a:spcAft>
-            </a:pPr>
-            <a:r>
-              <a:rPr sz="1500" b="0">
-                <a:solidFill>
-                  <a:srgbClr val="64748B"/>
-                </a:solidFill>
-                <a:latin typeface="Calibri"/>
-              </a:rPr>
-              <a:t>AI amplifies reverse engineering — it does not replace it</a:t>
-            </a:r>
-          </a:p>
-        </p:txBody>
-      </p:sp>
-      <p:sp>
-        <p:nvSpPr>
-          <p:cNvPr id="5" name="Rectangle 4"/>
-          <p:cNvSpPr/>
-          <p:nvPr/>
-        </p:nvSpPr>
-        <p:spPr>
-          <a:xfrm>
-            <a:off x="457200" y="1280160"/>
-            <a:ext cx="11155680" cy="18288"/>
-          </a:xfrm>
-          <a:prstGeom prst="rect">
-            <a:avLst/>
-          </a:prstGeom>
-          <a:solidFill>
-            <a:srgbClr val="CBD5E1"/>
-          </a:solidFill>
-          <a:ln>
-            <a:noFill/>
-          </a:ln>
-        </p:spPr>
-        <p:style>
-          <a:lnRef idx="1">
-            <a:schemeClr val="accent1"/>
-          </a:lnRef>
-          <a:fillRef idx="3">
-            <a:schemeClr val="accent1"/>
-          </a:fillRef>
-          <a:effectRef idx="2">
-            <a:schemeClr val="accent1"/>
-          </a:effectRef>
-          <a:fontRef idx="minor">
-            <a:schemeClr val="lt1"/>
-          </a:fontRef>
-        </p:style>
-        <p:txBody>
-          <a:bodyPr rtlCol="0" anchor="ctr"/>
-          <a:lstStyle/>
-          <a:p>
-            <a:pPr algn="ctr"/>
-          </a:p>
-        </p:txBody>
-      </p:sp>
-      <p:sp>
-        <p:nvSpPr>
-          <p:cNvPr id="6" name="TextBox 5"/>
-          <p:cNvSpPr txBox="1"/>
-          <p:nvPr/>
-        </p:nvSpPr>
-        <p:spPr>
-          <a:xfrm>
-            <a:off x="548640" y="1554480"/>
-            <a:ext cx="10972800" cy="3200400"/>
-          </a:xfrm>
-          <a:prstGeom prst="rect">
-            <a:avLst/>
-          </a:prstGeom>
-          <a:noFill/>
-        </p:spPr>
-        <p:txBody>
-          <a:bodyPr wrap="square">
-            <a:spAutoFit/>
-          </a:bodyPr>
-          <a:lstStyle/>
-          <a:p>
-            <a:pPr algn="l">
-              <a:spcAft>
-                <a:spcPts val="800"/>
-              </a:spcAft>
-            </a:pPr>
-            <a:r>
-              <a:rPr sz="1700">
-                <a:solidFill>
-                  <a:srgbClr val="334155"/>
-                </a:solidFill>
-                <a:latin typeface="Calibri"/>
-              </a:rPr>
-              <a:t>•  Classical reverse engineering recovers meaning from compiled binaries; the bottleneck was always human analysis time.</a:t>
-            </a:r>
-          </a:p>
-          <a:p>
-            <a:pPr algn="l">
-              <a:spcAft>
-                <a:spcPts val="800"/>
-              </a:spcAft>
-            </a:pPr>
-            <a:r>
-              <a:rPr sz="1700">
-                <a:solidFill>
-                  <a:srgbClr val="334155"/>
-                </a:solidFill>
-                <a:latin typeface="Calibri"/>
-              </a:rPr>
-              <a:t>•  AI assists by renaming, explaining, refining, and iterating — making the pipeline dramatically faster.</a:t>
-            </a:r>
-          </a:p>
-          <a:p>
-            <a:pPr algn="l">
-              <a:spcAft>
-                <a:spcPts val="800"/>
-              </a:spcAft>
-            </a:pPr>
-            <a:r>
-              <a:rPr sz="1700">
-                <a:solidFill>
-                  <a:srgbClr val="334155"/>
-                </a:solidFill>
-                <a:latin typeface="Calibri"/>
-              </a:rPr>
-              <a:t>•  Video-game binary bridges show how formerly expert-only modifications become comparatively practical.</a:t>
-            </a:r>
-          </a:p>
-          <a:p>
-            <a:pPr algn="l">
-              <a:spcAft>
-                <a:spcPts val="800"/>
-              </a:spcAft>
-            </a:pPr>
-            <a:r>
-              <a:rPr sz="1700">
-                <a:solidFill>
-                  <a:srgbClr val="334155"/>
-                </a:solidFill>
-                <a:latin typeface="Calibri"/>
-              </a:rPr>
-              <a:t>•  Verification, legality, and ethics remain essential. AI drafts; engineers decide.</a:t>
-            </a:r>
-          </a:p>
-        </p:txBody>
-      </p:sp>
-      <p:sp>
-        <p:nvSpPr>
-          <p:cNvPr id="7" name="TextBox 6"/>
-          <p:cNvSpPr txBox="1"/>
-          <p:nvPr/>
-        </p:nvSpPr>
-        <p:spPr>
-          <a:xfrm>
-            <a:off x="548640" y="5029200"/>
-            <a:ext cx="10972800" cy="1097280"/>
-          </a:xfrm>
-          <a:prstGeom prst="rect">
-            <a:avLst/>
-          </a:prstGeom>
-          <a:noFill/>
-        </p:spPr>
-        <p:txBody>
-          <a:bodyPr wrap="square">
-            <a:spAutoFit/>
-          </a:bodyPr>
-          <a:lstStyle/>
-          <a:p>
-            <a:pPr algn="ctr">
-              <a:spcAft>
-                <a:spcPts val="400"/>
-              </a:spcAft>
-            </a:pPr>
-            <a:r>
-              <a:rPr sz="1600" b="1">
-                <a:solidFill>
-                  <a:srgbClr val="0B1F3A"/>
-                </a:solidFill>
-                <a:latin typeface="Calibri"/>
-              </a:rPr>
-              <a:t>Thank you  |  Ankrit Jarngal · 2023BSE028 · CSE · NIT Srinagar</a:t>
-            </a:r>
-          </a:p>
-          <a:p>
-            <a:pPr algn="ctr">
-              <a:spcAft>
-                <a:spcPts val="400"/>
-              </a:spcAft>
-            </a:pPr>
-            <a:r>
-              <a:rPr sz="1600" b="1">
-                <a:solidFill>
-                  <a:srgbClr val="0B1F3A"/>
-                </a:solidFill>
-                <a:latin typeface="Calibri"/>
-              </a:rPr>
-              <a:t>Questions?</a:t>
+              <a:t>Thank you   ·   Ankrit Jarngal  ·  2023BSE028  ·  CSE  ·  NIT Srinagar</a:t>
             </a:r>
           </a:p>
         </p:txBody>
